--- a/TASK 2/Group 16 Task 2 Powerpoint.pptx
+++ b/TASK 2/Group 16 Task 2 Powerpoint.pptx
@@ -164,7 +164,7 @@
           <p:cNvPr id="3" name="Date Placeholder 2">
             <a:extLst>
               <a:ext uri="{FF2B5EF4-FFF2-40B4-BE49-F238E27FC236}">
-                <a16:creationId xmlns:a16="http://schemas.microsoft.com/office/drawing/2014/main" xmlns="" id="{6368F83A-302B-D5C7-8388-31A7738B9491}"/>
+                <a16:creationId xmlns:a16="http://schemas.microsoft.com/office/drawing/2014/main" id="{6368F83A-302B-D5C7-8388-31A7738B9491}"/>
               </a:ext>
             </a:extLst>
           </p:cNvPr>
@@ -205,7 +205,7 @@
           <p:cNvPr id="4" name="Footer Placeholder 3">
             <a:extLst>
               <a:ext uri="{FF2B5EF4-FFF2-40B4-BE49-F238E27FC236}">
-                <a16:creationId xmlns:a16="http://schemas.microsoft.com/office/drawing/2014/main" xmlns="" id="{A90593AB-C6A0-9A15-AB36-A73DC45ECA76}"/>
+                <a16:creationId xmlns:a16="http://schemas.microsoft.com/office/drawing/2014/main" id="{A90593AB-C6A0-9A15-AB36-A73DC45ECA76}"/>
               </a:ext>
             </a:extLst>
           </p:cNvPr>
@@ -245,7 +245,7 @@
           <p:cNvPr id="5" name="Slide Number Placeholder 4">
             <a:extLst>
               <a:ext uri="{FF2B5EF4-FFF2-40B4-BE49-F238E27FC236}">
-                <a16:creationId xmlns:a16="http://schemas.microsoft.com/office/drawing/2014/main" xmlns="" id="{EEFA4FD5-91A7-B4C3-9946-947BB86E9AEC}"/>
+                <a16:creationId xmlns:a16="http://schemas.microsoft.com/office/drawing/2014/main" id="{EEFA4FD5-91A7-B4C3-9946-947BB86E9AEC}"/>
               </a:ext>
             </a:extLst>
           </p:cNvPr>
@@ -286,7 +286,7 @@
           <p:cNvPr id="6" name="Header Placeholder 5">
             <a:extLst>
               <a:ext uri="{FF2B5EF4-FFF2-40B4-BE49-F238E27FC236}">
-                <a16:creationId xmlns:a16="http://schemas.microsoft.com/office/drawing/2014/main" xmlns="" id="{7D257EEE-7A71-A801-1D30-27730853F455}"/>
+                <a16:creationId xmlns:a16="http://schemas.microsoft.com/office/drawing/2014/main" id="{7D257EEE-7A71-A801-1D30-27730853F455}"/>
               </a:ext>
             </a:extLst>
           </p:cNvPr>
@@ -570,7 +570,7 @@
           <p:cNvPr id="8" name="Date Placeholder 7">
             <a:extLst>
               <a:ext uri="{FF2B5EF4-FFF2-40B4-BE49-F238E27FC236}">
-                <a16:creationId xmlns:a16="http://schemas.microsoft.com/office/drawing/2014/main" xmlns="" id="{2D11F53F-2F00-3651-F337-81306AF8F1EE}"/>
+                <a16:creationId xmlns:a16="http://schemas.microsoft.com/office/drawing/2014/main" id="{2D11F53F-2F00-3651-F337-81306AF8F1EE}"/>
               </a:ext>
             </a:extLst>
           </p:cNvPr>
@@ -1231,7 +1231,7 @@
           </a:lstStyle>
           <a:p>
             <a:r>
-              <a:rPr lang="en-US" smtClean="0"/>
+              <a:rPr lang="en-US"/>
               <a:t>Click to edit Master title style</a:t>
             </a:r>
             <a:endParaRPr lang="en-US" dirty="0"/>
@@ -1350,7 +1350,7 @@
           </a:lstStyle>
           <a:p>
             <a:r>
-              <a:rPr lang="en-US" smtClean="0"/>
+              <a:rPr lang="en-US"/>
               <a:t>Click to edit Master subtitle style</a:t>
             </a:r>
             <a:endParaRPr lang="en-US" dirty="0"/>
@@ -1429,10 +1429,9 @@
           </a:lstStyle>
           <a:p>
             <a:r>
-              <a:rPr lang="en-US" smtClean="0"/>
+              <a:rPr lang="en-US"/>
               <a:t>Sample Footer Text</a:t>
             </a:r>
-            <a:endParaRPr lang="en-US"/>
           </a:p>
         </p:txBody>
       </p:sp>
@@ -1567,7 +1566,7 @@
           <a:lstStyle/>
           <a:p>
             <a:r>
-              <a:rPr lang="en-US" smtClean="0"/>
+              <a:rPr lang="en-US"/>
               <a:t>Click to edit Master title style</a:t>
             </a:r>
             <a:endParaRPr lang="en-US" dirty="0"/>
@@ -1607,35 +1606,35 @@
           <a:p>
             <a:pPr lvl="0"/>
             <a:r>
-              <a:rPr lang="en-US" smtClean="0"/>
+              <a:rPr lang="en-US"/>
               <a:t>Edit Master text styles</a:t>
             </a:r>
           </a:p>
           <a:p>
             <a:pPr lvl="1"/>
             <a:r>
-              <a:rPr lang="en-US" smtClean="0"/>
+              <a:rPr lang="en-US"/>
               <a:t>Second level</a:t>
             </a:r>
           </a:p>
           <a:p>
             <a:pPr lvl="2"/>
             <a:r>
-              <a:rPr lang="en-US" smtClean="0"/>
+              <a:rPr lang="en-US"/>
               <a:t>Third level</a:t>
             </a:r>
           </a:p>
           <a:p>
             <a:pPr lvl="3"/>
             <a:r>
-              <a:rPr lang="en-US" smtClean="0"/>
+              <a:rPr lang="en-US"/>
               <a:t>Fourth level</a:t>
             </a:r>
           </a:p>
           <a:p>
             <a:pPr lvl="4"/>
             <a:r>
-              <a:rPr lang="en-US" smtClean="0"/>
+              <a:rPr lang="en-US"/>
               <a:t>Fifth level</a:t>
             </a:r>
             <a:endParaRPr lang="en-US" dirty="0"/>
@@ -1682,10 +1681,9 @@
           <a:lstStyle/>
           <a:p>
             <a:r>
-              <a:rPr lang="en-US" smtClean="0"/>
+              <a:rPr lang="en-US"/>
               <a:t>Sample Footer Text</a:t>
             </a:r>
-            <a:endParaRPr lang="en-US"/>
           </a:p>
         </p:txBody>
       </p:sp>
@@ -1804,7 +1802,7 @@
           <a:lstStyle/>
           <a:p>
             <a:r>
-              <a:rPr lang="en-US" smtClean="0"/>
+              <a:rPr lang="en-US"/>
               <a:t>Click to edit Master title style</a:t>
             </a:r>
             <a:endParaRPr lang="en-US" dirty="0"/>
@@ -1833,35 +1831,35 @@
           <a:p>
             <a:pPr lvl="0"/>
             <a:r>
-              <a:rPr lang="en-US" smtClean="0"/>
+              <a:rPr lang="en-US"/>
               <a:t>Edit Master text styles</a:t>
             </a:r>
           </a:p>
           <a:p>
             <a:pPr lvl="1"/>
             <a:r>
-              <a:rPr lang="en-US" smtClean="0"/>
+              <a:rPr lang="en-US"/>
               <a:t>Second level</a:t>
             </a:r>
           </a:p>
           <a:p>
             <a:pPr lvl="2"/>
             <a:r>
-              <a:rPr lang="en-US" smtClean="0"/>
+              <a:rPr lang="en-US"/>
               <a:t>Third level</a:t>
             </a:r>
           </a:p>
           <a:p>
             <a:pPr lvl="3"/>
             <a:r>
-              <a:rPr lang="en-US" smtClean="0"/>
+              <a:rPr lang="en-US"/>
               <a:t>Fourth level</a:t>
             </a:r>
           </a:p>
           <a:p>
             <a:pPr lvl="4"/>
             <a:r>
-              <a:rPr lang="en-US" smtClean="0"/>
+              <a:rPr lang="en-US"/>
               <a:t>Fifth level</a:t>
             </a:r>
             <a:endParaRPr lang="en-US" dirty="0"/>
@@ -1929,10 +1927,9 @@
           <a:lstStyle/>
           <a:p>
             <a:r>
-              <a:rPr lang="en-US" smtClean="0"/>
+              <a:rPr lang="en-US"/>
               <a:t>Sample Footer Text</a:t>
             </a:r>
-            <a:endParaRPr lang="en-US"/>
           </a:p>
         </p:txBody>
       </p:sp>
@@ -2012,10 +2009,10 @@
           <p:cNvPr id="3" name="Freeform: Shape 3">
             <a:extLst>
               <a:ext uri="{FF2B5EF4-FFF2-40B4-BE49-F238E27FC236}">
-                <a16:creationId xmlns:a16="http://schemas.microsoft.com/office/drawing/2014/main" xmlns="" id="{35B62877-1ECE-C895-2628-D7024147423A}"/>
+                <a16:creationId xmlns:a16="http://schemas.microsoft.com/office/drawing/2014/main" id="{35B62877-1ECE-C895-2628-D7024147423A}"/>
               </a:ext>
               <a:ext uri="{C183D7F6-B498-43B3-948B-1728B52AA6E4}">
-                <adec:decorative xmlns:adec="http://schemas.microsoft.com/office/drawing/2017/decorative" xmlns="" val="1"/>
+                <adec:decorative xmlns:adec="http://schemas.microsoft.com/office/drawing/2017/decorative" val="1"/>
               </a:ext>
             </a:extLst>
           </p:cNvPr>
@@ -2104,7 +2101,7 @@
           <p:cNvPr id="10" name="Title 2">
             <a:extLst>
               <a:ext uri="{FF2B5EF4-FFF2-40B4-BE49-F238E27FC236}">
-                <a16:creationId xmlns:a16="http://schemas.microsoft.com/office/drawing/2014/main" xmlns="" id="{52BE707F-C731-EA4B-19D9-D329BD4A154E}"/>
+                <a16:creationId xmlns:a16="http://schemas.microsoft.com/office/drawing/2014/main" id="{52BE707F-C731-EA4B-19D9-D329BD4A154E}"/>
               </a:ext>
             </a:extLst>
           </p:cNvPr>
@@ -2147,7 +2144,7 @@
           <p:cNvPr id="11" name="Subtitle 8">
             <a:extLst>
               <a:ext uri="{FF2B5EF4-FFF2-40B4-BE49-F238E27FC236}">
-                <a16:creationId xmlns:a16="http://schemas.microsoft.com/office/drawing/2014/main" xmlns="" id="{630C0ABC-2179-00DC-A363-2C8C30649466}"/>
+                <a16:creationId xmlns:a16="http://schemas.microsoft.com/office/drawing/2014/main" id="{630C0ABC-2179-00DC-A363-2C8C30649466}"/>
               </a:ext>
             </a:extLst>
           </p:cNvPr>
@@ -2203,7 +2200,7 @@
           <p:cNvPr id="6" name="Text Placeholder 10">
             <a:extLst>
               <a:ext uri="{FF2B5EF4-FFF2-40B4-BE49-F238E27FC236}">
-                <a16:creationId xmlns:a16="http://schemas.microsoft.com/office/drawing/2014/main" xmlns="" id="{A1D21C21-739A-A82A-8977-42F691559CD9}"/>
+                <a16:creationId xmlns:a16="http://schemas.microsoft.com/office/drawing/2014/main" id="{A1D21C21-739A-A82A-8977-42F691559CD9}"/>
               </a:ext>
             </a:extLst>
           </p:cNvPr>
@@ -2244,10 +2241,10 @@
           <p:cNvPr id="2" name="Picture Placeholder 20">
             <a:extLst>
               <a:ext uri="{FF2B5EF4-FFF2-40B4-BE49-F238E27FC236}">
-                <a16:creationId xmlns:a16="http://schemas.microsoft.com/office/drawing/2014/main" xmlns="" id="{E7DFF57B-01B8-7AE5-59D6-1EA01068C2ED}"/>
+                <a16:creationId xmlns:a16="http://schemas.microsoft.com/office/drawing/2014/main" id="{E7DFF57B-01B8-7AE5-59D6-1EA01068C2ED}"/>
               </a:ext>
               <a:ext uri="{C183D7F6-B498-43B3-948B-1728B52AA6E4}">
-                <adec:decorative xmlns:adec="http://schemas.microsoft.com/office/drawing/2017/decorative" xmlns="" val="0"/>
+                <adec:decorative xmlns:adec="http://schemas.microsoft.com/office/drawing/2017/decorative" val="0"/>
               </a:ext>
             </a:extLst>
           </p:cNvPr>
@@ -2326,10 +2323,10 @@
           <p:cNvPr id="13" name="Picture Placeholder 24">
             <a:extLst>
               <a:ext uri="{FF2B5EF4-FFF2-40B4-BE49-F238E27FC236}">
-                <a16:creationId xmlns:a16="http://schemas.microsoft.com/office/drawing/2014/main" xmlns="" id="{60987CD7-1E61-07D2-B179-5524B68E1EE9}"/>
+                <a16:creationId xmlns:a16="http://schemas.microsoft.com/office/drawing/2014/main" id="{60987CD7-1E61-07D2-B179-5524B68E1EE9}"/>
               </a:ext>
               <a:ext uri="{C183D7F6-B498-43B3-948B-1728B52AA6E4}">
-                <adec:decorative xmlns:adec="http://schemas.microsoft.com/office/drawing/2017/decorative" xmlns="" val="0"/>
+                <adec:decorative xmlns:adec="http://schemas.microsoft.com/office/drawing/2017/decorative" val="0"/>
               </a:ext>
             </a:extLst>
           </p:cNvPr>
@@ -2360,7 +2357,7 @@
           <p:cNvPr id="16" name="Slide Number Placeholder 5">
             <a:extLst>
               <a:ext uri="{FF2B5EF4-FFF2-40B4-BE49-F238E27FC236}">
-                <a16:creationId xmlns:a16="http://schemas.microsoft.com/office/drawing/2014/main" xmlns="" id="{9E3EDE68-DC03-72CA-8812-032BBE8CDA37}"/>
+                <a16:creationId xmlns:a16="http://schemas.microsoft.com/office/drawing/2014/main" id="{9E3EDE68-DC03-72CA-8812-032BBE8CDA37}"/>
               </a:ext>
             </a:extLst>
           </p:cNvPr>
@@ -2394,7 +2391,7 @@
           <p:cNvPr id="17" name="Footer Placeholder 4">
             <a:extLst>
               <a:ext uri="{FF2B5EF4-FFF2-40B4-BE49-F238E27FC236}">
-                <a16:creationId xmlns:a16="http://schemas.microsoft.com/office/drawing/2014/main" xmlns="" id="{592B5A2C-FD03-F122-C8E4-B6CB4EC4861B}"/>
+                <a16:creationId xmlns:a16="http://schemas.microsoft.com/office/drawing/2014/main" id="{592B5A2C-FD03-F122-C8E4-B6CB4EC4861B}"/>
               </a:ext>
             </a:extLst>
           </p:cNvPr>
@@ -2427,7 +2424,7 @@
           <p:cNvPr id="18" name="Date Placeholder 3">
             <a:extLst>
               <a:ext uri="{FF2B5EF4-FFF2-40B4-BE49-F238E27FC236}">
-                <a16:creationId xmlns:a16="http://schemas.microsoft.com/office/drawing/2014/main" xmlns="" id="{46414389-5BC5-00A3-92BE-5E87E7C9E3BF}"/>
+                <a16:creationId xmlns:a16="http://schemas.microsoft.com/office/drawing/2014/main" id="{46414389-5BC5-00A3-92BE-5E87E7C9E3BF}"/>
               </a:ext>
             </a:extLst>
           </p:cNvPr>
@@ -2465,10 +2462,10 @@
           <p:cNvPr id="5" name="Oval 13">
             <a:extLst>
               <a:ext uri="{FF2B5EF4-FFF2-40B4-BE49-F238E27FC236}">
-                <a16:creationId xmlns:a16="http://schemas.microsoft.com/office/drawing/2014/main" xmlns="" id="{B492ADB2-587E-B1A9-AEBC-1F6E07F2E63B}"/>
+                <a16:creationId xmlns:a16="http://schemas.microsoft.com/office/drawing/2014/main" id="{B492ADB2-587E-B1A9-AEBC-1F6E07F2E63B}"/>
               </a:ext>
               <a:ext uri="{C183D7F6-B498-43B3-948B-1728B52AA6E4}">
-                <adec:decorative xmlns:adec="http://schemas.microsoft.com/office/drawing/2017/decorative" xmlns="" val="1"/>
+                <adec:decorative xmlns:adec="http://schemas.microsoft.com/office/drawing/2017/decorative" val="1"/>
               </a:ext>
             </a:extLst>
           </p:cNvPr>
@@ -2520,10 +2517,10 @@
           <p:cNvPr id="9" name="Freeform: Shape 3">
             <a:extLst>
               <a:ext uri="{FF2B5EF4-FFF2-40B4-BE49-F238E27FC236}">
-                <a16:creationId xmlns:a16="http://schemas.microsoft.com/office/drawing/2014/main" xmlns="" id="{92E441E4-4327-1C3A-4D55-41FD3ECB9B62}"/>
+                <a16:creationId xmlns:a16="http://schemas.microsoft.com/office/drawing/2014/main" id="{92E441E4-4327-1C3A-4D55-41FD3ECB9B62}"/>
               </a:ext>
               <a:ext uri="{C183D7F6-B498-43B3-948B-1728B52AA6E4}">
-                <adec:decorative xmlns:adec="http://schemas.microsoft.com/office/drawing/2017/decorative" xmlns="" val="1"/>
+                <adec:decorative xmlns:adec="http://schemas.microsoft.com/office/drawing/2017/decorative" val="1"/>
               </a:ext>
             </a:extLst>
           </p:cNvPr>
@@ -2642,7 +2639,7 @@
           <p:cNvPr id="4" name="Title 1">
             <a:extLst>
               <a:ext uri="{FF2B5EF4-FFF2-40B4-BE49-F238E27FC236}">
-                <a16:creationId xmlns:a16="http://schemas.microsoft.com/office/drawing/2014/main" xmlns="" id="{5CAAAA72-0635-9135-A730-ECC45A439709}"/>
+                <a16:creationId xmlns:a16="http://schemas.microsoft.com/office/drawing/2014/main" id="{5CAAAA72-0635-9135-A730-ECC45A439709}"/>
               </a:ext>
             </a:extLst>
           </p:cNvPr>
@@ -2681,7 +2678,7 @@
           <p:cNvPr id="13" name="Text Placeholder 12">
             <a:extLst>
               <a:ext uri="{FF2B5EF4-FFF2-40B4-BE49-F238E27FC236}">
-                <a16:creationId xmlns:a16="http://schemas.microsoft.com/office/drawing/2014/main" xmlns="" id="{678F1E9F-8DC0-3F47-3713-0A6BECA4A23E}"/>
+                <a16:creationId xmlns:a16="http://schemas.microsoft.com/office/drawing/2014/main" id="{678F1E9F-8DC0-3F47-3713-0A6BECA4A23E}"/>
               </a:ext>
             </a:extLst>
           </p:cNvPr>
@@ -2724,7 +2721,7 @@
           <p:cNvPr id="7" name="Text Placeholder 2">
             <a:extLst>
               <a:ext uri="{FF2B5EF4-FFF2-40B4-BE49-F238E27FC236}">
-                <a16:creationId xmlns:a16="http://schemas.microsoft.com/office/drawing/2014/main" xmlns="" id="{15229F71-3CE4-1A56-A454-B19344890E24}"/>
+                <a16:creationId xmlns:a16="http://schemas.microsoft.com/office/drawing/2014/main" id="{15229F71-3CE4-1A56-A454-B19344890E24}"/>
               </a:ext>
             </a:extLst>
           </p:cNvPr>
@@ -2822,7 +2819,7 @@
           <p:cNvPr id="53" name="Content Placeholder 2">
             <a:extLst>
               <a:ext uri="{FF2B5EF4-FFF2-40B4-BE49-F238E27FC236}">
-                <a16:creationId xmlns:a16="http://schemas.microsoft.com/office/drawing/2014/main" xmlns="" id="{12F71417-AF87-8BCD-86C2-D6D8455F6759}"/>
+                <a16:creationId xmlns:a16="http://schemas.microsoft.com/office/drawing/2014/main" id="{12F71417-AF87-8BCD-86C2-D6D8455F6759}"/>
               </a:ext>
             </a:extLst>
           </p:cNvPr>
@@ -2926,7 +2923,7 @@
           <p:cNvPr id="15" name="Text Placeholder 12">
             <a:extLst>
               <a:ext uri="{FF2B5EF4-FFF2-40B4-BE49-F238E27FC236}">
-                <a16:creationId xmlns:a16="http://schemas.microsoft.com/office/drawing/2014/main" xmlns="" id="{7EF0D168-760E-3567-B5E3-6EB79B152A58}"/>
+                <a16:creationId xmlns:a16="http://schemas.microsoft.com/office/drawing/2014/main" id="{7EF0D168-760E-3567-B5E3-6EB79B152A58}"/>
               </a:ext>
             </a:extLst>
           </p:cNvPr>
@@ -2969,7 +2966,7 @@
           <p:cNvPr id="3" name="Text Placeholder 2">
             <a:extLst>
               <a:ext uri="{FF2B5EF4-FFF2-40B4-BE49-F238E27FC236}">
-                <a16:creationId xmlns:a16="http://schemas.microsoft.com/office/drawing/2014/main" xmlns="" id="{6F80ECA0-C9A9-7F6F-DDEE-49117E596C86}"/>
+                <a16:creationId xmlns:a16="http://schemas.microsoft.com/office/drawing/2014/main" id="{6F80ECA0-C9A9-7F6F-DDEE-49117E596C86}"/>
               </a:ext>
             </a:extLst>
           </p:cNvPr>
@@ -3067,7 +3064,7 @@
           <p:cNvPr id="56" name="Content Placeholder 2">
             <a:extLst>
               <a:ext uri="{FF2B5EF4-FFF2-40B4-BE49-F238E27FC236}">
-                <a16:creationId xmlns:a16="http://schemas.microsoft.com/office/drawing/2014/main" xmlns="" id="{CB9C6248-FAAF-2686-9707-F8099CFE5465}"/>
+                <a16:creationId xmlns:a16="http://schemas.microsoft.com/office/drawing/2014/main" id="{CB9C6248-FAAF-2686-9707-F8099CFE5465}"/>
               </a:ext>
             </a:extLst>
           </p:cNvPr>
@@ -3171,7 +3168,7 @@
           <p:cNvPr id="21" name="Text Placeholder 12">
             <a:extLst>
               <a:ext uri="{FF2B5EF4-FFF2-40B4-BE49-F238E27FC236}">
-                <a16:creationId xmlns:a16="http://schemas.microsoft.com/office/drawing/2014/main" xmlns="" id="{C9235EC0-5363-881D-ECDD-99F834323172}"/>
+                <a16:creationId xmlns:a16="http://schemas.microsoft.com/office/drawing/2014/main" id="{C9235EC0-5363-881D-ECDD-99F834323172}"/>
               </a:ext>
             </a:extLst>
           </p:cNvPr>
@@ -3214,7 +3211,7 @@
           <p:cNvPr id="5" name="Text Placeholder 2">
             <a:extLst>
               <a:ext uri="{FF2B5EF4-FFF2-40B4-BE49-F238E27FC236}">
-                <a16:creationId xmlns:a16="http://schemas.microsoft.com/office/drawing/2014/main" xmlns="" id="{C787FA2C-E603-94B3-BA10-F6645705849F}"/>
+                <a16:creationId xmlns:a16="http://schemas.microsoft.com/office/drawing/2014/main" id="{C787FA2C-E603-94B3-BA10-F6645705849F}"/>
               </a:ext>
             </a:extLst>
           </p:cNvPr>
@@ -3312,7 +3309,7 @@
           <p:cNvPr id="59" name="Content Placeholder 2">
             <a:extLst>
               <a:ext uri="{FF2B5EF4-FFF2-40B4-BE49-F238E27FC236}">
-                <a16:creationId xmlns:a16="http://schemas.microsoft.com/office/drawing/2014/main" xmlns="" id="{7664AE50-9F09-679F-6A2C-FCFE2305B0FB}"/>
+                <a16:creationId xmlns:a16="http://schemas.microsoft.com/office/drawing/2014/main" id="{7664AE50-9F09-679F-6A2C-FCFE2305B0FB}"/>
               </a:ext>
             </a:extLst>
           </p:cNvPr>
@@ -3416,7 +3413,7 @@
           <p:cNvPr id="14" name="Text Placeholder 12">
             <a:extLst>
               <a:ext uri="{FF2B5EF4-FFF2-40B4-BE49-F238E27FC236}">
-                <a16:creationId xmlns:a16="http://schemas.microsoft.com/office/drawing/2014/main" xmlns="" id="{D091BDB1-D06A-F20F-BD0A-FA4BEE12E67F}"/>
+                <a16:creationId xmlns:a16="http://schemas.microsoft.com/office/drawing/2014/main" id="{D091BDB1-D06A-F20F-BD0A-FA4BEE12E67F}"/>
               </a:ext>
             </a:extLst>
           </p:cNvPr>
@@ -3459,7 +3456,7 @@
           <p:cNvPr id="10" name="Text Placeholder 2">
             <a:extLst>
               <a:ext uri="{FF2B5EF4-FFF2-40B4-BE49-F238E27FC236}">
-                <a16:creationId xmlns:a16="http://schemas.microsoft.com/office/drawing/2014/main" xmlns="" id="{34B2A11E-0D27-4D46-A91D-448866797E48}"/>
+                <a16:creationId xmlns:a16="http://schemas.microsoft.com/office/drawing/2014/main" id="{34B2A11E-0D27-4D46-A91D-448866797E48}"/>
               </a:ext>
             </a:extLst>
           </p:cNvPr>
@@ -3557,7 +3554,7 @@
           <p:cNvPr id="62" name="Content Placeholder 2">
             <a:extLst>
               <a:ext uri="{FF2B5EF4-FFF2-40B4-BE49-F238E27FC236}">
-                <a16:creationId xmlns:a16="http://schemas.microsoft.com/office/drawing/2014/main" xmlns="" id="{ABE6E289-1987-1965-BF2F-9BA862779B9C}"/>
+                <a16:creationId xmlns:a16="http://schemas.microsoft.com/office/drawing/2014/main" id="{ABE6E289-1987-1965-BF2F-9BA862779B9C}"/>
               </a:ext>
             </a:extLst>
           </p:cNvPr>
@@ -3661,7 +3658,7 @@
           <p:cNvPr id="16" name="Text Placeholder 12">
             <a:extLst>
               <a:ext uri="{FF2B5EF4-FFF2-40B4-BE49-F238E27FC236}">
-                <a16:creationId xmlns:a16="http://schemas.microsoft.com/office/drawing/2014/main" xmlns="" id="{35A2DADA-11CE-0CFF-67A5-C675A9F7976D}"/>
+                <a16:creationId xmlns:a16="http://schemas.microsoft.com/office/drawing/2014/main" id="{35A2DADA-11CE-0CFF-67A5-C675A9F7976D}"/>
               </a:ext>
             </a:extLst>
           </p:cNvPr>
@@ -3704,7 +3701,7 @@
           <p:cNvPr id="11" name="Text Placeholder 2">
             <a:extLst>
               <a:ext uri="{FF2B5EF4-FFF2-40B4-BE49-F238E27FC236}">
-                <a16:creationId xmlns:a16="http://schemas.microsoft.com/office/drawing/2014/main" xmlns="" id="{D89CDCE3-2BC6-3295-3B7D-D64BF96C5457}"/>
+                <a16:creationId xmlns:a16="http://schemas.microsoft.com/office/drawing/2014/main" id="{D89CDCE3-2BC6-3295-3B7D-D64BF96C5457}"/>
               </a:ext>
             </a:extLst>
           </p:cNvPr>
@@ -3802,7 +3799,7 @@
           <p:cNvPr id="65" name="Content Placeholder 2">
             <a:extLst>
               <a:ext uri="{FF2B5EF4-FFF2-40B4-BE49-F238E27FC236}">
-                <a16:creationId xmlns:a16="http://schemas.microsoft.com/office/drawing/2014/main" xmlns="" id="{CD76792D-C530-0E2F-8D16-3B89EFFB4FF6}"/>
+                <a16:creationId xmlns:a16="http://schemas.microsoft.com/office/drawing/2014/main" id="{CD76792D-C530-0E2F-8D16-3B89EFFB4FF6}"/>
               </a:ext>
             </a:extLst>
           </p:cNvPr>
@@ -3906,7 +3903,7 @@
           <p:cNvPr id="22" name="Text Placeholder 12">
             <a:extLst>
               <a:ext uri="{FF2B5EF4-FFF2-40B4-BE49-F238E27FC236}">
-                <a16:creationId xmlns:a16="http://schemas.microsoft.com/office/drawing/2014/main" xmlns="" id="{436CB067-7239-D038-646D-52E7105AE7E0}"/>
+                <a16:creationId xmlns:a16="http://schemas.microsoft.com/office/drawing/2014/main" id="{436CB067-7239-D038-646D-52E7105AE7E0}"/>
               </a:ext>
             </a:extLst>
           </p:cNvPr>
@@ -3949,7 +3946,7 @@
           <p:cNvPr id="12" name="Text Placeholder 2">
             <a:extLst>
               <a:ext uri="{FF2B5EF4-FFF2-40B4-BE49-F238E27FC236}">
-                <a16:creationId xmlns:a16="http://schemas.microsoft.com/office/drawing/2014/main" xmlns="" id="{4BA33470-6404-0E70-04B0-CDCAA18D4361}"/>
+                <a16:creationId xmlns:a16="http://schemas.microsoft.com/office/drawing/2014/main" id="{4BA33470-6404-0E70-04B0-CDCAA18D4361}"/>
               </a:ext>
             </a:extLst>
           </p:cNvPr>
@@ -4047,7 +4044,7 @@
           <p:cNvPr id="68" name="Content Placeholder 2">
             <a:extLst>
               <a:ext uri="{FF2B5EF4-FFF2-40B4-BE49-F238E27FC236}">
-                <a16:creationId xmlns:a16="http://schemas.microsoft.com/office/drawing/2014/main" xmlns="" id="{068F9459-BC8A-0B9B-0553-20FAA0BDB905}"/>
+                <a16:creationId xmlns:a16="http://schemas.microsoft.com/office/drawing/2014/main" id="{068F9459-BC8A-0B9B-0553-20FAA0BDB905}"/>
               </a:ext>
             </a:extLst>
           </p:cNvPr>
@@ -4151,7 +4148,7 @@
           <p:cNvPr id="8" name="Footer Placeholder 4">
             <a:extLst>
               <a:ext uri="{FF2B5EF4-FFF2-40B4-BE49-F238E27FC236}">
-                <a16:creationId xmlns:a16="http://schemas.microsoft.com/office/drawing/2014/main" xmlns="" id="{B791D491-74AF-1110-DE2A-F94B0F8C0981}"/>
+                <a16:creationId xmlns:a16="http://schemas.microsoft.com/office/drawing/2014/main" id="{B791D491-74AF-1110-DE2A-F94B0F8C0981}"/>
               </a:ext>
             </a:extLst>
           </p:cNvPr>
@@ -4188,7 +4185,7 @@
           <p:cNvPr id="2" name="Date Placeholder 3">
             <a:extLst>
               <a:ext uri="{FF2B5EF4-FFF2-40B4-BE49-F238E27FC236}">
-                <a16:creationId xmlns:a16="http://schemas.microsoft.com/office/drawing/2014/main" xmlns="" id="{27687739-4F1B-4886-C248-53466C296513}"/>
+                <a16:creationId xmlns:a16="http://schemas.microsoft.com/office/drawing/2014/main" id="{27687739-4F1B-4886-C248-53466C296513}"/>
               </a:ext>
             </a:extLst>
           </p:cNvPr>
@@ -4235,7 +4232,7 @@
           <p:cNvPr id="6" name="Slide Number Placeholder 5">
             <a:extLst>
               <a:ext uri="{FF2B5EF4-FFF2-40B4-BE49-F238E27FC236}">
-                <a16:creationId xmlns:a16="http://schemas.microsoft.com/office/drawing/2014/main" xmlns="" id="{0E0578B1-7D93-F923-4A39-FF6F2B37E343}"/>
+                <a16:creationId xmlns:a16="http://schemas.microsoft.com/office/drawing/2014/main" id="{0E0578B1-7D93-F923-4A39-FF6F2B37E343}"/>
               </a:ext>
             </a:extLst>
           </p:cNvPr>
@@ -4274,10 +4271,10 @@
           <p:cNvPr id="17" name="Freeform: Shape 16">
             <a:extLst>
               <a:ext uri="{FF2B5EF4-FFF2-40B4-BE49-F238E27FC236}">
-                <a16:creationId xmlns:a16="http://schemas.microsoft.com/office/drawing/2014/main" xmlns="" id="{53E59676-000B-23C4-A79E-6F7EF618E4F9}"/>
+                <a16:creationId xmlns:a16="http://schemas.microsoft.com/office/drawing/2014/main" id="{53E59676-000B-23C4-A79E-6F7EF618E4F9}"/>
               </a:ext>
               <a:ext uri="{C183D7F6-B498-43B3-948B-1728B52AA6E4}">
-                <adec:decorative xmlns:adec="http://schemas.microsoft.com/office/drawing/2017/decorative" xmlns="" val="1"/>
+                <adec:decorative xmlns:adec="http://schemas.microsoft.com/office/drawing/2017/decorative" val="1"/>
               </a:ext>
             </a:extLst>
           </p:cNvPr>
@@ -4375,10 +4372,10 @@
           <p:cNvPr id="18" name="Freeform: Shape 17">
             <a:extLst>
               <a:ext uri="{FF2B5EF4-FFF2-40B4-BE49-F238E27FC236}">
-                <a16:creationId xmlns:a16="http://schemas.microsoft.com/office/drawing/2014/main" xmlns="" id="{1D8FF8B4-211F-D599-8942-4CEA19F21D3F}"/>
+                <a16:creationId xmlns:a16="http://schemas.microsoft.com/office/drawing/2014/main" id="{1D8FF8B4-211F-D599-8942-4CEA19F21D3F}"/>
               </a:ext>
               <a:ext uri="{C183D7F6-B498-43B3-948B-1728B52AA6E4}">
-                <adec:decorative xmlns:adec="http://schemas.microsoft.com/office/drawing/2017/decorative" xmlns="" val="1"/>
+                <adec:decorative xmlns:adec="http://schemas.microsoft.com/office/drawing/2017/decorative" val="1"/>
               </a:ext>
             </a:extLst>
           </p:cNvPr>
@@ -4479,10 +4476,10 @@
           <p:cNvPr id="20" name="Freeform: Shape 19">
             <a:extLst>
               <a:ext uri="{FF2B5EF4-FFF2-40B4-BE49-F238E27FC236}">
-                <a16:creationId xmlns:a16="http://schemas.microsoft.com/office/drawing/2014/main" xmlns="" id="{8F73199D-15C0-5009-084E-702074F044D2}"/>
+                <a16:creationId xmlns:a16="http://schemas.microsoft.com/office/drawing/2014/main" id="{8F73199D-15C0-5009-084E-702074F044D2}"/>
               </a:ext>
               <a:ext uri="{C183D7F6-B498-43B3-948B-1728B52AA6E4}">
-                <adec:decorative xmlns:adec="http://schemas.microsoft.com/office/drawing/2017/decorative" xmlns="" val="1"/>
+                <adec:decorative xmlns:adec="http://schemas.microsoft.com/office/drawing/2017/decorative" val="1"/>
               </a:ext>
             </a:extLst>
           </p:cNvPr>
@@ -4583,10 +4580,10 @@
           <p:cNvPr id="19" name="Freeform: Shape 18">
             <a:extLst>
               <a:ext uri="{FF2B5EF4-FFF2-40B4-BE49-F238E27FC236}">
-                <a16:creationId xmlns:a16="http://schemas.microsoft.com/office/drawing/2014/main" xmlns="" id="{0B3DC668-E35A-3B70-A10C-247B5A01BBB4}"/>
+                <a16:creationId xmlns:a16="http://schemas.microsoft.com/office/drawing/2014/main" id="{0B3DC668-E35A-3B70-A10C-247B5A01BBB4}"/>
               </a:ext>
               <a:ext uri="{C183D7F6-B498-43B3-948B-1728B52AA6E4}">
-                <adec:decorative xmlns:adec="http://schemas.microsoft.com/office/drawing/2017/decorative" xmlns="" val="1"/>
+                <adec:decorative xmlns:adec="http://schemas.microsoft.com/office/drawing/2017/decorative" val="1"/>
               </a:ext>
             </a:extLst>
           </p:cNvPr>
@@ -4714,10 +4711,10 @@
           <p:cNvPr id="9" name="Rectangle 8">
             <a:extLst>
               <a:ext uri="{FF2B5EF4-FFF2-40B4-BE49-F238E27FC236}">
-                <a16:creationId xmlns:a16="http://schemas.microsoft.com/office/drawing/2014/main" xmlns="" id="{9591D9F7-2AF5-7E15-28CD-C5189318CC9A}"/>
+                <a16:creationId xmlns:a16="http://schemas.microsoft.com/office/drawing/2014/main" id="{9591D9F7-2AF5-7E15-28CD-C5189318CC9A}"/>
               </a:ext>
               <a:ext uri="{C183D7F6-B498-43B3-948B-1728B52AA6E4}">
-                <adec:decorative xmlns:adec="http://schemas.microsoft.com/office/drawing/2017/decorative" xmlns="" val="1"/>
+                <adec:decorative xmlns:adec="http://schemas.microsoft.com/office/drawing/2017/decorative" val="1"/>
               </a:ext>
             </a:extLst>
           </p:cNvPr>
@@ -4769,7 +4766,7 @@
           <p:cNvPr id="7" name="Title 6">
             <a:extLst>
               <a:ext uri="{FF2B5EF4-FFF2-40B4-BE49-F238E27FC236}">
-                <a16:creationId xmlns:a16="http://schemas.microsoft.com/office/drawing/2014/main" xmlns="" id="{3575A47E-66DF-0DFE-6068-FCE75A83C7A8}"/>
+                <a16:creationId xmlns:a16="http://schemas.microsoft.com/office/drawing/2014/main" id="{3575A47E-66DF-0DFE-6068-FCE75A83C7A8}"/>
               </a:ext>
             </a:extLst>
           </p:cNvPr>
@@ -4813,7 +4810,7 @@
           <p:cNvPr id="18" name="Picture Placeholder 17">
             <a:extLst>
               <a:ext uri="{FF2B5EF4-FFF2-40B4-BE49-F238E27FC236}">
-                <a16:creationId xmlns:a16="http://schemas.microsoft.com/office/drawing/2014/main" xmlns="" id="{54D9E87A-1CDC-4014-2314-39FC7B07C83B}"/>
+                <a16:creationId xmlns:a16="http://schemas.microsoft.com/office/drawing/2014/main" id="{54D9E87A-1CDC-4014-2314-39FC7B07C83B}"/>
               </a:ext>
             </a:extLst>
           </p:cNvPr>
@@ -4844,7 +4841,7 @@
           <p:cNvPr id="3" name="Text Placeholder 2">
             <a:extLst>
               <a:ext uri="{C183D7F6-B498-43B3-948B-1728B52AA6E4}">
-                <adec:decorative xmlns:adec="http://schemas.microsoft.com/office/drawing/2017/decorative" xmlns="" val="0"/>
+                <adec:decorative xmlns:adec="http://schemas.microsoft.com/office/drawing/2017/decorative" val="0"/>
               </a:ext>
             </a:extLst>
           </p:cNvPr>
@@ -4971,7 +4968,7 @@
           <p:cNvPr id="12" name="Date Placeholder 3">
             <a:extLst>
               <a:ext uri="{FF2B5EF4-FFF2-40B4-BE49-F238E27FC236}">
-                <a16:creationId xmlns:a16="http://schemas.microsoft.com/office/drawing/2014/main" xmlns="" id="{9054A355-1144-8E9E-0708-A56938F03394}"/>
+                <a16:creationId xmlns:a16="http://schemas.microsoft.com/office/drawing/2014/main" id="{9054A355-1144-8E9E-0708-A56938F03394}"/>
               </a:ext>
             </a:extLst>
           </p:cNvPr>
@@ -5018,7 +5015,7 @@
           <p:cNvPr id="11" name="Footer Placeholder 4">
             <a:extLst>
               <a:ext uri="{FF2B5EF4-FFF2-40B4-BE49-F238E27FC236}">
-                <a16:creationId xmlns:a16="http://schemas.microsoft.com/office/drawing/2014/main" xmlns="" id="{DB79E66C-660C-8962-2CA8-5B57D171332E}"/>
+                <a16:creationId xmlns:a16="http://schemas.microsoft.com/office/drawing/2014/main" id="{DB79E66C-660C-8962-2CA8-5B57D171332E}"/>
               </a:ext>
             </a:extLst>
           </p:cNvPr>
@@ -5055,7 +5052,7 @@
           <p:cNvPr id="6" name="Slide Number Placeholder 5">
             <a:extLst>
               <a:ext uri="{FF2B5EF4-FFF2-40B4-BE49-F238E27FC236}">
-                <a16:creationId xmlns:a16="http://schemas.microsoft.com/office/drawing/2014/main" xmlns="" id="{5D4AF8B1-E706-AD9A-FD16-CE6704805A2F}"/>
+                <a16:creationId xmlns:a16="http://schemas.microsoft.com/office/drawing/2014/main" id="{5D4AF8B1-E706-AD9A-FD16-CE6704805A2F}"/>
               </a:ext>
             </a:extLst>
           </p:cNvPr>
@@ -5094,10 +5091,10 @@
           <p:cNvPr id="15" name="Freeform: Shape 14">
             <a:extLst>
               <a:ext uri="{FF2B5EF4-FFF2-40B4-BE49-F238E27FC236}">
-                <a16:creationId xmlns:a16="http://schemas.microsoft.com/office/drawing/2014/main" xmlns="" id="{90703BCA-69C2-3D24-7F07-71DD32C3B700}"/>
+                <a16:creationId xmlns:a16="http://schemas.microsoft.com/office/drawing/2014/main" id="{90703BCA-69C2-3D24-7F07-71DD32C3B700}"/>
               </a:ext>
               <a:ext uri="{C183D7F6-B498-43B3-948B-1728B52AA6E4}">
-                <adec:decorative xmlns:adec="http://schemas.microsoft.com/office/drawing/2017/decorative" xmlns="" val="1"/>
+                <adec:decorative xmlns:adec="http://schemas.microsoft.com/office/drawing/2017/decorative" val="1"/>
               </a:ext>
             </a:extLst>
           </p:cNvPr>
@@ -5198,10 +5195,10 @@
           <p:cNvPr id="14" name="Freeform: Shape 13">
             <a:extLst>
               <a:ext uri="{FF2B5EF4-FFF2-40B4-BE49-F238E27FC236}">
-                <a16:creationId xmlns:a16="http://schemas.microsoft.com/office/drawing/2014/main" xmlns="" id="{EADD3443-0734-5152-8D04-B2D94110150A}"/>
+                <a16:creationId xmlns:a16="http://schemas.microsoft.com/office/drawing/2014/main" id="{EADD3443-0734-5152-8D04-B2D94110150A}"/>
               </a:ext>
               <a:ext uri="{C183D7F6-B498-43B3-948B-1728B52AA6E4}">
-                <adec:decorative xmlns:adec="http://schemas.microsoft.com/office/drawing/2017/decorative" xmlns="" val="1"/>
+                <adec:decorative xmlns:adec="http://schemas.microsoft.com/office/drawing/2017/decorative" val="1"/>
               </a:ext>
             </a:extLst>
           </p:cNvPr>
@@ -5299,10 +5296,10 @@
           <p:cNvPr id="10" name="Rectangle 9">
             <a:extLst>
               <a:ext uri="{FF2B5EF4-FFF2-40B4-BE49-F238E27FC236}">
-                <a16:creationId xmlns:a16="http://schemas.microsoft.com/office/drawing/2014/main" xmlns="" id="{FF402BE0-455F-CF23-B696-A4F06F441098}"/>
+                <a16:creationId xmlns:a16="http://schemas.microsoft.com/office/drawing/2014/main" id="{FF402BE0-455F-CF23-B696-A4F06F441098}"/>
               </a:ext>
               <a:ext uri="{C183D7F6-B498-43B3-948B-1728B52AA6E4}">
-                <adec:decorative xmlns:adec="http://schemas.microsoft.com/office/drawing/2017/decorative" xmlns="" val="1"/>
+                <adec:decorative xmlns:adec="http://schemas.microsoft.com/office/drawing/2017/decorative" val="1"/>
               </a:ext>
             </a:extLst>
           </p:cNvPr>
@@ -5384,10 +5381,10 @@
           <p:cNvPr id="20" name="Rectangle 8">
             <a:extLst>
               <a:ext uri="{FF2B5EF4-FFF2-40B4-BE49-F238E27FC236}">
-                <a16:creationId xmlns:a16="http://schemas.microsoft.com/office/drawing/2014/main" xmlns="" id="{DDD22BDB-6215-B88F-E45B-801DAF53832E}"/>
+                <a16:creationId xmlns:a16="http://schemas.microsoft.com/office/drawing/2014/main" id="{DDD22BDB-6215-B88F-E45B-801DAF53832E}"/>
               </a:ext>
               <a:ext uri="{C183D7F6-B498-43B3-948B-1728B52AA6E4}">
-                <adec:decorative xmlns:adec="http://schemas.microsoft.com/office/drawing/2017/decorative" xmlns="" val="1"/>
+                <adec:decorative xmlns:adec="http://schemas.microsoft.com/office/drawing/2017/decorative" val="1"/>
               </a:ext>
             </a:extLst>
           </p:cNvPr>
@@ -5439,7 +5436,7 @@
           <p:cNvPr id="2" name="Title 1">
             <a:extLst>
               <a:ext uri="{FF2B5EF4-FFF2-40B4-BE49-F238E27FC236}">
-                <a16:creationId xmlns:a16="http://schemas.microsoft.com/office/drawing/2014/main" xmlns="" id="{666A9F42-7FF7-F803-C075-BC4968D35E34}"/>
+                <a16:creationId xmlns:a16="http://schemas.microsoft.com/office/drawing/2014/main" id="{666A9F42-7FF7-F803-C075-BC4968D35E34}"/>
               </a:ext>
             </a:extLst>
           </p:cNvPr>
@@ -5478,10 +5475,10 @@
           <p:cNvPr id="21" name="Oval 9">
             <a:extLst>
               <a:ext uri="{FF2B5EF4-FFF2-40B4-BE49-F238E27FC236}">
-                <a16:creationId xmlns:a16="http://schemas.microsoft.com/office/drawing/2014/main" xmlns="" id="{3B8FB568-40CA-4614-DF0C-2C6D33DBF8E5}"/>
+                <a16:creationId xmlns:a16="http://schemas.microsoft.com/office/drawing/2014/main" id="{3B8FB568-40CA-4614-DF0C-2C6D33DBF8E5}"/>
               </a:ext>
               <a:ext uri="{C183D7F6-B498-43B3-948B-1728B52AA6E4}">
-                <adec:decorative xmlns:adec="http://schemas.microsoft.com/office/drawing/2017/decorative" xmlns="" val="1"/>
+                <adec:decorative xmlns:adec="http://schemas.microsoft.com/office/drawing/2017/decorative" val="1"/>
               </a:ext>
             </a:extLst>
           </p:cNvPr>
@@ -5536,10 +5533,10 @@
           <p:cNvPr id="4" name="Oval 5">
             <a:extLst>
               <a:ext uri="{FF2B5EF4-FFF2-40B4-BE49-F238E27FC236}">
-                <a16:creationId xmlns:a16="http://schemas.microsoft.com/office/drawing/2014/main" xmlns="" id="{19509B16-033B-8F64-FFC4-DDE5E8D48D51}"/>
+                <a16:creationId xmlns:a16="http://schemas.microsoft.com/office/drawing/2014/main" id="{19509B16-033B-8F64-FFC4-DDE5E8D48D51}"/>
               </a:ext>
               <a:ext uri="{C183D7F6-B498-43B3-948B-1728B52AA6E4}">
-                <adec:decorative xmlns:adec="http://schemas.microsoft.com/office/drawing/2017/decorative" xmlns="" val="1"/>
+                <adec:decorative xmlns:adec="http://schemas.microsoft.com/office/drawing/2017/decorative" val="1"/>
               </a:ext>
             </a:extLst>
           </p:cNvPr>
@@ -5594,10 +5591,10 @@
           <p:cNvPr id="5" name="Rectangle 7">
             <a:extLst>
               <a:ext uri="{FF2B5EF4-FFF2-40B4-BE49-F238E27FC236}">
-                <a16:creationId xmlns:a16="http://schemas.microsoft.com/office/drawing/2014/main" xmlns="" id="{4A002548-DE85-310F-C8D5-5305547E86EB}"/>
+                <a16:creationId xmlns:a16="http://schemas.microsoft.com/office/drawing/2014/main" id="{4A002548-DE85-310F-C8D5-5305547E86EB}"/>
               </a:ext>
               <a:ext uri="{C183D7F6-B498-43B3-948B-1728B52AA6E4}">
-                <adec:decorative xmlns:adec="http://schemas.microsoft.com/office/drawing/2017/decorative" xmlns="" val="1"/>
+                <adec:decorative xmlns:adec="http://schemas.microsoft.com/office/drawing/2017/decorative" val="1"/>
               </a:ext>
             </a:extLst>
           </p:cNvPr>
@@ -5649,10 +5646,10 @@
           <p:cNvPr id="14" name="Straight Connector 3">
             <a:extLst>
               <a:ext uri="{FF2B5EF4-FFF2-40B4-BE49-F238E27FC236}">
-                <a16:creationId xmlns:a16="http://schemas.microsoft.com/office/drawing/2014/main" xmlns="" id="{F86D542F-38EC-61DB-7AD9-6453D6F0E4A4}"/>
+                <a16:creationId xmlns:a16="http://schemas.microsoft.com/office/drawing/2014/main" id="{F86D542F-38EC-61DB-7AD9-6453D6F0E4A4}"/>
               </a:ext>
               <a:ext uri="{C183D7F6-B498-43B3-948B-1728B52AA6E4}">
-                <adec:decorative xmlns:adec="http://schemas.microsoft.com/office/drawing/2017/decorative" xmlns="" val="1"/>
+                <adec:decorative xmlns:adec="http://schemas.microsoft.com/office/drawing/2017/decorative" val="1"/>
               </a:ext>
             </a:extLst>
           </p:cNvPr>
@@ -5695,10 +5692,10 @@
           <p:cNvPr id="15" name="Straight Connector 4">
             <a:extLst>
               <a:ext uri="{FF2B5EF4-FFF2-40B4-BE49-F238E27FC236}">
-                <a16:creationId xmlns:a16="http://schemas.microsoft.com/office/drawing/2014/main" xmlns="" id="{D17BECAB-B66B-0943-7AF6-21611173DC3E}"/>
+                <a16:creationId xmlns:a16="http://schemas.microsoft.com/office/drawing/2014/main" id="{D17BECAB-B66B-0943-7AF6-21611173DC3E}"/>
               </a:ext>
               <a:ext uri="{C183D7F6-B498-43B3-948B-1728B52AA6E4}">
-                <adec:decorative xmlns:adec="http://schemas.microsoft.com/office/drawing/2017/decorative" xmlns="" val="1"/>
+                <adec:decorative xmlns:adec="http://schemas.microsoft.com/office/drawing/2017/decorative" val="1"/>
               </a:ext>
             </a:extLst>
           </p:cNvPr>
@@ -5741,7 +5738,7 @@
           <p:cNvPr id="42" name="Text Placeholder 2">
             <a:extLst>
               <a:ext uri="{FF2B5EF4-FFF2-40B4-BE49-F238E27FC236}">
-                <a16:creationId xmlns:a16="http://schemas.microsoft.com/office/drawing/2014/main" xmlns="" id="{D6161399-D3CD-2B6A-7B5A-A173236E9A97}"/>
+                <a16:creationId xmlns:a16="http://schemas.microsoft.com/office/drawing/2014/main" id="{D6161399-D3CD-2B6A-7B5A-A173236E9A97}"/>
               </a:ext>
             </a:extLst>
           </p:cNvPr>
@@ -5819,7 +5816,7 @@
           <p:cNvPr id="43" name="Text Placeholder 10">
             <a:extLst>
               <a:ext uri="{FF2B5EF4-FFF2-40B4-BE49-F238E27FC236}">
-                <a16:creationId xmlns:a16="http://schemas.microsoft.com/office/drawing/2014/main" xmlns="" id="{90822DB5-2A32-BB84-BE71-30DA82316A46}"/>
+                <a16:creationId xmlns:a16="http://schemas.microsoft.com/office/drawing/2014/main" id="{90822DB5-2A32-BB84-BE71-30DA82316A46}"/>
               </a:ext>
             </a:extLst>
           </p:cNvPr>
@@ -5886,10 +5883,10 @@
           <p:cNvPr id="44" name="Straight Connector 3">
             <a:extLst>
               <a:ext uri="{FF2B5EF4-FFF2-40B4-BE49-F238E27FC236}">
-                <a16:creationId xmlns:a16="http://schemas.microsoft.com/office/drawing/2014/main" xmlns="" id="{456CED7D-93B5-34BD-84D6-825AD84C449A}"/>
+                <a16:creationId xmlns:a16="http://schemas.microsoft.com/office/drawing/2014/main" id="{456CED7D-93B5-34BD-84D6-825AD84C449A}"/>
               </a:ext>
               <a:ext uri="{C183D7F6-B498-43B3-948B-1728B52AA6E4}">
-                <adec:decorative xmlns:adec="http://schemas.microsoft.com/office/drawing/2017/decorative" xmlns="" val="1"/>
+                <adec:decorative xmlns:adec="http://schemas.microsoft.com/office/drawing/2017/decorative" val="1"/>
               </a:ext>
             </a:extLst>
           </p:cNvPr>
@@ -5932,10 +5929,10 @@
           <p:cNvPr id="45" name="Straight Connector 4">
             <a:extLst>
               <a:ext uri="{FF2B5EF4-FFF2-40B4-BE49-F238E27FC236}">
-                <a16:creationId xmlns:a16="http://schemas.microsoft.com/office/drawing/2014/main" xmlns="" id="{12B87474-83B0-2583-6BEB-DBB264CC1B39}"/>
+                <a16:creationId xmlns:a16="http://schemas.microsoft.com/office/drawing/2014/main" id="{12B87474-83B0-2583-6BEB-DBB264CC1B39}"/>
               </a:ext>
               <a:ext uri="{C183D7F6-B498-43B3-948B-1728B52AA6E4}">
-                <adec:decorative xmlns:adec="http://schemas.microsoft.com/office/drawing/2017/decorative" xmlns="" val="1"/>
+                <adec:decorative xmlns:adec="http://schemas.microsoft.com/office/drawing/2017/decorative" val="1"/>
               </a:ext>
             </a:extLst>
           </p:cNvPr>
@@ -5978,7 +5975,7 @@
           <p:cNvPr id="46" name="Text Placeholder 2">
             <a:extLst>
               <a:ext uri="{FF2B5EF4-FFF2-40B4-BE49-F238E27FC236}">
-                <a16:creationId xmlns:a16="http://schemas.microsoft.com/office/drawing/2014/main" xmlns="" id="{55BFE79B-8E6A-D9C7-8A98-4A21A96FDC4B}"/>
+                <a16:creationId xmlns:a16="http://schemas.microsoft.com/office/drawing/2014/main" id="{55BFE79B-8E6A-D9C7-8A98-4A21A96FDC4B}"/>
               </a:ext>
             </a:extLst>
           </p:cNvPr>
@@ -6056,7 +6053,7 @@
           <p:cNvPr id="47" name="Text Placeholder 10">
             <a:extLst>
               <a:ext uri="{FF2B5EF4-FFF2-40B4-BE49-F238E27FC236}">
-                <a16:creationId xmlns:a16="http://schemas.microsoft.com/office/drawing/2014/main" xmlns="" id="{F5A556EA-CC4F-1770-022A-C73BB2B9835F}"/>
+                <a16:creationId xmlns:a16="http://schemas.microsoft.com/office/drawing/2014/main" id="{F5A556EA-CC4F-1770-022A-C73BB2B9835F}"/>
               </a:ext>
             </a:extLst>
           </p:cNvPr>
@@ -6123,10 +6120,10 @@
           <p:cNvPr id="52" name="Straight Connector 3">
             <a:extLst>
               <a:ext uri="{FF2B5EF4-FFF2-40B4-BE49-F238E27FC236}">
-                <a16:creationId xmlns:a16="http://schemas.microsoft.com/office/drawing/2014/main" xmlns="" id="{664CF928-1384-68A8-D1B4-8DEB8E0FF213}"/>
+                <a16:creationId xmlns:a16="http://schemas.microsoft.com/office/drawing/2014/main" id="{664CF928-1384-68A8-D1B4-8DEB8E0FF213}"/>
               </a:ext>
               <a:ext uri="{C183D7F6-B498-43B3-948B-1728B52AA6E4}">
-                <adec:decorative xmlns:adec="http://schemas.microsoft.com/office/drawing/2017/decorative" xmlns="" val="1"/>
+                <adec:decorative xmlns:adec="http://schemas.microsoft.com/office/drawing/2017/decorative" val="1"/>
               </a:ext>
             </a:extLst>
           </p:cNvPr>
@@ -6169,10 +6166,10 @@
           <p:cNvPr id="53" name="Straight Connector 4">
             <a:extLst>
               <a:ext uri="{FF2B5EF4-FFF2-40B4-BE49-F238E27FC236}">
-                <a16:creationId xmlns:a16="http://schemas.microsoft.com/office/drawing/2014/main" xmlns="" id="{82427830-33ED-2D71-F1A1-A803CC6A3340}"/>
+                <a16:creationId xmlns:a16="http://schemas.microsoft.com/office/drawing/2014/main" id="{82427830-33ED-2D71-F1A1-A803CC6A3340}"/>
               </a:ext>
               <a:ext uri="{C183D7F6-B498-43B3-948B-1728B52AA6E4}">
-                <adec:decorative xmlns:adec="http://schemas.microsoft.com/office/drawing/2017/decorative" xmlns="" val="1"/>
+                <adec:decorative xmlns:adec="http://schemas.microsoft.com/office/drawing/2017/decorative" val="1"/>
               </a:ext>
             </a:extLst>
           </p:cNvPr>
@@ -6215,7 +6212,7 @@
           <p:cNvPr id="54" name="Text Placeholder 2">
             <a:extLst>
               <a:ext uri="{FF2B5EF4-FFF2-40B4-BE49-F238E27FC236}">
-                <a16:creationId xmlns:a16="http://schemas.microsoft.com/office/drawing/2014/main" xmlns="" id="{A01FC06B-A087-E474-D4A7-336F08F727D1}"/>
+                <a16:creationId xmlns:a16="http://schemas.microsoft.com/office/drawing/2014/main" id="{A01FC06B-A087-E474-D4A7-336F08F727D1}"/>
               </a:ext>
             </a:extLst>
           </p:cNvPr>
@@ -6293,7 +6290,7 @@
           <p:cNvPr id="55" name="Text Placeholder 10">
             <a:extLst>
               <a:ext uri="{FF2B5EF4-FFF2-40B4-BE49-F238E27FC236}">
-                <a16:creationId xmlns:a16="http://schemas.microsoft.com/office/drawing/2014/main" xmlns="" id="{E6AD28EF-5FD9-495F-E6E5-08E2C0E0B52C}"/>
+                <a16:creationId xmlns:a16="http://schemas.microsoft.com/office/drawing/2014/main" id="{E6AD28EF-5FD9-495F-E6E5-08E2C0E0B52C}"/>
               </a:ext>
             </a:extLst>
           </p:cNvPr>
@@ -6360,10 +6357,10 @@
           <p:cNvPr id="48" name="Straight Connector 3">
             <a:extLst>
               <a:ext uri="{FF2B5EF4-FFF2-40B4-BE49-F238E27FC236}">
-                <a16:creationId xmlns:a16="http://schemas.microsoft.com/office/drawing/2014/main" xmlns="" id="{94AEDC53-C272-2AB2-5E5D-F72DAB0DD2C8}"/>
+                <a16:creationId xmlns:a16="http://schemas.microsoft.com/office/drawing/2014/main" id="{94AEDC53-C272-2AB2-5E5D-F72DAB0DD2C8}"/>
               </a:ext>
               <a:ext uri="{C183D7F6-B498-43B3-948B-1728B52AA6E4}">
-                <adec:decorative xmlns:adec="http://schemas.microsoft.com/office/drawing/2017/decorative" xmlns="" val="1"/>
+                <adec:decorative xmlns:adec="http://schemas.microsoft.com/office/drawing/2017/decorative" val="1"/>
               </a:ext>
             </a:extLst>
           </p:cNvPr>
@@ -6406,10 +6403,10 @@
           <p:cNvPr id="49" name="Straight Connector 4">
             <a:extLst>
               <a:ext uri="{FF2B5EF4-FFF2-40B4-BE49-F238E27FC236}">
-                <a16:creationId xmlns:a16="http://schemas.microsoft.com/office/drawing/2014/main" xmlns="" id="{055C88A9-A0AC-5C27-5E5E-84D680EBD2FD}"/>
+                <a16:creationId xmlns:a16="http://schemas.microsoft.com/office/drawing/2014/main" id="{055C88A9-A0AC-5C27-5E5E-84D680EBD2FD}"/>
               </a:ext>
               <a:ext uri="{C183D7F6-B498-43B3-948B-1728B52AA6E4}">
-                <adec:decorative xmlns:adec="http://schemas.microsoft.com/office/drawing/2017/decorative" xmlns="" val="1"/>
+                <adec:decorative xmlns:adec="http://schemas.microsoft.com/office/drawing/2017/decorative" val="1"/>
               </a:ext>
             </a:extLst>
           </p:cNvPr>
@@ -6452,7 +6449,7 @@
           <p:cNvPr id="50" name="Text Placeholder 2">
             <a:extLst>
               <a:ext uri="{FF2B5EF4-FFF2-40B4-BE49-F238E27FC236}">
-                <a16:creationId xmlns:a16="http://schemas.microsoft.com/office/drawing/2014/main" xmlns="" id="{335D000D-A853-BF2A-796C-5BB4089FE151}"/>
+                <a16:creationId xmlns:a16="http://schemas.microsoft.com/office/drawing/2014/main" id="{335D000D-A853-BF2A-796C-5BB4089FE151}"/>
               </a:ext>
             </a:extLst>
           </p:cNvPr>
@@ -6530,7 +6527,7 @@
           <p:cNvPr id="51" name="Text Placeholder 10">
             <a:extLst>
               <a:ext uri="{FF2B5EF4-FFF2-40B4-BE49-F238E27FC236}">
-                <a16:creationId xmlns:a16="http://schemas.microsoft.com/office/drawing/2014/main" xmlns="" id="{B774CFC3-0318-B4D5-3562-72284B097DFA}"/>
+                <a16:creationId xmlns:a16="http://schemas.microsoft.com/office/drawing/2014/main" id="{B774CFC3-0318-B4D5-3562-72284B097DFA}"/>
               </a:ext>
             </a:extLst>
           </p:cNvPr>
@@ -6597,7 +6594,7 @@
           <p:cNvPr id="12" name="Date Placeholder 2">
             <a:extLst>
               <a:ext uri="{FF2B5EF4-FFF2-40B4-BE49-F238E27FC236}">
-                <a16:creationId xmlns:a16="http://schemas.microsoft.com/office/drawing/2014/main" xmlns="" id="{60D48F82-45FC-A36B-0146-5E8D370B7C7E}"/>
+                <a16:creationId xmlns:a16="http://schemas.microsoft.com/office/drawing/2014/main" id="{60D48F82-45FC-A36B-0146-5E8D370B7C7E}"/>
               </a:ext>
             </a:extLst>
           </p:cNvPr>
@@ -6642,7 +6639,7 @@
           <p:cNvPr id="11" name="Footer Placeholder 3">
             <a:extLst>
               <a:ext uri="{FF2B5EF4-FFF2-40B4-BE49-F238E27FC236}">
-                <a16:creationId xmlns:a16="http://schemas.microsoft.com/office/drawing/2014/main" xmlns="" id="{0ACEA3CE-FEF8-2294-2081-7C50B08B5E8A}"/>
+                <a16:creationId xmlns:a16="http://schemas.microsoft.com/office/drawing/2014/main" id="{0ACEA3CE-FEF8-2294-2081-7C50B08B5E8A}"/>
               </a:ext>
             </a:extLst>
           </p:cNvPr>
@@ -6681,7 +6678,7 @@
           <p:cNvPr id="10" name="Slide Number Placeholder 4">
             <a:extLst>
               <a:ext uri="{FF2B5EF4-FFF2-40B4-BE49-F238E27FC236}">
-                <a16:creationId xmlns:a16="http://schemas.microsoft.com/office/drawing/2014/main" xmlns="" id="{C5CEDF45-2CB7-35F2-5138-54DBA2ADD8F4}"/>
+                <a16:creationId xmlns:a16="http://schemas.microsoft.com/office/drawing/2014/main" id="{C5CEDF45-2CB7-35F2-5138-54DBA2ADD8F4}"/>
               </a:ext>
             </a:extLst>
           </p:cNvPr>
@@ -6752,10 +6749,10 @@
           <p:cNvPr id="8" name="Oval 6">
             <a:extLst>
               <a:ext uri="{FF2B5EF4-FFF2-40B4-BE49-F238E27FC236}">
-                <a16:creationId xmlns:a16="http://schemas.microsoft.com/office/drawing/2014/main" xmlns="" id="{3CA77268-47A6-DBA8-B49A-089CF0ABA55F}"/>
+                <a16:creationId xmlns:a16="http://schemas.microsoft.com/office/drawing/2014/main" id="{3CA77268-47A6-DBA8-B49A-089CF0ABA55F}"/>
               </a:ext>
               <a:ext uri="{C183D7F6-B498-43B3-948B-1728B52AA6E4}">
-                <adec:decorative xmlns:adec="http://schemas.microsoft.com/office/drawing/2017/decorative" xmlns="" val="1"/>
+                <adec:decorative xmlns:adec="http://schemas.microsoft.com/office/drawing/2017/decorative" val="1"/>
               </a:ext>
             </a:extLst>
           </p:cNvPr>
@@ -6810,10 +6807,10 @@
           <p:cNvPr id="9" name="Rectangle 7">
             <a:extLst>
               <a:ext uri="{FF2B5EF4-FFF2-40B4-BE49-F238E27FC236}">
-                <a16:creationId xmlns:a16="http://schemas.microsoft.com/office/drawing/2014/main" xmlns="" id="{457AE0FC-167D-DCD4-7E90-08F6C5CF5343}"/>
+                <a16:creationId xmlns:a16="http://schemas.microsoft.com/office/drawing/2014/main" id="{457AE0FC-167D-DCD4-7E90-08F6C5CF5343}"/>
               </a:ext>
               <a:ext uri="{C183D7F6-B498-43B3-948B-1728B52AA6E4}">
-                <adec:decorative xmlns:adec="http://schemas.microsoft.com/office/drawing/2017/decorative" xmlns="" val="1"/>
+                <adec:decorative xmlns:adec="http://schemas.microsoft.com/office/drawing/2017/decorative" val="1"/>
               </a:ext>
             </a:extLst>
           </p:cNvPr>
@@ -6865,10 +6862,10 @@
           <p:cNvPr id="2" name="Rectangle 11">
             <a:extLst>
               <a:ext uri="{FF2B5EF4-FFF2-40B4-BE49-F238E27FC236}">
-                <a16:creationId xmlns:a16="http://schemas.microsoft.com/office/drawing/2014/main" xmlns="" id="{6CB3C578-3B25-DE12-0521-367F4E721220}"/>
+                <a16:creationId xmlns:a16="http://schemas.microsoft.com/office/drawing/2014/main" id="{6CB3C578-3B25-DE12-0521-367F4E721220}"/>
               </a:ext>
               <a:ext uri="{C183D7F6-B498-43B3-948B-1728B52AA6E4}">
-                <adec:decorative xmlns:adec="http://schemas.microsoft.com/office/drawing/2017/decorative" xmlns="" val="1"/>
+                <adec:decorative xmlns:adec="http://schemas.microsoft.com/office/drawing/2017/decorative" val="1"/>
               </a:ext>
             </a:extLst>
           </p:cNvPr>
@@ -6920,10 +6917,10 @@
           <p:cNvPr id="4" name="Oval 5">
             <a:extLst>
               <a:ext uri="{FF2B5EF4-FFF2-40B4-BE49-F238E27FC236}">
-                <a16:creationId xmlns:a16="http://schemas.microsoft.com/office/drawing/2014/main" xmlns="" id="{E81BD741-F30D-3EC0-3E21-FE8EDC56FE9E}"/>
+                <a16:creationId xmlns:a16="http://schemas.microsoft.com/office/drawing/2014/main" id="{E81BD741-F30D-3EC0-3E21-FE8EDC56FE9E}"/>
               </a:ext>
               <a:ext uri="{C183D7F6-B498-43B3-948B-1728B52AA6E4}">
-                <adec:decorative xmlns:adec="http://schemas.microsoft.com/office/drawing/2017/decorative" xmlns="" val="1"/>
+                <adec:decorative xmlns:adec="http://schemas.microsoft.com/office/drawing/2017/decorative" val="1"/>
               </a:ext>
             </a:extLst>
           </p:cNvPr>
@@ -6978,10 +6975,10 @@
           <p:cNvPr id="5" name="Rectangle 7">
             <a:extLst>
               <a:ext uri="{FF2B5EF4-FFF2-40B4-BE49-F238E27FC236}">
-                <a16:creationId xmlns:a16="http://schemas.microsoft.com/office/drawing/2014/main" xmlns="" id="{B78CB1F1-43DC-84A2-DB38-42CED8A6D0DE}"/>
+                <a16:creationId xmlns:a16="http://schemas.microsoft.com/office/drawing/2014/main" id="{B78CB1F1-43DC-84A2-DB38-42CED8A6D0DE}"/>
               </a:ext>
               <a:ext uri="{C183D7F6-B498-43B3-948B-1728B52AA6E4}">
-                <adec:decorative xmlns:adec="http://schemas.microsoft.com/office/drawing/2017/decorative" xmlns="" val="1"/>
+                <adec:decorative xmlns:adec="http://schemas.microsoft.com/office/drawing/2017/decorative" val="1"/>
               </a:ext>
             </a:extLst>
           </p:cNvPr>
@@ -7033,10 +7030,10 @@
           <p:cNvPr id="6" name="Straight Connector 3">
             <a:extLst>
               <a:ext uri="{FF2B5EF4-FFF2-40B4-BE49-F238E27FC236}">
-                <a16:creationId xmlns:a16="http://schemas.microsoft.com/office/drawing/2014/main" xmlns="" id="{13D9D504-F065-099D-DFC5-03AAFA58A1DE}"/>
+                <a16:creationId xmlns:a16="http://schemas.microsoft.com/office/drawing/2014/main" id="{13D9D504-F065-099D-DFC5-03AAFA58A1DE}"/>
               </a:ext>
               <a:ext uri="{C183D7F6-B498-43B3-948B-1728B52AA6E4}">
-                <adec:decorative xmlns:adec="http://schemas.microsoft.com/office/drawing/2017/decorative" xmlns="" val="1"/>
+                <adec:decorative xmlns:adec="http://schemas.microsoft.com/office/drawing/2017/decorative" val="1"/>
               </a:ext>
             </a:extLst>
           </p:cNvPr>
@@ -7079,10 +7076,10 @@
           <p:cNvPr id="7" name="Straight Connector 4">
             <a:extLst>
               <a:ext uri="{FF2B5EF4-FFF2-40B4-BE49-F238E27FC236}">
-                <a16:creationId xmlns:a16="http://schemas.microsoft.com/office/drawing/2014/main" xmlns="" id="{6DFB1812-ACA6-4DC3-03F0-C2E6122DF093}"/>
+                <a16:creationId xmlns:a16="http://schemas.microsoft.com/office/drawing/2014/main" id="{6DFB1812-ACA6-4DC3-03F0-C2E6122DF093}"/>
               </a:ext>
               <a:ext uri="{C183D7F6-B498-43B3-948B-1728B52AA6E4}">
-                <adec:decorative xmlns:adec="http://schemas.microsoft.com/office/drawing/2017/decorative" xmlns="" val="1"/>
+                <adec:decorative xmlns:adec="http://schemas.microsoft.com/office/drawing/2017/decorative" val="1"/>
               </a:ext>
             </a:extLst>
           </p:cNvPr>
@@ -7125,10 +7122,10 @@
           <p:cNvPr id="15" name="Straight Connector 3">
             <a:extLst>
               <a:ext uri="{FF2B5EF4-FFF2-40B4-BE49-F238E27FC236}">
-                <a16:creationId xmlns:a16="http://schemas.microsoft.com/office/drawing/2014/main" xmlns="" id="{03BC5B12-08AC-2BFA-4EDD-13EA2E2980AD}"/>
+                <a16:creationId xmlns:a16="http://schemas.microsoft.com/office/drawing/2014/main" id="{03BC5B12-08AC-2BFA-4EDD-13EA2E2980AD}"/>
               </a:ext>
               <a:ext uri="{C183D7F6-B498-43B3-948B-1728B52AA6E4}">
-                <adec:decorative xmlns:adec="http://schemas.microsoft.com/office/drawing/2017/decorative" xmlns="" val="1"/>
+                <adec:decorative xmlns:adec="http://schemas.microsoft.com/office/drawing/2017/decorative" val="1"/>
               </a:ext>
             </a:extLst>
           </p:cNvPr>
@@ -7171,10 +7168,10 @@
           <p:cNvPr id="16" name="Straight Connector 4">
             <a:extLst>
               <a:ext uri="{FF2B5EF4-FFF2-40B4-BE49-F238E27FC236}">
-                <a16:creationId xmlns:a16="http://schemas.microsoft.com/office/drawing/2014/main" xmlns="" id="{A93A9BBB-A674-5564-A878-E3CA286CAE71}"/>
+                <a16:creationId xmlns:a16="http://schemas.microsoft.com/office/drawing/2014/main" id="{A93A9BBB-A674-5564-A878-E3CA286CAE71}"/>
               </a:ext>
               <a:ext uri="{C183D7F6-B498-43B3-948B-1728B52AA6E4}">
-                <adec:decorative xmlns:adec="http://schemas.microsoft.com/office/drawing/2017/decorative" xmlns="" val="1"/>
+                <adec:decorative xmlns:adec="http://schemas.microsoft.com/office/drawing/2017/decorative" val="1"/>
               </a:ext>
             </a:extLst>
           </p:cNvPr>
@@ -7217,7 +7214,7 @@
           <p:cNvPr id="3" name="Title 1">
             <a:extLst>
               <a:ext uri="{FF2B5EF4-FFF2-40B4-BE49-F238E27FC236}">
-                <a16:creationId xmlns:a16="http://schemas.microsoft.com/office/drawing/2014/main" xmlns="" id="{09CCEDB7-7782-5D8A-FC68-FF822CFE4673}"/>
+                <a16:creationId xmlns:a16="http://schemas.microsoft.com/office/drawing/2014/main" id="{09CCEDB7-7782-5D8A-FC68-FF822CFE4673}"/>
               </a:ext>
             </a:extLst>
           </p:cNvPr>
@@ -7256,7 +7253,7 @@
           <p:cNvPr id="13" name="Text Placeholder 2">
             <a:extLst>
               <a:ext uri="{FF2B5EF4-FFF2-40B4-BE49-F238E27FC236}">
-                <a16:creationId xmlns:a16="http://schemas.microsoft.com/office/drawing/2014/main" xmlns="" id="{27F44296-638D-5B08-2F89-F8907F3138E9}"/>
+                <a16:creationId xmlns:a16="http://schemas.microsoft.com/office/drawing/2014/main" id="{27F44296-638D-5B08-2F89-F8907F3138E9}"/>
               </a:ext>
             </a:extLst>
           </p:cNvPr>
@@ -7334,7 +7331,7 @@
           <p:cNvPr id="14" name="Text Placeholder 10">
             <a:extLst>
               <a:ext uri="{FF2B5EF4-FFF2-40B4-BE49-F238E27FC236}">
-                <a16:creationId xmlns:a16="http://schemas.microsoft.com/office/drawing/2014/main" xmlns="" id="{25EBA686-575C-E191-F98A-C0EBBA4F530E}"/>
+                <a16:creationId xmlns:a16="http://schemas.microsoft.com/office/drawing/2014/main" id="{25EBA686-575C-E191-F98A-C0EBBA4F530E}"/>
               </a:ext>
             </a:extLst>
           </p:cNvPr>
@@ -7401,7 +7398,7 @@
           <p:cNvPr id="17" name="Text Placeholder 2">
             <a:extLst>
               <a:ext uri="{FF2B5EF4-FFF2-40B4-BE49-F238E27FC236}">
-                <a16:creationId xmlns:a16="http://schemas.microsoft.com/office/drawing/2014/main" xmlns="" id="{147DF147-0973-9BC0-59E9-EA9637F0FED1}"/>
+                <a16:creationId xmlns:a16="http://schemas.microsoft.com/office/drawing/2014/main" id="{147DF147-0973-9BC0-59E9-EA9637F0FED1}"/>
               </a:ext>
             </a:extLst>
           </p:cNvPr>
@@ -7479,7 +7476,7 @@
           <p:cNvPr id="18" name="Text Placeholder 10">
             <a:extLst>
               <a:ext uri="{FF2B5EF4-FFF2-40B4-BE49-F238E27FC236}">
-                <a16:creationId xmlns:a16="http://schemas.microsoft.com/office/drawing/2014/main" xmlns="" id="{BC0FA2C4-2DCC-57D2-A4A8-C0E7A91A23BF}"/>
+                <a16:creationId xmlns:a16="http://schemas.microsoft.com/office/drawing/2014/main" id="{BC0FA2C4-2DCC-57D2-A4A8-C0E7A91A23BF}"/>
               </a:ext>
             </a:extLst>
           </p:cNvPr>
@@ -7546,7 +7543,7 @@
           <p:cNvPr id="22" name="Picture Placeholder 21">
             <a:extLst>
               <a:ext uri="{FF2B5EF4-FFF2-40B4-BE49-F238E27FC236}">
-                <a16:creationId xmlns:a16="http://schemas.microsoft.com/office/drawing/2014/main" xmlns="" id="{26F9B4D9-EE44-B302-2788-6E680765993D}"/>
+                <a16:creationId xmlns:a16="http://schemas.microsoft.com/office/drawing/2014/main" id="{26F9B4D9-EE44-B302-2788-6E680765993D}"/>
               </a:ext>
             </a:extLst>
           </p:cNvPr>
@@ -7624,7 +7621,7 @@
           <p:cNvPr id="12" name="Date Placeholder 2">
             <a:extLst>
               <a:ext uri="{FF2B5EF4-FFF2-40B4-BE49-F238E27FC236}">
-                <a16:creationId xmlns:a16="http://schemas.microsoft.com/office/drawing/2014/main" xmlns="" id="{60D48F82-45FC-A36B-0146-5E8D370B7C7E}"/>
+                <a16:creationId xmlns:a16="http://schemas.microsoft.com/office/drawing/2014/main" id="{60D48F82-45FC-A36B-0146-5E8D370B7C7E}"/>
               </a:ext>
             </a:extLst>
           </p:cNvPr>
@@ -7669,7 +7666,7 @@
           <p:cNvPr id="11" name="Footer Placeholder 3">
             <a:extLst>
               <a:ext uri="{FF2B5EF4-FFF2-40B4-BE49-F238E27FC236}">
-                <a16:creationId xmlns:a16="http://schemas.microsoft.com/office/drawing/2014/main" xmlns="" id="{0ACEA3CE-FEF8-2294-2081-7C50B08B5E8A}"/>
+                <a16:creationId xmlns:a16="http://schemas.microsoft.com/office/drawing/2014/main" id="{0ACEA3CE-FEF8-2294-2081-7C50B08B5E8A}"/>
               </a:ext>
             </a:extLst>
           </p:cNvPr>
@@ -7708,7 +7705,7 @@
           <p:cNvPr id="10" name="Slide Number Placeholder 4">
             <a:extLst>
               <a:ext uri="{FF2B5EF4-FFF2-40B4-BE49-F238E27FC236}">
-                <a16:creationId xmlns:a16="http://schemas.microsoft.com/office/drawing/2014/main" xmlns="" id="{C5CEDF45-2CB7-35F2-5138-54DBA2ADD8F4}"/>
+                <a16:creationId xmlns:a16="http://schemas.microsoft.com/office/drawing/2014/main" id="{C5CEDF45-2CB7-35F2-5138-54DBA2ADD8F4}"/>
               </a:ext>
             </a:extLst>
           </p:cNvPr>
@@ -7779,10 +7776,10 @@
           <p:cNvPr id="4" name="Rectangle 2">
             <a:extLst>
               <a:ext uri="{FF2B5EF4-FFF2-40B4-BE49-F238E27FC236}">
-                <a16:creationId xmlns:a16="http://schemas.microsoft.com/office/drawing/2014/main" xmlns="" id="{5537B8F7-E751-7CEB-6DD9-B42C2FD723C2}"/>
+                <a16:creationId xmlns:a16="http://schemas.microsoft.com/office/drawing/2014/main" id="{5537B8F7-E751-7CEB-6DD9-B42C2FD723C2}"/>
               </a:ext>
               <a:ext uri="{C183D7F6-B498-43B3-948B-1728B52AA6E4}">
-                <adec:decorative xmlns:adec="http://schemas.microsoft.com/office/drawing/2017/decorative" xmlns="" val="1"/>
+                <adec:decorative xmlns:adec="http://schemas.microsoft.com/office/drawing/2017/decorative" val="1"/>
               </a:ext>
             </a:extLst>
           </p:cNvPr>
@@ -7834,7 +7831,7 @@
           <p:cNvPr id="10" name="Title 5">
             <a:extLst>
               <a:ext uri="{FF2B5EF4-FFF2-40B4-BE49-F238E27FC236}">
-                <a16:creationId xmlns:a16="http://schemas.microsoft.com/office/drawing/2014/main" xmlns="" id="{F57799BE-E2E8-5386-4E50-78667C4C3B5E}"/>
+                <a16:creationId xmlns:a16="http://schemas.microsoft.com/office/drawing/2014/main" id="{F57799BE-E2E8-5386-4E50-78667C4C3B5E}"/>
               </a:ext>
             </a:extLst>
           </p:cNvPr>
@@ -7874,7 +7871,7 @@
           <p:cNvPr id="9" name="Subtitle 9">
             <a:extLst>
               <a:ext uri="{FF2B5EF4-FFF2-40B4-BE49-F238E27FC236}">
-                <a16:creationId xmlns:a16="http://schemas.microsoft.com/office/drawing/2014/main" xmlns="" id="{2C3C4BD9-EA24-4419-395F-2ED13A13051F}"/>
+                <a16:creationId xmlns:a16="http://schemas.microsoft.com/office/drawing/2014/main" id="{2C3C4BD9-EA24-4419-395F-2ED13A13051F}"/>
               </a:ext>
             </a:extLst>
           </p:cNvPr>
@@ -7921,7 +7918,7 @@
           <p:cNvPr id="13" name="Date Placeholder 3">
             <a:extLst>
               <a:ext uri="{FF2B5EF4-FFF2-40B4-BE49-F238E27FC236}">
-                <a16:creationId xmlns:a16="http://schemas.microsoft.com/office/drawing/2014/main" xmlns="" id="{5B1E7BAB-714E-16DE-838B-DD3C94444791}"/>
+                <a16:creationId xmlns:a16="http://schemas.microsoft.com/office/drawing/2014/main" id="{5B1E7BAB-714E-16DE-838B-DD3C94444791}"/>
               </a:ext>
             </a:extLst>
           </p:cNvPr>
@@ -7959,7 +7956,7 @@
           <p:cNvPr id="12" name="Footer Placeholder 4">
             <a:extLst>
               <a:ext uri="{FF2B5EF4-FFF2-40B4-BE49-F238E27FC236}">
-                <a16:creationId xmlns:a16="http://schemas.microsoft.com/office/drawing/2014/main" xmlns="" id="{0300E782-589F-8882-4679-6D4626FE09FE}"/>
+                <a16:creationId xmlns:a16="http://schemas.microsoft.com/office/drawing/2014/main" id="{0300E782-589F-8882-4679-6D4626FE09FE}"/>
               </a:ext>
             </a:extLst>
           </p:cNvPr>
@@ -7992,7 +7989,7 @@
           <p:cNvPr id="11" name="Slide Number Placeholder 5">
             <a:extLst>
               <a:ext uri="{FF2B5EF4-FFF2-40B4-BE49-F238E27FC236}">
-                <a16:creationId xmlns:a16="http://schemas.microsoft.com/office/drawing/2014/main" xmlns="" id="{96AEB95B-6A8F-4EAD-1687-68BF0E2ADDB5}"/>
+                <a16:creationId xmlns:a16="http://schemas.microsoft.com/office/drawing/2014/main" id="{96AEB95B-6A8F-4EAD-1687-68BF0E2ADDB5}"/>
               </a:ext>
             </a:extLst>
           </p:cNvPr>
@@ -8026,10 +8023,10 @@
           <p:cNvPr id="3" name="Freeform: Shape 1">
             <a:extLst>
               <a:ext uri="{FF2B5EF4-FFF2-40B4-BE49-F238E27FC236}">
-                <a16:creationId xmlns:a16="http://schemas.microsoft.com/office/drawing/2014/main" xmlns="" id="{76378701-6465-5DA7-D893-B28EDACEEB3C}"/>
+                <a16:creationId xmlns:a16="http://schemas.microsoft.com/office/drawing/2014/main" id="{76378701-6465-5DA7-D893-B28EDACEEB3C}"/>
               </a:ext>
               <a:ext uri="{C183D7F6-B498-43B3-948B-1728B52AA6E4}">
-                <adec:decorative xmlns:adec="http://schemas.microsoft.com/office/drawing/2017/decorative" xmlns="" val="1"/>
+                <adec:decorative xmlns:adec="http://schemas.microsoft.com/office/drawing/2017/decorative" val="1"/>
               </a:ext>
             </a:extLst>
           </p:cNvPr>
@@ -8126,10 +8123,10 @@
           <p:cNvPr id="5" name="Oval 6">
             <a:extLst>
               <a:ext uri="{FF2B5EF4-FFF2-40B4-BE49-F238E27FC236}">
-                <a16:creationId xmlns:a16="http://schemas.microsoft.com/office/drawing/2014/main" xmlns="" id="{0A5B844E-3667-B2D2-8C28-BCDE9C01DC22}"/>
+                <a16:creationId xmlns:a16="http://schemas.microsoft.com/office/drawing/2014/main" id="{0A5B844E-3667-B2D2-8C28-BCDE9C01DC22}"/>
               </a:ext>
               <a:ext uri="{C183D7F6-B498-43B3-948B-1728B52AA6E4}">
-                <adec:decorative xmlns:adec="http://schemas.microsoft.com/office/drawing/2017/decorative" xmlns="" val="1"/>
+                <adec:decorative xmlns:adec="http://schemas.microsoft.com/office/drawing/2017/decorative" val="1"/>
               </a:ext>
             </a:extLst>
           </p:cNvPr>
@@ -8211,10 +8208,10 @@
           <p:cNvPr id="3" name="Rectangle 2">
             <a:extLst>
               <a:ext uri="{FF2B5EF4-FFF2-40B4-BE49-F238E27FC236}">
-                <a16:creationId xmlns:a16="http://schemas.microsoft.com/office/drawing/2014/main" xmlns="" id="{6305CB43-6584-B990-A6AF-D56EDAC943B8}"/>
+                <a16:creationId xmlns:a16="http://schemas.microsoft.com/office/drawing/2014/main" id="{6305CB43-6584-B990-A6AF-D56EDAC943B8}"/>
               </a:ext>
               <a:ext uri="{C183D7F6-B498-43B3-948B-1728B52AA6E4}">
-                <adec:decorative xmlns:adec="http://schemas.microsoft.com/office/drawing/2017/decorative" xmlns="" val="1"/>
+                <adec:decorative xmlns:adec="http://schemas.microsoft.com/office/drawing/2017/decorative" val="1"/>
               </a:ext>
             </a:extLst>
           </p:cNvPr>
@@ -8266,7 +8263,7 @@
           <p:cNvPr id="6" name="Title 5">
             <a:extLst>
               <a:ext uri="{FF2B5EF4-FFF2-40B4-BE49-F238E27FC236}">
-                <a16:creationId xmlns:a16="http://schemas.microsoft.com/office/drawing/2014/main" xmlns="" id="{7F36D05A-80E9-C912-631C-020FB6C7B76D}"/>
+                <a16:creationId xmlns:a16="http://schemas.microsoft.com/office/drawing/2014/main" id="{7F36D05A-80E9-C912-631C-020FB6C7B76D}"/>
               </a:ext>
             </a:extLst>
           </p:cNvPr>
@@ -8306,7 +8303,7 @@
           <p:cNvPr id="10" name="Subtitle 9">
             <a:extLst>
               <a:ext uri="{FF2B5EF4-FFF2-40B4-BE49-F238E27FC236}">
-                <a16:creationId xmlns:a16="http://schemas.microsoft.com/office/drawing/2014/main" xmlns="" id="{431E9181-3767-0683-848A-A04AD81103B4}"/>
+                <a16:creationId xmlns:a16="http://schemas.microsoft.com/office/drawing/2014/main" id="{431E9181-3767-0683-848A-A04AD81103B4}"/>
               </a:ext>
             </a:extLst>
           </p:cNvPr>
@@ -8353,7 +8350,7 @@
           <p:cNvPr id="8" name="Date Placeholder 3">
             <a:extLst>
               <a:ext uri="{FF2B5EF4-FFF2-40B4-BE49-F238E27FC236}">
-                <a16:creationId xmlns:a16="http://schemas.microsoft.com/office/drawing/2014/main" xmlns="" id="{D5F2E121-23DB-EE92-5A6F-9C14E579B4B5}"/>
+                <a16:creationId xmlns:a16="http://schemas.microsoft.com/office/drawing/2014/main" id="{D5F2E121-23DB-EE92-5A6F-9C14E579B4B5}"/>
               </a:ext>
             </a:extLst>
           </p:cNvPr>
@@ -8391,7 +8388,7 @@
           <p:cNvPr id="5" name="Footer Placeholder 4">
             <a:extLst>
               <a:ext uri="{FF2B5EF4-FFF2-40B4-BE49-F238E27FC236}">
-                <a16:creationId xmlns:a16="http://schemas.microsoft.com/office/drawing/2014/main" xmlns="" id="{5991E89D-E6E4-4258-C5B2-951DE629946F}"/>
+                <a16:creationId xmlns:a16="http://schemas.microsoft.com/office/drawing/2014/main" id="{5991E89D-E6E4-4258-C5B2-951DE629946F}"/>
               </a:ext>
             </a:extLst>
           </p:cNvPr>
@@ -8424,7 +8421,7 @@
           <p:cNvPr id="4" name="Slide Number Placeholder 5">
             <a:extLst>
               <a:ext uri="{FF2B5EF4-FFF2-40B4-BE49-F238E27FC236}">
-                <a16:creationId xmlns:a16="http://schemas.microsoft.com/office/drawing/2014/main" xmlns="" id="{63B216FA-3264-2E8A-CB95-2A77936FB01F}"/>
+                <a16:creationId xmlns:a16="http://schemas.microsoft.com/office/drawing/2014/main" id="{63B216FA-3264-2E8A-CB95-2A77936FB01F}"/>
               </a:ext>
             </a:extLst>
           </p:cNvPr>
@@ -8458,10 +8455,10 @@
           <p:cNvPr id="7" name="Oval 6">
             <a:extLst>
               <a:ext uri="{FF2B5EF4-FFF2-40B4-BE49-F238E27FC236}">
-                <a16:creationId xmlns:a16="http://schemas.microsoft.com/office/drawing/2014/main" xmlns="" id="{757C57ED-577F-5153-1162-EAF7FD333421}"/>
+                <a16:creationId xmlns:a16="http://schemas.microsoft.com/office/drawing/2014/main" id="{757C57ED-577F-5153-1162-EAF7FD333421}"/>
               </a:ext>
               <a:ext uri="{C183D7F6-B498-43B3-948B-1728B52AA6E4}">
-                <adec:decorative xmlns:adec="http://schemas.microsoft.com/office/drawing/2017/decorative" xmlns="" val="1"/>
+                <adec:decorative xmlns:adec="http://schemas.microsoft.com/office/drawing/2017/decorative" val="1"/>
               </a:ext>
             </a:extLst>
           </p:cNvPr>
@@ -8513,10 +8510,10 @@
           <p:cNvPr id="2" name="Freeform: Shape 1">
             <a:extLst>
               <a:ext uri="{FF2B5EF4-FFF2-40B4-BE49-F238E27FC236}">
-                <a16:creationId xmlns:a16="http://schemas.microsoft.com/office/drawing/2014/main" xmlns="" id="{5ABEA6E9-B107-316F-C7B8-6EAC137922A4}"/>
+                <a16:creationId xmlns:a16="http://schemas.microsoft.com/office/drawing/2014/main" id="{5ABEA6E9-B107-316F-C7B8-6EAC137922A4}"/>
               </a:ext>
               <a:ext uri="{C183D7F6-B498-43B3-948B-1728B52AA6E4}">
-                <adec:decorative xmlns:adec="http://schemas.microsoft.com/office/drawing/2017/decorative" xmlns="" val="1"/>
+                <adec:decorative xmlns:adec="http://schemas.microsoft.com/office/drawing/2017/decorative" val="1"/>
               </a:ext>
             </a:extLst>
           </p:cNvPr>
@@ -8643,10 +8640,10 @@
           <p:cNvPr id="10" name="Oval 9">
             <a:extLst>
               <a:ext uri="{FF2B5EF4-FFF2-40B4-BE49-F238E27FC236}">
-                <a16:creationId xmlns:a16="http://schemas.microsoft.com/office/drawing/2014/main" xmlns="" id="{1E718A0D-D1A5-F3AB-2E4B-7E5B6D164A13}"/>
+                <a16:creationId xmlns:a16="http://schemas.microsoft.com/office/drawing/2014/main" id="{1E718A0D-D1A5-F3AB-2E4B-7E5B6D164A13}"/>
               </a:ext>
               <a:ext uri="{C183D7F6-B498-43B3-948B-1728B52AA6E4}">
-                <adec:decorative xmlns:adec="http://schemas.microsoft.com/office/drawing/2017/decorative" xmlns="" val="1"/>
+                <adec:decorative xmlns:adec="http://schemas.microsoft.com/office/drawing/2017/decorative" val="1"/>
               </a:ext>
             </a:extLst>
           </p:cNvPr>
@@ -8698,7 +8695,7 @@
           <p:cNvPr id="5" name="Title 4">
             <a:extLst>
               <a:ext uri="{FF2B5EF4-FFF2-40B4-BE49-F238E27FC236}">
-                <a16:creationId xmlns:a16="http://schemas.microsoft.com/office/drawing/2014/main" xmlns="" id="{7064545F-B4D6-7EA6-DF60-737E0CDF30CC}"/>
+                <a16:creationId xmlns:a16="http://schemas.microsoft.com/office/drawing/2014/main" id="{7064545F-B4D6-7EA6-DF60-737E0CDF30CC}"/>
               </a:ext>
             </a:extLst>
           </p:cNvPr>
@@ -8737,7 +8734,7 @@
           <p:cNvPr id="6" name="Picture Placeholder 5" descr="A man in a suit is looking at a smartphone.">
             <a:extLst>
               <a:ext uri="{FF2B5EF4-FFF2-40B4-BE49-F238E27FC236}">
-                <a16:creationId xmlns:a16="http://schemas.microsoft.com/office/drawing/2014/main" xmlns="" id="{045934CC-3871-932C-71A1-C590767CEC14}"/>
+                <a16:creationId xmlns:a16="http://schemas.microsoft.com/office/drawing/2014/main" id="{045934CC-3871-932C-71A1-C590767CEC14}"/>
               </a:ext>
             </a:extLst>
           </p:cNvPr>
@@ -8840,7 +8837,7 @@
           <p:cNvPr id="4" name="Date Placeholder 3">
             <a:extLst>
               <a:ext uri="{FF2B5EF4-FFF2-40B4-BE49-F238E27FC236}">
-                <a16:creationId xmlns:a16="http://schemas.microsoft.com/office/drawing/2014/main" xmlns="" id="{A01502E5-2DFC-DF77-C335-F8BB163D1B02}"/>
+                <a16:creationId xmlns:a16="http://schemas.microsoft.com/office/drawing/2014/main" id="{A01502E5-2DFC-DF77-C335-F8BB163D1B02}"/>
               </a:ext>
             </a:extLst>
           </p:cNvPr>
@@ -8887,7 +8884,7 @@
           <p:cNvPr id="3" name="Footer Placeholder 4">
             <a:extLst>
               <a:ext uri="{FF2B5EF4-FFF2-40B4-BE49-F238E27FC236}">
-                <a16:creationId xmlns:a16="http://schemas.microsoft.com/office/drawing/2014/main" xmlns="" id="{84F7829B-847B-82B9-DC04-43F2A9DA358B}"/>
+                <a16:creationId xmlns:a16="http://schemas.microsoft.com/office/drawing/2014/main" id="{84F7829B-847B-82B9-DC04-43F2A9DA358B}"/>
               </a:ext>
             </a:extLst>
           </p:cNvPr>
@@ -8920,7 +8917,7 @@
           <p:cNvPr id="2" name="Slide Number Placeholder 5">
             <a:extLst>
               <a:ext uri="{FF2B5EF4-FFF2-40B4-BE49-F238E27FC236}">
-                <a16:creationId xmlns:a16="http://schemas.microsoft.com/office/drawing/2014/main" xmlns="" id="{5C44EE9F-3C07-B885-75F7-2EF19AE632B8}"/>
+                <a16:creationId xmlns:a16="http://schemas.microsoft.com/office/drawing/2014/main" id="{5C44EE9F-3C07-B885-75F7-2EF19AE632B8}"/>
               </a:ext>
             </a:extLst>
           </p:cNvPr>
@@ -8954,10 +8951,10 @@
           <p:cNvPr id="7" name="Freeform: Shape 4">
             <a:extLst>
               <a:ext uri="{FF2B5EF4-FFF2-40B4-BE49-F238E27FC236}">
-                <a16:creationId xmlns:a16="http://schemas.microsoft.com/office/drawing/2014/main" xmlns="" id="{8B7B7E86-F28E-485C-35D7-E051E0B872B2}"/>
+                <a16:creationId xmlns:a16="http://schemas.microsoft.com/office/drawing/2014/main" id="{8B7B7E86-F28E-485C-35D7-E051E0B872B2}"/>
               </a:ext>
               <a:ext uri="{C183D7F6-B498-43B3-948B-1728B52AA6E4}">
-                <adec:decorative xmlns:adec="http://schemas.microsoft.com/office/drawing/2017/decorative" xmlns="" val="1"/>
+                <adec:decorative xmlns:adec="http://schemas.microsoft.com/office/drawing/2017/decorative" val="1"/>
               </a:ext>
             </a:extLst>
           </p:cNvPr>
@@ -9131,7 +9128,7 @@
           <a:lstStyle/>
           <a:p>
             <a:r>
-              <a:rPr lang="en-US" smtClean="0"/>
+              <a:rPr lang="en-US"/>
               <a:t>Click to edit Master title style</a:t>
             </a:r>
             <a:endParaRPr lang="en-US" dirty="0"/>
@@ -9160,35 +9157,35 @@
           <a:p>
             <a:pPr lvl="0"/>
             <a:r>
-              <a:rPr lang="en-US" smtClean="0"/>
+              <a:rPr lang="en-US"/>
               <a:t>Edit Master text styles</a:t>
             </a:r>
           </a:p>
           <a:p>
             <a:pPr lvl="1"/>
             <a:r>
-              <a:rPr lang="en-US" smtClean="0"/>
+              <a:rPr lang="en-US"/>
               <a:t>Second level</a:t>
             </a:r>
           </a:p>
           <a:p>
             <a:pPr lvl="2"/>
             <a:r>
-              <a:rPr lang="en-US" smtClean="0"/>
+              <a:rPr lang="en-US"/>
               <a:t>Third level</a:t>
             </a:r>
           </a:p>
           <a:p>
             <a:pPr lvl="3"/>
             <a:r>
-              <a:rPr lang="en-US" smtClean="0"/>
+              <a:rPr lang="en-US"/>
               <a:t>Fourth level</a:t>
             </a:r>
           </a:p>
           <a:p>
             <a:pPr lvl="4"/>
             <a:r>
-              <a:rPr lang="en-US" smtClean="0"/>
+              <a:rPr lang="en-US"/>
               <a:t>Fifth level</a:t>
             </a:r>
             <a:endParaRPr lang="en-US" dirty="0"/>
@@ -9235,10 +9232,9 @@
           <a:lstStyle/>
           <a:p>
             <a:r>
-              <a:rPr lang="en-US" smtClean="0"/>
+              <a:rPr lang="en-US"/>
               <a:t>Sample Footer Text</a:t>
             </a:r>
-            <a:endParaRPr lang="en-US"/>
           </a:p>
         </p:txBody>
       </p:sp>
@@ -9307,10 +9303,10 @@
           <p:cNvPr id="16" name="Rectangle 10">
             <a:extLst>
               <a:ext uri="{FF2B5EF4-FFF2-40B4-BE49-F238E27FC236}">
-                <a16:creationId xmlns:a16="http://schemas.microsoft.com/office/drawing/2014/main" xmlns="" id="{DEDFF660-44B9-7885-5DCC-4C9555F83228}"/>
+                <a16:creationId xmlns:a16="http://schemas.microsoft.com/office/drawing/2014/main" id="{DEDFF660-44B9-7885-5DCC-4C9555F83228}"/>
               </a:ext>
               <a:ext uri="{C183D7F6-B498-43B3-948B-1728B52AA6E4}">
-                <adec:decorative xmlns:adec="http://schemas.microsoft.com/office/drawing/2017/decorative" xmlns="" val="1"/>
+                <adec:decorative xmlns:adec="http://schemas.microsoft.com/office/drawing/2017/decorative" val="1"/>
               </a:ext>
             </a:extLst>
           </p:cNvPr>
@@ -9362,7 +9358,7 @@
           <p:cNvPr id="2" name="Title 1">
             <a:extLst>
               <a:ext uri="{FF2B5EF4-FFF2-40B4-BE49-F238E27FC236}">
-                <a16:creationId xmlns:a16="http://schemas.microsoft.com/office/drawing/2014/main" xmlns="" id="{E4336E9A-8E96-CD8C-7598-F87632CD81CF}"/>
+                <a16:creationId xmlns:a16="http://schemas.microsoft.com/office/drawing/2014/main" id="{E4336E9A-8E96-CD8C-7598-F87632CD81CF}"/>
               </a:ext>
             </a:extLst>
           </p:cNvPr>
@@ -9401,7 +9397,7 @@
           <p:cNvPr id="3" name="Subtitle 2">
             <a:extLst>
               <a:ext uri="{FF2B5EF4-FFF2-40B4-BE49-F238E27FC236}">
-                <a16:creationId xmlns:a16="http://schemas.microsoft.com/office/drawing/2014/main" xmlns="" id="{2BDC76B8-60F6-62D3-9F73-E81662203017}"/>
+                <a16:creationId xmlns:a16="http://schemas.microsoft.com/office/drawing/2014/main" id="{2BDC76B8-60F6-62D3-9F73-E81662203017}"/>
               </a:ext>
             </a:extLst>
           </p:cNvPr>
@@ -9473,7 +9469,7 @@
           <p:cNvPr id="8" name="Date Placeholder 3">
             <a:extLst>
               <a:ext uri="{FF2B5EF4-FFF2-40B4-BE49-F238E27FC236}">
-                <a16:creationId xmlns:a16="http://schemas.microsoft.com/office/drawing/2014/main" xmlns="" id="{B7BA9381-262A-B17F-46F5-9F3C97BC3EE4}"/>
+                <a16:creationId xmlns:a16="http://schemas.microsoft.com/office/drawing/2014/main" id="{B7BA9381-262A-B17F-46F5-9F3C97BC3EE4}"/>
               </a:ext>
             </a:extLst>
           </p:cNvPr>
@@ -9511,7 +9507,7 @@
           <p:cNvPr id="7" name="Footer Placeholder 4">
             <a:extLst>
               <a:ext uri="{FF2B5EF4-FFF2-40B4-BE49-F238E27FC236}">
-                <a16:creationId xmlns:a16="http://schemas.microsoft.com/office/drawing/2014/main" xmlns="" id="{5ABCDF71-65BF-6C49-105D-D348EF41CD6F}"/>
+                <a16:creationId xmlns:a16="http://schemas.microsoft.com/office/drawing/2014/main" id="{5ABCDF71-65BF-6C49-105D-D348EF41CD6F}"/>
               </a:ext>
             </a:extLst>
           </p:cNvPr>
@@ -9544,7 +9540,7 @@
           <p:cNvPr id="6" name="Slide Number Placeholder 5">
             <a:extLst>
               <a:ext uri="{FF2B5EF4-FFF2-40B4-BE49-F238E27FC236}">
-                <a16:creationId xmlns:a16="http://schemas.microsoft.com/office/drawing/2014/main" xmlns="" id="{BC8F2AA5-D3F6-DAFA-E665-DEFCE26A80B2}"/>
+                <a16:creationId xmlns:a16="http://schemas.microsoft.com/office/drawing/2014/main" id="{BC8F2AA5-D3F6-DAFA-E665-DEFCE26A80B2}"/>
               </a:ext>
             </a:extLst>
           </p:cNvPr>
@@ -9578,10 +9574,10 @@
           <p:cNvPr id="12" name="Freeform: Shape 3">
             <a:extLst>
               <a:ext uri="{FF2B5EF4-FFF2-40B4-BE49-F238E27FC236}">
-                <a16:creationId xmlns:a16="http://schemas.microsoft.com/office/drawing/2014/main" xmlns="" id="{FA1FE77D-9B4D-B4FC-88E1-9ED84E9823FD}"/>
+                <a16:creationId xmlns:a16="http://schemas.microsoft.com/office/drawing/2014/main" id="{FA1FE77D-9B4D-B4FC-88E1-9ED84E9823FD}"/>
               </a:ext>
               <a:ext uri="{C183D7F6-B498-43B3-948B-1728B52AA6E4}">
-                <adec:decorative xmlns:adec="http://schemas.microsoft.com/office/drawing/2017/decorative" xmlns="" val="1"/>
+                <adec:decorative xmlns:adec="http://schemas.microsoft.com/office/drawing/2017/decorative" val="1"/>
               </a:ext>
             </a:extLst>
           </p:cNvPr>
@@ -9670,10 +9666,10 @@
           <p:cNvPr id="14" name="Oval 13">
             <a:extLst>
               <a:ext uri="{FF2B5EF4-FFF2-40B4-BE49-F238E27FC236}">
-                <a16:creationId xmlns:a16="http://schemas.microsoft.com/office/drawing/2014/main" xmlns="" id="{E54C3941-2FC1-3C96-F1CD-DAD18E8BF9D1}"/>
+                <a16:creationId xmlns:a16="http://schemas.microsoft.com/office/drawing/2014/main" id="{E54C3941-2FC1-3C96-F1CD-DAD18E8BF9D1}"/>
               </a:ext>
               <a:ext uri="{C183D7F6-B498-43B3-948B-1728B52AA6E4}">
-                <adec:decorative xmlns:adec="http://schemas.microsoft.com/office/drawing/2017/decorative" xmlns="" val="1"/>
+                <adec:decorative xmlns:adec="http://schemas.microsoft.com/office/drawing/2017/decorative" val="1"/>
               </a:ext>
             </a:extLst>
           </p:cNvPr>
@@ -9725,10 +9721,10 @@
           <p:cNvPr id="13" name="Rectangle 10">
             <a:extLst>
               <a:ext uri="{FF2B5EF4-FFF2-40B4-BE49-F238E27FC236}">
-                <a16:creationId xmlns:a16="http://schemas.microsoft.com/office/drawing/2014/main" xmlns="" id="{926EEB0A-F27C-6546-05A8-C0556777DF1E}"/>
+                <a16:creationId xmlns:a16="http://schemas.microsoft.com/office/drawing/2014/main" id="{926EEB0A-F27C-6546-05A8-C0556777DF1E}"/>
               </a:ext>
               <a:ext uri="{C183D7F6-B498-43B3-948B-1728B52AA6E4}">
-                <adec:decorative xmlns:adec="http://schemas.microsoft.com/office/drawing/2017/decorative" xmlns="" val="1"/>
+                <adec:decorative xmlns:adec="http://schemas.microsoft.com/office/drawing/2017/decorative" val="1"/>
               </a:ext>
             </a:extLst>
           </p:cNvPr>
@@ -9780,7 +9776,7 @@
           <p:cNvPr id="11" name="Text Placeholder 10">
             <a:extLst>
               <a:ext uri="{FF2B5EF4-FFF2-40B4-BE49-F238E27FC236}">
-                <a16:creationId xmlns:a16="http://schemas.microsoft.com/office/drawing/2014/main" xmlns="" id="{DC80570A-A447-B5FC-F358-DE1603621B7F}"/>
+                <a16:creationId xmlns:a16="http://schemas.microsoft.com/office/drawing/2014/main" id="{DC80570A-A447-B5FC-F358-DE1603621B7F}"/>
               </a:ext>
             </a:extLst>
           </p:cNvPr>
@@ -9826,7 +9822,7 @@
   <p:clrMapOvr>
     <a:masterClrMapping/>
   </p:clrMapOvr>
-  <p:extLst mod="1">
+  <p:extLst>
     <p:ext uri="{DCECCB84-F9BA-43D5-87BE-67443E8EF086}">
       <p15:sldGuideLst xmlns:p15="http://schemas.microsoft.com/office/powerpoint/2012/main">
         <p15:guide id="5" orient="horz" pos="2160">
@@ -9867,10 +9863,10 @@
           <p:cNvPr id="14" name="Rectangle 10">
             <a:extLst>
               <a:ext uri="{FF2B5EF4-FFF2-40B4-BE49-F238E27FC236}">
-                <a16:creationId xmlns:a16="http://schemas.microsoft.com/office/drawing/2014/main" xmlns="" id="{EBD2A05F-7D97-AC92-8751-B2038D22C7B7}"/>
+                <a16:creationId xmlns:a16="http://schemas.microsoft.com/office/drawing/2014/main" id="{EBD2A05F-7D97-AC92-8751-B2038D22C7B7}"/>
               </a:ext>
               <a:ext uri="{C183D7F6-B498-43B3-948B-1728B52AA6E4}">
-                <adec:decorative xmlns:adec="http://schemas.microsoft.com/office/drawing/2017/decorative" xmlns="" val="1"/>
+                <adec:decorative xmlns:adec="http://schemas.microsoft.com/office/drawing/2017/decorative" val="1"/>
               </a:ext>
             </a:extLst>
           </p:cNvPr>
@@ -9922,7 +9918,7 @@
           <p:cNvPr id="2" name="Title 1">
             <a:extLst>
               <a:ext uri="{FF2B5EF4-FFF2-40B4-BE49-F238E27FC236}">
-                <a16:creationId xmlns:a16="http://schemas.microsoft.com/office/drawing/2014/main" xmlns="" id="{E4336E9A-8E96-CD8C-7598-F87632CD81CF}"/>
+                <a16:creationId xmlns:a16="http://schemas.microsoft.com/office/drawing/2014/main" id="{E4336E9A-8E96-CD8C-7598-F87632CD81CF}"/>
               </a:ext>
             </a:extLst>
           </p:cNvPr>
@@ -9961,7 +9957,7 @@
           <p:cNvPr id="3" name="Subtitle 2">
             <a:extLst>
               <a:ext uri="{FF2B5EF4-FFF2-40B4-BE49-F238E27FC236}">
-                <a16:creationId xmlns:a16="http://schemas.microsoft.com/office/drawing/2014/main" xmlns="" id="{2BDC76B8-60F6-62D3-9F73-E81662203017}"/>
+                <a16:creationId xmlns:a16="http://schemas.microsoft.com/office/drawing/2014/main" id="{2BDC76B8-60F6-62D3-9F73-E81662203017}"/>
               </a:ext>
             </a:extLst>
           </p:cNvPr>
@@ -10033,7 +10029,7 @@
           <p:cNvPr id="9" name="Date Placeholder 3">
             <a:extLst>
               <a:ext uri="{FF2B5EF4-FFF2-40B4-BE49-F238E27FC236}">
-                <a16:creationId xmlns:a16="http://schemas.microsoft.com/office/drawing/2014/main" xmlns="" id="{A3A9F20F-0C3A-1397-9D15-E8FAB1915A63}"/>
+                <a16:creationId xmlns:a16="http://schemas.microsoft.com/office/drawing/2014/main" id="{A3A9F20F-0C3A-1397-9D15-E8FAB1915A63}"/>
               </a:ext>
             </a:extLst>
           </p:cNvPr>
@@ -10071,7 +10067,7 @@
           <p:cNvPr id="8" name="Footer Placeholder 4">
             <a:extLst>
               <a:ext uri="{FF2B5EF4-FFF2-40B4-BE49-F238E27FC236}">
-                <a16:creationId xmlns:a16="http://schemas.microsoft.com/office/drawing/2014/main" xmlns="" id="{D1D99E05-D2CE-BA6C-1B55-023B81570C95}"/>
+                <a16:creationId xmlns:a16="http://schemas.microsoft.com/office/drawing/2014/main" id="{D1D99E05-D2CE-BA6C-1B55-023B81570C95}"/>
               </a:ext>
             </a:extLst>
           </p:cNvPr>
@@ -10104,7 +10100,7 @@
           <p:cNvPr id="7" name="Slide Number Placeholder 5">
             <a:extLst>
               <a:ext uri="{FF2B5EF4-FFF2-40B4-BE49-F238E27FC236}">
-                <a16:creationId xmlns:a16="http://schemas.microsoft.com/office/drawing/2014/main" xmlns="" id="{B17487FF-71BE-78AA-BA49-FBF87B6E3985}"/>
+                <a16:creationId xmlns:a16="http://schemas.microsoft.com/office/drawing/2014/main" id="{B17487FF-71BE-78AA-BA49-FBF87B6E3985}"/>
               </a:ext>
             </a:extLst>
           </p:cNvPr>
@@ -10138,10 +10134,10 @@
           <p:cNvPr id="13" name="Oval 13">
             <a:extLst>
               <a:ext uri="{FF2B5EF4-FFF2-40B4-BE49-F238E27FC236}">
-                <a16:creationId xmlns:a16="http://schemas.microsoft.com/office/drawing/2014/main" xmlns="" id="{D4F49636-34EE-9DB1-7F2D-70300BC4B52B}"/>
+                <a16:creationId xmlns:a16="http://schemas.microsoft.com/office/drawing/2014/main" id="{D4F49636-34EE-9DB1-7F2D-70300BC4B52B}"/>
               </a:ext>
               <a:ext uri="{C183D7F6-B498-43B3-948B-1728B52AA6E4}">
-                <adec:decorative xmlns:adec="http://schemas.microsoft.com/office/drawing/2017/decorative" xmlns="" val="1"/>
+                <adec:decorative xmlns:adec="http://schemas.microsoft.com/office/drawing/2017/decorative" val="1"/>
               </a:ext>
             </a:extLst>
           </p:cNvPr>
@@ -10193,10 +10189,10 @@
           <p:cNvPr id="11" name="Freeform: Shape 3">
             <a:extLst>
               <a:ext uri="{FF2B5EF4-FFF2-40B4-BE49-F238E27FC236}">
-                <a16:creationId xmlns:a16="http://schemas.microsoft.com/office/drawing/2014/main" xmlns="" id="{5EC4A581-A833-A254-3039-BDBCA788BCA6}"/>
+                <a16:creationId xmlns:a16="http://schemas.microsoft.com/office/drawing/2014/main" id="{5EC4A581-A833-A254-3039-BDBCA788BCA6}"/>
               </a:ext>
               <a:ext uri="{C183D7F6-B498-43B3-948B-1728B52AA6E4}">
-                <adec:decorative xmlns:adec="http://schemas.microsoft.com/office/drawing/2017/decorative" xmlns="" val="1"/>
+                <adec:decorative xmlns:adec="http://schemas.microsoft.com/office/drawing/2017/decorative" val="1"/>
               </a:ext>
             </a:extLst>
           </p:cNvPr>
@@ -10285,10 +10281,10 @@
           <p:cNvPr id="12" name="Rectangle 10">
             <a:extLst>
               <a:ext uri="{FF2B5EF4-FFF2-40B4-BE49-F238E27FC236}">
-                <a16:creationId xmlns:a16="http://schemas.microsoft.com/office/drawing/2014/main" xmlns="" id="{9FFED0BB-EF13-651B-6B3F-61EAF5473C2D}"/>
+                <a16:creationId xmlns:a16="http://schemas.microsoft.com/office/drawing/2014/main" id="{9FFED0BB-EF13-651B-6B3F-61EAF5473C2D}"/>
               </a:ext>
               <a:ext uri="{C183D7F6-B498-43B3-948B-1728B52AA6E4}">
-                <adec:decorative xmlns:adec="http://schemas.microsoft.com/office/drawing/2017/decorative" xmlns="" val="1"/>
+                <adec:decorative xmlns:adec="http://schemas.microsoft.com/office/drawing/2017/decorative" val="1"/>
               </a:ext>
             </a:extLst>
           </p:cNvPr>
@@ -10340,7 +10336,7 @@
           <p:cNvPr id="6" name="Text Placeholder 10">
             <a:extLst>
               <a:ext uri="{FF2B5EF4-FFF2-40B4-BE49-F238E27FC236}">
-                <a16:creationId xmlns:a16="http://schemas.microsoft.com/office/drawing/2014/main" xmlns="" id="{04CA4762-63F5-8110-8D25-0FE369BADEA0}"/>
+                <a16:creationId xmlns:a16="http://schemas.microsoft.com/office/drawing/2014/main" id="{04CA4762-63F5-8110-8D25-0FE369BADEA0}"/>
               </a:ext>
             </a:extLst>
           </p:cNvPr>
@@ -10386,7 +10382,7 @@
   <p:clrMapOvr>
     <a:masterClrMapping/>
   </p:clrMapOvr>
-  <p:extLst mod="1">
+  <p:extLst>
     <p:ext uri="{DCECCB84-F9BA-43D5-87BE-67443E8EF086}">
       <p15:sldGuideLst xmlns:p15="http://schemas.microsoft.com/office/powerpoint/2012/main">
         <p15:guide id="5" orient="horz" pos="2160">
@@ -10427,10 +10423,10 @@
           <p:cNvPr id="9" name="Oval 13">
             <a:extLst>
               <a:ext uri="{FF2B5EF4-FFF2-40B4-BE49-F238E27FC236}">
-                <a16:creationId xmlns:a16="http://schemas.microsoft.com/office/drawing/2014/main" xmlns="" id="{9A6F5649-82E9-4EB0-F4A3-CEB7F519803E}"/>
+                <a16:creationId xmlns:a16="http://schemas.microsoft.com/office/drawing/2014/main" id="{9A6F5649-82E9-4EB0-F4A3-CEB7F519803E}"/>
               </a:ext>
               <a:ext uri="{C183D7F6-B498-43B3-948B-1728B52AA6E4}">
-                <adec:decorative xmlns:adec="http://schemas.microsoft.com/office/drawing/2017/decorative" xmlns="" val="1"/>
+                <adec:decorative xmlns:adec="http://schemas.microsoft.com/office/drawing/2017/decorative" val="1"/>
               </a:ext>
             </a:extLst>
           </p:cNvPr>
@@ -10482,10 +10478,10 @@
           <p:cNvPr id="10" name="Rectangle 10">
             <a:extLst>
               <a:ext uri="{FF2B5EF4-FFF2-40B4-BE49-F238E27FC236}">
-                <a16:creationId xmlns:a16="http://schemas.microsoft.com/office/drawing/2014/main" xmlns="" id="{13732C8E-A89F-3C9F-4630-F690E7E98F17}"/>
+                <a16:creationId xmlns:a16="http://schemas.microsoft.com/office/drawing/2014/main" id="{13732C8E-A89F-3C9F-4630-F690E7E98F17}"/>
               </a:ext>
               <a:ext uri="{C183D7F6-B498-43B3-948B-1728B52AA6E4}">
-                <adec:decorative xmlns:adec="http://schemas.microsoft.com/office/drawing/2017/decorative" xmlns="" val="1"/>
+                <adec:decorative xmlns:adec="http://schemas.microsoft.com/office/drawing/2017/decorative" val="1"/>
               </a:ext>
             </a:extLst>
           </p:cNvPr>
@@ -10537,7 +10533,7 @@
           <p:cNvPr id="2" name="Title 1">
             <a:extLst>
               <a:ext uri="{FF2B5EF4-FFF2-40B4-BE49-F238E27FC236}">
-                <a16:creationId xmlns:a16="http://schemas.microsoft.com/office/drawing/2014/main" xmlns="" id="{E4336E9A-8E96-CD8C-7598-F87632CD81CF}"/>
+                <a16:creationId xmlns:a16="http://schemas.microsoft.com/office/drawing/2014/main" id="{E4336E9A-8E96-CD8C-7598-F87632CD81CF}"/>
               </a:ext>
             </a:extLst>
           </p:cNvPr>
@@ -10576,7 +10572,7 @@
           <p:cNvPr id="3" name="Subtitle 2">
             <a:extLst>
               <a:ext uri="{FF2B5EF4-FFF2-40B4-BE49-F238E27FC236}">
-                <a16:creationId xmlns:a16="http://schemas.microsoft.com/office/drawing/2014/main" xmlns="" id="{2BDC76B8-60F6-62D3-9F73-E81662203017}"/>
+                <a16:creationId xmlns:a16="http://schemas.microsoft.com/office/drawing/2014/main" id="{2BDC76B8-60F6-62D3-9F73-E81662203017}"/>
               </a:ext>
             </a:extLst>
           </p:cNvPr>
@@ -10648,7 +10644,7 @@
           <p:cNvPr id="14" name="Slide Number Placeholder 5">
             <a:extLst>
               <a:ext uri="{FF2B5EF4-FFF2-40B4-BE49-F238E27FC236}">
-                <a16:creationId xmlns:a16="http://schemas.microsoft.com/office/drawing/2014/main" xmlns="" id="{C9A64E4D-5F8D-89DE-6750-9DB3E8928892}"/>
+                <a16:creationId xmlns:a16="http://schemas.microsoft.com/office/drawing/2014/main" id="{C9A64E4D-5F8D-89DE-6750-9DB3E8928892}"/>
               </a:ext>
             </a:extLst>
           </p:cNvPr>
@@ -10682,7 +10678,7 @@
           <p:cNvPr id="15" name="Footer Placeholder 4">
             <a:extLst>
               <a:ext uri="{FF2B5EF4-FFF2-40B4-BE49-F238E27FC236}">
-                <a16:creationId xmlns:a16="http://schemas.microsoft.com/office/drawing/2014/main" xmlns="" id="{1AF7A5D5-9D2E-55B0-B6EC-4B52019A09A6}"/>
+                <a16:creationId xmlns:a16="http://schemas.microsoft.com/office/drawing/2014/main" id="{1AF7A5D5-9D2E-55B0-B6EC-4B52019A09A6}"/>
               </a:ext>
             </a:extLst>
           </p:cNvPr>
@@ -10715,7 +10711,7 @@
           <p:cNvPr id="16" name="Date Placeholder 3">
             <a:extLst>
               <a:ext uri="{FF2B5EF4-FFF2-40B4-BE49-F238E27FC236}">
-                <a16:creationId xmlns:a16="http://schemas.microsoft.com/office/drawing/2014/main" xmlns="" id="{0C486168-ACCE-2B30-5AA9-299E5A437B44}"/>
+                <a16:creationId xmlns:a16="http://schemas.microsoft.com/office/drawing/2014/main" id="{0C486168-ACCE-2B30-5AA9-299E5A437B44}"/>
               </a:ext>
             </a:extLst>
           </p:cNvPr>
@@ -10753,10 +10749,10 @@
           <p:cNvPr id="7" name="Freeform: Shape 3">
             <a:extLst>
               <a:ext uri="{FF2B5EF4-FFF2-40B4-BE49-F238E27FC236}">
-                <a16:creationId xmlns:a16="http://schemas.microsoft.com/office/drawing/2014/main" xmlns="" id="{E4CDDEFC-E3FC-1135-8E92-3A076889EE4D}"/>
+                <a16:creationId xmlns:a16="http://schemas.microsoft.com/office/drawing/2014/main" id="{E4CDDEFC-E3FC-1135-8E92-3A076889EE4D}"/>
               </a:ext>
               <a:ext uri="{C183D7F6-B498-43B3-948B-1728B52AA6E4}">
-                <adec:decorative xmlns:adec="http://schemas.microsoft.com/office/drawing/2017/decorative" xmlns="" val="1"/>
+                <adec:decorative xmlns:adec="http://schemas.microsoft.com/office/drawing/2017/decorative" val="1"/>
               </a:ext>
             </a:extLst>
           </p:cNvPr>
@@ -10845,10 +10841,10 @@
           <p:cNvPr id="8" name="Rectangle 10">
             <a:extLst>
               <a:ext uri="{FF2B5EF4-FFF2-40B4-BE49-F238E27FC236}">
-                <a16:creationId xmlns:a16="http://schemas.microsoft.com/office/drawing/2014/main" xmlns="" id="{CB53BEE4-B0F1-21AC-C432-CD02ED97775B}"/>
+                <a16:creationId xmlns:a16="http://schemas.microsoft.com/office/drawing/2014/main" id="{CB53BEE4-B0F1-21AC-C432-CD02ED97775B}"/>
               </a:ext>
               <a:ext uri="{C183D7F6-B498-43B3-948B-1728B52AA6E4}">
-                <adec:decorative xmlns:adec="http://schemas.microsoft.com/office/drawing/2017/decorative" xmlns="" val="1"/>
+                <adec:decorative xmlns:adec="http://schemas.microsoft.com/office/drawing/2017/decorative" val="1"/>
               </a:ext>
             </a:extLst>
           </p:cNvPr>
@@ -10900,7 +10896,7 @@
           <p:cNvPr id="6" name="Text Placeholder 10">
             <a:extLst>
               <a:ext uri="{FF2B5EF4-FFF2-40B4-BE49-F238E27FC236}">
-                <a16:creationId xmlns:a16="http://schemas.microsoft.com/office/drawing/2014/main" xmlns="" id="{7F6DD921-0CB1-DD3B-05FF-590B8632B8B9}"/>
+                <a16:creationId xmlns:a16="http://schemas.microsoft.com/office/drawing/2014/main" id="{7F6DD921-0CB1-DD3B-05FF-590B8632B8B9}"/>
               </a:ext>
             </a:extLst>
           </p:cNvPr>
@@ -10946,7 +10942,7 @@
   <p:clrMapOvr>
     <a:masterClrMapping/>
   </p:clrMapOvr>
-  <p:extLst mod="1">
+  <p:extLst>
     <p:ext uri="{DCECCB84-F9BA-43D5-87BE-67443E8EF086}">
       <p15:sldGuideLst xmlns:p15="http://schemas.microsoft.com/office/powerpoint/2012/main">
         <p15:guide id="5" orient="horz" pos="2160">
@@ -10987,7 +10983,7 @@
           <p:cNvPr id="22" name="Title 2">
             <a:extLst>
               <a:ext uri="{FF2B5EF4-FFF2-40B4-BE49-F238E27FC236}">
-                <a16:creationId xmlns:a16="http://schemas.microsoft.com/office/drawing/2014/main" xmlns="" id="{8E620CC0-DC30-91C7-8486-4145213E00C0}"/>
+                <a16:creationId xmlns:a16="http://schemas.microsoft.com/office/drawing/2014/main" id="{8E620CC0-DC30-91C7-8486-4145213E00C0}"/>
               </a:ext>
             </a:extLst>
           </p:cNvPr>
@@ -11030,7 +11026,7 @@
           <p:cNvPr id="17" name="Subtitle 8">
             <a:extLst>
               <a:ext uri="{FF2B5EF4-FFF2-40B4-BE49-F238E27FC236}">
-                <a16:creationId xmlns:a16="http://schemas.microsoft.com/office/drawing/2014/main" xmlns="" id="{DD16B2CF-CBE4-0CAA-4D1A-87BA8323347E}"/>
+                <a16:creationId xmlns:a16="http://schemas.microsoft.com/office/drawing/2014/main" id="{DD16B2CF-CBE4-0CAA-4D1A-87BA8323347E}"/>
               </a:ext>
             </a:extLst>
           </p:cNvPr>
@@ -11086,10 +11082,10 @@
           <p:cNvPr id="9" name="Picture Placeholder 20" descr="A hand holding a pen is writing on an open blank notebook.">
             <a:extLst>
               <a:ext uri="{FF2B5EF4-FFF2-40B4-BE49-F238E27FC236}">
-                <a16:creationId xmlns:a16="http://schemas.microsoft.com/office/drawing/2014/main" xmlns="" id="{DEC0C38B-6B43-AD26-4095-760B8B70DC16}"/>
+                <a16:creationId xmlns:a16="http://schemas.microsoft.com/office/drawing/2014/main" id="{DEC0C38B-6B43-AD26-4095-760B8B70DC16}"/>
               </a:ext>
               <a:ext uri="{C183D7F6-B498-43B3-948B-1728B52AA6E4}">
-                <adec:decorative xmlns:adec="http://schemas.microsoft.com/office/drawing/2017/decorative" xmlns="" val="0"/>
+                <adec:decorative xmlns:adec="http://schemas.microsoft.com/office/drawing/2017/decorative" val="0"/>
               </a:ext>
             </a:extLst>
           </p:cNvPr>
@@ -11168,10 +11164,10 @@
           <p:cNvPr id="8" name="Picture Placeholder 24" descr="A modern, multi-story glass office building with a clear blue sky in the background.">
             <a:extLst>
               <a:ext uri="{FF2B5EF4-FFF2-40B4-BE49-F238E27FC236}">
-                <a16:creationId xmlns:a16="http://schemas.microsoft.com/office/drawing/2014/main" xmlns="" id="{1BB82094-7EB6-EC6F-84DC-9D44135FA43B}"/>
+                <a16:creationId xmlns:a16="http://schemas.microsoft.com/office/drawing/2014/main" id="{1BB82094-7EB6-EC6F-84DC-9D44135FA43B}"/>
               </a:ext>
               <a:ext uri="{C183D7F6-B498-43B3-948B-1728B52AA6E4}">
-                <adec:decorative xmlns:adec="http://schemas.microsoft.com/office/drawing/2017/decorative" xmlns="" val="0"/>
+                <adec:decorative xmlns:adec="http://schemas.microsoft.com/office/drawing/2017/decorative" val="0"/>
               </a:ext>
             </a:extLst>
           </p:cNvPr>
@@ -11202,7 +11198,7 @@
           <p:cNvPr id="7" name="Date Placeholder 3">
             <a:extLst>
               <a:ext uri="{FF2B5EF4-FFF2-40B4-BE49-F238E27FC236}">
-                <a16:creationId xmlns:a16="http://schemas.microsoft.com/office/drawing/2014/main" xmlns="" id="{1D6268BB-B547-A20C-3B9E-187F14FE0C14}"/>
+                <a16:creationId xmlns:a16="http://schemas.microsoft.com/office/drawing/2014/main" id="{1D6268BB-B547-A20C-3B9E-187F14FE0C14}"/>
               </a:ext>
             </a:extLst>
           </p:cNvPr>
@@ -11240,7 +11236,7 @@
           <p:cNvPr id="3" name="Footer Placeholder 4">
             <a:extLst>
               <a:ext uri="{FF2B5EF4-FFF2-40B4-BE49-F238E27FC236}">
-                <a16:creationId xmlns:a16="http://schemas.microsoft.com/office/drawing/2014/main" xmlns="" id="{C9EC6F98-8B99-D984-46BE-AB3745B39CF9}"/>
+                <a16:creationId xmlns:a16="http://schemas.microsoft.com/office/drawing/2014/main" id="{C9EC6F98-8B99-D984-46BE-AB3745B39CF9}"/>
               </a:ext>
             </a:extLst>
           </p:cNvPr>
@@ -11273,7 +11269,7 @@
           <p:cNvPr id="2" name="Slide Number Placeholder 5">
             <a:extLst>
               <a:ext uri="{FF2B5EF4-FFF2-40B4-BE49-F238E27FC236}">
-                <a16:creationId xmlns:a16="http://schemas.microsoft.com/office/drawing/2014/main" xmlns="" id="{BC6EC5DF-3303-F1EE-3D99-530E70BC2EE3}"/>
+                <a16:creationId xmlns:a16="http://schemas.microsoft.com/office/drawing/2014/main" id="{BC6EC5DF-3303-F1EE-3D99-530E70BC2EE3}"/>
               </a:ext>
             </a:extLst>
           </p:cNvPr>
@@ -11307,10 +11303,10 @@
           <p:cNvPr id="5" name="Freeform: Shape 3">
             <a:extLst>
               <a:ext uri="{FF2B5EF4-FFF2-40B4-BE49-F238E27FC236}">
-                <a16:creationId xmlns:a16="http://schemas.microsoft.com/office/drawing/2014/main" xmlns="" id="{AAFE7D64-F404-CB16-B1A6-2632D9817AB1}"/>
+                <a16:creationId xmlns:a16="http://schemas.microsoft.com/office/drawing/2014/main" id="{AAFE7D64-F404-CB16-B1A6-2632D9817AB1}"/>
               </a:ext>
               <a:ext uri="{C183D7F6-B498-43B3-948B-1728B52AA6E4}">
-                <adec:decorative xmlns:adec="http://schemas.microsoft.com/office/drawing/2017/decorative" xmlns="" val="1"/>
+                <adec:decorative xmlns:adec="http://schemas.microsoft.com/office/drawing/2017/decorative" val="1"/>
               </a:ext>
             </a:extLst>
           </p:cNvPr>
@@ -11399,10 +11395,10 @@
           <p:cNvPr id="10" name="Oval 13">
             <a:extLst>
               <a:ext uri="{FF2B5EF4-FFF2-40B4-BE49-F238E27FC236}">
-                <a16:creationId xmlns:a16="http://schemas.microsoft.com/office/drawing/2014/main" xmlns="" id="{00AEDDFB-A768-7BB7-5203-76DF807E10F5}"/>
+                <a16:creationId xmlns:a16="http://schemas.microsoft.com/office/drawing/2014/main" id="{00AEDDFB-A768-7BB7-5203-76DF807E10F5}"/>
               </a:ext>
               <a:ext uri="{C183D7F6-B498-43B3-948B-1728B52AA6E4}">
-                <adec:decorative xmlns:adec="http://schemas.microsoft.com/office/drawing/2017/decorative" xmlns="" val="1"/>
+                <adec:decorative xmlns:adec="http://schemas.microsoft.com/office/drawing/2017/decorative" val="1"/>
               </a:ext>
             </a:extLst>
           </p:cNvPr>
@@ -11454,10 +11450,10 @@
           <p:cNvPr id="4" name="Freeform: Shape 3">
             <a:extLst>
               <a:ext uri="{FF2B5EF4-FFF2-40B4-BE49-F238E27FC236}">
-                <a16:creationId xmlns:a16="http://schemas.microsoft.com/office/drawing/2014/main" xmlns="" id="{2B22C943-07E1-D41A-22B9-A7C40FF5C3F7}"/>
+                <a16:creationId xmlns:a16="http://schemas.microsoft.com/office/drawing/2014/main" id="{2B22C943-07E1-D41A-22B9-A7C40FF5C3F7}"/>
               </a:ext>
               <a:ext uri="{C183D7F6-B498-43B3-948B-1728B52AA6E4}">
-                <adec:decorative xmlns:adec="http://schemas.microsoft.com/office/drawing/2017/decorative" xmlns="" val="1"/>
+                <adec:decorative xmlns:adec="http://schemas.microsoft.com/office/drawing/2017/decorative" val="1"/>
               </a:ext>
             </a:extLst>
           </p:cNvPr>
@@ -11546,7 +11542,7 @@
           <p:cNvPr id="11" name="Text Placeholder 10">
             <a:extLst>
               <a:ext uri="{FF2B5EF4-FFF2-40B4-BE49-F238E27FC236}">
-                <a16:creationId xmlns:a16="http://schemas.microsoft.com/office/drawing/2014/main" xmlns="" id="{A3AD1606-3704-1AD8-6FD1-CC0ED99642EC}"/>
+                <a16:creationId xmlns:a16="http://schemas.microsoft.com/office/drawing/2014/main" id="{A3AD1606-3704-1AD8-6FD1-CC0ED99642EC}"/>
               </a:ext>
             </a:extLst>
           </p:cNvPr>
@@ -11592,7 +11588,7 @@
   <p:clrMapOvr>
     <a:masterClrMapping/>
   </p:clrMapOvr>
-  <p:extLst mod="1">
+  <p:extLst>
     <p:ext uri="{DCECCB84-F9BA-43D5-87BE-67443E8EF086}">
       <p15:sldGuideLst xmlns:p15="http://schemas.microsoft.com/office/powerpoint/2012/main">
         <p15:guide id="5" orient="horz" pos="2160">
@@ -11633,10 +11629,10 @@
           <p:cNvPr id="11" name="Freeform: Shape 3">
             <a:extLst>
               <a:ext uri="{FF2B5EF4-FFF2-40B4-BE49-F238E27FC236}">
-                <a16:creationId xmlns:a16="http://schemas.microsoft.com/office/drawing/2014/main" xmlns="" id="{57C928DF-3B7B-6F49-CF7D-FDEF5C3A95BB}"/>
+                <a16:creationId xmlns:a16="http://schemas.microsoft.com/office/drawing/2014/main" id="{57C928DF-3B7B-6F49-CF7D-FDEF5C3A95BB}"/>
               </a:ext>
               <a:ext uri="{C183D7F6-B498-43B3-948B-1728B52AA6E4}">
-                <adec:decorative xmlns:adec="http://schemas.microsoft.com/office/drawing/2017/decorative" xmlns="" val="1"/>
+                <adec:decorative xmlns:adec="http://schemas.microsoft.com/office/drawing/2017/decorative" val="1"/>
               </a:ext>
             </a:extLst>
           </p:cNvPr>
@@ -11725,7 +11721,7 @@
           <p:cNvPr id="13" name="Title 2">
             <a:extLst>
               <a:ext uri="{FF2B5EF4-FFF2-40B4-BE49-F238E27FC236}">
-                <a16:creationId xmlns:a16="http://schemas.microsoft.com/office/drawing/2014/main" xmlns="" id="{86E48CD5-347B-4324-FD33-02D324DDB571}"/>
+                <a16:creationId xmlns:a16="http://schemas.microsoft.com/office/drawing/2014/main" id="{86E48CD5-347B-4324-FD33-02D324DDB571}"/>
               </a:ext>
             </a:extLst>
           </p:cNvPr>
@@ -11768,7 +11764,7 @@
           <p:cNvPr id="14" name="Subtitle 8">
             <a:extLst>
               <a:ext uri="{FF2B5EF4-FFF2-40B4-BE49-F238E27FC236}">
-                <a16:creationId xmlns:a16="http://schemas.microsoft.com/office/drawing/2014/main" xmlns="" id="{5153DC17-0242-8E4C-6962-ED318C76B7A4}"/>
+                <a16:creationId xmlns:a16="http://schemas.microsoft.com/office/drawing/2014/main" id="{5153DC17-0242-8E4C-6962-ED318C76B7A4}"/>
               </a:ext>
             </a:extLst>
           </p:cNvPr>
@@ -11824,7 +11820,7 @@
           <p:cNvPr id="6" name="Text Placeholder 10">
             <a:extLst>
               <a:ext uri="{FF2B5EF4-FFF2-40B4-BE49-F238E27FC236}">
-                <a16:creationId xmlns:a16="http://schemas.microsoft.com/office/drawing/2014/main" xmlns="" id="{9DED0A95-69FB-B981-619F-C8F0BD1FF7D6}"/>
+                <a16:creationId xmlns:a16="http://schemas.microsoft.com/office/drawing/2014/main" id="{9DED0A95-69FB-B981-619F-C8F0BD1FF7D6}"/>
               </a:ext>
             </a:extLst>
           </p:cNvPr>
@@ -11865,10 +11861,10 @@
           <p:cNvPr id="15" name="Picture Placeholder 24" descr="A modern, multi-story glass office building with a clear blue sky in the background.">
             <a:extLst>
               <a:ext uri="{FF2B5EF4-FFF2-40B4-BE49-F238E27FC236}">
-                <a16:creationId xmlns:a16="http://schemas.microsoft.com/office/drawing/2014/main" xmlns="" id="{CEF89FC2-74BC-6AFF-62E2-5E5247C9456F}"/>
+                <a16:creationId xmlns:a16="http://schemas.microsoft.com/office/drawing/2014/main" id="{CEF89FC2-74BC-6AFF-62E2-5E5247C9456F}"/>
               </a:ext>
               <a:ext uri="{C183D7F6-B498-43B3-948B-1728B52AA6E4}">
-                <adec:decorative xmlns:adec="http://schemas.microsoft.com/office/drawing/2017/decorative" xmlns="" val="0"/>
+                <adec:decorative xmlns:adec="http://schemas.microsoft.com/office/drawing/2017/decorative" val="0"/>
               </a:ext>
             </a:extLst>
           </p:cNvPr>
@@ -11899,10 +11895,10 @@
           <p:cNvPr id="20" name="Picture Placeholder 20" descr="A hand holding a pen is writing on an open blank notebook.">
             <a:extLst>
               <a:ext uri="{FF2B5EF4-FFF2-40B4-BE49-F238E27FC236}">
-                <a16:creationId xmlns:a16="http://schemas.microsoft.com/office/drawing/2014/main" xmlns="" id="{DF4643A0-B24C-4527-7AF0-464401E07B68}"/>
+                <a16:creationId xmlns:a16="http://schemas.microsoft.com/office/drawing/2014/main" id="{DF4643A0-B24C-4527-7AF0-464401E07B68}"/>
               </a:ext>
               <a:ext uri="{C183D7F6-B498-43B3-948B-1728B52AA6E4}">
-                <adec:decorative xmlns:adec="http://schemas.microsoft.com/office/drawing/2017/decorative" xmlns="" val="0"/>
+                <adec:decorative xmlns:adec="http://schemas.microsoft.com/office/drawing/2017/decorative" val="0"/>
               </a:ext>
             </a:extLst>
           </p:cNvPr>
@@ -11981,7 +11977,7 @@
           <p:cNvPr id="7" name="Date Placeholder 3">
             <a:extLst>
               <a:ext uri="{FF2B5EF4-FFF2-40B4-BE49-F238E27FC236}">
-                <a16:creationId xmlns:a16="http://schemas.microsoft.com/office/drawing/2014/main" xmlns="" id="{D3B675A4-D9B6-583C-33B5-791287E060B8}"/>
+                <a16:creationId xmlns:a16="http://schemas.microsoft.com/office/drawing/2014/main" id="{D3B675A4-D9B6-583C-33B5-791287E060B8}"/>
               </a:ext>
             </a:extLst>
           </p:cNvPr>
@@ -12019,7 +12015,7 @@
           <p:cNvPr id="3" name="Footer Placeholder 4">
             <a:extLst>
               <a:ext uri="{FF2B5EF4-FFF2-40B4-BE49-F238E27FC236}">
-                <a16:creationId xmlns:a16="http://schemas.microsoft.com/office/drawing/2014/main" xmlns="" id="{3C062E25-7E66-344C-A3E5-A5CE410A7459}"/>
+                <a16:creationId xmlns:a16="http://schemas.microsoft.com/office/drawing/2014/main" id="{3C062E25-7E66-344C-A3E5-A5CE410A7459}"/>
               </a:ext>
             </a:extLst>
           </p:cNvPr>
@@ -12052,7 +12048,7 @@
           <p:cNvPr id="2" name="Slide Number Placeholder 5">
             <a:extLst>
               <a:ext uri="{FF2B5EF4-FFF2-40B4-BE49-F238E27FC236}">
-                <a16:creationId xmlns:a16="http://schemas.microsoft.com/office/drawing/2014/main" xmlns="" id="{40A8CDE8-23F5-5E35-E043-E2792B371987}"/>
+                <a16:creationId xmlns:a16="http://schemas.microsoft.com/office/drawing/2014/main" id="{40A8CDE8-23F5-5E35-E043-E2792B371987}"/>
               </a:ext>
             </a:extLst>
           </p:cNvPr>
@@ -12086,10 +12082,10 @@
           <p:cNvPr id="9" name="Oval 13">
             <a:extLst>
               <a:ext uri="{FF2B5EF4-FFF2-40B4-BE49-F238E27FC236}">
-                <a16:creationId xmlns:a16="http://schemas.microsoft.com/office/drawing/2014/main" xmlns="" id="{13F359CB-6E7F-AB72-12C6-FE1FA423F3CE}"/>
+                <a16:creationId xmlns:a16="http://schemas.microsoft.com/office/drawing/2014/main" id="{13F359CB-6E7F-AB72-12C6-FE1FA423F3CE}"/>
               </a:ext>
               <a:ext uri="{C183D7F6-B498-43B3-948B-1728B52AA6E4}">
-                <adec:decorative xmlns:adec="http://schemas.microsoft.com/office/drawing/2017/decorative" xmlns="" val="1"/>
+                <adec:decorative xmlns:adec="http://schemas.microsoft.com/office/drawing/2017/decorative" val="1"/>
               </a:ext>
             </a:extLst>
           </p:cNvPr>
@@ -12141,10 +12137,10 @@
           <p:cNvPr id="4" name="Freeform: Shape 3">
             <a:extLst>
               <a:ext uri="{FF2B5EF4-FFF2-40B4-BE49-F238E27FC236}">
-                <a16:creationId xmlns:a16="http://schemas.microsoft.com/office/drawing/2014/main" xmlns="" id="{6F10E236-0BF6-76AD-46AB-3DCC71CA33EA}"/>
+                <a16:creationId xmlns:a16="http://schemas.microsoft.com/office/drawing/2014/main" id="{6F10E236-0BF6-76AD-46AB-3DCC71CA33EA}"/>
               </a:ext>
               <a:ext uri="{C183D7F6-B498-43B3-948B-1728B52AA6E4}">
-                <adec:decorative xmlns:adec="http://schemas.microsoft.com/office/drawing/2017/decorative" xmlns="" val="1"/>
+                <adec:decorative xmlns:adec="http://schemas.microsoft.com/office/drawing/2017/decorative" val="1"/>
               </a:ext>
             </a:extLst>
           </p:cNvPr>
@@ -12238,7 +12234,7 @@
   <p:clrMapOvr>
     <a:masterClrMapping/>
   </p:clrMapOvr>
-  <p:extLst mod="1">
+  <p:extLst>
     <p:ext uri="{DCECCB84-F9BA-43D5-87BE-67443E8EF086}">
       <p15:sldGuideLst xmlns:p15="http://schemas.microsoft.com/office/powerpoint/2012/main">
         <p15:guide id="5" orient="horz" pos="2160">
@@ -12279,10 +12275,10 @@
           <p:cNvPr id="5" name="Freeform: Shape 1">
             <a:extLst>
               <a:ext uri="{FF2B5EF4-FFF2-40B4-BE49-F238E27FC236}">
-                <a16:creationId xmlns:a16="http://schemas.microsoft.com/office/drawing/2014/main" xmlns="" id="{C9D17E65-B7F6-BBA0-5C0A-13E21E39A360}"/>
+                <a16:creationId xmlns:a16="http://schemas.microsoft.com/office/drawing/2014/main" id="{C9D17E65-B7F6-BBA0-5C0A-13E21E39A360}"/>
               </a:ext>
               <a:ext uri="{C183D7F6-B498-43B3-948B-1728B52AA6E4}">
-                <adec:decorative xmlns:adec="http://schemas.microsoft.com/office/drawing/2017/decorative" xmlns="" val="1"/>
+                <adec:decorative xmlns:adec="http://schemas.microsoft.com/office/drawing/2017/decorative" val="1"/>
               </a:ext>
             </a:extLst>
           </p:cNvPr>
@@ -12379,10 +12375,10 @@
           <p:cNvPr id="7" name="Rectangle 2">
             <a:extLst>
               <a:ext uri="{FF2B5EF4-FFF2-40B4-BE49-F238E27FC236}">
-                <a16:creationId xmlns:a16="http://schemas.microsoft.com/office/drawing/2014/main" xmlns="" id="{ECA2531A-F5B4-E8B8-D412-65D3B1F33305}"/>
+                <a16:creationId xmlns:a16="http://schemas.microsoft.com/office/drawing/2014/main" id="{ECA2531A-F5B4-E8B8-D412-65D3B1F33305}"/>
               </a:ext>
               <a:ext uri="{C183D7F6-B498-43B3-948B-1728B52AA6E4}">
-                <adec:decorative xmlns:adec="http://schemas.microsoft.com/office/drawing/2017/decorative" xmlns="" val="1"/>
+                <adec:decorative xmlns:adec="http://schemas.microsoft.com/office/drawing/2017/decorative" val="1"/>
               </a:ext>
             </a:extLst>
           </p:cNvPr>
@@ -12434,7 +12430,7 @@
           <p:cNvPr id="3" name="Title 5">
             <a:extLst>
               <a:ext uri="{FF2B5EF4-FFF2-40B4-BE49-F238E27FC236}">
-                <a16:creationId xmlns:a16="http://schemas.microsoft.com/office/drawing/2014/main" xmlns="" id="{CE797FB8-5B85-3C23-4767-E540B7810CAB}"/>
+                <a16:creationId xmlns:a16="http://schemas.microsoft.com/office/drawing/2014/main" id="{CE797FB8-5B85-3C23-4767-E540B7810CAB}"/>
               </a:ext>
             </a:extLst>
           </p:cNvPr>
@@ -12474,7 +12470,7 @@
           <p:cNvPr id="2" name="Subtitle 9">
             <a:extLst>
               <a:ext uri="{FF2B5EF4-FFF2-40B4-BE49-F238E27FC236}">
-                <a16:creationId xmlns:a16="http://schemas.microsoft.com/office/drawing/2014/main" xmlns="" id="{D5D77306-9032-C768-9BC4-5AB9875D5F39}"/>
+                <a16:creationId xmlns:a16="http://schemas.microsoft.com/office/drawing/2014/main" id="{D5D77306-9032-C768-9BC4-5AB9875D5F39}"/>
               </a:ext>
             </a:extLst>
           </p:cNvPr>
@@ -12521,7 +12517,7 @@
           <p:cNvPr id="11" name="Date Placeholder 3">
             <a:extLst>
               <a:ext uri="{FF2B5EF4-FFF2-40B4-BE49-F238E27FC236}">
-                <a16:creationId xmlns:a16="http://schemas.microsoft.com/office/drawing/2014/main" xmlns="" id="{BDE02714-7C27-8D41-51B3-A9C407DB9B4F}"/>
+                <a16:creationId xmlns:a16="http://schemas.microsoft.com/office/drawing/2014/main" id="{BDE02714-7C27-8D41-51B3-A9C407DB9B4F}"/>
               </a:ext>
             </a:extLst>
           </p:cNvPr>
@@ -12559,7 +12555,7 @@
           <p:cNvPr id="10" name="Footer Placeholder 4">
             <a:extLst>
               <a:ext uri="{FF2B5EF4-FFF2-40B4-BE49-F238E27FC236}">
-                <a16:creationId xmlns:a16="http://schemas.microsoft.com/office/drawing/2014/main" xmlns="" id="{CDA94B75-E618-5656-FC34-228692F1BC8F}"/>
+                <a16:creationId xmlns:a16="http://schemas.microsoft.com/office/drawing/2014/main" id="{CDA94B75-E618-5656-FC34-228692F1BC8F}"/>
               </a:ext>
             </a:extLst>
           </p:cNvPr>
@@ -12592,7 +12588,7 @@
           <p:cNvPr id="9" name="Slide Number Placeholder 5">
             <a:extLst>
               <a:ext uri="{FF2B5EF4-FFF2-40B4-BE49-F238E27FC236}">
-                <a16:creationId xmlns:a16="http://schemas.microsoft.com/office/drawing/2014/main" xmlns="" id="{7827BC14-D194-8A9A-DE2E-F8CA4D63521D}"/>
+                <a16:creationId xmlns:a16="http://schemas.microsoft.com/office/drawing/2014/main" id="{7827BC14-D194-8A9A-DE2E-F8CA4D63521D}"/>
               </a:ext>
             </a:extLst>
           </p:cNvPr>
@@ -12626,10 +12622,10 @@
           <p:cNvPr id="6" name="Oval 6">
             <a:extLst>
               <a:ext uri="{FF2B5EF4-FFF2-40B4-BE49-F238E27FC236}">
-                <a16:creationId xmlns:a16="http://schemas.microsoft.com/office/drawing/2014/main" xmlns="" id="{86971F90-0FB8-A46A-78E4-2016819D6C67}"/>
+                <a16:creationId xmlns:a16="http://schemas.microsoft.com/office/drawing/2014/main" id="{86971F90-0FB8-A46A-78E4-2016819D6C67}"/>
               </a:ext>
               <a:ext uri="{C183D7F6-B498-43B3-948B-1728B52AA6E4}">
-                <adec:decorative xmlns:adec="http://schemas.microsoft.com/office/drawing/2017/decorative" xmlns="" val="1"/>
+                <adec:decorative xmlns:adec="http://schemas.microsoft.com/office/drawing/2017/decorative" val="1"/>
               </a:ext>
             </a:extLst>
           </p:cNvPr>
@@ -12711,10 +12707,10 @@
           <p:cNvPr id="11" name="Rectangle 10">
             <a:extLst>
               <a:ext uri="{FF2B5EF4-FFF2-40B4-BE49-F238E27FC236}">
-                <a16:creationId xmlns:a16="http://schemas.microsoft.com/office/drawing/2014/main" xmlns="" id="{CE94A473-0E2F-855B-9BE9-646566F82A57}"/>
+                <a16:creationId xmlns:a16="http://schemas.microsoft.com/office/drawing/2014/main" id="{CE94A473-0E2F-855B-9BE9-646566F82A57}"/>
               </a:ext>
               <a:ext uri="{C183D7F6-B498-43B3-948B-1728B52AA6E4}">
-                <adec:decorative xmlns:adec="http://schemas.microsoft.com/office/drawing/2017/decorative" xmlns="" val="1"/>
+                <adec:decorative xmlns:adec="http://schemas.microsoft.com/office/drawing/2017/decorative" val="1"/>
               </a:ext>
             </a:extLst>
           </p:cNvPr>
@@ -12766,10 +12762,10 @@
           <p:cNvPr id="10" name="Oval 9">
             <a:extLst>
               <a:ext uri="{FF2B5EF4-FFF2-40B4-BE49-F238E27FC236}">
-                <a16:creationId xmlns:a16="http://schemas.microsoft.com/office/drawing/2014/main" xmlns="" id="{D11F1861-7394-91D1-3FB3-1C63CAD6CDAA}"/>
+                <a16:creationId xmlns:a16="http://schemas.microsoft.com/office/drawing/2014/main" id="{D11F1861-7394-91D1-3FB3-1C63CAD6CDAA}"/>
               </a:ext>
               <a:ext uri="{C183D7F6-B498-43B3-948B-1728B52AA6E4}">
-                <adec:decorative xmlns:adec="http://schemas.microsoft.com/office/drawing/2017/decorative" xmlns="" val="1"/>
+                <adec:decorative xmlns:adec="http://schemas.microsoft.com/office/drawing/2017/decorative" val="1"/>
               </a:ext>
             </a:extLst>
           </p:cNvPr>
@@ -12824,10 +12820,10 @@
           <p:cNvPr id="6" name="Oval 5">
             <a:extLst>
               <a:ext uri="{FF2B5EF4-FFF2-40B4-BE49-F238E27FC236}">
-                <a16:creationId xmlns:a16="http://schemas.microsoft.com/office/drawing/2014/main" xmlns="" id="{944FA9C6-3F37-9A7B-AE46-A7F949180780}"/>
+                <a16:creationId xmlns:a16="http://schemas.microsoft.com/office/drawing/2014/main" id="{944FA9C6-3F37-9A7B-AE46-A7F949180780}"/>
               </a:ext>
               <a:ext uri="{C183D7F6-B498-43B3-948B-1728B52AA6E4}">
-                <adec:decorative xmlns:adec="http://schemas.microsoft.com/office/drawing/2017/decorative" xmlns="" val="1"/>
+                <adec:decorative xmlns:adec="http://schemas.microsoft.com/office/drawing/2017/decorative" val="1"/>
               </a:ext>
             </a:extLst>
           </p:cNvPr>
@@ -12882,10 +12878,10 @@
           <p:cNvPr id="8" name="Rectangle 7">
             <a:extLst>
               <a:ext uri="{FF2B5EF4-FFF2-40B4-BE49-F238E27FC236}">
-                <a16:creationId xmlns:a16="http://schemas.microsoft.com/office/drawing/2014/main" xmlns="" id="{4EE6E05E-CA4A-59B6-994A-26ED66D7F727}"/>
+                <a16:creationId xmlns:a16="http://schemas.microsoft.com/office/drawing/2014/main" id="{4EE6E05E-CA4A-59B6-994A-26ED66D7F727}"/>
               </a:ext>
               <a:ext uri="{C183D7F6-B498-43B3-948B-1728B52AA6E4}">
-                <adec:decorative xmlns:adec="http://schemas.microsoft.com/office/drawing/2017/decorative" xmlns="" val="1"/>
+                <adec:decorative xmlns:adec="http://schemas.microsoft.com/office/drawing/2017/decorative" val="1"/>
               </a:ext>
             </a:extLst>
           </p:cNvPr>
@@ -12937,10 +12933,10 @@
           <p:cNvPr id="3" name="Straight Connector 96">
             <a:extLst>
               <a:ext uri="{FF2B5EF4-FFF2-40B4-BE49-F238E27FC236}">
-                <a16:creationId xmlns:a16="http://schemas.microsoft.com/office/drawing/2014/main" xmlns="" id="{E6848015-40FC-D2CF-56EF-7B2B82A9A6AE}"/>
+                <a16:creationId xmlns:a16="http://schemas.microsoft.com/office/drawing/2014/main" id="{E6848015-40FC-D2CF-56EF-7B2B82A9A6AE}"/>
               </a:ext>
               <a:ext uri="{C183D7F6-B498-43B3-948B-1728B52AA6E4}">
-                <adec:decorative xmlns:adec="http://schemas.microsoft.com/office/drawing/2017/decorative" xmlns="" val="1"/>
+                <adec:decorative xmlns:adec="http://schemas.microsoft.com/office/drawing/2017/decorative" val="1"/>
               </a:ext>
             </a:extLst>
           </p:cNvPr>
@@ -12983,10 +12979,10 @@
           <p:cNvPr id="4" name="Straight Connector 9">
             <a:extLst>
               <a:ext uri="{FF2B5EF4-FFF2-40B4-BE49-F238E27FC236}">
-                <a16:creationId xmlns:a16="http://schemas.microsoft.com/office/drawing/2014/main" xmlns="" id="{172BA788-1AE9-2B5A-C0B2-C16236F3A348}"/>
+                <a16:creationId xmlns:a16="http://schemas.microsoft.com/office/drawing/2014/main" id="{172BA788-1AE9-2B5A-C0B2-C16236F3A348}"/>
               </a:ext>
               <a:ext uri="{C183D7F6-B498-43B3-948B-1728B52AA6E4}">
-                <adec:decorative xmlns:adec="http://schemas.microsoft.com/office/drawing/2017/decorative" xmlns="" val="1"/>
+                <adec:decorative xmlns:adec="http://schemas.microsoft.com/office/drawing/2017/decorative" val="1"/>
               </a:ext>
             </a:extLst>
           </p:cNvPr>
@@ -13029,10 +13025,10 @@
           <p:cNvPr id="5" name="Straight Connector 10">
             <a:extLst>
               <a:ext uri="{FF2B5EF4-FFF2-40B4-BE49-F238E27FC236}">
-                <a16:creationId xmlns:a16="http://schemas.microsoft.com/office/drawing/2014/main" xmlns="" id="{D0B09B15-3563-712C-6E2E-C89B5AF82003}"/>
+                <a16:creationId xmlns:a16="http://schemas.microsoft.com/office/drawing/2014/main" id="{D0B09B15-3563-712C-6E2E-C89B5AF82003}"/>
               </a:ext>
               <a:ext uri="{C183D7F6-B498-43B3-948B-1728B52AA6E4}">
-                <adec:decorative xmlns:adec="http://schemas.microsoft.com/office/drawing/2017/decorative" xmlns="" val="1"/>
+                <adec:decorative xmlns:adec="http://schemas.microsoft.com/office/drawing/2017/decorative" val="1"/>
               </a:ext>
             </a:extLst>
           </p:cNvPr>
@@ -13075,10 +13071,10 @@
           <p:cNvPr id="14" name="Straight Connector 11">
             <a:extLst>
               <a:ext uri="{FF2B5EF4-FFF2-40B4-BE49-F238E27FC236}">
-                <a16:creationId xmlns:a16="http://schemas.microsoft.com/office/drawing/2014/main" xmlns="" id="{44CF4C88-92DD-301D-210A-6C1B202D75FE}"/>
+                <a16:creationId xmlns:a16="http://schemas.microsoft.com/office/drawing/2014/main" id="{44CF4C88-92DD-301D-210A-6C1B202D75FE}"/>
               </a:ext>
               <a:ext uri="{C183D7F6-B498-43B3-948B-1728B52AA6E4}">
-                <adec:decorative xmlns:adec="http://schemas.microsoft.com/office/drawing/2017/decorative" xmlns="" val="1"/>
+                <adec:decorative xmlns:adec="http://schemas.microsoft.com/office/drawing/2017/decorative" val="1"/>
               </a:ext>
             </a:extLst>
           </p:cNvPr>
@@ -13121,7 +13117,7 @@
           <p:cNvPr id="2" name="Title 1">
             <a:extLst>
               <a:ext uri="{FF2B5EF4-FFF2-40B4-BE49-F238E27FC236}">
-                <a16:creationId xmlns:a16="http://schemas.microsoft.com/office/drawing/2014/main" xmlns="" id="{4E4019F8-742E-9EEF-F591-C9666AC32AF1}"/>
+                <a16:creationId xmlns:a16="http://schemas.microsoft.com/office/drawing/2014/main" id="{4E4019F8-742E-9EEF-F591-C9666AC32AF1}"/>
               </a:ext>
             </a:extLst>
           </p:cNvPr>
@@ -13160,7 +13156,7 @@
           <p:cNvPr id="15" name="Text Placeholder 14">
             <a:extLst>
               <a:ext uri="{FF2B5EF4-FFF2-40B4-BE49-F238E27FC236}">
-                <a16:creationId xmlns:a16="http://schemas.microsoft.com/office/drawing/2014/main" xmlns="" id="{88715CCF-7A7B-5AAC-D071-DE008B249E48}"/>
+                <a16:creationId xmlns:a16="http://schemas.microsoft.com/office/drawing/2014/main" id="{88715CCF-7A7B-5AAC-D071-DE008B249E48}"/>
               </a:ext>
             </a:extLst>
           </p:cNvPr>
@@ -13213,7 +13209,7 @@
           <p:cNvPr id="40" name="Text Placeholder 9">
             <a:extLst>
               <a:ext uri="{FF2B5EF4-FFF2-40B4-BE49-F238E27FC236}">
-                <a16:creationId xmlns:a16="http://schemas.microsoft.com/office/drawing/2014/main" xmlns="" id="{DA9011B5-6D01-3AF0-99E4-6A004B6CA06D}"/>
+                <a16:creationId xmlns:a16="http://schemas.microsoft.com/office/drawing/2014/main" id="{DA9011B5-6D01-3AF0-99E4-6A004B6CA06D}"/>
               </a:ext>
             </a:extLst>
           </p:cNvPr>
@@ -13262,7 +13258,7 @@
           <p:cNvPr id="16" name="Text Placeholder 14">
             <a:extLst>
               <a:ext uri="{FF2B5EF4-FFF2-40B4-BE49-F238E27FC236}">
-                <a16:creationId xmlns:a16="http://schemas.microsoft.com/office/drawing/2014/main" xmlns="" id="{59ABDEC3-4BEB-A518-046E-129B7D9E2509}"/>
+                <a16:creationId xmlns:a16="http://schemas.microsoft.com/office/drawing/2014/main" id="{59ABDEC3-4BEB-A518-046E-129B7D9E2509}"/>
               </a:ext>
             </a:extLst>
           </p:cNvPr>
@@ -13315,7 +13311,7 @@
           <p:cNvPr id="41" name="Text Placeholder 9">
             <a:extLst>
               <a:ext uri="{FF2B5EF4-FFF2-40B4-BE49-F238E27FC236}">
-                <a16:creationId xmlns:a16="http://schemas.microsoft.com/office/drawing/2014/main" xmlns="" id="{34B40045-4DCE-76DA-58AD-223A1C01919C}"/>
+                <a16:creationId xmlns:a16="http://schemas.microsoft.com/office/drawing/2014/main" id="{34B40045-4DCE-76DA-58AD-223A1C01919C}"/>
               </a:ext>
             </a:extLst>
           </p:cNvPr>
@@ -13364,7 +13360,7 @@
           <p:cNvPr id="17" name="Text Placeholder 14">
             <a:extLst>
               <a:ext uri="{FF2B5EF4-FFF2-40B4-BE49-F238E27FC236}">
-                <a16:creationId xmlns:a16="http://schemas.microsoft.com/office/drawing/2014/main" xmlns="" id="{F33B2306-2357-FD4D-9A71-A8DD1010DE40}"/>
+                <a16:creationId xmlns:a16="http://schemas.microsoft.com/office/drawing/2014/main" id="{F33B2306-2357-FD4D-9A71-A8DD1010DE40}"/>
               </a:ext>
             </a:extLst>
           </p:cNvPr>
@@ -13417,7 +13413,7 @@
           <p:cNvPr id="43" name="Text Placeholder 9">
             <a:extLst>
               <a:ext uri="{FF2B5EF4-FFF2-40B4-BE49-F238E27FC236}">
-                <a16:creationId xmlns:a16="http://schemas.microsoft.com/office/drawing/2014/main" xmlns="" id="{E04F7AE4-DD5E-CA7A-FB08-B802AEDD0425}"/>
+                <a16:creationId xmlns:a16="http://schemas.microsoft.com/office/drawing/2014/main" id="{E04F7AE4-DD5E-CA7A-FB08-B802AEDD0425}"/>
               </a:ext>
             </a:extLst>
           </p:cNvPr>
@@ -13466,7 +13462,7 @@
           <p:cNvPr id="18" name="Text Placeholder 14">
             <a:extLst>
               <a:ext uri="{FF2B5EF4-FFF2-40B4-BE49-F238E27FC236}">
-                <a16:creationId xmlns:a16="http://schemas.microsoft.com/office/drawing/2014/main" xmlns="" id="{9515354B-8178-69A7-B299-C539A6E3E865}"/>
+                <a16:creationId xmlns:a16="http://schemas.microsoft.com/office/drawing/2014/main" id="{9515354B-8178-69A7-B299-C539A6E3E865}"/>
               </a:ext>
             </a:extLst>
           </p:cNvPr>
@@ -13519,7 +13515,7 @@
           <p:cNvPr id="42" name="Text Placeholder 9">
             <a:extLst>
               <a:ext uri="{FF2B5EF4-FFF2-40B4-BE49-F238E27FC236}">
-                <a16:creationId xmlns:a16="http://schemas.microsoft.com/office/drawing/2014/main" xmlns="" id="{E2E62BAE-F951-3097-780E-D7E06FD341A3}"/>
+                <a16:creationId xmlns:a16="http://schemas.microsoft.com/office/drawing/2014/main" id="{E2E62BAE-F951-3097-780E-D7E06FD341A3}"/>
               </a:ext>
             </a:extLst>
           </p:cNvPr>
@@ -13568,7 +13564,7 @@
           <p:cNvPr id="13" name="Date Placeholder 3">
             <a:extLst>
               <a:ext uri="{FF2B5EF4-FFF2-40B4-BE49-F238E27FC236}">
-                <a16:creationId xmlns:a16="http://schemas.microsoft.com/office/drawing/2014/main" xmlns="" id="{89B8E453-8C8A-F7A4-D77C-765B9466A423}"/>
+                <a16:creationId xmlns:a16="http://schemas.microsoft.com/office/drawing/2014/main" id="{89B8E453-8C8A-F7A4-D77C-765B9466A423}"/>
               </a:ext>
             </a:extLst>
           </p:cNvPr>
@@ -13606,7 +13602,7 @@
           <p:cNvPr id="12" name="Footer Placeholder 4">
             <a:extLst>
               <a:ext uri="{FF2B5EF4-FFF2-40B4-BE49-F238E27FC236}">
-                <a16:creationId xmlns:a16="http://schemas.microsoft.com/office/drawing/2014/main" xmlns="" id="{34830229-14EC-08ED-D66A-130B5046437B}"/>
+                <a16:creationId xmlns:a16="http://schemas.microsoft.com/office/drawing/2014/main" id="{34830229-14EC-08ED-D66A-130B5046437B}"/>
               </a:ext>
             </a:extLst>
           </p:cNvPr>
@@ -13639,7 +13635,7 @@
           <p:cNvPr id="9" name="Slide Number Placeholder 5">
             <a:extLst>
               <a:ext uri="{FF2B5EF4-FFF2-40B4-BE49-F238E27FC236}">
-                <a16:creationId xmlns:a16="http://schemas.microsoft.com/office/drawing/2014/main" xmlns="" id="{4766673F-B093-E7D5-C076-5AEF41184809}"/>
+                <a16:creationId xmlns:a16="http://schemas.microsoft.com/office/drawing/2014/main" id="{4766673F-B093-E7D5-C076-5AEF41184809}"/>
               </a:ext>
             </a:extLst>
           </p:cNvPr>
@@ -13703,10 +13699,10 @@
           <p:cNvPr id="11" name="Rectangle 10">
             <a:extLst>
               <a:ext uri="{FF2B5EF4-FFF2-40B4-BE49-F238E27FC236}">
-                <a16:creationId xmlns:a16="http://schemas.microsoft.com/office/drawing/2014/main" xmlns="" id="{CE94A473-0E2F-855B-9BE9-646566F82A57}"/>
+                <a16:creationId xmlns:a16="http://schemas.microsoft.com/office/drawing/2014/main" id="{CE94A473-0E2F-855B-9BE9-646566F82A57}"/>
               </a:ext>
               <a:ext uri="{C183D7F6-B498-43B3-948B-1728B52AA6E4}">
-                <adec:decorative xmlns:adec="http://schemas.microsoft.com/office/drawing/2017/decorative" xmlns="" val="1"/>
+                <adec:decorative xmlns:adec="http://schemas.microsoft.com/office/drawing/2017/decorative" val="1"/>
               </a:ext>
             </a:extLst>
           </p:cNvPr>
@@ -13758,10 +13754,10 @@
           <p:cNvPr id="10" name="Oval 9">
             <a:extLst>
               <a:ext uri="{FF2B5EF4-FFF2-40B4-BE49-F238E27FC236}">
-                <a16:creationId xmlns:a16="http://schemas.microsoft.com/office/drawing/2014/main" xmlns="" id="{D11F1861-7394-91D1-3FB3-1C63CAD6CDAA}"/>
+                <a16:creationId xmlns:a16="http://schemas.microsoft.com/office/drawing/2014/main" id="{D11F1861-7394-91D1-3FB3-1C63CAD6CDAA}"/>
               </a:ext>
               <a:ext uri="{C183D7F6-B498-43B3-948B-1728B52AA6E4}">
-                <adec:decorative xmlns:adec="http://schemas.microsoft.com/office/drawing/2017/decorative" xmlns="" val="1"/>
+                <adec:decorative xmlns:adec="http://schemas.microsoft.com/office/drawing/2017/decorative" val="1"/>
               </a:ext>
             </a:extLst>
           </p:cNvPr>
@@ -13816,7 +13812,7 @@
           <p:cNvPr id="2" name="Title 1">
             <a:extLst>
               <a:ext uri="{FF2B5EF4-FFF2-40B4-BE49-F238E27FC236}">
-                <a16:creationId xmlns:a16="http://schemas.microsoft.com/office/drawing/2014/main" xmlns="" id="{4E4019F8-742E-9EEF-F591-C9666AC32AF1}"/>
+                <a16:creationId xmlns:a16="http://schemas.microsoft.com/office/drawing/2014/main" id="{4E4019F8-742E-9EEF-F591-C9666AC32AF1}"/>
               </a:ext>
             </a:extLst>
           </p:cNvPr>
@@ -13855,7 +13851,7 @@
           <p:cNvPr id="15" name="Content Placeholder 14">
             <a:extLst>
               <a:ext uri="{FF2B5EF4-FFF2-40B4-BE49-F238E27FC236}">
-                <a16:creationId xmlns:a16="http://schemas.microsoft.com/office/drawing/2014/main" xmlns="" id="{65C0DFC7-33FF-AA73-3FFC-C978E3721F5C}"/>
+                <a16:creationId xmlns:a16="http://schemas.microsoft.com/office/drawing/2014/main" id="{65C0DFC7-33FF-AA73-3FFC-C978E3721F5C}"/>
               </a:ext>
             </a:extLst>
           </p:cNvPr>
@@ -13935,7 +13931,7 @@
           <p:cNvPr id="13" name="Date Placeholder 3">
             <a:extLst>
               <a:ext uri="{FF2B5EF4-FFF2-40B4-BE49-F238E27FC236}">
-                <a16:creationId xmlns:a16="http://schemas.microsoft.com/office/drawing/2014/main" xmlns="" id="{89B8E453-8C8A-F7A4-D77C-765B9466A423}"/>
+                <a16:creationId xmlns:a16="http://schemas.microsoft.com/office/drawing/2014/main" id="{89B8E453-8C8A-F7A4-D77C-765B9466A423}"/>
               </a:ext>
             </a:extLst>
           </p:cNvPr>
@@ -13973,7 +13969,7 @@
           <p:cNvPr id="12" name="Footer Placeholder 4">
             <a:extLst>
               <a:ext uri="{FF2B5EF4-FFF2-40B4-BE49-F238E27FC236}">
-                <a16:creationId xmlns:a16="http://schemas.microsoft.com/office/drawing/2014/main" xmlns="" id="{34830229-14EC-08ED-D66A-130B5046437B}"/>
+                <a16:creationId xmlns:a16="http://schemas.microsoft.com/office/drawing/2014/main" id="{34830229-14EC-08ED-D66A-130B5046437B}"/>
               </a:ext>
             </a:extLst>
           </p:cNvPr>
@@ -14006,7 +14002,7 @@
           <p:cNvPr id="9" name="Slide Number Placeholder 5">
             <a:extLst>
               <a:ext uri="{FF2B5EF4-FFF2-40B4-BE49-F238E27FC236}">
-                <a16:creationId xmlns:a16="http://schemas.microsoft.com/office/drawing/2014/main" xmlns="" id="{4766673F-B093-E7D5-C076-5AEF41184809}"/>
+                <a16:creationId xmlns:a16="http://schemas.microsoft.com/office/drawing/2014/main" id="{4766673F-B093-E7D5-C076-5AEF41184809}"/>
               </a:ext>
             </a:extLst>
           </p:cNvPr>
@@ -14040,10 +14036,10 @@
           <p:cNvPr id="6" name="Oval 5">
             <a:extLst>
               <a:ext uri="{FF2B5EF4-FFF2-40B4-BE49-F238E27FC236}">
-                <a16:creationId xmlns:a16="http://schemas.microsoft.com/office/drawing/2014/main" xmlns="" id="{944FA9C6-3F37-9A7B-AE46-A7F949180780}"/>
+                <a16:creationId xmlns:a16="http://schemas.microsoft.com/office/drawing/2014/main" id="{944FA9C6-3F37-9A7B-AE46-A7F949180780}"/>
               </a:ext>
               <a:ext uri="{C183D7F6-B498-43B3-948B-1728B52AA6E4}">
-                <adec:decorative xmlns:adec="http://schemas.microsoft.com/office/drawing/2017/decorative" xmlns="" val="1"/>
+                <adec:decorative xmlns:adec="http://schemas.microsoft.com/office/drawing/2017/decorative" val="1"/>
               </a:ext>
             </a:extLst>
           </p:cNvPr>
@@ -14098,10 +14094,10 @@
           <p:cNvPr id="8" name="Rectangle 7">
             <a:extLst>
               <a:ext uri="{FF2B5EF4-FFF2-40B4-BE49-F238E27FC236}">
-                <a16:creationId xmlns:a16="http://schemas.microsoft.com/office/drawing/2014/main" xmlns="" id="{4EE6E05E-CA4A-59B6-994A-26ED66D7F727}"/>
+                <a16:creationId xmlns:a16="http://schemas.microsoft.com/office/drawing/2014/main" id="{4EE6E05E-CA4A-59B6-994A-26ED66D7F727}"/>
               </a:ext>
               <a:ext uri="{C183D7F6-B498-43B3-948B-1728B52AA6E4}">
-                <adec:decorative xmlns:adec="http://schemas.microsoft.com/office/drawing/2017/decorative" xmlns="" val="1"/>
+                <adec:decorative xmlns:adec="http://schemas.microsoft.com/office/drawing/2017/decorative" val="1"/>
               </a:ext>
             </a:extLst>
           </p:cNvPr>
@@ -14183,10 +14179,10 @@
           <p:cNvPr id="11" name="Rectangle 10">
             <a:extLst>
               <a:ext uri="{FF2B5EF4-FFF2-40B4-BE49-F238E27FC236}">
-                <a16:creationId xmlns:a16="http://schemas.microsoft.com/office/drawing/2014/main" xmlns="" id="{25FCF6D2-D22A-3276-796E-755059E35060}"/>
+                <a16:creationId xmlns:a16="http://schemas.microsoft.com/office/drawing/2014/main" id="{25FCF6D2-D22A-3276-796E-755059E35060}"/>
               </a:ext>
               <a:ext uri="{C183D7F6-B498-43B3-948B-1728B52AA6E4}">
-                <adec:decorative xmlns:adec="http://schemas.microsoft.com/office/drawing/2017/decorative" xmlns="" val="1"/>
+                <adec:decorative xmlns:adec="http://schemas.microsoft.com/office/drawing/2017/decorative" val="1"/>
               </a:ext>
             </a:extLst>
           </p:cNvPr>
@@ -14238,10 +14234,10 @@
           <p:cNvPr id="10" name="Oval 9">
             <a:extLst>
               <a:ext uri="{FF2B5EF4-FFF2-40B4-BE49-F238E27FC236}">
-                <a16:creationId xmlns:a16="http://schemas.microsoft.com/office/drawing/2014/main" xmlns="" id="{7F380B01-FB3F-7DD6-224D-B483747E33AD}"/>
+                <a16:creationId xmlns:a16="http://schemas.microsoft.com/office/drawing/2014/main" id="{7F380B01-FB3F-7DD6-224D-B483747E33AD}"/>
               </a:ext>
               <a:ext uri="{C183D7F6-B498-43B3-948B-1728B52AA6E4}">
-                <adec:decorative xmlns:adec="http://schemas.microsoft.com/office/drawing/2017/decorative" xmlns="" val="1"/>
+                <adec:decorative xmlns:adec="http://schemas.microsoft.com/office/drawing/2017/decorative" val="1"/>
               </a:ext>
             </a:extLst>
           </p:cNvPr>
@@ -14296,7 +14292,7 @@
           <p:cNvPr id="2" name="Title 1">
             <a:extLst>
               <a:ext uri="{FF2B5EF4-FFF2-40B4-BE49-F238E27FC236}">
-                <a16:creationId xmlns:a16="http://schemas.microsoft.com/office/drawing/2014/main" xmlns="" id="{BC7433D9-FD02-59E2-0F81-A0B7201D2DA0}"/>
+                <a16:creationId xmlns:a16="http://schemas.microsoft.com/office/drawing/2014/main" id="{BC7433D9-FD02-59E2-0F81-A0B7201D2DA0}"/>
               </a:ext>
             </a:extLst>
           </p:cNvPr>
@@ -14335,7 +14331,7 @@
           <p:cNvPr id="4" name="Content Placeholder 14">
             <a:extLst>
               <a:ext uri="{FF2B5EF4-FFF2-40B4-BE49-F238E27FC236}">
-                <a16:creationId xmlns:a16="http://schemas.microsoft.com/office/drawing/2014/main" xmlns="" id="{D003242D-37DC-762E-1EA1-8B102E5213AD}"/>
+                <a16:creationId xmlns:a16="http://schemas.microsoft.com/office/drawing/2014/main" id="{D003242D-37DC-762E-1EA1-8B102E5213AD}"/>
               </a:ext>
             </a:extLst>
           </p:cNvPr>
@@ -14420,7 +14416,7 @@
           <p:cNvPr id="13" name="Date Placeholder 3">
             <a:extLst>
               <a:ext uri="{FF2B5EF4-FFF2-40B4-BE49-F238E27FC236}">
-                <a16:creationId xmlns:a16="http://schemas.microsoft.com/office/drawing/2014/main" xmlns="" id="{AE62007A-8538-D139-3C5B-8FB01733924F}"/>
+                <a16:creationId xmlns:a16="http://schemas.microsoft.com/office/drawing/2014/main" id="{AE62007A-8538-D139-3C5B-8FB01733924F}"/>
               </a:ext>
             </a:extLst>
           </p:cNvPr>
@@ -14458,7 +14454,7 @@
           <p:cNvPr id="12" name="Footer Placeholder 4">
             <a:extLst>
               <a:ext uri="{FF2B5EF4-FFF2-40B4-BE49-F238E27FC236}">
-                <a16:creationId xmlns:a16="http://schemas.microsoft.com/office/drawing/2014/main" xmlns="" id="{C395DC02-FAD1-051C-FC0A-4556D73CA226}"/>
+                <a16:creationId xmlns:a16="http://schemas.microsoft.com/office/drawing/2014/main" id="{C395DC02-FAD1-051C-FC0A-4556D73CA226}"/>
               </a:ext>
             </a:extLst>
           </p:cNvPr>
@@ -14491,7 +14487,7 @@
           <p:cNvPr id="9" name="Slide Number Placeholder 5">
             <a:extLst>
               <a:ext uri="{FF2B5EF4-FFF2-40B4-BE49-F238E27FC236}">
-                <a16:creationId xmlns:a16="http://schemas.microsoft.com/office/drawing/2014/main" xmlns="" id="{F529D71B-FE0E-CC62-38E3-7279774AA934}"/>
+                <a16:creationId xmlns:a16="http://schemas.microsoft.com/office/drawing/2014/main" id="{F529D71B-FE0E-CC62-38E3-7279774AA934}"/>
               </a:ext>
             </a:extLst>
           </p:cNvPr>
@@ -14525,10 +14521,10 @@
           <p:cNvPr id="7" name="Oval 6">
             <a:extLst>
               <a:ext uri="{FF2B5EF4-FFF2-40B4-BE49-F238E27FC236}">
-                <a16:creationId xmlns:a16="http://schemas.microsoft.com/office/drawing/2014/main" xmlns="" id="{C676AF1C-25E0-EBF0-0B1D-FA5F7D770210}"/>
+                <a16:creationId xmlns:a16="http://schemas.microsoft.com/office/drawing/2014/main" id="{C676AF1C-25E0-EBF0-0B1D-FA5F7D770210}"/>
               </a:ext>
               <a:ext uri="{C183D7F6-B498-43B3-948B-1728B52AA6E4}">
-                <adec:decorative xmlns:adec="http://schemas.microsoft.com/office/drawing/2017/decorative" xmlns="" val="1"/>
+                <adec:decorative xmlns:adec="http://schemas.microsoft.com/office/drawing/2017/decorative" val="1"/>
               </a:ext>
             </a:extLst>
           </p:cNvPr>
@@ -14583,10 +14579,10 @@
           <p:cNvPr id="8" name="Rectangle 7">
             <a:extLst>
               <a:ext uri="{FF2B5EF4-FFF2-40B4-BE49-F238E27FC236}">
-                <a16:creationId xmlns:a16="http://schemas.microsoft.com/office/drawing/2014/main" xmlns="" id="{F60E189A-D955-6A7F-2779-ED5B5EB97BA0}"/>
+                <a16:creationId xmlns:a16="http://schemas.microsoft.com/office/drawing/2014/main" id="{F60E189A-D955-6A7F-2779-ED5B5EB97BA0}"/>
               </a:ext>
               <a:ext uri="{C183D7F6-B498-43B3-948B-1728B52AA6E4}">
-                <adec:decorative xmlns:adec="http://schemas.microsoft.com/office/drawing/2017/decorative" xmlns="" val="1"/>
+                <adec:decorative xmlns:adec="http://schemas.microsoft.com/office/drawing/2017/decorative" val="1"/>
               </a:ext>
             </a:extLst>
           </p:cNvPr>
@@ -14668,7 +14664,7 @@
           <p:cNvPr id="2" name="Title 1">
             <a:extLst>
               <a:ext uri="{FF2B5EF4-FFF2-40B4-BE49-F238E27FC236}">
-                <a16:creationId xmlns:a16="http://schemas.microsoft.com/office/drawing/2014/main" xmlns="" id="{BC7433D9-FD02-59E2-0F81-A0B7201D2DA0}"/>
+                <a16:creationId xmlns:a16="http://schemas.microsoft.com/office/drawing/2014/main" id="{BC7433D9-FD02-59E2-0F81-A0B7201D2DA0}"/>
               </a:ext>
             </a:extLst>
           </p:cNvPr>
@@ -14707,7 +14703,7 @@
           <p:cNvPr id="7" name="Content Placeholder 14">
             <a:extLst>
               <a:ext uri="{FF2B5EF4-FFF2-40B4-BE49-F238E27FC236}">
-                <a16:creationId xmlns:a16="http://schemas.microsoft.com/office/drawing/2014/main" xmlns="" id="{9C39C3C5-BCCF-9F66-0E64-6811D986BBB0}"/>
+                <a16:creationId xmlns:a16="http://schemas.microsoft.com/office/drawing/2014/main" id="{9C39C3C5-BCCF-9F66-0E64-6811D986BBB0}"/>
               </a:ext>
             </a:extLst>
           </p:cNvPr>
@@ -14792,7 +14788,7 @@
           <p:cNvPr id="4" name="Date Placeholder 3">
             <a:extLst>
               <a:ext uri="{FF2B5EF4-FFF2-40B4-BE49-F238E27FC236}">
-                <a16:creationId xmlns:a16="http://schemas.microsoft.com/office/drawing/2014/main" xmlns="" id="{0B9485D1-E172-8F0A-A425-3097B3ABCFB4}"/>
+                <a16:creationId xmlns:a16="http://schemas.microsoft.com/office/drawing/2014/main" id="{0B9485D1-E172-8F0A-A425-3097B3ABCFB4}"/>
               </a:ext>
             </a:extLst>
           </p:cNvPr>
@@ -14830,7 +14826,7 @@
           <p:cNvPr id="5" name="Footer Placeholder 4">
             <a:extLst>
               <a:ext uri="{FF2B5EF4-FFF2-40B4-BE49-F238E27FC236}">
-                <a16:creationId xmlns:a16="http://schemas.microsoft.com/office/drawing/2014/main" xmlns="" id="{B17E6B5E-6174-FD5C-41E8-FFC44C650D7E}"/>
+                <a16:creationId xmlns:a16="http://schemas.microsoft.com/office/drawing/2014/main" id="{B17E6B5E-6174-FD5C-41E8-FFC44C650D7E}"/>
               </a:ext>
             </a:extLst>
           </p:cNvPr>
@@ -14863,7 +14859,7 @@
           <p:cNvPr id="6" name="Slide Number Placeholder 5">
             <a:extLst>
               <a:ext uri="{FF2B5EF4-FFF2-40B4-BE49-F238E27FC236}">
-                <a16:creationId xmlns:a16="http://schemas.microsoft.com/office/drawing/2014/main" xmlns="" id="{4BF72154-F85B-E301-DA57-E314D7315916}"/>
+                <a16:creationId xmlns:a16="http://schemas.microsoft.com/office/drawing/2014/main" id="{4BF72154-F85B-E301-DA57-E314D7315916}"/>
               </a:ext>
             </a:extLst>
           </p:cNvPr>
@@ -14992,7 +14988,7 @@
           </a:lstStyle>
           <a:p>
             <a:r>
-              <a:rPr lang="en-US" smtClean="0"/>
+              <a:rPr lang="en-US"/>
               <a:t>Click to edit Master title style</a:t>
             </a:r>
             <a:endParaRPr lang="en-US" dirty="0"/>
@@ -15112,7 +15108,7 @@
           <a:p>
             <a:pPr lvl="0"/>
             <a:r>
-              <a:rPr lang="en-US" smtClean="0"/>
+              <a:rPr lang="en-US"/>
               <a:t>Edit Master text styles</a:t>
             </a:r>
           </a:p>
@@ -15180,10 +15176,9 @@
           </a:lstStyle>
           <a:p>
             <a:r>
-              <a:rPr lang="en-US" smtClean="0"/>
+              <a:rPr lang="en-US"/>
               <a:t>Sample Footer Text</a:t>
             </a:r>
-            <a:endParaRPr lang="en-US"/>
           </a:p>
         </p:txBody>
       </p:sp>
@@ -15258,7 +15253,7 @@
           <p:cNvPr id="2" name="Title 1">
             <a:extLst>
               <a:ext uri="{FF2B5EF4-FFF2-40B4-BE49-F238E27FC236}">
-                <a16:creationId xmlns:a16="http://schemas.microsoft.com/office/drawing/2014/main" xmlns="" id="{BC7433D9-FD02-59E2-0F81-A0B7201D2DA0}"/>
+                <a16:creationId xmlns:a16="http://schemas.microsoft.com/office/drawing/2014/main" id="{BC7433D9-FD02-59E2-0F81-A0B7201D2DA0}"/>
               </a:ext>
             </a:extLst>
           </p:cNvPr>
@@ -15297,7 +15292,7 @@
           <p:cNvPr id="4" name="Content Placeholder 14">
             <a:extLst>
               <a:ext uri="{FF2B5EF4-FFF2-40B4-BE49-F238E27FC236}">
-                <a16:creationId xmlns:a16="http://schemas.microsoft.com/office/drawing/2014/main" xmlns="" id="{B85B9BDD-2F0E-42F1-CE42-7711FBBB9457}"/>
+                <a16:creationId xmlns:a16="http://schemas.microsoft.com/office/drawing/2014/main" id="{B85B9BDD-2F0E-42F1-CE42-7711FBBB9457}"/>
               </a:ext>
             </a:extLst>
           </p:cNvPr>
@@ -15382,7 +15377,7 @@
           <p:cNvPr id="9" name="Date Placeholder 3">
             <a:extLst>
               <a:ext uri="{FF2B5EF4-FFF2-40B4-BE49-F238E27FC236}">
-                <a16:creationId xmlns:a16="http://schemas.microsoft.com/office/drawing/2014/main" xmlns="" id="{31AE7160-8A18-8762-67F8-C71E839BA541}"/>
+                <a16:creationId xmlns:a16="http://schemas.microsoft.com/office/drawing/2014/main" id="{31AE7160-8A18-8762-67F8-C71E839BA541}"/>
               </a:ext>
             </a:extLst>
           </p:cNvPr>
@@ -15420,7 +15415,7 @@
           <p:cNvPr id="8" name="Footer Placeholder 4">
             <a:extLst>
               <a:ext uri="{FF2B5EF4-FFF2-40B4-BE49-F238E27FC236}">
-                <a16:creationId xmlns:a16="http://schemas.microsoft.com/office/drawing/2014/main" xmlns="" id="{E62296B3-7CBF-6881-5581-81D52C0F36F3}"/>
+                <a16:creationId xmlns:a16="http://schemas.microsoft.com/office/drawing/2014/main" id="{E62296B3-7CBF-6881-5581-81D52C0F36F3}"/>
               </a:ext>
             </a:extLst>
           </p:cNvPr>
@@ -15453,7 +15448,7 @@
           <p:cNvPr id="7" name="Slide Number Placeholder 5">
             <a:extLst>
               <a:ext uri="{FF2B5EF4-FFF2-40B4-BE49-F238E27FC236}">
-                <a16:creationId xmlns:a16="http://schemas.microsoft.com/office/drawing/2014/main" xmlns="" id="{F8346D7C-F120-5968-2FC4-2F9B5BC6DEDB}"/>
+                <a16:creationId xmlns:a16="http://schemas.microsoft.com/office/drawing/2014/main" id="{F8346D7C-F120-5968-2FC4-2F9B5BC6DEDB}"/>
               </a:ext>
             </a:extLst>
           </p:cNvPr>
@@ -15487,10 +15482,10 @@
           <p:cNvPr id="22" name="Oval 6">
             <a:extLst>
               <a:ext uri="{FF2B5EF4-FFF2-40B4-BE49-F238E27FC236}">
-                <a16:creationId xmlns:a16="http://schemas.microsoft.com/office/drawing/2014/main" xmlns="" id="{FEAE54C9-349B-EEFD-01BA-52EF837ACA99}"/>
+                <a16:creationId xmlns:a16="http://schemas.microsoft.com/office/drawing/2014/main" id="{FEAE54C9-349B-EEFD-01BA-52EF837ACA99}"/>
               </a:ext>
               <a:ext uri="{C183D7F6-B498-43B3-948B-1728B52AA6E4}">
-                <adec:decorative xmlns:adec="http://schemas.microsoft.com/office/drawing/2017/decorative" xmlns="" val="1"/>
+                <adec:decorative xmlns:adec="http://schemas.microsoft.com/office/drawing/2017/decorative" val="1"/>
               </a:ext>
             </a:extLst>
           </p:cNvPr>
@@ -15545,10 +15540,10 @@
           <p:cNvPr id="23" name="Rectangle 7">
             <a:extLst>
               <a:ext uri="{FF2B5EF4-FFF2-40B4-BE49-F238E27FC236}">
-                <a16:creationId xmlns:a16="http://schemas.microsoft.com/office/drawing/2014/main" xmlns="" id="{D9433BDD-AE57-6F96-8693-7E2D491ACC5B}"/>
+                <a16:creationId xmlns:a16="http://schemas.microsoft.com/office/drawing/2014/main" id="{D9433BDD-AE57-6F96-8693-7E2D491ACC5B}"/>
               </a:ext>
               <a:ext uri="{C183D7F6-B498-43B3-948B-1728B52AA6E4}">
-                <adec:decorative xmlns:adec="http://schemas.microsoft.com/office/drawing/2017/decorative" xmlns="" val="1"/>
+                <adec:decorative xmlns:adec="http://schemas.microsoft.com/office/drawing/2017/decorative" val="1"/>
               </a:ext>
             </a:extLst>
           </p:cNvPr>
@@ -15600,10 +15595,10 @@
           <p:cNvPr id="21" name="Rectangle 11">
             <a:extLst>
               <a:ext uri="{FF2B5EF4-FFF2-40B4-BE49-F238E27FC236}">
-                <a16:creationId xmlns:a16="http://schemas.microsoft.com/office/drawing/2014/main" xmlns="" id="{269FA094-1A8C-FF3E-020B-BE5688AA465C}"/>
+                <a16:creationId xmlns:a16="http://schemas.microsoft.com/office/drawing/2014/main" id="{269FA094-1A8C-FF3E-020B-BE5688AA465C}"/>
               </a:ext>
               <a:ext uri="{C183D7F6-B498-43B3-948B-1728B52AA6E4}">
-                <adec:decorative xmlns:adec="http://schemas.microsoft.com/office/drawing/2017/decorative" xmlns="" val="1"/>
+                <adec:decorative xmlns:adec="http://schemas.microsoft.com/office/drawing/2017/decorative" val="1"/>
               </a:ext>
             </a:extLst>
           </p:cNvPr>
@@ -15685,7 +15680,7 @@
           <p:cNvPr id="2" name="Title 1">
             <a:extLst>
               <a:ext uri="{FF2B5EF4-FFF2-40B4-BE49-F238E27FC236}">
-                <a16:creationId xmlns:a16="http://schemas.microsoft.com/office/drawing/2014/main" xmlns="" id="{BC7433D9-FD02-59E2-0F81-A0B7201D2DA0}"/>
+                <a16:creationId xmlns:a16="http://schemas.microsoft.com/office/drawing/2014/main" id="{BC7433D9-FD02-59E2-0F81-A0B7201D2DA0}"/>
               </a:ext>
             </a:extLst>
           </p:cNvPr>
@@ -15724,7 +15719,7 @@
           <p:cNvPr id="3" name="Content Placeholder 14">
             <a:extLst>
               <a:ext uri="{FF2B5EF4-FFF2-40B4-BE49-F238E27FC236}">
-                <a16:creationId xmlns:a16="http://schemas.microsoft.com/office/drawing/2014/main" xmlns="" id="{C261A18B-C79C-B070-5D41-0CBA01FD2C32}"/>
+                <a16:creationId xmlns:a16="http://schemas.microsoft.com/office/drawing/2014/main" id="{C261A18B-C79C-B070-5D41-0CBA01FD2C32}"/>
               </a:ext>
             </a:extLst>
           </p:cNvPr>
@@ -15809,7 +15804,7 @@
           <p:cNvPr id="4" name="Date Placeholder 3">
             <a:extLst>
               <a:ext uri="{FF2B5EF4-FFF2-40B4-BE49-F238E27FC236}">
-                <a16:creationId xmlns:a16="http://schemas.microsoft.com/office/drawing/2014/main" xmlns="" id="{0B9485D1-E172-8F0A-A425-3097B3ABCFB4}"/>
+                <a16:creationId xmlns:a16="http://schemas.microsoft.com/office/drawing/2014/main" id="{0B9485D1-E172-8F0A-A425-3097B3ABCFB4}"/>
               </a:ext>
             </a:extLst>
           </p:cNvPr>
@@ -15847,7 +15842,7 @@
           <p:cNvPr id="5" name="Footer Placeholder 4">
             <a:extLst>
               <a:ext uri="{FF2B5EF4-FFF2-40B4-BE49-F238E27FC236}">
-                <a16:creationId xmlns:a16="http://schemas.microsoft.com/office/drawing/2014/main" xmlns="" id="{B17E6B5E-6174-FD5C-41E8-FFC44C650D7E}"/>
+                <a16:creationId xmlns:a16="http://schemas.microsoft.com/office/drawing/2014/main" id="{B17E6B5E-6174-FD5C-41E8-FFC44C650D7E}"/>
               </a:ext>
             </a:extLst>
           </p:cNvPr>
@@ -15880,7 +15875,7 @@
           <p:cNvPr id="6" name="Slide Number Placeholder 5">
             <a:extLst>
               <a:ext uri="{FF2B5EF4-FFF2-40B4-BE49-F238E27FC236}">
-                <a16:creationId xmlns:a16="http://schemas.microsoft.com/office/drawing/2014/main" xmlns="" id="{4BF72154-F85B-E301-DA57-E314D7315916}"/>
+                <a16:creationId xmlns:a16="http://schemas.microsoft.com/office/drawing/2014/main" id="{4BF72154-F85B-E301-DA57-E314D7315916}"/>
               </a:ext>
             </a:extLst>
           </p:cNvPr>
@@ -15914,10 +15909,10 @@
           <p:cNvPr id="14" name="Rectangle 13">
             <a:extLst>
               <a:ext uri="{FF2B5EF4-FFF2-40B4-BE49-F238E27FC236}">
-                <a16:creationId xmlns:a16="http://schemas.microsoft.com/office/drawing/2014/main" xmlns="" id="{BA1F1CCA-5801-CC5B-119A-E3E19DD49D89}"/>
+                <a16:creationId xmlns:a16="http://schemas.microsoft.com/office/drawing/2014/main" id="{BA1F1CCA-5801-CC5B-119A-E3E19DD49D89}"/>
               </a:ext>
               <a:ext uri="{C183D7F6-B498-43B3-948B-1728B52AA6E4}">
-                <adec:decorative xmlns:adec="http://schemas.microsoft.com/office/drawing/2017/decorative" xmlns="" val="1"/>
+                <adec:decorative xmlns:adec="http://schemas.microsoft.com/office/drawing/2017/decorative" val="1"/>
               </a:ext>
             </a:extLst>
           </p:cNvPr>
@@ -15969,10 +15964,10 @@
           <p:cNvPr id="13" name="Rectangle 12">
             <a:extLst>
               <a:ext uri="{FF2B5EF4-FFF2-40B4-BE49-F238E27FC236}">
-                <a16:creationId xmlns:a16="http://schemas.microsoft.com/office/drawing/2014/main" xmlns="" id="{BEE657D3-93D0-4FB1-972C-646B605C4BF3}"/>
+                <a16:creationId xmlns:a16="http://schemas.microsoft.com/office/drawing/2014/main" id="{BEE657D3-93D0-4FB1-972C-646B605C4BF3}"/>
               </a:ext>
               <a:ext uri="{C183D7F6-B498-43B3-948B-1728B52AA6E4}">
-                <adec:decorative xmlns:adec="http://schemas.microsoft.com/office/drawing/2017/decorative" xmlns="" val="1"/>
+                <adec:decorative xmlns:adec="http://schemas.microsoft.com/office/drawing/2017/decorative" val="1"/>
               </a:ext>
             </a:extLst>
           </p:cNvPr>
@@ -16024,10 +16019,10 @@
           <p:cNvPr id="12" name="Oval 11">
             <a:extLst>
               <a:ext uri="{FF2B5EF4-FFF2-40B4-BE49-F238E27FC236}">
-                <a16:creationId xmlns:a16="http://schemas.microsoft.com/office/drawing/2014/main" xmlns="" id="{F7AA8180-1A53-234B-8CF6-65ADAA09EF5F}"/>
+                <a16:creationId xmlns:a16="http://schemas.microsoft.com/office/drawing/2014/main" id="{F7AA8180-1A53-234B-8CF6-65ADAA09EF5F}"/>
               </a:ext>
               <a:ext uri="{C183D7F6-B498-43B3-948B-1728B52AA6E4}">
-                <adec:decorative xmlns:adec="http://schemas.microsoft.com/office/drawing/2017/decorative" xmlns="" val="1"/>
+                <adec:decorative xmlns:adec="http://schemas.microsoft.com/office/drawing/2017/decorative" val="1"/>
               </a:ext>
             </a:extLst>
           </p:cNvPr>
@@ -16079,10 +16074,10 @@
           <p:cNvPr id="11" name="Rectangle 10">
             <a:extLst>
               <a:ext uri="{FF2B5EF4-FFF2-40B4-BE49-F238E27FC236}">
-                <a16:creationId xmlns:a16="http://schemas.microsoft.com/office/drawing/2014/main" xmlns="" id="{F1F94D7B-5469-B664-C915-DE6AC38BB4C3}"/>
+                <a16:creationId xmlns:a16="http://schemas.microsoft.com/office/drawing/2014/main" id="{F1F94D7B-5469-B664-C915-DE6AC38BB4C3}"/>
               </a:ext>
               <a:ext uri="{C183D7F6-B498-43B3-948B-1728B52AA6E4}">
-                <adec:decorative xmlns:adec="http://schemas.microsoft.com/office/drawing/2017/decorative" xmlns="" val="1"/>
+                <adec:decorative xmlns:adec="http://schemas.microsoft.com/office/drawing/2017/decorative" val="1"/>
               </a:ext>
             </a:extLst>
           </p:cNvPr>
@@ -16164,10 +16159,10 @@
           <p:cNvPr id="11" name="Rectangle 10">
             <a:extLst>
               <a:ext uri="{FF2B5EF4-FFF2-40B4-BE49-F238E27FC236}">
-                <a16:creationId xmlns:a16="http://schemas.microsoft.com/office/drawing/2014/main" xmlns="" id="{C3C5CADB-99AC-488A-7133-10E5DE765124}"/>
+                <a16:creationId xmlns:a16="http://schemas.microsoft.com/office/drawing/2014/main" id="{C3C5CADB-99AC-488A-7133-10E5DE765124}"/>
               </a:ext>
               <a:ext uri="{C183D7F6-B498-43B3-948B-1728B52AA6E4}">
-                <adec:decorative xmlns:adec="http://schemas.microsoft.com/office/drawing/2017/decorative" xmlns="" val="1"/>
+                <adec:decorative xmlns:adec="http://schemas.microsoft.com/office/drawing/2017/decorative" val="1"/>
               </a:ext>
             </a:extLst>
           </p:cNvPr>
@@ -16219,10 +16214,10 @@
           <p:cNvPr id="10" name="Oval 9">
             <a:extLst>
               <a:ext uri="{FF2B5EF4-FFF2-40B4-BE49-F238E27FC236}">
-                <a16:creationId xmlns:a16="http://schemas.microsoft.com/office/drawing/2014/main" xmlns="" id="{A203006B-749F-4FAF-D572-3B107413BE53}"/>
+                <a16:creationId xmlns:a16="http://schemas.microsoft.com/office/drawing/2014/main" id="{A203006B-749F-4FAF-D572-3B107413BE53}"/>
               </a:ext>
               <a:ext uri="{C183D7F6-B498-43B3-948B-1728B52AA6E4}">
-                <adec:decorative xmlns:adec="http://schemas.microsoft.com/office/drawing/2017/decorative" xmlns="" val="1"/>
+                <adec:decorative xmlns:adec="http://schemas.microsoft.com/office/drawing/2017/decorative" val="1"/>
               </a:ext>
             </a:extLst>
           </p:cNvPr>
@@ -16277,7 +16272,7 @@
           <p:cNvPr id="4" name="Title 1">
             <a:extLst>
               <a:ext uri="{FF2B5EF4-FFF2-40B4-BE49-F238E27FC236}">
-                <a16:creationId xmlns:a16="http://schemas.microsoft.com/office/drawing/2014/main" xmlns="" id="{2A7C7037-357A-DAC2-8D07-004BB280441F}"/>
+                <a16:creationId xmlns:a16="http://schemas.microsoft.com/office/drawing/2014/main" id="{2A7C7037-357A-DAC2-8D07-004BB280441F}"/>
               </a:ext>
             </a:extLst>
           </p:cNvPr>
@@ -16316,7 +16311,7 @@
           <p:cNvPr id="2" name="Content Placeholder 14">
             <a:extLst>
               <a:ext uri="{FF2B5EF4-FFF2-40B4-BE49-F238E27FC236}">
-                <a16:creationId xmlns:a16="http://schemas.microsoft.com/office/drawing/2014/main" xmlns="" id="{E95E211B-A490-5F92-9B2C-FEF3E25CE781}"/>
+                <a16:creationId xmlns:a16="http://schemas.microsoft.com/office/drawing/2014/main" id="{E95E211B-A490-5F92-9B2C-FEF3E25CE781}"/>
               </a:ext>
             </a:extLst>
           </p:cNvPr>
@@ -16401,7 +16396,7 @@
           <p:cNvPr id="13" name="Date Placeholder 3">
             <a:extLst>
               <a:ext uri="{FF2B5EF4-FFF2-40B4-BE49-F238E27FC236}">
-                <a16:creationId xmlns:a16="http://schemas.microsoft.com/office/drawing/2014/main" xmlns="" id="{53C0C011-1233-FC56-AA5C-DF88FB24AB28}"/>
+                <a16:creationId xmlns:a16="http://schemas.microsoft.com/office/drawing/2014/main" id="{53C0C011-1233-FC56-AA5C-DF88FB24AB28}"/>
               </a:ext>
             </a:extLst>
           </p:cNvPr>
@@ -16439,7 +16434,7 @@
           <p:cNvPr id="12" name="Footer Placeholder 4">
             <a:extLst>
               <a:ext uri="{FF2B5EF4-FFF2-40B4-BE49-F238E27FC236}">
-                <a16:creationId xmlns:a16="http://schemas.microsoft.com/office/drawing/2014/main" xmlns="" id="{BCEB22DD-F16F-C3EB-5439-20C05A9D8CC4}"/>
+                <a16:creationId xmlns:a16="http://schemas.microsoft.com/office/drawing/2014/main" id="{BCEB22DD-F16F-C3EB-5439-20C05A9D8CC4}"/>
               </a:ext>
             </a:extLst>
           </p:cNvPr>
@@ -16472,7 +16467,7 @@
           <p:cNvPr id="9" name="Slide Number Placeholder 5">
             <a:extLst>
               <a:ext uri="{FF2B5EF4-FFF2-40B4-BE49-F238E27FC236}">
-                <a16:creationId xmlns:a16="http://schemas.microsoft.com/office/drawing/2014/main" xmlns="" id="{C49AAE25-EEAC-AF75-FC81-21BC617D1B65}"/>
+                <a16:creationId xmlns:a16="http://schemas.microsoft.com/office/drawing/2014/main" id="{C49AAE25-EEAC-AF75-FC81-21BC617D1B65}"/>
               </a:ext>
             </a:extLst>
           </p:cNvPr>
@@ -16506,10 +16501,10 @@
           <p:cNvPr id="3" name="Oval 2">
             <a:extLst>
               <a:ext uri="{FF2B5EF4-FFF2-40B4-BE49-F238E27FC236}">
-                <a16:creationId xmlns:a16="http://schemas.microsoft.com/office/drawing/2014/main" xmlns="" id="{B3286C62-1802-4E61-4D00-A502D957675D}"/>
+                <a16:creationId xmlns:a16="http://schemas.microsoft.com/office/drawing/2014/main" id="{B3286C62-1802-4E61-4D00-A502D957675D}"/>
               </a:ext>
               <a:ext uri="{C183D7F6-B498-43B3-948B-1728B52AA6E4}">
-                <adec:decorative xmlns:adec="http://schemas.microsoft.com/office/drawing/2017/decorative" xmlns="" val="1"/>
+                <adec:decorative xmlns:adec="http://schemas.microsoft.com/office/drawing/2017/decorative" val="1"/>
               </a:ext>
             </a:extLst>
           </p:cNvPr>
@@ -16564,10 +16559,10 @@
           <p:cNvPr id="7" name="Rectangle 6">
             <a:extLst>
               <a:ext uri="{FF2B5EF4-FFF2-40B4-BE49-F238E27FC236}">
-                <a16:creationId xmlns:a16="http://schemas.microsoft.com/office/drawing/2014/main" xmlns="" id="{33643DA6-886C-DE80-B92C-E26740EAFE46}"/>
+                <a16:creationId xmlns:a16="http://schemas.microsoft.com/office/drawing/2014/main" id="{33643DA6-886C-DE80-B92C-E26740EAFE46}"/>
               </a:ext>
               <a:ext uri="{C183D7F6-B498-43B3-948B-1728B52AA6E4}">
-                <adec:decorative xmlns:adec="http://schemas.microsoft.com/office/drawing/2017/decorative" xmlns="" val="1"/>
+                <adec:decorative xmlns:adec="http://schemas.microsoft.com/office/drawing/2017/decorative" val="1"/>
               </a:ext>
             </a:extLst>
           </p:cNvPr>
@@ -16649,10 +16644,10 @@
           <p:cNvPr id="11" name="Rectangle 10">
             <a:extLst>
               <a:ext uri="{FF2B5EF4-FFF2-40B4-BE49-F238E27FC236}">
-                <a16:creationId xmlns:a16="http://schemas.microsoft.com/office/drawing/2014/main" xmlns="" id="{ECB9DAA1-B1FD-3717-3F96-795C852E7383}"/>
+                <a16:creationId xmlns:a16="http://schemas.microsoft.com/office/drawing/2014/main" id="{ECB9DAA1-B1FD-3717-3F96-795C852E7383}"/>
               </a:ext>
               <a:ext uri="{C183D7F6-B498-43B3-948B-1728B52AA6E4}">
-                <adec:decorative xmlns:adec="http://schemas.microsoft.com/office/drawing/2017/decorative" xmlns="" val="1"/>
+                <adec:decorative xmlns:adec="http://schemas.microsoft.com/office/drawing/2017/decorative" val="1"/>
               </a:ext>
             </a:extLst>
           </p:cNvPr>
@@ -16704,10 +16699,10 @@
           <p:cNvPr id="10" name="Oval 9">
             <a:extLst>
               <a:ext uri="{FF2B5EF4-FFF2-40B4-BE49-F238E27FC236}">
-                <a16:creationId xmlns:a16="http://schemas.microsoft.com/office/drawing/2014/main" xmlns="" id="{4965959E-D3BE-3B35-72E6-EE1774256C01}"/>
+                <a16:creationId xmlns:a16="http://schemas.microsoft.com/office/drawing/2014/main" id="{4965959E-D3BE-3B35-72E6-EE1774256C01}"/>
               </a:ext>
               <a:ext uri="{C183D7F6-B498-43B3-948B-1728B52AA6E4}">
-                <adec:decorative xmlns:adec="http://schemas.microsoft.com/office/drawing/2017/decorative" xmlns="" val="1"/>
+                <adec:decorative xmlns:adec="http://schemas.microsoft.com/office/drawing/2017/decorative" val="1"/>
               </a:ext>
             </a:extLst>
           </p:cNvPr>
@@ -16762,7 +16757,7 @@
           <p:cNvPr id="2" name="Title 1">
             <a:extLst>
               <a:ext uri="{FF2B5EF4-FFF2-40B4-BE49-F238E27FC236}">
-                <a16:creationId xmlns:a16="http://schemas.microsoft.com/office/drawing/2014/main" xmlns="" id="{BC7433D9-FD02-59E2-0F81-A0B7201D2DA0}"/>
+                <a16:creationId xmlns:a16="http://schemas.microsoft.com/office/drawing/2014/main" id="{BC7433D9-FD02-59E2-0F81-A0B7201D2DA0}"/>
               </a:ext>
             </a:extLst>
           </p:cNvPr>
@@ -16801,7 +16796,7 @@
           <p:cNvPr id="4" name="Content Placeholder 14">
             <a:extLst>
               <a:ext uri="{FF2B5EF4-FFF2-40B4-BE49-F238E27FC236}">
-                <a16:creationId xmlns:a16="http://schemas.microsoft.com/office/drawing/2014/main" xmlns="" id="{00DD584D-65FC-A106-C28D-A6D3A6A06AEC}"/>
+                <a16:creationId xmlns:a16="http://schemas.microsoft.com/office/drawing/2014/main" id="{00DD584D-65FC-A106-C28D-A6D3A6A06AEC}"/>
               </a:ext>
             </a:extLst>
           </p:cNvPr>
@@ -16886,7 +16881,7 @@
           <p:cNvPr id="13" name="Date Placeholder 3">
             <a:extLst>
               <a:ext uri="{FF2B5EF4-FFF2-40B4-BE49-F238E27FC236}">
-                <a16:creationId xmlns:a16="http://schemas.microsoft.com/office/drawing/2014/main" xmlns="" id="{2C749CC8-6079-025A-0476-7D1E02235F57}"/>
+                <a16:creationId xmlns:a16="http://schemas.microsoft.com/office/drawing/2014/main" id="{2C749CC8-6079-025A-0476-7D1E02235F57}"/>
               </a:ext>
             </a:extLst>
           </p:cNvPr>
@@ -16924,7 +16919,7 @@
           <p:cNvPr id="12" name="Footer Placeholder 4">
             <a:extLst>
               <a:ext uri="{FF2B5EF4-FFF2-40B4-BE49-F238E27FC236}">
-                <a16:creationId xmlns:a16="http://schemas.microsoft.com/office/drawing/2014/main" xmlns="" id="{BB622798-A9D5-13A8-E6EB-283FF564E7EE}"/>
+                <a16:creationId xmlns:a16="http://schemas.microsoft.com/office/drawing/2014/main" id="{BB622798-A9D5-13A8-E6EB-283FF564E7EE}"/>
               </a:ext>
             </a:extLst>
           </p:cNvPr>
@@ -16957,7 +16952,7 @@
           <p:cNvPr id="9" name="Slide Number Placeholder 5">
             <a:extLst>
               <a:ext uri="{FF2B5EF4-FFF2-40B4-BE49-F238E27FC236}">
-                <a16:creationId xmlns:a16="http://schemas.microsoft.com/office/drawing/2014/main" xmlns="" id="{178BA8E0-712A-77CA-9713-4F206AB0ECBE}"/>
+                <a16:creationId xmlns:a16="http://schemas.microsoft.com/office/drawing/2014/main" id="{178BA8E0-712A-77CA-9713-4F206AB0ECBE}"/>
               </a:ext>
             </a:extLst>
           </p:cNvPr>
@@ -16991,10 +16986,10 @@
           <p:cNvPr id="3" name="Oval 2">
             <a:extLst>
               <a:ext uri="{FF2B5EF4-FFF2-40B4-BE49-F238E27FC236}">
-                <a16:creationId xmlns:a16="http://schemas.microsoft.com/office/drawing/2014/main" xmlns="" id="{A2F44F8D-8952-05F9-99FA-D64FD2F50F08}"/>
+                <a16:creationId xmlns:a16="http://schemas.microsoft.com/office/drawing/2014/main" id="{A2F44F8D-8952-05F9-99FA-D64FD2F50F08}"/>
               </a:ext>
               <a:ext uri="{C183D7F6-B498-43B3-948B-1728B52AA6E4}">
-                <adec:decorative xmlns:adec="http://schemas.microsoft.com/office/drawing/2017/decorative" xmlns="" val="1"/>
+                <adec:decorative xmlns:adec="http://schemas.microsoft.com/office/drawing/2017/decorative" val="1"/>
               </a:ext>
             </a:extLst>
           </p:cNvPr>
@@ -17049,10 +17044,10 @@
           <p:cNvPr id="7" name="Rectangle 6">
             <a:extLst>
               <a:ext uri="{FF2B5EF4-FFF2-40B4-BE49-F238E27FC236}">
-                <a16:creationId xmlns:a16="http://schemas.microsoft.com/office/drawing/2014/main" xmlns="" id="{9FB60CB7-7D69-80F4-AE1F-366A7F0A26D7}"/>
+                <a16:creationId xmlns:a16="http://schemas.microsoft.com/office/drawing/2014/main" id="{9FB60CB7-7D69-80F4-AE1F-366A7F0A26D7}"/>
               </a:ext>
               <a:ext uri="{C183D7F6-B498-43B3-948B-1728B52AA6E4}">
-                <adec:decorative xmlns:adec="http://schemas.microsoft.com/office/drawing/2017/decorative" xmlns="" val="1"/>
+                <adec:decorative xmlns:adec="http://schemas.microsoft.com/office/drawing/2017/decorative" val="1"/>
               </a:ext>
             </a:extLst>
           </p:cNvPr>
@@ -17134,10 +17129,10 @@
           <p:cNvPr id="11" name="Rectangle 10">
             <a:extLst>
               <a:ext uri="{FF2B5EF4-FFF2-40B4-BE49-F238E27FC236}">
-                <a16:creationId xmlns:a16="http://schemas.microsoft.com/office/drawing/2014/main" xmlns="" id="{71105965-4EE5-E185-7666-27A5E5F11500}"/>
+                <a16:creationId xmlns:a16="http://schemas.microsoft.com/office/drawing/2014/main" id="{71105965-4EE5-E185-7666-27A5E5F11500}"/>
               </a:ext>
               <a:ext uri="{C183D7F6-B498-43B3-948B-1728B52AA6E4}">
-                <adec:decorative xmlns:adec="http://schemas.microsoft.com/office/drawing/2017/decorative" xmlns="" val="1"/>
+                <adec:decorative xmlns:adec="http://schemas.microsoft.com/office/drawing/2017/decorative" val="1"/>
               </a:ext>
             </a:extLst>
           </p:cNvPr>
@@ -17189,10 +17184,10 @@
           <p:cNvPr id="10" name="Oval 9">
             <a:extLst>
               <a:ext uri="{FF2B5EF4-FFF2-40B4-BE49-F238E27FC236}">
-                <a16:creationId xmlns:a16="http://schemas.microsoft.com/office/drawing/2014/main" xmlns="" id="{6308540A-D298-C62B-CC21-BC7C6B5F73DA}"/>
+                <a16:creationId xmlns:a16="http://schemas.microsoft.com/office/drawing/2014/main" id="{6308540A-D298-C62B-CC21-BC7C6B5F73DA}"/>
               </a:ext>
               <a:ext uri="{C183D7F6-B498-43B3-948B-1728B52AA6E4}">
-                <adec:decorative xmlns:adec="http://schemas.microsoft.com/office/drawing/2017/decorative" xmlns="" val="1"/>
+                <adec:decorative xmlns:adec="http://schemas.microsoft.com/office/drawing/2017/decorative" val="1"/>
               </a:ext>
             </a:extLst>
           </p:cNvPr>
@@ -17247,7 +17242,7 @@
           <p:cNvPr id="2" name="Title 1">
             <a:extLst>
               <a:ext uri="{FF2B5EF4-FFF2-40B4-BE49-F238E27FC236}">
-                <a16:creationId xmlns:a16="http://schemas.microsoft.com/office/drawing/2014/main" xmlns="" id="{BC7433D9-FD02-59E2-0F81-A0B7201D2DA0}"/>
+                <a16:creationId xmlns:a16="http://schemas.microsoft.com/office/drawing/2014/main" id="{BC7433D9-FD02-59E2-0F81-A0B7201D2DA0}"/>
               </a:ext>
             </a:extLst>
           </p:cNvPr>
@@ -17286,7 +17281,7 @@
           <p:cNvPr id="5" name="Content Placeholder 14">
             <a:extLst>
               <a:ext uri="{FF2B5EF4-FFF2-40B4-BE49-F238E27FC236}">
-                <a16:creationId xmlns:a16="http://schemas.microsoft.com/office/drawing/2014/main" xmlns="" id="{A93AF98B-99CB-F2D7-B247-51CE41CD414B}"/>
+                <a16:creationId xmlns:a16="http://schemas.microsoft.com/office/drawing/2014/main" id="{A93AF98B-99CB-F2D7-B247-51CE41CD414B}"/>
               </a:ext>
             </a:extLst>
           </p:cNvPr>
@@ -17371,7 +17366,7 @@
           <p:cNvPr id="13" name="Date Placeholder 3">
             <a:extLst>
               <a:ext uri="{FF2B5EF4-FFF2-40B4-BE49-F238E27FC236}">
-                <a16:creationId xmlns:a16="http://schemas.microsoft.com/office/drawing/2014/main" xmlns="" id="{A0F4DE3C-88B6-381C-78FC-8F935A2318D3}"/>
+                <a16:creationId xmlns:a16="http://schemas.microsoft.com/office/drawing/2014/main" id="{A0F4DE3C-88B6-381C-78FC-8F935A2318D3}"/>
               </a:ext>
             </a:extLst>
           </p:cNvPr>
@@ -17409,7 +17404,7 @@
           <p:cNvPr id="12" name="Footer Placeholder 4">
             <a:extLst>
               <a:ext uri="{FF2B5EF4-FFF2-40B4-BE49-F238E27FC236}">
-                <a16:creationId xmlns:a16="http://schemas.microsoft.com/office/drawing/2014/main" xmlns="" id="{C5AFEEB4-7A81-9408-C4EF-D8AD90FFC2A9}"/>
+                <a16:creationId xmlns:a16="http://schemas.microsoft.com/office/drawing/2014/main" id="{C5AFEEB4-7A81-9408-C4EF-D8AD90FFC2A9}"/>
               </a:ext>
             </a:extLst>
           </p:cNvPr>
@@ -17442,7 +17437,7 @@
           <p:cNvPr id="9" name="Slide Number Placeholder 5">
             <a:extLst>
               <a:ext uri="{FF2B5EF4-FFF2-40B4-BE49-F238E27FC236}">
-                <a16:creationId xmlns:a16="http://schemas.microsoft.com/office/drawing/2014/main" xmlns="" id="{5F48F71D-8479-0A54-8684-3F60D22DB4DB}"/>
+                <a16:creationId xmlns:a16="http://schemas.microsoft.com/office/drawing/2014/main" id="{5F48F71D-8479-0A54-8684-3F60D22DB4DB}"/>
               </a:ext>
             </a:extLst>
           </p:cNvPr>
@@ -17476,10 +17471,10 @@
           <p:cNvPr id="3" name="Oval 2">
             <a:extLst>
               <a:ext uri="{FF2B5EF4-FFF2-40B4-BE49-F238E27FC236}">
-                <a16:creationId xmlns:a16="http://schemas.microsoft.com/office/drawing/2014/main" xmlns="" id="{16816AA6-A60B-C6E1-2885-EB6E2B1FFBB5}"/>
+                <a16:creationId xmlns:a16="http://schemas.microsoft.com/office/drawing/2014/main" id="{16816AA6-A60B-C6E1-2885-EB6E2B1FFBB5}"/>
               </a:ext>
               <a:ext uri="{C183D7F6-B498-43B3-948B-1728B52AA6E4}">
-                <adec:decorative xmlns:adec="http://schemas.microsoft.com/office/drawing/2017/decorative" xmlns="" val="1"/>
+                <adec:decorative xmlns:adec="http://schemas.microsoft.com/office/drawing/2017/decorative" val="1"/>
               </a:ext>
             </a:extLst>
           </p:cNvPr>
@@ -17534,10 +17529,10 @@
           <p:cNvPr id="7" name="Rectangle 6">
             <a:extLst>
               <a:ext uri="{FF2B5EF4-FFF2-40B4-BE49-F238E27FC236}">
-                <a16:creationId xmlns:a16="http://schemas.microsoft.com/office/drawing/2014/main" xmlns="" id="{5760E10A-DF0B-1339-7826-107A95CC17D2}"/>
+                <a16:creationId xmlns:a16="http://schemas.microsoft.com/office/drawing/2014/main" id="{5760E10A-DF0B-1339-7826-107A95CC17D2}"/>
               </a:ext>
               <a:ext uri="{C183D7F6-B498-43B3-948B-1728B52AA6E4}">
-                <adec:decorative xmlns:adec="http://schemas.microsoft.com/office/drawing/2017/decorative" xmlns="" val="1"/>
+                <adec:decorative xmlns:adec="http://schemas.microsoft.com/office/drawing/2017/decorative" val="1"/>
               </a:ext>
             </a:extLst>
           </p:cNvPr>
@@ -17619,10 +17614,10 @@
           <p:cNvPr id="12" name="Rectangle 11">
             <a:extLst>
               <a:ext uri="{FF2B5EF4-FFF2-40B4-BE49-F238E27FC236}">
-                <a16:creationId xmlns:a16="http://schemas.microsoft.com/office/drawing/2014/main" xmlns="" id="{BC489336-0C23-2A47-DB03-CA00009C604F}"/>
+                <a16:creationId xmlns:a16="http://schemas.microsoft.com/office/drawing/2014/main" id="{BC489336-0C23-2A47-DB03-CA00009C604F}"/>
               </a:ext>
               <a:ext uri="{C183D7F6-B498-43B3-948B-1728B52AA6E4}">
-                <adec:decorative xmlns:adec="http://schemas.microsoft.com/office/drawing/2017/decorative" xmlns="" val="1"/>
+                <adec:decorative xmlns:adec="http://schemas.microsoft.com/office/drawing/2017/decorative" val="1"/>
               </a:ext>
             </a:extLst>
           </p:cNvPr>
@@ -17674,10 +17669,10 @@
           <p:cNvPr id="7" name="Oval 6">
             <a:extLst>
               <a:ext uri="{FF2B5EF4-FFF2-40B4-BE49-F238E27FC236}">
-                <a16:creationId xmlns:a16="http://schemas.microsoft.com/office/drawing/2014/main" xmlns="" id="{E8A6D03D-AABD-4AB3-9E1E-4DF31BB8536D}"/>
+                <a16:creationId xmlns:a16="http://schemas.microsoft.com/office/drawing/2014/main" id="{E8A6D03D-AABD-4AB3-9E1E-4DF31BB8536D}"/>
               </a:ext>
               <a:ext uri="{C183D7F6-B498-43B3-948B-1728B52AA6E4}">
-                <adec:decorative xmlns:adec="http://schemas.microsoft.com/office/drawing/2017/decorative" xmlns="" val="1"/>
+                <adec:decorative xmlns:adec="http://schemas.microsoft.com/office/drawing/2017/decorative" val="1"/>
               </a:ext>
             </a:extLst>
           </p:cNvPr>
@@ -17732,7 +17727,7 @@
           <p:cNvPr id="11" name="Picture Placeholder 10">
             <a:extLst>
               <a:ext uri="{FF2B5EF4-FFF2-40B4-BE49-F238E27FC236}">
-                <a16:creationId xmlns:a16="http://schemas.microsoft.com/office/drawing/2014/main" xmlns="" id="{7F8EA658-2652-6F81-1B04-D50C60A3F171}"/>
+                <a16:creationId xmlns:a16="http://schemas.microsoft.com/office/drawing/2014/main" id="{7F8EA658-2652-6F81-1B04-D50C60A3F171}"/>
               </a:ext>
             </a:extLst>
           </p:cNvPr>
@@ -17762,7 +17757,7 @@
           <p:cNvPr id="4" name="Content Placeholder 14">
             <a:extLst>
               <a:ext uri="{FF2B5EF4-FFF2-40B4-BE49-F238E27FC236}">
-                <a16:creationId xmlns:a16="http://schemas.microsoft.com/office/drawing/2014/main" xmlns="" id="{3C13A46E-F797-1C4C-30CB-A1D1CF1DE3B6}"/>
+                <a16:creationId xmlns:a16="http://schemas.microsoft.com/office/drawing/2014/main" id="{3C13A46E-F797-1C4C-30CB-A1D1CF1DE3B6}"/>
               </a:ext>
             </a:extLst>
           </p:cNvPr>
@@ -17847,7 +17842,7 @@
           <p:cNvPr id="2" name="Title 1">
             <a:extLst>
               <a:ext uri="{FF2B5EF4-FFF2-40B4-BE49-F238E27FC236}">
-                <a16:creationId xmlns:a16="http://schemas.microsoft.com/office/drawing/2014/main" xmlns="" id="{FAF3BB49-A328-F121-7F27-DEB7C3CC2B0F}"/>
+                <a16:creationId xmlns:a16="http://schemas.microsoft.com/office/drawing/2014/main" id="{FAF3BB49-A328-F121-7F27-DEB7C3CC2B0F}"/>
               </a:ext>
             </a:extLst>
           </p:cNvPr>
@@ -17886,7 +17881,7 @@
           <p:cNvPr id="17" name="Date Placeholder 2">
             <a:extLst>
               <a:ext uri="{FF2B5EF4-FFF2-40B4-BE49-F238E27FC236}">
-                <a16:creationId xmlns:a16="http://schemas.microsoft.com/office/drawing/2014/main" xmlns="" id="{007DB0D8-36F3-541C-5D5B-BE7F00E8492F}"/>
+                <a16:creationId xmlns:a16="http://schemas.microsoft.com/office/drawing/2014/main" id="{007DB0D8-36F3-541C-5D5B-BE7F00E8492F}"/>
               </a:ext>
             </a:extLst>
           </p:cNvPr>
@@ -17931,7 +17926,7 @@
           <p:cNvPr id="16" name="Footer Placeholder 3">
             <a:extLst>
               <a:ext uri="{FF2B5EF4-FFF2-40B4-BE49-F238E27FC236}">
-                <a16:creationId xmlns:a16="http://schemas.microsoft.com/office/drawing/2014/main" xmlns="" id="{329D90C1-EB79-260E-06B5-66A03CAE41D8}"/>
+                <a16:creationId xmlns:a16="http://schemas.microsoft.com/office/drawing/2014/main" id="{329D90C1-EB79-260E-06B5-66A03CAE41D8}"/>
               </a:ext>
             </a:extLst>
           </p:cNvPr>
@@ -17970,7 +17965,7 @@
           <p:cNvPr id="15" name="Slide Number Placeholder 4">
             <a:extLst>
               <a:ext uri="{FF2B5EF4-FFF2-40B4-BE49-F238E27FC236}">
-                <a16:creationId xmlns:a16="http://schemas.microsoft.com/office/drawing/2014/main" xmlns="" id="{D2A9EC63-48AA-37EC-23B0-6B17D3236C11}"/>
+                <a16:creationId xmlns:a16="http://schemas.microsoft.com/office/drawing/2014/main" id="{D2A9EC63-48AA-37EC-23B0-6B17D3236C11}"/>
               </a:ext>
             </a:extLst>
           </p:cNvPr>
@@ -18011,10 +18006,10 @@
           <p:cNvPr id="3" name="Oval 2">
             <a:extLst>
               <a:ext uri="{FF2B5EF4-FFF2-40B4-BE49-F238E27FC236}">
-                <a16:creationId xmlns:a16="http://schemas.microsoft.com/office/drawing/2014/main" xmlns="" id="{F4D911F7-7994-03E9-8128-10F10F99F5D4}"/>
+                <a16:creationId xmlns:a16="http://schemas.microsoft.com/office/drawing/2014/main" id="{F4D911F7-7994-03E9-8128-10F10F99F5D4}"/>
               </a:ext>
               <a:ext uri="{C183D7F6-B498-43B3-948B-1728B52AA6E4}">
-                <adec:decorative xmlns:adec="http://schemas.microsoft.com/office/drawing/2017/decorative" xmlns="" val="1"/>
+                <adec:decorative xmlns:adec="http://schemas.microsoft.com/office/drawing/2017/decorative" val="1"/>
               </a:ext>
             </a:extLst>
           </p:cNvPr>
@@ -18069,10 +18064,10 @@
           <p:cNvPr id="5" name="Rectangle 4">
             <a:extLst>
               <a:ext uri="{FF2B5EF4-FFF2-40B4-BE49-F238E27FC236}">
-                <a16:creationId xmlns:a16="http://schemas.microsoft.com/office/drawing/2014/main" xmlns="" id="{D1B32CED-CF03-686F-9EA0-80AD67E6EBA5}"/>
+                <a16:creationId xmlns:a16="http://schemas.microsoft.com/office/drawing/2014/main" id="{D1B32CED-CF03-686F-9EA0-80AD67E6EBA5}"/>
               </a:ext>
               <a:ext uri="{C183D7F6-B498-43B3-948B-1728B52AA6E4}">
-                <adec:decorative xmlns:adec="http://schemas.microsoft.com/office/drawing/2017/decorative" xmlns="" val="1"/>
+                <adec:decorative xmlns:adec="http://schemas.microsoft.com/office/drawing/2017/decorative" val="1"/>
               </a:ext>
             </a:extLst>
           </p:cNvPr>
@@ -18154,10 +18149,10 @@
           <p:cNvPr id="7" name="Rectangle 6">
             <a:extLst>
               <a:ext uri="{FF2B5EF4-FFF2-40B4-BE49-F238E27FC236}">
-                <a16:creationId xmlns:a16="http://schemas.microsoft.com/office/drawing/2014/main" xmlns="" id="{09DA9BE4-08A4-4088-DC5B-3F23F0E302F9}"/>
+                <a16:creationId xmlns:a16="http://schemas.microsoft.com/office/drawing/2014/main" id="{09DA9BE4-08A4-4088-DC5B-3F23F0E302F9}"/>
               </a:ext>
               <a:ext uri="{C183D7F6-B498-43B3-948B-1728B52AA6E4}">
-                <adec:decorative xmlns:adec="http://schemas.microsoft.com/office/drawing/2017/decorative" xmlns="" val="1"/>
+                <adec:decorative xmlns:adec="http://schemas.microsoft.com/office/drawing/2017/decorative" val="1"/>
               </a:ext>
             </a:extLst>
           </p:cNvPr>
@@ -18209,10 +18204,10 @@
           <p:cNvPr id="6" name="Oval 5">
             <a:extLst>
               <a:ext uri="{FF2B5EF4-FFF2-40B4-BE49-F238E27FC236}">
-                <a16:creationId xmlns:a16="http://schemas.microsoft.com/office/drawing/2014/main" xmlns="" id="{51F93313-9B95-1A0F-3166-8AA3A63DFC01}"/>
+                <a16:creationId xmlns:a16="http://schemas.microsoft.com/office/drawing/2014/main" id="{51F93313-9B95-1A0F-3166-8AA3A63DFC01}"/>
               </a:ext>
               <a:ext uri="{C183D7F6-B498-43B3-948B-1728B52AA6E4}">
-                <adec:decorative xmlns:adec="http://schemas.microsoft.com/office/drawing/2017/decorative" xmlns="" val="1"/>
+                <adec:decorative xmlns:adec="http://schemas.microsoft.com/office/drawing/2017/decorative" val="1"/>
               </a:ext>
             </a:extLst>
           </p:cNvPr>
@@ -18267,7 +18262,7 @@
           <p:cNvPr id="11" name="Picture Placeholder 10">
             <a:extLst>
               <a:ext uri="{FF2B5EF4-FFF2-40B4-BE49-F238E27FC236}">
-                <a16:creationId xmlns:a16="http://schemas.microsoft.com/office/drawing/2014/main" xmlns="" id="{7F8EA658-2652-6F81-1B04-D50C60A3F171}"/>
+                <a16:creationId xmlns:a16="http://schemas.microsoft.com/office/drawing/2014/main" id="{7F8EA658-2652-6F81-1B04-D50C60A3F171}"/>
               </a:ext>
             </a:extLst>
           </p:cNvPr>
@@ -18297,7 +18292,7 @@
           <p:cNvPr id="5" name="Content Placeholder 14">
             <a:extLst>
               <a:ext uri="{FF2B5EF4-FFF2-40B4-BE49-F238E27FC236}">
-                <a16:creationId xmlns:a16="http://schemas.microsoft.com/office/drawing/2014/main" xmlns="" id="{9B6ED53D-AC89-453B-A25B-CC64DA3F2155}"/>
+                <a16:creationId xmlns:a16="http://schemas.microsoft.com/office/drawing/2014/main" id="{9B6ED53D-AC89-453B-A25B-CC64DA3F2155}"/>
               </a:ext>
             </a:extLst>
           </p:cNvPr>
@@ -18382,7 +18377,7 @@
           <p:cNvPr id="2" name="Title 1">
             <a:extLst>
               <a:ext uri="{FF2B5EF4-FFF2-40B4-BE49-F238E27FC236}">
-                <a16:creationId xmlns:a16="http://schemas.microsoft.com/office/drawing/2014/main" xmlns="" id="{FAF3BB49-A328-F121-7F27-DEB7C3CC2B0F}"/>
+                <a16:creationId xmlns:a16="http://schemas.microsoft.com/office/drawing/2014/main" id="{FAF3BB49-A328-F121-7F27-DEB7C3CC2B0F}"/>
               </a:ext>
             </a:extLst>
           </p:cNvPr>
@@ -18421,7 +18416,7 @@
           <p:cNvPr id="17" name="Date Placeholder 2">
             <a:extLst>
               <a:ext uri="{FF2B5EF4-FFF2-40B4-BE49-F238E27FC236}">
-                <a16:creationId xmlns:a16="http://schemas.microsoft.com/office/drawing/2014/main" xmlns="" id="{AA8B19BB-10BD-EE0C-B647-96D5DC23860C}"/>
+                <a16:creationId xmlns:a16="http://schemas.microsoft.com/office/drawing/2014/main" id="{AA8B19BB-10BD-EE0C-B647-96D5DC23860C}"/>
               </a:ext>
             </a:extLst>
           </p:cNvPr>
@@ -18466,7 +18461,7 @@
           <p:cNvPr id="16" name="Footer Placeholder 3">
             <a:extLst>
               <a:ext uri="{FF2B5EF4-FFF2-40B4-BE49-F238E27FC236}">
-                <a16:creationId xmlns:a16="http://schemas.microsoft.com/office/drawing/2014/main" xmlns="" id="{194587B9-3271-1DBD-D567-666B86C3F583}"/>
+                <a16:creationId xmlns:a16="http://schemas.microsoft.com/office/drawing/2014/main" id="{194587B9-3271-1DBD-D567-666B86C3F583}"/>
               </a:ext>
             </a:extLst>
           </p:cNvPr>
@@ -18505,7 +18500,7 @@
           <p:cNvPr id="15" name="Slide Number Placeholder 4">
             <a:extLst>
               <a:ext uri="{FF2B5EF4-FFF2-40B4-BE49-F238E27FC236}">
-                <a16:creationId xmlns:a16="http://schemas.microsoft.com/office/drawing/2014/main" xmlns="" id="{514ABFF7-DC89-EED7-524C-B586DAD1EF37}"/>
+                <a16:creationId xmlns:a16="http://schemas.microsoft.com/office/drawing/2014/main" id="{514ABFF7-DC89-EED7-524C-B586DAD1EF37}"/>
               </a:ext>
             </a:extLst>
           </p:cNvPr>
@@ -18546,10 +18541,10 @@
           <p:cNvPr id="3" name="Oval 2">
             <a:extLst>
               <a:ext uri="{FF2B5EF4-FFF2-40B4-BE49-F238E27FC236}">
-                <a16:creationId xmlns:a16="http://schemas.microsoft.com/office/drawing/2014/main" xmlns="" id="{5241CE73-4958-1726-C9B4-B1B2394278C5}"/>
+                <a16:creationId xmlns:a16="http://schemas.microsoft.com/office/drawing/2014/main" id="{5241CE73-4958-1726-C9B4-B1B2394278C5}"/>
               </a:ext>
               <a:ext uri="{C183D7F6-B498-43B3-948B-1728B52AA6E4}">
-                <adec:decorative xmlns:adec="http://schemas.microsoft.com/office/drawing/2017/decorative" xmlns="" val="1"/>
+                <adec:decorative xmlns:adec="http://schemas.microsoft.com/office/drawing/2017/decorative" val="1"/>
               </a:ext>
             </a:extLst>
           </p:cNvPr>
@@ -18604,10 +18599,10 @@
           <p:cNvPr id="4" name="Rectangle 3">
             <a:extLst>
               <a:ext uri="{FF2B5EF4-FFF2-40B4-BE49-F238E27FC236}">
-                <a16:creationId xmlns:a16="http://schemas.microsoft.com/office/drawing/2014/main" xmlns="" id="{7F202D8C-E98F-7728-52D1-B44C8EB257E1}"/>
+                <a16:creationId xmlns:a16="http://schemas.microsoft.com/office/drawing/2014/main" id="{7F202D8C-E98F-7728-52D1-B44C8EB257E1}"/>
               </a:ext>
               <a:ext uri="{C183D7F6-B498-43B3-948B-1728B52AA6E4}">
-                <adec:decorative xmlns:adec="http://schemas.microsoft.com/office/drawing/2017/decorative" xmlns="" val="1"/>
+                <adec:decorative xmlns:adec="http://schemas.microsoft.com/office/drawing/2017/decorative" val="1"/>
               </a:ext>
             </a:extLst>
           </p:cNvPr>
@@ -18689,10 +18684,10 @@
           <p:cNvPr id="12" name="Rectangle 11">
             <a:extLst>
               <a:ext uri="{FF2B5EF4-FFF2-40B4-BE49-F238E27FC236}">
-                <a16:creationId xmlns:a16="http://schemas.microsoft.com/office/drawing/2014/main" xmlns="" id="{1BC20976-8E96-EA29-B265-5660CEC8E2C0}"/>
+                <a16:creationId xmlns:a16="http://schemas.microsoft.com/office/drawing/2014/main" id="{1BC20976-8E96-EA29-B265-5660CEC8E2C0}"/>
               </a:ext>
               <a:ext uri="{C183D7F6-B498-43B3-948B-1728B52AA6E4}">
-                <adec:decorative xmlns:adec="http://schemas.microsoft.com/office/drawing/2017/decorative" xmlns="" val="1"/>
+                <adec:decorative xmlns:adec="http://schemas.microsoft.com/office/drawing/2017/decorative" val="1"/>
               </a:ext>
             </a:extLst>
           </p:cNvPr>
@@ -18744,10 +18739,10 @@
           <p:cNvPr id="10" name="Oval 9">
             <a:extLst>
               <a:ext uri="{FF2B5EF4-FFF2-40B4-BE49-F238E27FC236}">
-                <a16:creationId xmlns:a16="http://schemas.microsoft.com/office/drawing/2014/main" xmlns="" id="{201513C9-9EF0-A484-2C49-5EE294C48176}"/>
+                <a16:creationId xmlns:a16="http://schemas.microsoft.com/office/drawing/2014/main" id="{201513C9-9EF0-A484-2C49-5EE294C48176}"/>
               </a:ext>
               <a:ext uri="{C183D7F6-B498-43B3-948B-1728B52AA6E4}">
-                <adec:decorative xmlns:adec="http://schemas.microsoft.com/office/drawing/2017/decorative" xmlns="" val="1"/>
+                <adec:decorative xmlns:adec="http://schemas.microsoft.com/office/drawing/2017/decorative" val="1"/>
               </a:ext>
             </a:extLst>
           </p:cNvPr>
@@ -18802,7 +18797,7 @@
           <p:cNvPr id="2" name="Title 1">
             <a:extLst>
               <a:ext uri="{FF2B5EF4-FFF2-40B4-BE49-F238E27FC236}">
-                <a16:creationId xmlns:a16="http://schemas.microsoft.com/office/drawing/2014/main" xmlns="" id="{FAF3BB49-A328-F121-7F27-DEB7C3CC2B0F}"/>
+                <a16:creationId xmlns:a16="http://schemas.microsoft.com/office/drawing/2014/main" id="{FAF3BB49-A328-F121-7F27-DEB7C3CC2B0F}"/>
               </a:ext>
             </a:extLst>
           </p:cNvPr>
@@ -18841,7 +18836,7 @@
           <p:cNvPr id="11" name="Picture Placeholder 10">
             <a:extLst>
               <a:ext uri="{FF2B5EF4-FFF2-40B4-BE49-F238E27FC236}">
-                <a16:creationId xmlns:a16="http://schemas.microsoft.com/office/drawing/2014/main" xmlns="" id="{7F8EA658-2652-6F81-1B04-D50C60A3F171}"/>
+                <a16:creationId xmlns:a16="http://schemas.microsoft.com/office/drawing/2014/main" id="{7F8EA658-2652-6F81-1B04-D50C60A3F171}"/>
               </a:ext>
             </a:extLst>
           </p:cNvPr>
@@ -18871,7 +18866,7 @@
           <p:cNvPr id="3" name="Content Placeholder 14">
             <a:extLst>
               <a:ext uri="{FF2B5EF4-FFF2-40B4-BE49-F238E27FC236}">
-                <a16:creationId xmlns:a16="http://schemas.microsoft.com/office/drawing/2014/main" xmlns="" id="{2F6F66EE-0D34-BF84-840D-5515C61DE457}"/>
+                <a16:creationId xmlns:a16="http://schemas.microsoft.com/office/drawing/2014/main" id="{2F6F66EE-0D34-BF84-840D-5515C61DE457}"/>
               </a:ext>
             </a:extLst>
           </p:cNvPr>
@@ -18956,7 +18951,7 @@
           <p:cNvPr id="14" name="Date Placeholder 2">
             <a:extLst>
               <a:ext uri="{FF2B5EF4-FFF2-40B4-BE49-F238E27FC236}">
-                <a16:creationId xmlns:a16="http://schemas.microsoft.com/office/drawing/2014/main" xmlns="" id="{20C2E4E4-F31A-5808-A175-A469DDB19751}"/>
+                <a16:creationId xmlns:a16="http://schemas.microsoft.com/office/drawing/2014/main" id="{20C2E4E4-F31A-5808-A175-A469DDB19751}"/>
               </a:ext>
             </a:extLst>
           </p:cNvPr>
@@ -19001,7 +18996,7 @@
           <p:cNvPr id="13" name="Footer Placeholder 3">
             <a:extLst>
               <a:ext uri="{FF2B5EF4-FFF2-40B4-BE49-F238E27FC236}">
-                <a16:creationId xmlns:a16="http://schemas.microsoft.com/office/drawing/2014/main" xmlns="" id="{482603C5-7507-EB69-733F-4C701FC008E9}"/>
+                <a16:creationId xmlns:a16="http://schemas.microsoft.com/office/drawing/2014/main" id="{482603C5-7507-EB69-733F-4C701FC008E9}"/>
               </a:ext>
             </a:extLst>
           </p:cNvPr>
@@ -19040,7 +19035,7 @@
           <p:cNvPr id="7" name="Slide Number Placeholder 4">
             <a:extLst>
               <a:ext uri="{FF2B5EF4-FFF2-40B4-BE49-F238E27FC236}">
-                <a16:creationId xmlns:a16="http://schemas.microsoft.com/office/drawing/2014/main" xmlns="" id="{A0D4AA14-0EE9-A172-CD3A-EBE8A6A77931}"/>
+                <a16:creationId xmlns:a16="http://schemas.microsoft.com/office/drawing/2014/main" id="{A0D4AA14-0EE9-A172-CD3A-EBE8A6A77931}"/>
               </a:ext>
             </a:extLst>
           </p:cNvPr>
@@ -19081,10 +19076,10 @@
           <p:cNvPr id="5" name="Oval 4">
             <a:extLst>
               <a:ext uri="{FF2B5EF4-FFF2-40B4-BE49-F238E27FC236}">
-                <a16:creationId xmlns:a16="http://schemas.microsoft.com/office/drawing/2014/main" xmlns="" id="{92D8354F-0577-6A30-7505-8930D0CF8E8A}"/>
+                <a16:creationId xmlns:a16="http://schemas.microsoft.com/office/drawing/2014/main" id="{92D8354F-0577-6A30-7505-8930D0CF8E8A}"/>
               </a:ext>
               <a:ext uri="{C183D7F6-B498-43B3-948B-1728B52AA6E4}">
-                <adec:decorative xmlns:adec="http://schemas.microsoft.com/office/drawing/2017/decorative" xmlns="" val="1"/>
+                <adec:decorative xmlns:adec="http://schemas.microsoft.com/office/drawing/2017/decorative" val="1"/>
               </a:ext>
             </a:extLst>
           </p:cNvPr>
@@ -19139,10 +19134,10 @@
           <p:cNvPr id="6" name="Rectangle 5">
             <a:extLst>
               <a:ext uri="{FF2B5EF4-FFF2-40B4-BE49-F238E27FC236}">
-                <a16:creationId xmlns:a16="http://schemas.microsoft.com/office/drawing/2014/main" xmlns="" id="{F6112CC8-70AC-3C75-6385-1A2C0FE27559}"/>
+                <a16:creationId xmlns:a16="http://schemas.microsoft.com/office/drawing/2014/main" id="{F6112CC8-70AC-3C75-6385-1A2C0FE27559}"/>
               </a:ext>
               <a:ext uri="{C183D7F6-B498-43B3-948B-1728B52AA6E4}">
-                <adec:decorative xmlns:adec="http://schemas.microsoft.com/office/drawing/2017/decorative" xmlns="" val="1"/>
+                <adec:decorative xmlns:adec="http://schemas.microsoft.com/office/drawing/2017/decorative" val="1"/>
               </a:ext>
             </a:extLst>
           </p:cNvPr>
@@ -19224,10 +19219,10 @@
           <p:cNvPr id="12" name="Rectangle 11">
             <a:extLst>
               <a:ext uri="{FF2B5EF4-FFF2-40B4-BE49-F238E27FC236}">
-                <a16:creationId xmlns:a16="http://schemas.microsoft.com/office/drawing/2014/main" xmlns="" id="{47DC58E5-8B31-563D-65CE-5CB78BABC5EE}"/>
+                <a16:creationId xmlns:a16="http://schemas.microsoft.com/office/drawing/2014/main" id="{47DC58E5-8B31-563D-65CE-5CB78BABC5EE}"/>
               </a:ext>
               <a:ext uri="{C183D7F6-B498-43B3-948B-1728B52AA6E4}">
-                <adec:decorative xmlns:adec="http://schemas.microsoft.com/office/drawing/2017/decorative" xmlns="" val="1"/>
+                <adec:decorative xmlns:adec="http://schemas.microsoft.com/office/drawing/2017/decorative" val="1"/>
               </a:ext>
             </a:extLst>
           </p:cNvPr>
@@ -19279,10 +19274,10 @@
           <p:cNvPr id="11" name="Oval 10">
             <a:extLst>
               <a:ext uri="{FF2B5EF4-FFF2-40B4-BE49-F238E27FC236}">
-                <a16:creationId xmlns:a16="http://schemas.microsoft.com/office/drawing/2014/main" xmlns="" id="{34FC30D6-2036-A49D-2D87-79BB698CFE26}"/>
+                <a16:creationId xmlns:a16="http://schemas.microsoft.com/office/drawing/2014/main" id="{34FC30D6-2036-A49D-2D87-79BB698CFE26}"/>
               </a:ext>
               <a:ext uri="{C183D7F6-B498-43B3-948B-1728B52AA6E4}">
-                <adec:decorative xmlns:adec="http://schemas.microsoft.com/office/drawing/2017/decorative" xmlns="" val="1"/>
+                <adec:decorative xmlns:adec="http://schemas.microsoft.com/office/drawing/2017/decorative" val="1"/>
               </a:ext>
             </a:extLst>
           </p:cNvPr>
@@ -19337,7 +19332,7 @@
           <p:cNvPr id="5" name="Title 1">
             <a:extLst>
               <a:ext uri="{FF2B5EF4-FFF2-40B4-BE49-F238E27FC236}">
-                <a16:creationId xmlns:a16="http://schemas.microsoft.com/office/drawing/2014/main" xmlns="" id="{5C6104E6-797D-DE61-EBFD-7BF0502BCC04}"/>
+                <a16:creationId xmlns:a16="http://schemas.microsoft.com/office/drawing/2014/main" id="{5C6104E6-797D-DE61-EBFD-7BF0502BCC04}"/>
               </a:ext>
             </a:extLst>
           </p:cNvPr>
@@ -19376,7 +19371,7 @@
           <p:cNvPr id="4" name="Content Placeholder 14">
             <a:extLst>
               <a:ext uri="{FF2B5EF4-FFF2-40B4-BE49-F238E27FC236}">
-                <a16:creationId xmlns:a16="http://schemas.microsoft.com/office/drawing/2014/main" xmlns="" id="{70DCF516-124A-7A64-68B6-4E53B51558A3}"/>
+                <a16:creationId xmlns:a16="http://schemas.microsoft.com/office/drawing/2014/main" id="{70DCF516-124A-7A64-68B6-4E53B51558A3}"/>
               </a:ext>
             </a:extLst>
           </p:cNvPr>
@@ -19461,7 +19456,7 @@
           <p:cNvPr id="6" name="Picture Placeholder 10">
             <a:extLst>
               <a:ext uri="{FF2B5EF4-FFF2-40B4-BE49-F238E27FC236}">
-                <a16:creationId xmlns:a16="http://schemas.microsoft.com/office/drawing/2014/main" xmlns="" id="{41874ABC-5130-9579-629F-5CECD6DC2F74}"/>
+                <a16:creationId xmlns:a16="http://schemas.microsoft.com/office/drawing/2014/main" id="{41874ABC-5130-9579-629F-5CECD6DC2F74}"/>
               </a:ext>
             </a:extLst>
           </p:cNvPr>
@@ -19491,7 +19486,7 @@
           <p:cNvPr id="14" name="Date Placeholder 2">
             <a:extLst>
               <a:ext uri="{FF2B5EF4-FFF2-40B4-BE49-F238E27FC236}">
-                <a16:creationId xmlns:a16="http://schemas.microsoft.com/office/drawing/2014/main" xmlns="" id="{59F9DDC1-0F34-0AE1-3EEE-1E60892D85FF}"/>
+                <a16:creationId xmlns:a16="http://schemas.microsoft.com/office/drawing/2014/main" id="{59F9DDC1-0F34-0AE1-3EEE-1E60892D85FF}"/>
               </a:ext>
             </a:extLst>
           </p:cNvPr>
@@ -19536,7 +19531,7 @@
           <p:cNvPr id="13" name="Footer Placeholder 3">
             <a:extLst>
               <a:ext uri="{FF2B5EF4-FFF2-40B4-BE49-F238E27FC236}">
-                <a16:creationId xmlns:a16="http://schemas.microsoft.com/office/drawing/2014/main" xmlns="" id="{EBEBE2F7-AEE1-67CD-3C02-A67FE8863707}"/>
+                <a16:creationId xmlns:a16="http://schemas.microsoft.com/office/drawing/2014/main" id="{EBEBE2F7-AEE1-67CD-3C02-A67FE8863707}"/>
               </a:ext>
             </a:extLst>
           </p:cNvPr>
@@ -19575,7 +19570,7 @@
           <p:cNvPr id="8" name="Slide Number Placeholder 4">
             <a:extLst>
               <a:ext uri="{FF2B5EF4-FFF2-40B4-BE49-F238E27FC236}">
-                <a16:creationId xmlns:a16="http://schemas.microsoft.com/office/drawing/2014/main" xmlns="" id="{9C7317C0-3EE4-FD5D-3CC9-DB7DEBCFF60E}"/>
+                <a16:creationId xmlns:a16="http://schemas.microsoft.com/office/drawing/2014/main" id="{9C7317C0-3EE4-FD5D-3CC9-DB7DEBCFF60E}"/>
               </a:ext>
             </a:extLst>
           </p:cNvPr>
@@ -19616,10 +19611,10 @@
           <p:cNvPr id="2" name="Oval 1">
             <a:extLst>
               <a:ext uri="{FF2B5EF4-FFF2-40B4-BE49-F238E27FC236}">
-                <a16:creationId xmlns:a16="http://schemas.microsoft.com/office/drawing/2014/main" xmlns="" id="{AD8B416C-0540-7EBC-ACDF-ABEFD1F3ECC6}"/>
+                <a16:creationId xmlns:a16="http://schemas.microsoft.com/office/drawing/2014/main" id="{AD8B416C-0540-7EBC-ACDF-ABEFD1F3ECC6}"/>
               </a:ext>
               <a:ext uri="{C183D7F6-B498-43B3-948B-1728B52AA6E4}">
-                <adec:decorative xmlns:adec="http://schemas.microsoft.com/office/drawing/2017/decorative" xmlns="" val="1"/>
+                <adec:decorative xmlns:adec="http://schemas.microsoft.com/office/drawing/2017/decorative" val="1"/>
               </a:ext>
             </a:extLst>
           </p:cNvPr>
@@ -19674,10 +19669,10 @@
           <p:cNvPr id="3" name="Rectangle 2">
             <a:extLst>
               <a:ext uri="{FF2B5EF4-FFF2-40B4-BE49-F238E27FC236}">
-                <a16:creationId xmlns:a16="http://schemas.microsoft.com/office/drawing/2014/main" xmlns="" id="{8A909623-94DE-B2B1-C6C6-D617C3FA2EA6}"/>
+                <a16:creationId xmlns:a16="http://schemas.microsoft.com/office/drawing/2014/main" id="{8A909623-94DE-B2B1-C6C6-D617C3FA2EA6}"/>
               </a:ext>
               <a:ext uri="{C183D7F6-B498-43B3-948B-1728B52AA6E4}">
-                <adec:decorative xmlns:adec="http://schemas.microsoft.com/office/drawing/2017/decorative" xmlns="" val="1"/>
+                <adec:decorative xmlns:adec="http://schemas.microsoft.com/office/drawing/2017/decorative" val="1"/>
               </a:ext>
             </a:extLst>
           </p:cNvPr>
@@ -19759,10 +19754,10 @@
           <p:cNvPr id="9" name="Rectangle 8">
             <a:extLst>
               <a:ext uri="{FF2B5EF4-FFF2-40B4-BE49-F238E27FC236}">
-                <a16:creationId xmlns:a16="http://schemas.microsoft.com/office/drawing/2014/main" xmlns="" id="{2780E457-D284-8068-957F-D85B00F3FC84}"/>
+                <a16:creationId xmlns:a16="http://schemas.microsoft.com/office/drawing/2014/main" id="{2780E457-D284-8068-957F-D85B00F3FC84}"/>
               </a:ext>
               <a:ext uri="{C183D7F6-B498-43B3-948B-1728B52AA6E4}">
-                <adec:decorative xmlns:adec="http://schemas.microsoft.com/office/drawing/2017/decorative" xmlns="" val="1"/>
+                <adec:decorative xmlns:adec="http://schemas.microsoft.com/office/drawing/2017/decorative" val="1"/>
               </a:ext>
             </a:extLst>
           </p:cNvPr>
@@ -19814,10 +19809,10 @@
           <p:cNvPr id="8" name="Oval 7">
             <a:extLst>
               <a:ext uri="{FF2B5EF4-FFF2-40B4-BE49-F238E27FC236}">
-                <a16:creationId xmlns:a16="http://schemas.microsoft.com/office/drawing/2014/main" xmlns="" id="{7C48C225-FAD4-92C8-17A3-928B4B089431}"/>
+                <a16:creationId xmlns:a16="http://schemas.microsoft.com/office/drawing/2014/main" id="{7C48C225-FAD4-92C8-17A3-928B4B089431}"/>
               </a:ext>
               <a:ext uri="{C183D7F6-B498-43B3-948B-1728B52AA6E4}">
-                <adec:decorative xmlns:adec="http://schemas.microsoft.com/office/drawing/2017/decorative" xmlns="" val="1"/>
+                <adec:decorative xmlns:adec="http://schemas.microsoft.com/office/drawing/2017/decorative" val="1"/>
               </a:ext>
             </a:extLst>
           </p:cNvPr>
@@ -19872,7 +19867,7 @@
           <p:cNvPr id="12" name="Title 1">
             <a:extLst>
               <a:ext uri="{FF2B5EF4-FFF2-40B4-BE49-F238E27FC236}">
-                <a16:creationId xmlns:a16="http://schemas.microsoft.com/office/drawing/2014/main" xmlns="" id="{B0E64AB3-51D9-9992-E51A-78ADA62E241F}"/>
+                <a16:creationId xmlns:a16="http://schemas.microsoft.com/office/drawing/2014/main" id="{B0E64AB3-51D9-9992-E51A-78ADA62E241F}"/>
               </a:ext>
             </a:extLst>
           </p:cNvPr>
@@ -19911,7 +19906,7 @@
           <p:cNvPr id="5" name="Content Placeholder 14">
             <a:extLst>
               <a:ext uri="{FF2B5EF4-FFF2-40B4-BE49-F238E27FC236}">
-                <a16:creationId xmlns:a16="http://schemas.microsoft.com/office/drawing/2014/main" xmlns="" id="{5C4894AA-FFFC-1F6C-8D9F-E941F8EBE6EB}"/>
+                <a16:creationId xmlns:a16="http://schemas.microsoft.com/office/drawing/2014/main" id="{5C4894AA-FFFC-1F6C-8D9F-E941F8EBE6EB}"/>
               </a:ext>
             </a:extLst>
           </p:cNvPr>
@@ -19996,7 +19991,7 @@
           <p:cNvPr id="13" name="Picture Placeholder 10">
             <a:extLst>
               <a:ext uri="{FF2B5EF4-FFF2-40B4-BE49-F238E27FC236}">
-                <a16:creationId xmlns:a16="http://schemas.microsoft.com/office/drawing/2014/main" xmlns="" id="{992B4E0B-09D2-1770-AF0A-79593CF5C03A}"/>
+                <a16:creationId xmlns:a16="http://schemas.microsoft.com/office/drawing/2014/main" id="{992B4E0B-09D2-1770-AF0A-79593CF5C03A}"/>
               </a:ext>
             </a:extLst>
           </p:cNvPr>
@@ -20026,7 +20021,7 @@
           <p:cNvPr id="11" name="Date Placeholder 2">
             <a:extLst>
               <a:ext uri="{FF2B5EF4-FFF2-40B4-BE49-F238E27FC236}">
-                <a16:creationId xmlns:a16="http://schemas.microsoft.com/office/drawing/2014/main" xmlns="" id="{767B0CE1-4683-787E-7E78-385D3963DD69}"/>
+                <a16:creationId xmlns:a16="http://schemas.microsoft.com/office/drawing/2014/main" id="{767B0CE1-4683-787E-7E78-385D3963DD69}"/>
               </a:ext>
             </a:extLst>
           </p:cNvPr>
@@ -20071,7 +20066,7 @@
           <p:cNvPr id="10" name="Footer Placeholder 3">
             <a:extLst>
               <a:ext uri="{FF2B5EF4-FFF2-40B4-BE49-F238E27FC236}">
-                <a16:creationId xmlns:a16="http://schemas.microsoft.com/office/drawing/2014/main" xmlns="" id="{1FC3404C-1D8E-1568-8A3A-54E59FB1D2DF}"/>
+                <a16:creationId xmlns:a16="http://schemas.microsoft.com/office/drawing/2014/main" id="{1FC3404C-1D8E-1568-8A3A-54E59FB1D2DF}"/>
               </a:ext>
             </a:extLst>
           </p:cNvPr>
@@ -20110,7 +20105,7 @@
           <p:cNvPr id="4" name="Slide Number Placeholder 4">
             <a:extLst>
               <a:ext uri="{FF2B5EF4-FFF2-40B4-BE49-F238E27FC236}">
-                <a16:creationId xmlns:a16="http://schemas.microsoft.com/office/drawing/2014/main" xmlns="" id="{3EB56144-4670-1B58-E7A7-D1422FD2B796}"/>
+                <a16:creationId xmlns:a16="http://schemas.microsoft.com/office/drawing/2014/main" id="{3EB56144-4670-1B58-E7A7-D1422FD2B796}"/>
               </a:ext>
             </a:extLst>
           </p:cNvPr>
@@ -20151,10 +20146,10 @@
           <p:cNvPr id="2" name="Oval 1">
             <a:extLst>
               <a:ext uri="{FF2B5EF4-FFF2-40B4-BE49-F238E27FC236}">
-                <a16:creationId xmlns:a16="http://schemas.microsoft.com/office/drawing/2014/main" xmlns="" id="{D65FCF90-9957-3ECF-3797-C2D9FEE25C94}"/>
+                <a16:creationId xmlns:a16="http://schemas.microsoft.com/office/drawing/2014/main" id="{D65FCF90-9957-3ECF-3797-C2D9FEE25C94}"/>
               </a:ext>
               <a:ext uri="{C183D7F6-B498-43B3-948B-1728B52AA6E4}">
-                <adec:decorative xmlns:adec="http://schemas.microsoft.com/office/drawing/2017/decorative" xmlns="" val="1"/>
+                <adec:decorative xmlns:adec="http://schemas.microsoft.com/office/drawing/2017/decorative" val="1"/>
               </a:ext>
             </a:extLst>
           </p:cNvPr>
@@ -20209,10 +20204,10 @@
           <p:cNvPr id="3" name="Rectangle 2">
             <a:extLst>
               <a:ext uri="{FF2B5EF4-FFF2-40B4-BE49-F238E27FC236}">
-                <a16:creationId xmlns:a16="http://schemas.microsoft.com/office/drawing/2014/main" xmlns="" id="{6CE1DC3D-3F35-8AEA-04FB-01F83E254A35}"/>
+                <a16:creationId xmlns:a16="http://schemas.microsoft.com/office/drawing/2014/main" id="{6CE1DC3D-3F35-8AEA-04FB-01F83E254A35}"/>
               </a:ext>
               <a:ext uri="{C183D7F6-B498-43B3-948B-1728B52AA6E4}">
-                <adec:decorative xmlns:adec="http://schemas.microsoft.com/office/drawing/2017/decorative" xmlns="" val="1"/>
+                <adec:decorative xmlns:adec="http://schemas.microsoft.com/office/drawing/2017/decorative" val="1"/>
               </a:ext>
             </a:extLst>
           </p:cNvPr>
@@ -20349,7 +20344,7 @@
           <a:lstStyle/>
           <a:p>
             <a:r>
-              <a:rPr lang="en-US" smtClean="0"/>
+              <a:rPr lang="en-US"/>
               <a:t>Click to edit Master title style</a:t>
             </a:r>
             <a:endParaRPr lang="en-US" dirty="0"/>
@@ -20380,35 +20375,35 @@
           <a:p>
             <a:pPr lvl="0"/>
             <a:r>
-              <a:rPr lang="en-US" smtClean="0"/>
+              <a:rPr lang="en-US"/>
               <a:t>Edit Master text styles</a:t>
             </a:r>
           </a:p>
           <a:p>
             <a:pPr lvl="1"/>
             <a:r>
-              <a:rPr lang="en-US" smtClean="0"/>
+              <a:rPr lang="en-US"/>
               <a:t>Second level</a:t>
             </a:r>
           </a:p>
           <a:p>
             <a:pPr lvl="2"/>
             <a:r>
-              <a:rPr lang="en-US" smtClean="0"/>
+              <a:rPr lang="en-US"/>
               <a:t>Third level</a:t>
             </a:r>
           </a:p>
           <a:p>
             <a:pPr lvl="3"/>
             <a:r>
-              <a:rPr lang="en-US" smtClean="0"/>
+              <a:rPr lang="en-US"/>
               <a:t>Fourth level</a:t>
             </a:r>
           </a:p>
           <a:p>
             <a:pPr lvl="4"/>
             <a:r>
-              <a:rPr lang="en-US" smtClean="0"/>
+              <a:rPr lang="en-US"/>
               <a:t>Fifth level</a:t>
             </a:r>
             <a:endParaRPr lang="en-US" dirty="0"/>
@@ -20439,35 +20434,35 @@
           <a:p>
             <a:pPr lvl="0"/>
             <a:r>
-              <a:rPr lang="en-US" smtClean="0"/>
+              <a:rPr lang="en-US"/>
               <a:t>Edit Master text styles</a:t>
             </a:r>
           </a:p>
           <a:p>
             <a:pPr lvl="1"/>
             <a:r>
-              <a:rPr lang="en-US" smtClean="0"/>
+              <a:rPr lang="en-US"/>
               <a:t>Second level</a:t>
             </a:r>
           </a:p>
           <a:p>
             <a:pPr lvl="2"/>
             <a:r>
-              <a:rPr lang="en-US" smtClean="0"/>
+              <a:rPr lang="en-US"/>
               <a:t>Third level</a:t>
             </a:r>
           </a:p>
           <a:p>
             <a:pPr lvl="3"/>
             <a:r>
-              <a:rPr lang="en-US" smtClean="0"/>
+              <a:rPr lang="en-US"/>
               <a:t>Fourth level</a:t>
             </a:r>
           </a:p>
           <a:p>
             <a:pPr lvl="4"/>
             <a:r>
-              <a:rPr lang="en-US" smtClean="0"/>
+              <a:rPr lang="en-US"/>
               <a:t>Fifth level</a:t>
             </a:r>
             <a:endParaRPr lang="en-US" dirty="0"/>
@@ -20490,7 +20485,7 @@
           <a:lstStyle/>
           <a:p>
             <a:r>
-              <a:rPr lang="en-US" altLang="zh-CN" smtClean="0"/>
+              <a:rPr lang="en-US" altLang="zh-CN"/>
               <a:t>03/10/2025</a:t>
             </a:r>
             <a:fld id="{4D63035D-22A0-4334-A9AE-2457016C8B47}" type="datetime1">
@@ -20518,10 +20513,9 @@
           <a:lstStyle/>
           <a:p>
             <a:r>
-              <a:rPr lang="en-US" smtClean="0"/>
+              <a:rPr lang="en-US"/>
               <a:t>Sample Footer Text</a:t>
             </a:r>
-            <a:endParaRPr lang="en-US"/>
           </a:p>
         </p:txBody>
       </p:sp>
@@ -20553,10 +20547,10 @@
           <p:cNvPr id="9" name="Oval 8">
             <a:extLst>
               <a:ext uri="{FF2B5EF4-FFF2-40B4-BE49-F238E27FC236}">
-                <a16:creationId xmlns:a16="http://schemas.microsoft.com/office/drawing/2014/main" xmlns="" id="{BD6CD142-9810-6E9E-811F-FBF95DAB136A}"/>
+                <a16:creationId xmlns:a16="http://schemas.microsoft.com/office/drawing/2014/main" id="{BD6CD142-9810-6E9E-811F-FBF95DAB136A}"/>
               </a:ext>
               <a:ext uri="{C183D7F6-B498-43B3-948B-1728B52AA6E4}">
-                <adec:decorative xmlns:adec="http://schemas.microsoft.com/office/drawing/2017/decorative" xmlns="" val="1"/>
+                <adec:decorative xmlns:adec="http://schemas.microsoft.com/office/drawing/2017/decorative" val="1"/>
               </a:ext>
             </a:extLst>
           </p:cNvPr>
@@ -20611,10 +20605,10 @@
           <p:cNvPr id="10" name="Rectangle 9">
             <a:extLst>
               <a:ext uri="{FF2B5EF4-FFF2-40B4-BE49-F238E27FC236}">
-                <a16:creationId xmlns:a16="http://schemas.microsoft.com/office/drawing/2014/main" xmlns="" id="{20410E30-A3EF-7BFE-43CC-85D8B7FDC4C2}"/>
+                <a16:creationId xmlns:a16="http://schemas.microsoft.com/office/drawing/2014/main" id="{20410E30-A3EF-7BFE-43CC-85D8B7FDC4C2}"/>
               </a:ext>
               <a:ext uri="{C183D7F6-B498-43B3-948B-1728B52AA6E4}">
-                <adec:decorative xmlns:adec="http://schemas.microsoft.com/office/drawing/2017/decorative" xmlns="" val="1"/>
+                <adec:decorative xmlns:adec="http://schemas.microsoft.com/office/drawing/2017/decorative" val="1"/>
               </a:ext>
             </a:extLst>
           </p:cNvPr>
@@ -20666,10 +20660,10 @@
           <p:cNvPr id="11" name="Rectangle 10">
             <a:extLst>
               <a:ext uri="{FF2B5EF4-FFF2-40B4-BE49-F238E27FC236}">
-                <a16:creationId xmlns:a16="http://schemas.microsoft.com/office/drawing/2014/main" xmlns="" id="{F7999891-11D4-E429-CDE9-3DF80CE2015A}"/>
+                <a16:creationId xmlns:a16="http://schemas.microsoft.com/office/drawing/2014/main" id="{F7999891-11D4-E429-CDE9-3DF80CE2015A}"/>
               </a:ext>
               <a:ext uri="{C183D7F6-B498-43B3-948B-1728B52AA6E4}">
-                <adec:decorative xmlns:adec="http://schemas.microsoft.com/office/drawing/2017/decorative" xmlns="" val="1"/>
+                <adec:decorative xmlns:adec="http://schemas.microsoft.com/office/drawing/2017/decorative" val="1"/>
               </a:ext>
             </a:extLst>
           </p:cNvPr>
@@ -20721,10 +20715,10 @@
           <p:cNvPr id="12" name="Oval 11">
             <a:extLst>
               <a:ext uri="{FF2B5EF4-FFF2-40B4-BE49-F238E27FC236}">
-                <a16:creationId xmlns:a16="http://schemas.microsoft.com/office/drawing/2014/main" xmlns="" id="{DB733A1D-510F-48B2-3D98-68215649F5AF}"/>
+                <a16:creationId xmlns:a16="http://schemas.microsoft.com/office/drawing/2014/main" id="{DB733A1D-510F-48B2-3D98-68215649F5AF}"/>
               </a:ext>
               <a:ext uri="{C183D7F6-B498-43B3-948B-1728B52AA6E4}">
-                <adec:decorative xmlns:adec="http://schemas.microsoft.com/office/drawing/2017/decorative" xmlns="" val="1"/>
+                <adec:decorative xmlns:adec="http://schemas.microsoft.com/office/drawing/2017/decorative" val="1"/>
               </a:ext>
             </a:extLst>
           </p:cNvPr>
@@ -20809,10 +20803,10 @@
           <p:cNvPr id="12" name="Rectangle 11">
             <a:extLst>
               <a:ext uri="{FF2B5EF4-FFF2-40B4-BE49-F238E27FC236}">
-                <a16:creationId xmlns:a16="http://schemas.microsoft.com/office/drawing/2014/main" xmlns="" id="{9143B539-8924-C0B8-CCA7-34D998DFBE98}"/>
+                <a16:creationId xmlns:a16="http://schemas.microsoft.com/office/drawing/2014/main" id="{9143B539-8924-C0B8-CCA7-34D998DFBE98}"/>
               </a:ext>
               <a:ext uri="{C183D7F6-B498-43B3-948B-1728B52AA6E4}">
-                <adec:decorative xmlns:adec="http://schemas.microsoft.com/office/drawing/2017/decorative" xmlns="" val="1"/>
+                <adec:decorative xmlns:adec="http://schemas.microsoft.com/office/drawing/2017/decorative" val="1"/>
               </a:ext>
             </a:extLst>
           </p:cNvPr>
@@ -20864,10 +20858,10 @@
           <p:cNvPr id="10" name="Oval 9">
             <a:extLst>
               <a:ext uri="{FF2B5EF4-FFF2-40B4-BE49-F238E27FC236}">
-                <a16:creationId xmlns:a16="http://schemas.microsoft.com/office/drawing/2014/main" xmlns="" id="{994CABF7-7146-2440-C062-A7A27E048FE7}"/>
+                <a16:creationId xmlns:a16="http://schemas.microsoft.com/office/drawing/2014/main" id="{994CABF7-7146-2440-C062-A7A27E048FE7}"/>
               </a:ext>
               <a:ext uri="{C183D7F6-B498-43B3-948B-1728B52AA6E4}">
-                <adec:decorative xmlns:adec="http://schemas.microsoft.com/office/drawing/2017/decorative" xmlns="" val="1"/>
+                <adec:decorative xmlns:adec="http://schemas.microsoft.com/office/drawing/2017/decorative" val="1"/>
               </a:ext>
             </a:extLst>
           </p:cNvPr>
@@ -20922,7 +20916,7 @@
           <p:cNvPr id="2" name="Title 1">
             <a:extLst>
               <a:ext uri="{FF2B5EF4-FFF2-40B4-BE49-F238E27FC236}">
-                <a16:creationId xmlns:a16="http://schemas.microsoft.com/office/drawing/2014/main" xmlns="" id="{FAF3BB49-A328-F121-7F27-DEB7C3CC2B0F}"/>
+                <a16:creationId xmlns:a16="http://schemas.microsoft.com/office/drawing/2014/main" id="{FAF3BB49-A328-F121-7F27-DEB7C3CC2B0F}"/>
               </a:ext>
             </a:extLst>
           </p:cNvPr>
@@ -20961,7 +20955,7 @@
           <p:cNvPr id="11" name="Picture Placeholder 10">
             <a:extLst>
               <a:ext uri="{FF2B5EF4-FFF2-40B4-BE49-F238E27FC236}">
-                <a16:creationId xmlns:a16="http://schemas.microsoft.com/office/drawing/2014/main" xmlns="" id="{7F8EA658-2652-6F81-1B04-D50C60A3F171}"/>
+                <a16:creationId xmlns:a16="http://schemas.microsoft.com/office/drawing/2014/main" id="{7F8EA658-2652-6F81-1B04-D50C60A3F171}"/>
               </a:ext>
             </a:extLst>
           </p:cNvPr>
@@ -20991,7 +20985,7 @@
           <p:cNvPr id="5" name="Content Placeholder 14">
             <a:extLst>
               <a:ext uri="{FF2B5EF4-FFF2-40B4-BE49-F238E27FC236}">
-                <a16:creationId xmlns:a16="http://schemas.microsoft.com/office/drawing/2014/main" xmlns="" id="{0D6E1E71-0B89-05C8-E774-C2A7B85E9410}"/>
+                <a16:creationId xmlns:a16="http://schemas.microsoft.com/office/drawing/2014/main" id="{0D6E1E71-0B89-05C8-E774-C2A7B85E9410}"/>
               </a:ext>
             </a:extLst>
           </p:cNvPr>
@@ -21076,7 +21070,7 @@
           <p:cNvPr id="14" name="Date Placeholder 2">
             <a:extLst>
               <a:ext uri="{FF2B5EF4-FFF2-40B4-BE49-F238E27FC236}">
-                <a16:creationId xmlns:a16="http://schemas.microsoft.com/office/drawing/2014/main" xmlns="" id="{874D5977-75E4-C67F-7EED-E31BDE0F0AE1}"/>
+                <a16:creationId xmlns:a16="http://schemas.microsoft.com/office/drawing/2014/main" id="{874D5977-75E4-C67F-7EED-E31BDE0F0AE1}"/>
               </a:ext>
             </a:extLst>
           </p:cNvPr>
@@ -21121,7 +21115,7 @@
           <p:cNvPr id="13" name="Footer Placeholder 3">
             <a:extLst>
               <a:ext uri="{FF2B5EF4-FFF2-40B4-BE49-F238E27FC236}">
-                <a16:creationId xmlns:a16="http://schemas.microsoft.com/office/drawing/2014/main" xmlns="" id="{627033D7-64E7-A801-F814-EFB769601953}"/>
+                <a16:creationId xmlns:a16="http://schemas.microsoft.com/office/drawing/2014/main" id="{627033D7-64E7-A801-F814-EFB769601953}"/>
               </a:ext>
             </a:extLst>
           </p:cNvPr>
@@ -21160,7 +21154,7 @@
           <p:cNvPr id="9" name="Slide Number Placeholder 4">
             <a:extLst>
               <a:ext uri="{FF2B5EF4-FFF2-40B4-BE49-F238E27FC236}">
-                <a16:creationId xmlns:a16="http://schemas.microsoft.com/office/drawing/2014/main" xmlns="" id="{B84A8F00-1CC3-8925-1509-3B5E9754447A}"/>
+                <a16:creationId xmlns:a16="http://schemas.microsoft.com/office/drawing/2014/main" id="{B84A8F00-1CC3-8925-1509-3B5E9754447A}"/>
               </a:ext>
             </a:extLst>
           </p:cNvPr>
@@ -21201,10 +21195,10 @@
           <p:cNvPr id="3" name="Oval 2">
             <a:extLst>
               <a:ext uri="{FF2B5EF4-FFF2-40B4-BE49-F238E27FC236}">
-                <a16:creationId xmlns:a16="http://schemas.microsoft.com/office/drawing/2014/main" xmlns="" id="{3C7AEE2D-FC46-D9E4-9B50-387B4FD567F2}"/>
+                <a16:creationId xmlns:a16="http://schemas.microsoft.com/office/drawing/2014/main" id="{3C7AEE2D-FC46-D9E4-9B50-387B4FD567F2}"/>
               </a:ext>
               <a:ext uri="{C183D7F6-B498-43B3-948B-1728B52AA6E4}">
-                <adec:decorative xmlns:adec="http://schemas.microsoft.com/office/drawing/2017/decorative" xmlns="" val="1"/>
+                <adec:decorative xmlns:adec="http://schemas.microsoft.com/office/drawing/2017/decorative" val="1"/>
               </a:ext>
             </a:extLst>
           </p:cNvPr>
@@ -21259,10 +21253,10 @@
           <p:cNvPr id="4" name="Rectangle 3">
             <a:extLst>
               <a:ext uri="{FF2B5EF4-FFF2-40B4-BE49-F238E27FC236}">
-                <a16:creationId xmlns:a16="http://schemas.microsoft.com/office/drawing/2014/main" xmlns="" id="{2DD62481-A06C-5002-BF7F-77030C50D3B2}"/>
+                <a16:creationId xmlns:a16="http://schemas.microsoft.com/office/drawing/2014/main" id="{2DD62481-A06C-5002-BF7F-77030C50D3B2}"/>
               </a:ext>
               <a:ext uri="{C183D7F6-B498-43B3-948B-1728B52AA6E4}">
-                <adec:decorative xmlns:adec="http://schemas.microsoft.com/office/drawing/2017/decorative" xmlns="" val="1"/>
+                <adec:decorative xmlns:adec="http://schemas.microsoft.com/office/drawing/2017/decorative" val="1"/>
               </a:ext>
             </a:extLst>
           </p:cNvPr>
@@ -21344,10 +21338,10 @@
           <p:cNvPr id="12" name="Rectangle 11">
             <a:extLst>
               <a:ext uri="{FF2B5EF4-FFF2-40B4-BE49-F238E27FC236}">
-                <a16:creationId xmlns:a16="http://schemas.microsoft.com/office/drawing/2014/main" xmlns="" id="{B73C539E-0623-5929-BCEC-D78603191F72}"/>
+                <a16:creationId xmlns:a16="http://schemas.microsoft.com/office/drawing/2014/main" id="{B73C539E-0623-5929-BCEC-D78603191F72}"/>
               </a:ext>
               <a:ext uri="{C183D7F6-B498-43B3-948B-1728B52AA6E4}">
-                <adec:decorative xmlns:adec="http://schemas.microsoft.com/office/drawing/2017/decorative" xmlns="" val="1"/>
+                <adec:decorative xmlns:adec="http://schemas.microsoft.com/office/drawing/2017/decorative" val="1"/>
               </a:ext>
             </a:extLst>
           </p:cNvPr>
@@ -21399,10 +21393,10 @@
           <p:cNvPr id="10" name="Oval 9">
             <a:extLst>
               <a:ext uri="{FF2B5EF4-FFF2-40B4-BE49-F238E27FC236}">
-                <a16:creationId xmlns:a16="http://schemas.microsoft.com/office/drawing/2014/main" xmlns="" id="{DE87B982-FFFC-A392-9770-4B6E1013F55E}"/>
+                <a16:creationId xmlns:a16="http://schemas.microsoft.com/office/drawing/2014/main" id="{DE87B982-FFFC-A392-9770-4B6E1013F55E}"/>
               </a:ext>
               <a:ext uri="{C183D7F6-B498-43B3-948B-1728B52AA6E4}">
-                <adec:decorative xmlns:adec="http://schemas.microsoft.com/office/drawing/2017/decorative" xmlns="" val="1"/>
+                <adec:decorative xmlns:adec="http://schemas.microsoft.com/office/drawing/2017/decorative" val="1"/>
               </a:ext>
             </a:extLst>
           </p:cNvPr>
@@ -21457,7 +21451,7 @@
           <p:cNvPr id="2" name="Title 1">
             <a:extLst>
               <a:ext uri="{FF2B5EF4-FFF2-40B4-BE49-F238E27FC236}">
-                <a16:creationId xmlns:a16="http://schemas.microsoft.com/office/drawing/2014/main" xmlns="" id="{FAF3BB49-A328-F121-7F27-DEB7C3CC2B0F}"/>
+                <a16:creationId xmlns:a16="http://schemas.microsoft.com/office/drawing/2014/main" id="{FAF3BB49-A328-F121-7F27-DEB7C3CC2B0F}"/>
               </a:ext>
             </a:extLst>
           </p:cNvPr>
@@ -21496,7 +21490,7 @@
           <p:cNvPr id="5" name="Content Placeholder 14">
             <a:extLst>
               <a:ext uri="{FF2B5EF4-FFF2-40B4-BE49-F238E27FC236}">
-                <a16:creationId xmlns:a16="http://schemas.microsoft.com/office/drawing/2014/main" xmlns="" id="{12B2705C-C73D-683F-26BE-4A73BC9A33CE}"/>
+                <a16:creationId xmlns:a16="http://schemas.microsoft.com/office/drawing/2014/main" id="{12B2705C-C73D-683F-26BE-4A73BC9A33CE}"/>
               </a:ext>
             </a:extLst>
           </p:cNvPr>
@@ -21581,7 +21575,7 @@
           <p:cNvPr id="11" name="Picture Placeholder 10">
             <a:extLst>
               <a:ext uri="{FF2B5EF4-FFF2-40B4-BE49-F238E27FC236}">
-                <a16:creationId xmlns:a16="http://schemas.microsoft.com/office/drawing/2014/main" xmlns="" id="{7F8EA658-2652-6F81-1B04-D50C60A3F171}"/>
+                <a16:creationId xmlns:a16="http://schemas.microsoft.com/office/drawing/2014/main" id="{7F8EA658-2652-6F81-1B04-D50C60A3F171}"/>
               </a:ext>
             </a:extLst>
           </p:cNvPr>
@@ -21611,7 +21605,7 @@
           <p:cNvPr id="14" name="Date Placeholder 2">
             <a:extLst>
               <a:ext uri="{FF2B5EF4-FFF2-40B4-BE49-F238E27FC236}">
-                <a16:creationId xmlns:a16="http://schemas.microsoft.com/office/drawing/2014/main" xmlns="" id="{16AE17EA-5DE5-8855-1E1E-385F234BA0D4}"/>
+                <a16:creationId xmlns:a16="http://schemas.microsoft.com/office/drawing/2014/main" id="{16AE17EA-5DE5-8855-1E1E-385F234BA0D4}"/>
               </a:ext>
             </a:extLst>
           </p:cNvPr>
@@ -21656,7 +21650,7 @@
           <p:cNvPr id="13" name="Footer Placeholder 3">
             <a:extLst>
               <a:ext uri="{FF2B5EF4-FFF2-40B4-BE49-F238E27FC236}">
-                <a16:creationId xmlns:a16="http://schemas.microsoft.com/office/drawing/2014/main" xmlns="" id="{E2416C41-9ADB-1026-364B-9B1691E4F526}"/>
+                <a16:creationId xmlns:a16="http://schemas.microsoft.com/office/drawing/2014/main" id="{E2416C41-9ADB-1026-364B-9B1691E4F526}"/>
               </a:ext>
             </a:extLst>
           </p:cNvPr>
@@ -21695,7 +21689,7 @@
           <p:cNvPr id="9" name="Slide Number Placeholder 4">
             <a:extLst>
               <a:ext uri="{FF2B5EF4-FFF2-40B4-BE49-F238E27FC236}">
-                <a16:creationId xmlns:a16="http://schemas.microsoft.com/office/drawing/2014/main" xmlns="" id="{188799B5-E673-DEC7-3C2D-136D84230D9E}"/>
+                <a16:creationId xmlns:a16="http://schemas.microsoft.com/office/drawing/2014/main" id="{188799B5-E673-DEC7-3C2D-136D84230D9E}"/>
               </a:ext>
             </a:extLst>
           </p:cNvPr>
@@ -21736,10 +21730,10 @@
           <p:cNvPr id="3" name="Oval 2">
             <a:extLst>
               <a:ext uri="{FF2B5EF4-FFF2-40B4-BE49-F238E27FC236}">
-                <a16:creationId xmlns:a16="http://schemas.microsoft.com/office/drawing/2014/main" xmlns="" id="{4E82FBAA-97D8-63A0-17D5-F9253ABE6116}"/>
+                <a16:creationId xmlns:a16="http://schemas.microsoft.com/office/drawing/2014/main" id="{4E82FBAA-97D8-63A0-17D5-F9253ABE6116}"/>
               </a:ext>
               <a:ext uri="{C183D7F6-B498-43B3-948B-1728B52AA6E4}">
-                <adec:decorative xmlns:adec="http://schemas.microsoft.com/office/drawing/2017/decorative" xmlns="" val="1"/>
+                <adec:decorative xmlns:adec="http://schemas.microsoft.com/office/drawing/2017/decorative" val="1"/>
               </a:ext>
             </a:extLst>
           </p:cNvPr>
@@ -21794,10 +21788,10 @@
           <p:cNvPr id="4" name="Rectangle 3">
             <a:extLst>
               <a:ext uri="{FF2B5EF4-FFF2-40B4-BE49-F238E27FC236}">
-                <a16:creationId xmlns:a16="http://schemas.microsoft.com/office/drawing/2014/main" xmlns="" id="{EA3DA902-FEB6-39F4-636D-7825E8E2A3D3}"/>
+                <a16:creationId xmlns:a16="http://schemas.microsoft.com/office/drawing/2014/main" id="{EA3DA902-FEB6-39F4-636D-7825E8E2A3D3}"/>
               </a:ext>
               <a:ext uri="{C183D7F6-B498-43B3-948B-1728B52AA6E4}">
-                <adec:decorative xmlns:adec="http://schemas.microsoft.com/office/drawing/2017/decorative" xmlns="" val="1"/>
+                <adec:decorative xmlns:adec="http://schemas.microsoft.com/office/drawing/2017/decorative" val="1"/>
               </a:ext>
             </a:extLst>
           </p:cNvPr>
@@ -21879,10 +21873,10 @@
           <p:cNvPr id="12" name="Rectangle 11">
             <a:extLst>
               <a:ext uri="{FF2B5EF4-FFF2-40B4-BE49-F238E27FC236}">
-                <a16:creationId xmlns:a16="http://schemas.microsoft.com/office/drawing/2014/main" xmlns="" id="{46DE35DD-8058-B253-9AE4-5343BE2B4D9E}"/>
+                <a16:creationId xmlns:a16="http://schemas.microsoft.com/office/drawing/2014/main" id="{46DE35DD-8058-B253-9AE4-5343BE2B4D9E}"/>
               </a:ext>
               <a:ext uri="{C183D7F6-B498-43B3-948B-1728B52AA6E4}">
-                <adec:decorative xmlns:adec="http://schemas.microsoft.com/office/drawing/2017/decorative" xmlns="" val="1"/>
+                <adec:decorative xmlns:adec="http://schemas.microsoft.com/office/drawing/2017/decorative" val="1"/>
               </a:ext>
             </a:extLst>
           </p:cNvPr>
@@ -21934,10 +21928,10 @@
           <p:cNvPr id="7" name="Oval 6">
             <a:extLst>
               <a:ext uri="{FF2B5EF4-FFF2-40B4-BE49-F238E27FC236}">
-                <a16:creationId xmlns:a16="http://schemas.microsoft.com/office/drawing/2014/main" xmlns="" id="{4F09DCB7-1228-2DB6-BF64-0785F0FD444A}"/>
+                <a16:creationId xmlns:a16="http://schemas.microsoft.com/office/drawing/2014/main" id="{4F09DCB7-1228-2DB6-BF64-0785F0FD444A}"/>
               </a:ext>
               <a:ext uri="{C183D7F6-B498-43B3-948B-1728B52AA6E4}">
-                <adec:decorative xmlns:adec="http://schemas.microsoft.com/office/drawing/2017/decorative" xmlns="" val="1"/>
+                <adec:decorative xmlns:adec="http://schemas.microsoft.com/office/drawing/2017/decorative" val="1"/>
               </a:ext>
             </a:extLst>
           </p:cNvPr>
@@ -21992,7 +21986,7 @@
           <p:cNvPr id="2" name="Title 1">
             <a:extLst>
               <a:ext uri="{FF2B5EF4-FFF2-40B4-BE49-F238E27FC236}">
-                <a16:creationId xmlns:a16="http://schemas.microsoft.com/office/drawing/2014/main" xmlns="" id="{FAF3BB49-A328-F121-7F27-DEB7C3CC2B0F}"/>
+                <a16:creationId xmlns:a16="http://schemas.microsoft.com/office/drawing/2014/main" id="{FAF3BB49-A328-F121-7F27-DEB7C3CC2B0F}"/>
               </a:ext>
             </a:extLst>
           </p:cNvPr>
@@ -22031,7 +22025,7 @@
           <p:cNvPr id="11" name="Picture Placeholder 10">
             <a:extLst>
               <a:ext uri="{FF2B5EF4-FFF2-40B4-BE49-F238E27FC236}">
-                <a16:creationId xmlns:a16="http://schemas.microsoft.com/office/drawing/2014/main" xmlns="" id="{7F8EA658-2652-6F81-1B04-D50C60A3F171}"/>
+                <a16:creationId xmlns:a16="http://schemas.microsoft.com/office/drawing/2014/main" id="{7F8EA658-2652-6F81-1B04-D50C60A3F171}"/>
               </a:ext>
             </a:extLst>
           </p:cNvPr>
@@ -22061,7 +22055,7 @@
           <p:cNvPr id="9" name="Content Placeholder 14">
             <a:extLst>
               <a:ext uri="{FF2B5EF4-FFF2-40B4-BE49-F238E27FC236}">
-                <a16:creationId xmlns:a16="http://schemas.microsoft.com/office/drawing/2014/main" xmlns="" id="{51116429-AB70-C20D-68E5-16E754531566}"/>
+                <a16:creationId xmlns:a16="http://schemas.microsoft.com/office/drawing/2014/main" id="{51116429-AB70-C20D-68E5-16E754531566}"/>
               </a:ext>
             </a:extLst>
           </p:cNvPr>
@@ -22146,7 +22140,7 @@
           <p:cNvPr id="13" name="Footer Placeholder 3">
             <a:extLst>
               <a:ext uri="{FF2B5EF4-FFF2-40B4-BE49-F238E27FC236}">
-                <a16:creationId xmlns:a16="http://schemas.microsoft.com/office/drawing/2014/main" xmlns="" id="{776FF1D7-D2E1-9D6F-EDE2-9D9DFF35FAA9}"/>
+                <a16:creationId xmlns:a16="http://schemas.microsoft.com/office/drawing/2014/main" id="{776FF1D7-D2E1-9D6F-EDE2-9D9DFF35FAA9}"/>
               </a:ext>
             </a:extLst>
           </p:cNvPr>
@@ -22185,7 +22179,7 @@
           <p:cNvPr id="6" name="Slide Number Placeholder 4">
             <a:extLst>
               <a:ext uri="{FF2B5EF4-FFF2-40B4-BE49-F238E27FC236}">
-                <a16:creationId xmlns:a16="http://schemas.microsoft.com/office/drawing/2014/main" xmlns="" id="{1D41FB96-972B-0FA7-7C7C-A0ABD216CFBE}"/>
+                <a16:creationId xmlns:a16="http://schemas.microsoft.com/office/drawing/2014/main" id="{1D41FB96-972B-0FA7-7C7C-A0ABD216CFBE}"/>
               </a:ext>
             </a:extLst>
           </p:cNvPr>
@@ -22226,10 +22220,10 @@
           <p:cNvPr id="3" name="Oval 2">
             <a:extLst>
               <a:ext uri="{FF2B5EF4-FFF2-40B4-BE49-F238E27FC236}">
-                <a16:creationId xmlns:a16="http://schemas.microsoft.com/office/drawing/2014/main" xmlns="" id="{5AC8983F-239A-B6B7-795A-CCEFADE1EF24}"/>
+                <a16:creationId xmlns:a16="http://schemas.microsoft.com/office/drawing/2014/main" id="{5AC8983F-239A-B6B7-795A-CCEFADE1EF24}"/>
               </a:ext>
               <a:ext uri="{C183D7F6-B498-43B3-948B-1728B52AA6E4}">
-                <adec:decorative xmlns:adec="http://schemas.microsoft.com/office/drawing/2017/decorative" xmlns="" val="1"/>
+                <adec:decorative xmlns:adec="http://schemas.microsoft.com/office/drawing/2017/decorative" val="1"/>
               </a:ext>
             </a:extLst>
           </p:cNvPr>
@@ -22284,10 +22278,10 @@
           <p:cNvPr id="5" name="Rectangle 4">
             <a:extLst>
               <a:ext uri="{FF2B5EF4-FFF2-40B4-BE49-F238E27FC236}">
-                <a16:creationId xmlns:a16="http://schemas.microsoft.com/office/drawing/2014/main" xmlns="" id="{A0F8957D-AAB0-DEFF-9EB9-87C630548EED}"/>
+                <a16:creationId xmlns:a16="http://schemas.microsoft.com/office/drawing/2014/main" id="{A0F8957D-AAB0-DEFF-9EB9-87C630548EED}"/>
               </a:ext>
               <a:ext uri="{C183D7F6-B498-43B3-948B-1728B52AA6E4}">
-                <adec:decorative xmlns:adec="http://schemas.microsoft.com/office/drawing/2017/decorative" xmlns="" val="1"/>
+                <adec:decorative xmlns:adec="http://schemas.microsoft.com/office/drawing/2017/decorative" val="1"/>
               </a:ext>
             </a:extLst>
           </p:cNvPr>
@@ -22339,7 +22333,7 @@
           <p:cNvPr id="4" name="Date Placeholder 3">
             <a:extLst>
               <a:ext uri="{FF2B5EF4-FFF2-40B4-BE49-F238E27FC236}">
-                <a16:creationId xmlns:a16="http://schemas.microsoft.com/office/drawing/2014/main" xmlns="" id="{FA177F51-9761-F2F7-DF84-18F30B6C29AC}"/>
+                <a16:creationId xmlns:a16="http://schemas.microsoft.com/office/drawing/2014/main" id="{FA177F51-9761-F2F7-DF84-18F30B6C29AC}"/>
               </a:ext>
             </a:extLst>
           </p:cNvPr>
@@ -22416,10 +22410,10 @@
           <p:cNvPr id="18" name="Rectangle 17">
             <a:extLst>
               <a:ext uri="{FF2B5EF4-FFF2-40B4-BE49-F238E27FC236}">
-                <a16:creationId xmlns:a16="http://schemas.microsoft.com/office/drawing/2014/main" xmlns="" id="{A7E35E2C-3084-0772-27D8-C1C214C8E9EC}"/>
+                <a16:creationId xmlns:a16="http://schemas.microsoft.com/office/drawing/2014/main" id="{A7E35E2C-3084-0772-27D8-C1C214C8E9EC}"/>
               </a:ext>
               <a:ext uri="{C183D7F6-B498-43B3-948B-1728B52AA6E4}">
-                <adec:decorative xmlns:adec="http://schemas.microsoft.com/office/drawing/2017/decorative" xmlns="" val="1"/>
+                <adec:decorative xmlns:adec="http://schemas.microsoft.com/office/drawing/2017/decorative" val="1"/>
               </a:ext>
             </a:extLst>
           </p:cNvPr>
@@ -22471,10 +22465,10 @@
           <p:cNvPr id="17" name="Oval 16">
             <a:extLst>
               <a:ext uri="{FF2B5EF4-FFF2-40B4-BE49-F238E27FC236}">
-                <a16:creationId xmlns:a16="http://schemas.microsoft.com/office/drawing/2014/main" xmlns="" id="{33C75CE7-717C-9244-6F64-72711A69332C}"/>
+                <a16:creationId xmlns:a16="http://schemas.microsoft.com/office/drawing/2014/main" id="{33C75CE7-717C-9244-6F64-72711A69332C}"/>
               </a:ext>
               <a:ext uri="{C183D7F6-B498-43B3-948B-1728B52AA6E4}">
-                <adec:decorative xmlns:adec="http://schemas.microsoft.com/office/drawing/2017/decorative" xmlns="" val="1"/>
+                <adec:decorative xmlns:adec="http://schemas.microsoft.com/office/drawing/2017/decorative" val="1"/>
               </a:ext>
             </a:extLst>
           </p:cNvPr>
@@ -22529,7 +22523,7 @@
           <p:cNvPr id="2" name="Title 1">
             <a:extLst>
               <a:ext uri="{FF2B5EF4-FFF2-40B4-BE49-F238E27FC236}">
-                <a16:creationId xmlns:a16="http://schemas.microsoft.com/office/drawing/2014/main" xmlns="" id="{FAF3BB49-A328-F121-7F27-DEB7C3CC2B0F}"/>
+                <a16:creationId xmlns:a16="http://schemas.microsoft.com/office/drawing/2014/main" id="{FAF3BB49-A328-F121-7F27-DEB7C3CC2B0F}"/>
               </a:ext>
             </a:extLst>
           </p:cNvPr>
@@ -22568,7 +22562,7 @@
           <p:cNvPr id="6" name="Content Placeholder 14">
             <a:extLst>
               <a:ext uri="{FF2B5EF4-FFF2-40B4-BE49-F238E27FC236}">
-                <a16:creationId xmlns:a16="http://schemas.microsoft.com/office/drawing/2014/main" xmlns="" id="{39F3FF2B-377F-34A8-9E2C-A1EC9335BC25}"/>
+                <a16:creationId xmlns:a16="http://schemas.microsoft.com/office/drawing/2014/main" id="{39F3FF2B-377F-34A8-9E2C-A1EC9335BC25}"/>
               </a:ext>
             </a:extLst>
           </p:cNvPr>
@@ -22653,7 +22647,7 @@
           <p:cNvPr id="11" name="Picture Placeholder 10">
             <a:extLst>
               <a:ext uri="{FF2B5EF4-FFF2-40B4-BE49-F238E27FC236}">
-                <a16:creationId xmlns:a16="http://schemas.microsoft.com/office/drawing/2014/main" xmlns="" id="{7F8EA658-2652-6F81-1B04-D50C60A3F171}"/>
+                <a16:creationId xmlns:a16="http://schemas.microsoft.com/office/drawing/2014/main" id="{7F8EA658-2652-6F81-1B04-D50C60A3F171}"/>
               </a:ext>
             </a:extLst>
           </p:cNvPr>
@@ -22683,7 +22677,7 @@
           <p:cNvPr id="4" name="Footer Placeholder 3">
             <a:extLst>
               <a:ext uri="{FF2B5EF4-FFF2-40B4-BE49-F238E27FC236}">
-                <a16:creationId xmlns:a16="http://schemas.microsoft.com/office/drawing/2014/main" xmlns="" id="{AC25DD21-FB61-1472-2D64-DF184459F769}"/>
+                <a16:creationId xmlns:a16="http://schemas.microsoft.com/office/drawing/2014/main" id="{AC25DD21-FB61-1472-2D64-DF184459F769}"/>
               </a:ext>
             </a:extLst>
           </p:cNvPr>
@@ -22722,7 +22716,7 @@
           <p:cNvPr id="3" name="Slide Number Placeholder 4">
             <a:extLst>
               <a:ext uri="{FF2B5EF4-FFF2-40B4-BE49-F238E27FC236}">
-                <a16:creationId xmlns:a16="http://schemas.microsoft.com/office/drawing/2014/main" xmlns="" id="{EC03000C-C6AF-7EB5-E3EE-24823248D9A2}"/>
+                <a16:creationId xmlns:a16="http://schemas.microsoft.com/office/drawing/2014/main" id="{EC03000C-C6AF-7EB5-E3EE-24823248D9A2}"/>
               </a:ext>
             </a:extLst>
           </p:cNvPr>
@@ -22763,10 +22757,10 @@
           <p:cNvPr id="14" name="Oval 13">
             <a:extLst>
               <a:ext uri="{FF2B5EF4-FFF2-40B4-BE49-F238E27FC236}">
-                <a16:creationId xmlns:a16="http://schemas.microsoft.com/office/drawing/2014/main" xmlns="" id="{8204AC67-A154-C296-CA4A-49DCD172C8D6}"/>
+                <a16:creationId xmlns:a16="http://schemas.microsoft.com/office/drawing/2014/main" id="{8204AC67-A154-C296-CA4A-49DCD172C8D6}"/>
               </a:ext>
               <a:ext uri="{C183D7F6-B498-43B3-948B-1728B52AA6E4}">
-                <adec:decorative xmlns:adec="http://schemas.microsoft.com/office/drawing/2017/decorative" xmlns="" val="1"/>
+                <adec:decorative xmlns:adec="http://schemas.microsoft.com/office/drawing/2017/decorative" val="1"/>
               </a:ext>
             </a:extLst>
           </p:cNvPr>
@@ -22821,10 +22815,10 @@
           <p:cNvPr id="15" name="Rectangle 14">
             <a:extLst>
               <a:ext uri="{FF2B5EF4-FFF2-40B4-BE49-F238E27FC236}">
-                <a16:creationId xmlns:a16="http://schemas.microsoft.com/office/drawing/2014/main" xmlns="" id="{79E96F2D-3C3D-A945-47E2-8DFBDDA59B15}"/>
+                <a16:creationId xmlns:a16="http://schemas.microsoft.com/office/drawing/2014/main" id="{79E96F2D-3C3D-A945-47E2-8DFBDDA59B15}"/>
               </a:ext>
               <a:ext uri="{C183D7F6-B498-43B3-948B-1728B52AA6E4}">
-                <adec:decorative xmlns:adec="http://schemas.microsoft.com/office/drawing/2017/decorative" xmlns="" val="1"/>
+                <adec:decorative xmlns:adec="http://schemas.microsoft.com/office/drawing/2017/decorative" val="1"/>
               </a:ext>
             </a:extLst>
           </p:cNvPr>
@@ -22876,7 +22870,7 @@
           <p:cNvPr id="5" name="Date Placeholder 3">
             <a:extLst>
               <a:ext uri="{FF2B5EF4-FFF2-40B4-BE49-F238E27FC236}">
-                <a16:creationId xmlns:a16="http://schemas.microsoft.com/office/drawing/2014/main" xmlns="" id="{CB6089DF-6C45-7412-2734-8B13677451A6}"/>
+                <a16:creationId xmlns:a16="http://schemas.microsoft.com/office/drawing/2014/main" id="{CB6089DF-6C45-7412-2734-8B13677451A6}"/>
               </a:ext>
             </a:extLst>
           </p:cNvPr>
@@ -22953,10 +22947,10 @@
           <p:cNvPr id="18" name="Rectangle 17">
             <a:extLst>
               <a:ext uri="{FF2B5EF4-FFF2-40B4-BE49-F238E27FC236}">
-                <a16:creationId xmlns:a16="http://schemas.microsoft.com/office/drawing/2014/main" xmlns="" id="{BC22D34A-FBBF-9CE0-34C0-3280F9BBA5C8}"/>
+                <a16:creationId xmlns:a16="http://schemas.microsoft.com/office/drawing/2014/main" id="{BC22D34A-FBBF-9CE0-34C0-3280F9BBA5C8}"/>
               </a:ext>
               <a:ext uri="{C183D7F6-B498-43B3-948B-1728B52AA6E4}">
-                <adec:decorative xmlns:adec="http://schemas.microsoft.com/office/drawing/2017/decorative" xmlns="" val="1"/>
+                <adec:decorative xmlns:adec="http://schemas.microsoft.com/office/drawing/2017/decorative" val="1"/>
               </a:ext>
             </a:extLst>
           </p:cNvPr>
@@ -23008,10 +23002,10 @@
           <p:cNvPr id="17" name="Oval 16">
             <a:extLst>
               <a:ext uri="{FF2B5EF4-FFF2-40B4-BE49-F238E27FC236}">
-                <a16:creationId xmlns:a16="http://schemas.microsoft.com/office/drawing/2014/main" xmlns="" id="{C4F763C5-31DF-45A8-C0B5-6A919573FAC3}"/>
+                <a16:creationId xmlns:a16="http://schemas.microsoft.com/office/drawing/2014/main" id="{C4F763C5-31DF-45A8-C0B5-6A919573FAC3}"/>
               </a:ext>
               <a:ext uri="{C183D7F6-B498-43B3-948B-1728B52AA6E4}">
-                <adec:decorative xmlns:adec="http://schemas.microsoft.com/office/drawing/2017/decorative" xmlns="" val="1"/>
+                <adec:decorative xmlns:adec="http://schemas.microsoft.com/office/drawing/2017/decorative" val="1"/>
               </a:ext>
             </a:extLst>
           </p:cNvPr>
@@ -23066,7 +23060,7 @@
           <p:cNvPr id="2" name="Title 1">
             <a:extLst>
               <a:ext uri="{FF2B5EF4-FFF2-40B4-BE49-F238E27FC236}">
-                <a16:creationId xmlns:a16="http://schemas.microsoft.com/office/drawing/2014/main" xmlns="" id="{FAF3BB49-A328-F121-7F27-DEB7C3CC2B0F}"/>
+                <a16:creationId xmlns:a16="http://schemas.microsoft.com/office/drawing/2014/main" id="{FAF3BB49-A328-F121-7F27-DEB7C3CC2B0F}"/>
               </a:ext>
             </a:extLst>
           </p:cNvPr>
@@ -23105,7 +23099,7 @@
           <p:cNvPr id="11" name="Picture Placeholder 10">
             <a:extLst>
               <a:ext uri="{FF2B5EF4-FFF2-40B4-BE49-F238E27FC236}">
-                <a16:creationId xmlns:a16="http://schemas.microsoft.com/office/drawing/2014/main" xmlns="" id="{7F8EA658-2652-6F81-1B04-D50C60A3F171}"/>
+                <a16:creationId xmlns:a16="http://schemas.microsoft.com/office/drawing/2014/main" id="{7F8EA658-2652-6F81-1B04-D50C60A3F171}"/>
               </a:ext>
             </a:extLst>
           </p:cNvPr>
@@ -23135,7 +23129,7 @@
           <p:cNvPr id="6" name="Content Placeholder 14">
             <a:extLst>
               <a:ext uri="{FF2B5EF4-FFF2-40B4-BE49-F238E27FC236}">
-                <a16:creationId xmlns:a16="http://schemas.microsoft.com/office/drawing/2014/main" xmlns="" id="{BF4B9AE9-B78A-6D7F-20C0-F283C1653FD5}"/>
+                <a16:creationId xmlns:a16="http://schemas.microsoft.com/office/drawing/2014/main" id="{BF4B9AE9-B78A-6D7F-20C0-F283C1653FD5}"/>
               </a:ext>
             </a:extLst>
           </p:cNvPr>
@@ -23220,7 +23214,7 @@
           <p:cNvPr id="4" name="Footer Placeholder 3">
             <a:extLst>
               <a:ext uri="{FF2B5EF4-FFF2-40B4-BE49-F238E27FC236}">
-                <a16:creationId xmlns:a16="http://schemas.microsoft.com/office/drawing/2014/main" xmlns="" id="{BD5E2451-9812-34C5-3C33-856233B63B8D}"/>
+                <a16:creationId xmlns:a16="http://schemas.microsoft.com/office/drawing/2014/main" id="{BD5E2451-9812-34C5-3C33-856233B63B8D}"/>
               </a:ext>
             </a:extLst>
           </p:cNvPr>
@@ -23259,7 +23253,7 @@
           <p:cNvPr id="3" name="Slide Number Placeholder 4">
             <a:extLst>
               <a:ext uri="{FF2B5EF4-FFF2-40B4-BE49-F238E27FC236}">
-                <a16:creationId xmlns:a16="http://schemas.microsoft.com/office/drawing/2014/main" xmlns="" id="{F7BEE80C-92D1-4F33-B7E5-AE68C008D29F}"/>
+                <a16:creationId xmlns:a16="http://schemas.microsoft.com/office/drawing/2014/main" id="{F7BEE80C-92D1-4F33-B7E5-AE68C008D29F}"/>
               </a:ext>
             </a:extLst>
           </p:cNvPr>
@@ -23300,10 +23294,10 @@
           <p:cNvPr id="14" name="Oval 13">
             <a:extLst>
               <a:ext uri="{FF2B5EF4-FFF2-40B4-BE49-F238E27FC236}">
-                <a16:creationId xmlns:a16="http://schemas.microsoft.com/office/drawing/2014/main" xmlns="" id="{B5F4499B-9AF3-3A1A-12B9-F6C1E6E90957}"/>
+                <a16:creationId xmlns:a16="http://schemas.microsoft.com/office/drawing/2014/main" id="{B5F4499B-9AF3-3A1A-12B9-F6C1E6E90957}"/>
               </a:ext>
               <a:ext uri="{C183D7F6-B498-43B3-948B-1728B52AA6E4}">
-                <adec:decorative xmlns:adec="http://schemas.microsoft.com/office/drawing/2017/decorative" xmlns="" val="1"/>
+                <adec:decorative xmlns:adec="http://schemas.microsoft.com/office/drawing/2017/decorative" val="1"/>
               </a:ext>
             </a:extLst>
           </p:cNvPr>
@@ -23358,10 +23352,10 @@
           <p:cNvPr id="15" name="Rectangle 14">
             <a:extLst>
               <a:ext uri="{FF2B5EF4-FFF2-40B4-BE49-F238E27FC236}">
-                <a16:creationId xmlns:a16="http://schemas.microsoft.com/office/drawing/2014/main" xmlns="" id="{3A65BF30-A776-10EB-762C-FBB4D91FD5D9}"/>
+                <a16:creationId xmlns:a16="http://schemas.microsoft.com/office/drawing/2014/main" id="{3A65BF30-A776-10EB-762C-FBB4D91FD5D9}"/>
               </a:ext>
               <a:ext uri="{C183D7F6-B498-43B3-948B-1728B52AA6E4}">
-                <adec:decorative xmlns:adec="http://schemas.microsoft.com/office/drawing/2017/decorative" xmlns="" val="1"/>
+                <adec:decorative xmlns:adec="http://schemas.microsoft.com/office/drawing/2017/decorative" val="1"/>
               </a:ext>
             </a:extLst>
           </p:cNvPr>
@@ -23413,7 +23407,7 @@
           <p:cNvPr id="5" name="Date Placeholder 3">
             <a:extLst>
               <a:ext uri="{FF2B5EF4-FFF2-40B4-BE49-F238E27FC236}">
-                <a16:creationId xmlns:a16="http://schemas.microsoft.com/office/drawing/2014/main" xmlns="" id="{53CF56CB-74FD-C1FE-4BAA-59AD65AFB25D}"/>
+                <a16:creationId xmlns:a16="http://schemas.microsoft.com/office/drawing/2014/main" id="{53CF56CB-74FD-C1FE-4BAA-59AD65AFB25D}"/>
               </a:ext>
             </a:extLst>
           </p:cNvPr>
@@ -23490,7 +23484,7 @@
           <p:cNvPr id="11" name="Picture Placeholder 10">
             <a:extLst>
               <a:ext uri="{FF2B5EF4-FFF2-40B4-BE49-F238E27FC236}">
-                <a16:creationId xmlns:a16="http://schemas.microsoft.com/office/drawing/2014/main" xmlns="" id="{7F8EA658-2652-6F81-1B04-D50C60A3F171}"/>
+                <a16:creationId xmlns:a16="http://schemas.microsoft.com/office/drawing/2014/main" id="{7F8EA658-2652-6F81-1B04-D50C60A3F171}"/>
               </a:ext>
             </a:extLst>
           </p:cNvPr>
@@ -23520,7 +23514,7 @@
           <p:cNvPr id="2" name="Title 1">
             <a:extLst>
               <a:ext uri="{FF2B5EF4-FFF2-40B4-BE49-F238E27FC236}">
-                <a16:creationId xmlns:a16="http://schemas.microsoft.com/office/drawing/2014/main" xmlns="" id="{FAF3BB49-A328-F121-7F27-DEB7C3CC2B0F}"/>
+                <a16:creationId xmlns:a16="http://schemas.microsoft.com/office/drawing/2014/main" id="{FAF3BB49-A328-F121-7F27-DEB7C3CC2B0F}"/>
               </a:ext>
             </a:extLst>
           </p:cNvPr>
@@ -23559,7 +23553,7 @@
           <p:cNvPr id="9" name="Content Placeholder 14">
             <a:extLst>
               <a:ext uri="{FF2B5EF4-FFF2-40B4-BE49-F238E27FC236}">
-                <a16:creationId xmlns:a16="http://schemas.microsoft.com/office/drawing/2014/main" xmlns="" id="{B2CDF48D-CCCD-B99E-F3E4-CBE0FAF00AA7}"/>
+                <a16:creationId xmlns:a16="http://schemas.microsoft.com/office/drawing/2014/main" id="{B2CDF48D-CCCD-B99E-F3E4-CBE0FAF00AA7}"/>
               </a:ext>
             </a:extLst>
           </p:cNvPr>
@@ -23644,7 +23638,7 @@
           <p:cNvPr id="5" name="Date Placeholder 4">
             <a:extLst>
               <a:ext uri="{FF2B5EF4-FFF2-40B4-BE49-F238E27FC236}">
-                <a16:creationId xmlns:a16="http://schemas.microsoft.com/office/drawing/2014/main" xmlns="" id="{897D0B7E-1A60-DA52-6965-92412B1C2F9F}"/>
+                <a16:creationId xmlns:a16="http://schemas.microsoft.com/office/drawing/2014/main" id="{897D0B7E-1A60-DA52-6965-92412B1C2F9F}"/>
               </a:ext>
             </a:extLst>
           </p:cNvPr>
@@ -23682,7 +23676,7 @@
           <p:cNvPr id="6" name="Footer Placeholder 5">
             <a:extLst>
               <a:ext uri="{FF2B5EF4-FFF2-40B4-BE49-F238E27FC236}">
-                <a16:creationId xmlns:a16="http://schemas.microsoft.com/office/drawing/2014/main" xmlns="" id="{C2BDD5A2-CE3E-3215-6DAA-F75C0D1229DA}"/>
+                <a16:creationId xmlns:a16="http://schemas.microsoft.com/office/drawing/2014/main" id="{C2BDD5A2-CE3E-3215-6DAA-F75C0D1229DA}"/>
               </a:ext>
             </a:extLst>
           </p:cNvPr>
@@ -23715,7 +23709,7 @@
           <p:cNvPr id="7" name="Slide Number Placeholder 6">
             <a:extLst>
               <a:ext uri="{FF2B5EF4-FFF2-40B4-BE49-F238E27FC236}">
-                <a16:creationId xmlns:a16="http://schemas.microsoft.com/office/drawing/2014/main" xmlns="" id="{B1B822F1-284A-1786-FAF2-72129E2FE64D}"/>
+                <a16:creationId xmlns:a16="http://schemas.microsoft.com/office/drawing/2014/main" id="{B1B822F1-284A-1786-FAF2-72129E2FE64D}"/>
               </a:ext>
             </a:extLst>
           </p:cNvPr>
@@ -23749,10 +23743,10 @@
           <p:cNvPr id="12" name="Rectangle 11">
             <a:extLst>
               <a:ext uri="{FF2B5EF4-FFF2-40B4-BE49-F238E27FC236}">
-                <a16:creationId xmlns:a16="http://schemas.microsoft.com/office/drawing/2014/main" xmlns="" id="{099BF16D-597E-71C6-2E3F-617E81AC1DE8}"/>
+                <a16:creationId xmlns:a16="http://schemas.microsoft.com/office/drawing/2014/main" id="{099BF16D-597E-71C6-2E3F-617E81AC1DE8}"/>
               </a:ext>
               <a:ext uri="{C183D7F6-B498-43B3-948B-1728B52AA6E4}">
-                <adec:decorative xmlns:adec="http://schemas.microsoft.com/office/drawing/2017/decorative" xmlns="" val="1"/>
+                <adec:decorative xmlns:adec="http://schemas.microsoft.com/office/drawing/2017/decorative" val="1"/>
               </a:ext>
             </a:extLst>
           </p:cNvPr>
@@ -23804,10 +23798,10 @@
           <p:cNvPr id="10" name="Oval 9">
             <a:extLst>
               <a:ext uri="{FF2B5EF4-FFF2-40B4-BE49-F238E27FC236}">
-                <a16:creationId xmlns:a16="http://schemas.microsoft.com/office/drawing/2014/main" xmlns="" id="{2BFFD748-48BA-022F-3C3B-8ECFF6991C04}"/>
+                <a16:creationId xmlns:a16="http://schemas.microsoft.com/office/drawing/2014/main" id="{2BFFD748-48BA-022F-3C3B-8ECFF6991C04}"/>
               </a:ext>
               <a:ext uri="{C183D7F6-B498-43B3-948B-1728B52AA6E4}">
-                <adec:decorative xmlns:adec="http://schemas.microsoft.com/office/drawing/2017/decorative" xmlns="" val="1"/>
+                <adec:decorative xmlns:adec="http://schemas.microsoft.com/office/drawing/2017/decorative" val="1"/>
               </a:ext>
             </a:extLst>
           </p:cNvPr>
@@ -23862,10 +23856,10 @@
           <p:cNvPr id="3" name="Oval 2">
             <a:extLst>
               <a:ext uri="{FF2B5EF4-FFF2-40B4-BE49-F238E27FC236}">
-                <a16:creationId xmlns:a16="http://schemas.microsoft.com/office/drawing/2014/main" xmlns="" id="{471A5897-3B1D-D50B-2427-DE31939A8582}"/>
+                <a16:creationId xmlns:a16="http://schemas.microsoft.com/office/drawing/2014/main" id="{471A5897-3B1D-D50B-2427-DE31939A8582}"/>
               </a:ext>
               <a:ext uri="{C183D7F6-B498-43B3-948B-1728B52AA6E4}">
-                <adec:decorative xmlns:adec="http://schemas.microsoft.com/office/drawing/2017/decorative" xmlns="" val="1"/>
+                <adec:decorative xmlns:adec="http://schemas.microsoft.com/office/drawing/2017/decorative" val="1"/>
               </a:ext>
             </a:extLst>
           </p:cNvPr>
@@ -23920,10 +23914,10 @@
           <p:cNvPr id="4" name="Rectangle 3">
             <a:extLst>
               <a:ext uri="{FF2B5EF4-FFF2-40B4-BE49-F238E27FC236}">
-                <a16:creationId xmlns:a16="http://schemas.microsoft.com/office/drawing/2014/main" xmlns="" id="{43312E9A-BE86-243D-20DB-F00178EEA385}"/>
+                <a16:creationId xmlns:a16="http://schemas.microsoft.com/office/drawing/2014/main" id="{43312E9A-BE86-243D-20DB-F00178EEA385}"/>
               </a:ext>
               <a:ext uri="{C183D7F6-B498-43B3-948B-1728B52AA6E4}">
-                <adec:decorative xmlns:adec="http://schemas.microsoft.com/office/drawing/2017/decorative" xmlns="" val="1"/>
+                <adec:decorative xmlns:adec="http://schemas.microsoft.com/office/drawing/2017/decorative" val="1"/>
               </a:ext>
             </a:extLst>
           </p:cNvPr>
@@ -24005,7 +23999,7 @@
           <p:cNvPr id="11" name="Picture Placeholder 10">
             <a:extLst>
               <a:ext uri="{FF2B5EF4-FFF2-40B4-BE49-F238E27FC236}">
-                <a16:creationId xmlns:a16="http://schemas.microsoft.com/office/drawing/2014/main" xmlns="" id="{7F8EA658-2652-6F81-1B04-D50C60A3F171}"/>
+                <a16:creationId xmlns:a16="http://schemas.microsoft.com/office/drawing/2014/main" id="{7F8EA658-2652-6F81-1B04-D50C60A3F171}"/>
               </a:ext>
             </a:extLst>
           </p:cNvPr>
@@ -24035,7 +24029,7 @@
           <p:cNvPr id="2" name="Title 1">
             <a:extLst>
               <a:ext uri="{FF2B5EF4-FFF2-40B4-BE49-F238E27FC236}">
-                <a16:creationId xmlns:a16="http://schemas.microsoft.com/office/drawing/2014/main" xmlns="" id="{FAF3BB49-A328-F121-7F27-DEB7C3CC2B0F}"/>
+                <a16:creationId xmlns:a16="http://schemas.microsoft.com/office/drawing/2014/main" id="{FAF3BB49-A328-F121-7F27-DEB7C3CC2B0F}"/>
               </a:ext>
             </a:extLst>
           </p:cNvPr>
@@ -24074,7 +24068,7 @@
           <p:cNvPr id="3" name="Content Placeholder 14">
             <a:extLst>
               <a:ext uri="{FF2B5EF4-FFF2-40B4-BE49-F238E27FC236}">
-                <a16:creationId xmlns:a16="http://schemas.microsoft.com/office/drawing/2014/main" xmlns="" id="{0E7AD882-6D78-F3F8-8E45-92D9E2011FF8}"/>
+                <a16:creationId xmlns:a16="http://schemas.microsoft.com/office/drawing/2014/main" id="{0E7AD882-6D78-F3F8-8E45-92D9E2011FF8}"/>
               </a:ext>
             </a:extLst>
           </p:cNvPr>
@@ -24159,7 +24153,7 @@
           <p:cNvPr id="5" name="Date Placeholder 4">
             <a:extLst>
               <a:ext uri="{FF2B5EF4-FFF2-40B4-BE49-F238E27FC236}">
-                <a16:creationId xmlns:a16="http://schemas.microsoft.com/office/drawing/2014/main" xmlns="" id="{897D0B7E-1A60-DA52-6965-92412B1C2F9F}"/>
+                <a16:creationId xmlns:a16="http://schemas.microsoft.com/office/drawing/2014/main" id="{897D0B7E-1A60-DA52-6965-92412B1C2F9F}"/>
               </a:ext>
             </a:extLst>
           </p:cNvPr>
@@ -24197,7 +24191,7 @@
           <p:cNvPr id="6" name="Footer Placeholder 5">
             <a:extLst>
               <a:ext uri="{FF2B5EF4-FFF2-40B4-BE49-F238E27FC236}">
-                <a16:creationId xmlns:a16="http://schemas.microsoft.com/office/drawing/2014/main" xmlns="" id="{C2BDD5A2-CE3E-3215-6DAA-F75C0D1229DA}"/>
+                <a16:creationId xmlns:a16="http://schemas.microsoft.com/office/drawing/2014/main" id="{C2BDD5A2-CE3E-3215-6DAA-F75C0D1229DA}"/>
               </a:ext>
             </a:extLst>
           </p:cNvPr>
@@ -24230,7 +24224,7 @@
           <p:cNvPr id="7" name="Slide Number Placeholder 6">
             <a:extLst>
               <a:ext uri="{FF2B5EF4-FFF2-40B4-BE49-F238E27FC236}">
-                <a16:creationId xmlns:a16="http://schemas.microsoft.com/office/drawing/2014/main" xmlns="" id="{B1B822F1-284A-1786-FAF2-72129E2FE64D}"/>
+                <a16:creationId xmlns:a16="http://schemas.microsoft.com/office/drawing/2014/main" id="{B1B822F1-284A-1786-FAF2-72129E2FE64D}"/>
               </a:ext>
             </a:extLst>
           </p:cNvPr>
@@ -24264,10 +24258,10 @@
           <p:cNvPr id="17" name="Rectangle 16">
             <a:extLst>
               <a:ext uri="{FF2B5EF4-FFF2-40B4-BE49-F238E27FC236}">
-                <a16:creationId xmlns:a16="http://schemas.microsoft.com/office/drawing/2014/main" xmlns="" id="{5110FEAA-9CDF-DFFD-DBD8-08095A039FE9}"/>
+                <a16:creationId xmlns:a16="http://schemas.microsoft.com/office/drawing/2014/main" id="{5110FEAA-9CDF-DFFD-DBD8-08095A039FE9}"/>
               </a:ext>
               <a:ext uri="{C183D7F6-B498-43B3-948B-1728B52AA6E4}">
-                <adec:decorative xmlns:adec="http://schemas.microsoft.com/office/drawing/2017/decorative" xmlns="" val="1"/>
+                <adec:decorative xmlns:adec="http://schemas.microsoft.com/office/drawing/2017/decorative" val="1"/>
               </a:ext>
             </a:extLst>
           </p:cNvPr>
@@ -24319,10 +24313,10 @@
           <p:cNvPr id="16" name="Oval 15">
             <a:extLst>
               <a:ext uri="{FF2B5EF4-FFF2-40B4-BE49-F238E27FC236}">
-                <a16:creationId xmlns:a16="http://schemas.microsoft.com/office/drawing/2014/main" xmlns="" id="{BA1CFA0B-85DB-50C1-2DCE-43E1EDBBD5A4}"/>
+                <a16:creationId xmlns:a16="http://schemas.microsoft.com/office/drawing/2014/main" id="{BA1CFA0B-85DB-50C1-2DCE-43E1EDBBD5A4}"/>
               </a:ext>
               <a:ext uri="{C183D7F6-B498-43B3-948B-1728B52AA6E4}">
-                <adec:decorative xmlns:adec="http://schemas.microsoft.com/office/drawing/2017/decorative" xmlns="" val="1"/>
+                <adec:decorative xmlns:adec="http://schemas.microsoft.com/office/drawing/2017/decorative" val="1"/>
               </a:ext>
             </a:extLst>
           </p:cNvPr>
@@ -24377,10 +24371,10 @@
           <p:cNvPr id="13" name="Oval 12">
             <a:extLst>
               <a:ext uri="{FF2B5EF4-FFF2-40B4-BE49-F238E27FC236}">
-                <a16:creationId xmlns:a16="http://schemas.microsoft.com/office/drawing/2014/main" xmlns="" id="{B5C54F2B-C639-D1C8-E104-CE340FCBE383}"/>
+                <a16:creationId xmlns:a16="http://schemas.microsoft.com/office/drawing/2014/main" id="{B5C54F2B-C639-D1C8-E104-CE340FCBE383}"/>
               </a:ext>
               <a:ext uri="{C183D7F6-B498-43B3-948B-1728B52AA6E4}">
-                <adec:decorative xmlns:adec="http://schemas.microsoft.com/office/drawing/2017/decorative" xmlns="" val="1"/>
+                <adec:decorative xmlns:adec="http://schemas.microsoft.com/office/drawing/2017/decorative" val="1"/>
               </a:ext>
             </a:extLst>
           </p:cNvPr>
@@ -24435,10 +24429,10 @@
           <p:cNvPr id="14" name="Rectangle 13">
             <a:extLst>
               <a:ext uri="{FF2B5EF4-FFF2-40B4-BE49-F238E27FC236}">
-                <a16:creationId xmlns:a16="http://schemas.microsoft.com/office/drawing/2014/main" xmlns="" id="{B6D35091-8023-DE48-73F1-9D869CF9CD9A}"/>
+                <a16:creationId xmlns:a16="http://schemas.microsoft.com/office/drawing/2014/main" id="{B6D35091-8023-DE48-73F1-9D869CF9CD9A}"/>
               </a:ext>
               <a:ext uri="{C183D7F6-B498-43B3-948B-1728B52AA6E4}">
-                <adec:decorative xmlns:adec="http://schemas.microsoft.com/office/drawing/2017/decorative" xmlns="" val="1"/>
+                <adec:decorative xmlns:adec="http://schemas.microsoft.com/office/drawing/2017/decorative" val="1"/>
               </a:ext>
             </a:extLst>
           </p:cNvPr>
@@ -24520,10 +24514,10 @@
           <p:cNvPr id="4" name="Rectangle 3">
             <a:extLst>
               <a:ext uri="{FF2B5EF4-FFF2-40B4-BE49-F238E27FC236}">
-                <a16:creationId xmlns:a16="http://schemas.microsoft.com/office/drawing/2014/main" xmlns="" id="{1BFB787F-F856-83D9-31F8-50BF0D4FA83B}"/>
+                <a16:creationId xmlns:a16="http://schemas.microsoft.com/office/drawing/2014/main" id="{1BFB787F-F856-83D9-31F8-50BF0D4FA83B}"/>
               </a:ext>
               <a:ext uri="{C183D7F6-B498-43B3-948B-1728B52AA6E4}">
-                <adec:decorative xmlns:adec="http://schemas.microsoft.com/office/drawing/2017/decorative" xmlns="" val="1"/>
+                <adec:decorative xmlns:adec="http://schemas.microsoft.com/office/drawing/2017/decorative" val="1"/>
               </a:ext>
             </a:extLst>
           </p:cNvPr>
@@ -24575,10 +24569,10 @@
           <p:cNvPr id="3" name="Oval 2">
             <a:extLst>
               <a:ext uri="{FF2B5EF4-FFF2-40B4-BE49-F238E27FC236}">
-                <a16:creationId xmlns:a16="http://schemas.microsoft.com/office/drawing/2014/main" xmlns="" id="{A02657CF-AF2D-4A8E-63B2-8CCAB197AC09}"/>
+                <a16:creationId xmlns:a16="http://schemas.microsoft.com/office/drawing/2014/main" id="{A02657CF-AF2D-4A8E-63B2-8CCAB197AC09}"/>
               </a:ext>
               <a:ext uri="{C183D7F6-B498-43B3-948B-1728B52AA6E4}">
-                <adec:decorative xmlns:adec="http://schemas.microsoft.com/office/drawing/2017/decorative" xmlns="" val="1"/>
+                <adec:decorative xmlns:adec="http://schemas.microsoft.com/office/drawing/2017/decorative" val="1"/>
               </a:ext>
             </a:extLst>
           </p:cNvPr>
@@ -24633,10 +24627,10 @@
           <p:cNvPr id="10" name="Oval 9">
             <a:extLst>
               <a:ext uri="{FF2B5EF4-FFF2-40B4-BE49-F238E27FC236}">
-                <a16:creationId xmlns:a16="http://schemas.microsoft.com/office/drawing/2014/main" xmlns="" id="{3809E7E7-B740-A6CE-1420-F217E7F4A6BC}"/>
+                <a16:creationId xmlns:a16="http://schemas.microsoft.com/office/drawing/2014/main" id="{3809E7E7-B740-A6CE-1420-F217E7F4A6BC}"/>
               </a:ext>
               <a:ext uri="{C183D7F6-B498-43B3-948B-1728B52AA6E4}">
-                <adec:decorative xmlns:adec="http://schemas.microsoft.com/office/drawing/2017/decorative" xmlns="" val="1"/>
+                <adec:decorative xmlns:adec="http://schemas.microsoft.com/office/drawing/2017/decorative" val="1"/>
               </a:ext>
             </a:extLst>
           </p:cNvPr>
@@ -24691,10 +24685,10 @@
           <p:cNvPr id="12" name="Rectangle 11">
             <a:extLst>
               <a:ext uri="{FF2B5EF4-FFF2-40B4-BE49-F238E27FC236}">
-                <a16:creationId xmlns:a16="http://schemas.microsoft.com/office/drawing/2014/main" xmlns="" id="{D589654F-122C-B489-BF0E-A6BAA5D165B1}"/>
+                <a16:creationId xmlns:a16="http://schemas.microsoft.com/office/drawing/2014/main" id="{D589654F-122C-B489-BF0E-A6BAA5D165B1}"/>
               </a:ext>
               <a:ext uri="{C183D7F6-B498-43B3-948B-1728B52AA6E4}">
-                <adec:decorative xmlns:adec="http://schemas.microsoft.com/office/drawing/2017/decorative" xmlns="" val="1"/>
+                <adec:decorative xmlns:adec="http://schemas.microsoft.com/office/drawing/2017/decorative" val="1"/>
               </a:ext>
             </a:extLst>
           </p:cNvPr>
@@ -24746,7 +24740,7 @@
           <p:cNvPr id="2" name="Title 1">
             <a:extLst>
               <a:ext uri="{FF2B5EF4-FFF2-40B4-BE49-F238E27FC236}">
-                <a16:creationId xmlns:a16="http://schemas.microsoft.com/office/drawing/2014/main" xmlns="" id="{FAF3BB49-A328-F121-7F27-DEB7C3CC2B0F}"/>
+                <a16:creationId xmlns:a16="http://schemas.microsoft.com/office/drawing/2014/main" id="{FAF3BB49-A328-F121-7F27-DEB7C3CC2B0F}"/>
               </a:ext>
             </a:extLst>
           </p:cNvPr>
@@ -24785,7 +24779,7 @@
           <p:cNvPr id="6" name="Content Placeholder 14">
             <a:extLst>
               <a:ext uri="{FF2B5EF4-FFF2-40B4-BE49-F238E27FC236}">
-                <a16:creationId xmlns:a16="http://schemas.microsoft.com/office/drawing/2014/main" xmlns="" id="{A11349E4-C41F-EF8C-5B32-8D12705832F0}"/>
+                <a16:creationId xmlns:a16="http://schemas.microsoft.com/office/drawing/2014/main" id="{A11349E4-C41F-EF8C-5B32-8D12705832F0}"/>
               </a:ext>
             </a:extLst>
           </p:cNvPr>
@@ -24870,7 +24864,7 @@
           <p:cNvPr id="11" name="Picture Placeholder 10">
             <a:extLst>
               <a:ext uri="{FF2B5EF4-FFF2-40B4-BE49-F238E27FC236}">
-                <a16:creationId xmlns:a16="http://schemas.microsoft.com/office/drawing/2014/main" xmlns="" id="{7F8EA658-2652-6F81-1B04-D50C60A3F171}"/>
+                <a16:creationId xmlns:a16="http://schemas.microsoft.com/office/drawing/2014/main" id="{7F8EA658-2652-6F81-1B04-D50C60A3F171}"/>
               </a:ext>
             </a:extLst>
           </p:cNvPr>
@@ -24900,7 +24894,7 @@
           <p:cNvPr id="13" name="Footer Placeholder 3">
             <a:extLst>
               <a:ext uri="{FF2B5EF4-FFF2-40B4-BE49-F238E27FC236}">
-                <a16:creationId xmlns:a16="http://schemas.microsoft.com/office/drawing/2014/main" xmlns="" id="{D6D9177A-278B-20CD-FE5E-6F66195139E4}"/>
+                <a16:creationId xmlns:a16="http://schemas.microsoft.com/office/drawing/2014/main" id="{D6D9177A-278B-20CD-FE5E-6F66195139E4}"/>
               </a:ext>
             </a:extLst>
           </p:cNvPr>
@@ -24939,7 +24933,7 @@
           <p:cNvPr id="9" name="Slide Number Placeholder 4">
             <a:extLst>
               <a:ext uri="{FF2B5EF4-FFF2-40B4-BE49-F238E27FC236}">
-                <a16:creationId xmlns:a16="http://schemas.microsoft.com/office/drawing/2014/main" xmlns="" id="{D941CF86-87E6-8948-A328-3A114B74DC33}"/>
+                <a16:creationId xmlns:a16="http://schemas.microsoft.com/office/drawing/2014/main" id="{D941CF86-87E6-8948-A328-3A114B74DC33}"/>
               </a:ext>
             </a:extLst>
           </p:cNvPr>
@@ -24980,7 +24974,7 @@
           <p:cNvPr id="5" name="Date Placeholder 3">
             <a:extLst>
               <a:ext uri="{FF2B5EF4-FFF2-40B4-BE49-F238E27FC236}">
-                <a16:creationId xmlns:a16="http://schemas.microsoft.com/office/drawing/2014/main" xmlns="" id="{40918809-FD32-F4A8-916A-8C76FA0B58EF}"/>
+                <a16:creationId xmlns:a16="http://schemas.microsoft.com/office/drawing/2014/main" id="{40918809-FD32-F4A8-916A-8C76FA0B58EF}"/>
               </a:ext>
             </a:extLst>
           </p:cNvPr>
@@ -25057,7 +25051,7 @@
           <p:cNvPr id="2" name="Title 1">
             <a:extLst>
               <a:ext uri="{FF2B5EF4-FFF2-40B4-BE49-F238E27FC236}">
-                <a16:creationId xmlns:a16="http://schemas.microsoft.com/office/drawing/2014/main" xmlns="" id="{FAF3BB49-A328-F121-7F27-DEB7C3CC2B0F}"/>
+                <a16:creationId xmlns:a16="http://schemas.microsoft.com/office/drawing/2014/main" id="{FAF3BB49-A328-F121-7F27-DEB7C3CC2B0F}"/>
               </a:ext>
             </a:extLst>
           </p:cNvPr>
@@ -25096,7 +25090,7 @@
           <p:cNvPr id="11" name="Picture Placeholder 10">
             <a:extLst>
               <a:ext uri="{FF2B5EF4-FFF2-40B4-BE49-F238E27FC236}">
-                <a16:creationId xmlns:a16="http://schemas.microsoft.com/office/drawing/2014/main" xmlns="" id="{7F8EA658-2652-6F81-1B04-D50C60A3F171}"/>
+                <a16:creationId xmlns:a16="http://schemas.microsoft.com/office/drawing/2014/main" id="{7F8EA658-2652-6F81-1B04-D50C60A3F171}"/>
               </a:ext>
             </a:extLst>
           </p:cNvPr>
@@ -25126,7 +25120,7 @@
           <p:cNvPr id="3" name="Content Placeholder 14">
             <a:extLst>
               <a:ext uri="{FF2B5EF4-FFF2-40B4-BE49-F238E27FC236}">
-                <a16:creationId xmlns:a16="http://schemas.microsoft.com/office/drawing/2014/main" xmlns="" id="{F73A54CA-FA08-6D99-1B77-AB0DB1F1F791}"/>
+                <a16:creationId xmlns:a16="http://schemas.microsoft.com/office/drawing/2014/main" id="{F73A54CA-FA08-6D99-1B77-AB0DB1F1F791}"/>
               </a:ext>
             </a:extLst>
           </p:cNvPr>
@@ -25211,7 +25205,7 @@
           <p:cNvPr id="5" name="Date Placeholder 4">
             <a:extLst>
               <a:ext uri="{FF2B5EF4-FFF2-40B4-BE49-F238E27FC236}">
-                <a16:creationId xmlns:a16="http://schemas.microsoft.com/office/drawing/2014/main" xmlns="" id="{897D0B7E-1A60-DA52-6965-92412B1C2F9F}"/>
+                <a16:creationId xmlns:a16="http://schemas.microsoft.com/office/drawing/2014/main" id="{897D0B7E-1A60-DA52-6965-92412B1C2F9F}"/>
               </a:ext>
             </a:extLst>
           </p:cNvPr>
@@ -25249,7 +25243,7 @@
           <p:cNvPr id="6" name="Footer Placeholder 5">
             <a:extLst>
               <a:ext uri="{FF2B5EF4-FFF2-40B4-BE49-F238E27FC236}">
-                <a16:creationId xmlns:a16="http://schemas.microsoft.com/office/drawing/2014/main" xmlns="" id="{C2BDD5A2-CE3E-3215-6DAA-F75C0D1229DA}"/>
+                <a16:creationId xmlns:a16="http://schemas.microsoft.com/office/drawing/2014/main" id="{C2BDD5A2-CE3E-3215-6DAA-F75C0D1229DA}"/>
               </a:ext>
             </a:extLst>
           </p:cNvPr>
@@ -25282,7 +25276,7 @@
           <p:cNvPr id="7" name="Slide Number Placeholder 6">
             <a:extLst>
               <a:ext uri="{FF2B5EF4-FFF2-40B4-BE49-F238E27FC236}">
-                <a16:creationId xmlns:a16="http://schemas.microsoft.com/office/drawing/2014/main" xmlns="" id="{B1B822F1-284A-1786-FAF2-72129E2FE64D}"/>
+                <a16:creationId xmlns:a16="http://schemas.microsoft.com/office/drawing/2014/main" id="{B1B822F1-284A-1786-FAF2-72129E2FE64D}"/>
               </a:ext>
             </a:extLst>
           </p:cNvPr>
@@ -25316,10 +25310,10 @@
           <p:cNvPr id="18" name="Rectangle 17">
             <a:extLst>
               <a:ext uri="{FF2B5EF4-FFF2-40B4-BE49-F238E27FC236}">
-                <a16:creationId xmlns:a16="http://schemas.microsoft.com/office/drawing/2014/main" xmlns="" id="{3D2BD5C2-C97A-C70B-4A03-5569FBDD129A}"/>
+                <a16:creationId xmlns:a16="http://schemas.microsoft.com/office/drawing/2014/main" id="{3D2BD5C2-C97A-C70B-4A03-5569FBDD129A}"/>
               </a:ext>
               <a:ext uri="{C183D7F6-B498-43B3-948B-1728B52AA6E4}">
-                <adec:decorative xmlns:adec="http://schemas.microsoft.com/office/drawing/2017/decorative" xmlns="" val="1"/>
+                <adec:decorative xmlns:adec="http://schemas.microsoft.com/office/drawing/2017/decorative" val="1"/>
               </a:ext>
             </a:extLst>
           </p:cNvPr>
@@ -25371,10 +25365,10 @@
           <p:cNvPr id="17" name="Oval 16">
             <a:extLst>
               <a:ext uri="{FF2B5EF4-FFF2-40B4-BE49-F238E27FC236}">
-                <a16:creationId xmlns:a16="http://schemas.microsoft.com/office/drawing/2014/main" xmlns="" id="{451B1B7C-F3EB-F411-B2F9-1447EABB0CA7}"/>
+                <a16:creationId xmlns:a16="http://schemas.microsoft.com/office/drawing/2014/main" id="{451B1B7C-F3EB-F411-B2F9-1447EABB0CA7}"/>
               </a:ext>
               <a:ext uri="{C183D7F6-B498-43B3-948B-1728B52AA6E4}">
-                <adec:decorative xmlns:adec="http://schemas.microsoft.com/office/drawing/2017/decorative" xmlns="" val="1"/>
+                <adec:decorative xmlns:adec="http://schemas.microsoft.com/office/drawing/2017/decorative" val="1"/>
               </a:ext>
             </a:extLst>
           </p:cNvPr>
@@ -25429,10 +25423,10 @@
           <p:cNvPr id="14" name="Oval 13">
             <a:extLst>
               <a:ext uri="{FF2B5EF4-FFF2-40B4-BE49-F238E27FC236}">
-                <a16:creationId xmlns:a16="http://schemas.microsoft.com/office/drawing/2014/main" xmlns="" id="{52B7F775-C47A-0C90-3F41-F05671F1F11C}"/>
+                <a16:creationId xmlns:a16="http://schemas.microsoft.com/office/drawing/2014/main" id="{52B7F775-C47A-0C90-3F41-F05671F1F11C}"/>
               </a:ext>
               <a:ext uri="{C183D7F6-B498-43B3-948B-1728B52AA6E4}">
-                <adec:decorative xmlns:adec="http://schemas.microsoft.com/office/drawing/2017/decorative" xmlns="" val="1"/>
+                <adec:decorative xmlns:adec="http://schemas.microsoft.com/office/drawing/2017/decorative" val="1"/>
               </a:ext>
             </a:extLst>
           </p:cNvPr>
@@ -25487,10 +25481,10 @@
           <p:cNvPr id="15" name="Rectangle 14">
             <a:extLst>
               <a:ext uri="{FF2B5EF4-FFF2-40B4-BE49-F238E27FC236}">
-                <a16:creationId xmlns:a16="http://schemas.microsoft.com/office/drawing/2014/main" xmlns="" id="{F01DFAFE-D783-B15F-D030-6FAC8A72D019}"/>
+                <a16:creationId xmlns:a16="http://schemas.microsoft.com/office/drawing/2014/main" id="{F01DFAFE-D783-B15F-D030-6FAC8A72D019}"/>
               </a:ext>
               <a:ext uri="{C183D7F6-B498-43B3-948B-1728B52AA6E4}">
-                <adec:decorative xmlns:adec="http://schemas.microsoft.com/office/drawing/2017/decorative" xmlns="" val="1"/>
+                <adec:decorative xmlns:adec="http://schemas.microsoft.com/office/drawing/2017/decorative" val="1"/>
               </a:ext>
             </a:extLst>
           </p:cNvPr>
@@ -25572,10 +25566,10 @@
           <p:cNvPr id="12" name="Oval 11">
             <a:extLst>
               <a:ext uri="{FF2B5EF4-FFF2-40B4-BE49-F238E27FC236}">
-                <a16:creationId xmlns:a16="http://schemas.microsoft.com/office/drawing/2014/main" xmlns="" id="{695BEAC7-7B0C-C67F-01EC-0D5C31CD35E3}"/>
+                <a16:creationId xmlns:a16="http://schemas.microsoft.com/office/drawing/2014/main" id="{695BEAC7-7B0C-C67F-01EC-0D5C31CD35E3}"/>
               </a:ext>
               <a:ext uri="{C183D7F6-B498-43B3-948B-1728B52AA6E4}">
-                <adec:decorative xmlns:adec="http://schemas.microsoft.com/office/drawing/2017/decorative" xmlns="" val="1"/>
+                <adec:decorative xmlns:adec="http://schemas.microsoft.com/office/drawing/2017/decorative" val="1"/>
               </a:ext>
             </a:extLst>
           </p:cNvPr>
@@ -25630,10 +25624,10 @@
           <p:cNvPr id="13" name="Rectangle 12">
             <a:extLst>
               <a:ext uri="{FF2B5EF4-FFF2-40B4-BE49-F238E27FC236}">
-                <a16:creationId xmlns:a16="http://schemas.microsoft.com/office/drawing/2014/main" xmlns="" id="{C0398174-5A2A-0232-7084-BDB432D18CD4}"/>
+                <a16:creationId xmlns:a16="http://schemas.microsoft.com/office/drawing/2014/main" id="{C0398174-5A2A-0232-7084-BDB432D18CD4}"/>
               </a:ext>
               <a:ext uri="{C183D7F6-B498-43B3-948B-1728B52AA6E4}">
-                <adec:decorative xmlns:adec="http://schemas.microsoft.com/office/drawing/2017/decorative" xmlns="" val="1"/>
+                <adec:decorative xmlns:adec="http://schemas.microsoft.com/office/drawing/2017/decorative" val="1"/>
               </a:ext>
             </a:extLst>
           </p:cNvPr>
@@ -25685,7 +25679,7 @@
           <p:cNvPr id="2" name="Title 1">
             <a:extLst>
               <a:ext uri="{FF2B5EF4-FFF2-40B4-BE49-F238E27FC236}">
-                <a16:creationId xmlns:a16="http://schemas.microsoft.com/office/drawing/2014/main" xmlns="" id="{FAF3BB49-A328-F121-7F27-DEB7C3CC2B0F}"/>
+                <a16:creationId xmlns:a16="http://schemas.microsoft.com/office/drawing/2014/main" id="{FAF3BB49-A328-F121-7F27-DEB7C3CC2B0F}"/>
               </a:ext>
             </a:extLst>
           </p:cNvPr>
@@ -25724,7 +25718,7 @@
           <p:cNvPr id="11" name="Picture Placeholder 10">
             <a:extLst>
               <a:ext uri="{FF2B5EF4-FFF2-40B4-BE49-F238E27FC236}">
-                <a16:creationId xmlns:a16="http://schemas.microsoft.com/office/drawing/2014/main" xmlns="" id="{7F8EA658-2652-6F81-1B04-D50C60A3F171}"/>
+                <a16:creationId xmlns:a16="http://schemas.microsoft.com/office/drawing/2014/main" id="{7F8EA658-2652-6F81-1B04-D50C60A3F171}"/>
               </a:ext>
             </a:extLst>
           </p:cNvPr>
@@ -25754,7 +25748,7 @@
           <p:cNvPr id="6" name="Content Placeholder 14">
             <a:extLst>
               <a:ext uri="{FF2B5EF4-FFF2-40B4-BE49-F238E27FC236}">
-                <a16:creationId xmlns:a16="http://schemas.microsoft.com/office/drawing/2014/main" xmlns="" id="{4715548A-198D-A2A2-D9C7-3779F8215ACA}"/>
+                <a16:creationId xmlns:a16="http://schemas.microsoft.com/office/drawing/2014/main" id="{4715548A-198D-A2A2-D9C7-3779F8215ACA}"/>
               </a:ext>
             </a:extLst>
           </p:cNvPr>
@@ -25839,7 +25833,7 @@
           <p:cNvPr id="10" name="Footer Placeholder 4">
             <a:extLst>
               <a:ext uri="{FF2B5EF4-FFF2-40B4-BE49-F238E27FC236}">
-                <a16:creationId xmlns:a16="http://schemas.microsoft.com/office/drawing/2014/main" xmlns="" id="{4D06C25B-BA04-6374-65A0-76BDFB99CD49}"/>
+                <a16:creationId xmlns:a16="http://schemas.microsoft.com/office/drawing/2014/main" id="{4D06C25B-BA04-6374-65A0-76BDFB99CD49}"/>
               </a:ext>
             </a:extLst>
           </p:cNvPr>
@@ -25872,7 +25866,7 @@
           <p:cNvPr id="3" name="Slide Number Placeholder 5">
             <a:extLst>
               <a:ext uri="{FF2B5EF4-FFF2-40B4-BE49-F238E27FC236}">
-                <a16:creationId xmlns:a16="http://schemas.microsoft.com/office/drawing/2014/main" xmlns="" id="{F1172CCB-6D6C-0A38-3222-0CAD79CB32F7}"/>
+                <a16:creationId xmlns:a16="http://schemas.microsoft.com/office/drawing/2014/main" id="{F1172CCB-6D6C-0A38-3222-0CAD79CB32F7}"/>
               </a:ext>
             </a:extLst>
           </p:cNvPr>
@@ -25906,10 +25900,10 @@
           <p:cNvPr id="9" name="Rectangle 8">
             <a:extLst>
               <a:ext uri="{FF2B5EF4-FFF2-40B4-BE49-F238E27FC236}">
-                <a16:creationId xmlns:a16="http://schemas.microsoft.com/office/drawing/2014/main" xmlns="" id="{2DDE88A6-D60B-5097-2962-CB861AC16AB3}"/>
+                <a16:creationId xmlns:a16="http://schemas.microsoft.com/office/drawing/2014/main" id="{2DDE88A6-D60B-5097-2962-CB861AC16AB3}"/>
               </a:ext>
               <a:ext uri="{C183D7F6-B498-43B3-948B-1728B52AA6E4}">
-                <adec:decorative xmlns:adec="http://schemas.microsoft.com/office/drawing/2017/decorative" xmlns="" val="1"/>
+                <adec:decorative xmlns:adec="http://schemas.microsoft.com/office/drawing/2017/decorative" val="1"/>
               </a:ext>
             </a:extLst>
           </p:cNvPr>
@@ -25961,10 +25955,10 @@
           <p:cNvPr id="4" name="Oval 3">
             <a:extLst>
               <a:ext uri="{FF2B5EF4-FFF2-40B4-BE49-F238E27FC236}">
-                <a16:creationId xmlns:a16="http://schemas.microsoft.com/office/drawing/2014/main" xmlns="" id="{8B0A4DDF-9BA3-BD54-C7E8-4ED5D6B42776}"/>
+                <a16:creationId xmlns:a16="http://schemas.microsoft.com/office/drawing/2014/main" id="{8B0A4DDF-9BA3-BD54-C7E8-4ED5D6B42776}"/>
               </a:ext>
               <a:ext uri="{C183D7F6-B498-43B3-948B-1728B52AA6E4}">
-                <adec:decorative xmlns:adec="http://schemas.microsoft.com/office/drawing/2017/decorative" xmlns="" val="1"/>
+                <adec:decorative xmlns:adec="http://schemas.microsoft.com/office/drawing/2017/decorative" val="1"/>
               </a:ext>
             </a:extLst>
           </p:cNvPr>
@@ -26019,7 +26013,7 @@
           <p:cNvPr id="5" name="Date Placeholder 3">
             <a:extLst>
               <a:ext uri="{FF2B5EF4-FFF2-40B4-BE49-F238E27FC236}">
-                <a16:creationId xmlns:a16="http://schemas.microsoft.com/office/drawing/2014/main" xmlns="" id="{7F54A775-89E7-5952-D197-FE7A9446211F}"/>
+                <a16:creationId xmlns:a16="http://schemas.microsoft.com/office/drawing/2014/main" id="{7F54A775-89E7-5952-D197-FE7A9446211F}"/>
               </a:ext>
             </a:extLst>
           </p:cNvPr>
@@ -26151,7 +26145,7 @@
           <a:lstStyle/>
           <a:p>
             <a:r>
-              <a:rPr lang="en-US" smtClean="0"/>
+              <a:rPr lang="en-US"/>
               <a:t>Click to edit Master title style</a:t>
             </a:r>
             <a:endParaRPr lang="en-US" dirty="0"/>
@@ -26223,7 +26217,7 @@
           <a:p>
             <a:pPr lvl="0"/>
             <a:r>
-              <a:rPr lang="en-US" smtClean="0"/>
+              <a:rPr lang="en-US"/>
               <a:t>Edit Master text styles</a:t>
             </a:r>
           </a:p>
@@ -26253,35 +26247,35 @@
           <a:p>
             <a:pPr lvl="0"/>
             <a:r>
-              <a:rPr lang="en-US" smtClean="0"/>
+              <a:rPr lang="en-US"/>
               <a:t>Edit Master text styles</a:t>
             </a:r>
           </a:p>
           <a:p>
             <a:pPr lvl="1"/>
             <a:r>
-              <a:rPr lang="en-US" smtClean="0"/>
+              <a:rPr lang="en-US"/>
               <a:t>Second level</a:t>
             </a:r>
           </a:p>
           <a:p>
             <a:pPr lvl="2"/>
             <a:r>
-              <a:rPr lang="en-US" smtClean="0"/>
+              <a:rPr lang="en-US"/>
               <a:t>Third level</a:t>
             </a:r>
           </a:p>
           <a:p>
             <a:pPr lvl="3"/>
             <a:r>
-              <a:rPr lang="en-US" smtClean="0"/>
+              <a:rPr lang="en-US"/>
               <a:t>Fourth level</a:t>
             </a:r>
           </a:p>
           <a:p>
             <a:pPr lvl="4"/>
             <a:r>
-              <a:rPr lang="en-US" smtClean="0"/>
+              <a:rPr lang="en-US"/>
               <a:t>Fifth level</a:t>
             </a:r>
             <a:endParaRPr lang="en-US" dirty="0"/>
@@ -26353,7 +26347,7 @@
           <a:p>
             <a:pPr lvl="0"/>
             <a:r>
-              <a:rPr lang="en-US" smtClean="0"/>
+              <a:rPr lang="en-US"/>
               <a:t>Edit Master text styles</a:t>
             </a:r>
           </a:p>
@@ -26383,35 +26377,35 @@
           <a:p>
             <a:pPr lvl="0"/>
             <a:r>
-              <a:rPr lang="en-US" smtClean="0"/>
+              <a:rPr lang="en-US"/>
               <a:t>Edit Master text styles</a:t>
             </a:r>
           </a:p>
           <a:p>
             <a:pPr lvl="1"/>
             <a:r>
-              <a:rPr lang="en-US" smtClean="0"/>
+              <a:rPr lang="en-US"/>
               <a:t>Second level</a:t>
             </a:r>
           </a:p>
           <a:p>
             <a:pPr lvl="2"/>
             <a:r>
-              <a:rPr lang="en-US" smtClean="0"/>
+              <a:rPr lang="en-US"/>
               <a:t>Third level</a:t>
             </a:r>
           </a:p>
           <a:p>
             <a:pPr lvl="3"/>
             <a:r>
-              <a:rPr lang="en-US" smtClean="0"/>
+              <a:rPr lang="en-US"/>
               <a:t>Fourth level</a:t>
             </a:r>
           </a:p>
           <a:p>
             <a:pPr lvl="4"/>
             <a:r>
-              <a:rPr lang="en-US" smtClean="0"/>
+              <a:rPr lang="en-US"/>
               <a:t>Fifth level</a:t>
             </a:r>
             <a:endParaRPr lang="en-US" dirty="0"/>
@@ -26434,7 +26428,7 @@
           <a:lstStyle/>
           <a:p>
             <a:r>
-              <a:rPr lang="en-US" altLang="zh-CN" smtClean="0"/>
+              <a:rPr lang="en-US" altLang="zh-CN"/>
               <a:t>03/10/2025</a:t>
             </a:r>
             <a:fld id="{4D63035D-22A0-4334-A9AE-2457016C8B47}" type="datetime1">
@@ -26462,10 +26456,9 @@
           <a:lstStyle/>
           <a:p>
             <a:r>
-              <a:rPr lang="en-US" smtClean="0"/>
+              <a:rPr lang="en-US"/>
               <a:t>Sample Footer Text</a:t>
             </a:r>
-            <a:endParaRPr lang="en-US"/>
           </a:p>
         </p:txBody>
       </p:sp>
@@ -26498,10 +26491,10 @@
           <p:cNvPr id="13" name="Oval 12">
             <a:extLst>
               <a:ext uri="{FF2B5EF4-FFF2-40B4-BE49-F238E27FC236}">
-                <a16:creationId xmlns:a16="http://schemas.microsoft.com/office/drawing/2014/main" xmlns="" id="{C6BD940F-D20B-0BF8-988B-5F547E82603B}"/>
+                <a16:creationId xmlns:a16="http://schemas.microsoft.com/office/drawing/2014/main" id="{C6BD940F-D20B-0BF8-988B-5F547E82603B}"/>
               </a:ext>
               <a:ext uri="{C183D7F6-B498-43B3-948B-1728B52AA6E4}">
-                <adec:decorative xmlns:adec="http://schemas.microsoft.com/office/drawing/2017/decorative" xmlns="" val="1"/>
+                <adec:decorative xmlns:adec="http://schemas.microsoft.com/office/drawing/2017/decorative" val="1"/>
               </a:ext>
             </a:extLst>
           </p:cNvPr>
@@ -26556,10 +26549,10 @@
           <p:cNvPr id="14" name="Rectangle 13">
             <a:extLst>
               <a:ext uri="{FF2B5EF4-FFF2-40B4-BE49-F238E27FC236}">
-                <a16:creationId xmlns:a16="http://schemas.microsoft.com/office/drawing/2014/main" xmlns="" id="{D74561AA-EE8E-A34D-D1B7-BCB6A39A792C}"/>
+                <a16:creationId xmlns:a16="http://schemas.microsoft.com/office/drawing/2014/main" id="{D74561AA-EE8E-A34D-D1B7-BCB6A39A792C}"/>
               </a:ext>
               <a:ext uri="{C183D7F6-B498-43B3-948B-1728B52AA6E4}">
-                <adec:decorative xmlns:adec="http://schemas.microsoft.com/office/drawing/2017/decorative" xmlns="" val="1"/>
+                <adec:decorative xmlns:adec="http://schemas.microsoft.com/office/drawing/2017/decorative" val="1"/>
               </a:ext>
             </a:extLst>
           </p:cNvPr>
@@ -26611,10 +26604,10 @@
           <p:cNvPr id="15" name="Rectangle 14">
             <a:extLst>
               <a:ext uri="{FF2B5EF4-FFF2-40B4-BE49-F238E27FC236}">
-                <a16:creationId xmlns:a16="http://schemas.microsoft.com/office/drawing/2014/main" xmlns="" id="{69187B6F-DAFE-6F4E-C600-61C125681F39}"/>
+                <a16:creationId xmlns:a16="http://schemas.microsoft.com/office/drawing/2014/main" id="{69187B6F-DAFE-6F4E-C600-61C125681F39}"/>
               </a:ext>
               <a:ext uri="{C183D7F6-B498-43B3-948B-1728B52AA6E4}">
-                <adec:decorative xmlns:adec="http://schemas.microsoft.com/office/drawing/2017/decorative" xmlns="" val="1"/>
+                <adec:decorative xmlns:adec="http://schemas.microsoft.com/office/drawing/2017/decorative" val="1"/>
               </a:ext>
             </a:extLst>
           </p:cNvPr>
@@ -26666,10 +26659,10 @@
           <p:cNvPr id="16" name="Oval 15">
             <a:extLst>
               <a:ext uri="{FF2B5EF4-FFF2-40B4-BE49-F238E27FC236}">
-                <a16:creationId xmlns:a16="http://schemas.microsoft.com/office/drawing/2014/main" xmlns="" id="{DE069CF5-8226-D57D-93F5-CB79F89435E5}"/>
+                <a16:creationId xmlns:a16="http://schemas.microsoft.com/office/drawing/2014/main" id="{DE069CF5-8226-D57D-93F5-CB79F89435E5}"/>
               </a:ext>
               <a:ext uri="{C183D7F6-B498-43B3-948B-1728B52AA6E4}">
-                <adec:decorative xmlns:adec="http://schemas.microsoft.com/office/drawing/2017/decorative" xmlns="" val="1"/>
+                <adec:decorative xmlns:adec="http://schemas.microsoft.com/office/drawing/2017/decorative" val="1"/>
               </a:ext>
             </a:extLst>
           </p:cNvPr>
@@ -26754,10 +26747,10 @@
           <p:cNvPr id="12" name="Oval 11">
             <a:extLst>
               <a:ext uri="{FF2B5EF4-FFF2-40B4-BE49-F238E27FC236}">
-                <a16:creationId xmlns:a16="http://schemas.microsoft.com/office/drawing/2014/main" xmlns="" id="{55CD5E4D-B21F-98DF-71BB-3A8188C85DBB}"/>
+                <a16:creationId xmlns:a16="http://schemas.microsoft.com/office/drawing/2014/main" id="{55CD5E4D-B21F-98DF-71BB-3A8188C85DBB}"/>
               </a:ext>
               <a:ext uri="{C183D7F6-B498-43B3-948B-1728B52AA6E4}">
-                <adec:decorative xmlns:adec="http://schemas.microsoft.com/office/drawing/2017/decorative" xmlns="" val="1"/>
+                <adec:decorative xmlns:adec="http://schemas.microsoft.com/office/drawing/2017/decorative" val="1"/>
               </a:ext>
             </a:extLst>
           </p:cNvPr>
@@ -26812,10 +26805,10 @@
           <p:cNvPr id="13" name="Rectangle 12">
             <a:extLst>
               <a:ext uri="{FF2B5EF4-FFF2-40B4-BE49-F238E27FC236}">
-                <a16:creationId xmlns:a16="http://schemas.microsoft.com/office/drawing/2014/main" xmlns="" id="{C3D01567-22D1-D593-7AB7-C9C8909D5838}"/>
+                <a16:creationId xmlns:a16="http://schemas.microsoft.com/office/drawing/2014/main" id="{C3D01567-22D1-D593-7AB7-C9C8909D5838}"/>
               </a:ext>
               <a:ext uri="{C183D7F6-B498-43B3-948B-1728B52AA6E4}">
-                <adec:decorative xmlns:adec="http://schemas.microsoft.com/office/drawing/2017/decorative" xmlns="" val="1"/>
+                <adec:decorative xmlns:adec="http://schemas.microsoft.com/office/drawing/2017/decorative" val="1"/>
               </a:ext>
             </a:extLst>
           </p:cNvPr>
@@ -26867,7 +26860,7 @@
           <p:cNvPr id="2" name="Title 1">
             <a:extLst>
               <a:ext uri="{FF2B5EF4-FFF2-40B4-BE49-F238E27FC236}">
-                <a16:creationId xmlns:a16="http://schemas.microsoft.com/office/drawing/2014/main" xmlns="" id="{FAF3BB49-A328-F121-7F27-DEB7C3CC2B0F}"/>
+                <a16:creationId xmlns:a16="http://schemas.microsoft.com/office/drawing/2014/main" id="{FAF3BB49-A328-F121-7F27-DEB7C3CC2B0F}"/>
               </a:ext>
             </a:extLst>
           </p:cNvPr>
@@ -26906,7 +26899,7 @@
           <p:cNvPr id="11" name="Picture Placeholder 10">
             <a:extLst>
               <a:ext uri="{FF2B5EF4-FFF2-40B4-BE49-F238E27FC236}">
-                <a16:creationId xmlns:a16="http://schemas.microsoft.com/office/drawing/2014/main" xmlns="" id="{7F8EA658-2652-6F81-1B04-D50C60A3F171}"/>
+                <a16:creationId xmlns:a16="http://schemas.microsoft.com/office/drawing/2014/main" id="{7F8EA658-2652-6F81-1B04-D50C60A3F171}"/>
               </a:ext>
             </a:extLst>
           </p:cNvPr>
@@ -26936,7 +26929,7 @@
           <p:cNvPr id="6" name="Content Placeholder 14">
             <a:extLst>
               <a:ext uri="{FF2B5EF4-FFF2-40B4-BE49-F238E27FC236}">
-                <a16:creationId xmlns:a16="http://schemas.microsoft.com/office/drawing/2014/main" xmlns="" id="{75509B30-B5BA-035C-9545-B2FADE9F1D7C}"/>
+                <a16:creationId xmlns:a16="http://schemas.microsoft.com/office/drawing/2014/main" id="{75509B30-B5BA-035C-9545-B2FADE9F1D7C}"/>
               </a:ext>
             </a:extLst>
           </p:cNvPr>
@@ -27021,7 +27014,7 @@
           <p:cNvPr id="10" name="Footer Placeholder 4">
             <a:extLst>
               <a:ext uri="{FF2B5EF4-FFF2-40B4-BE49-F238E27FC236}">
-                <a16:creationId xmlns:a16="http://schemas.microsoft.com/office/drawing/2014/main" xmlns="" id="{4B6D1E27-668D-3A81-ECA7-E859B09D88D1}"/>
+                <a16:creationId xmlns:a16="http://schemas.microsoft.com/office/drawing/2014/main" id="{4B6D1E27-668D-3A81-ECA7-E859B09D88D1}"/>
               </a:ext>
             </a:extLst>
           </p:cNvPr>
@@ -27054,7 +27047,7 @@
           <p:cNvPr id="3" name="Slide Number Placeholder 5">
             <a:extLst>
               <a:ext uri="{FF2B5EF4-FFF2-40B4-BE49-F238E27FC236}">
-                <a16:creationId xmlns:a16="http://schemas.microsoft.com/office/drawing/2014/main" xmlns="" id="{C839268F-45AE-773B-CA70-8DA32DFFF5FA}"/>
+                <a16:creationId xmlns:a16="http://schemas.microsoft.com/office/drawing/2014/main" id="{C839268F-45AE-773B-CA70-8DA32DFFF5FA}"/>
               </a:ext>
             </a:extLst>
           </p:cNvPr>
@@ -27088,10 +27081,10 @@
           <p:cNvPr id="9" name="Rectangle 8">
             <a:extLst>
               <a:ext uri="{FF2B5EF4-FFF2-40B4-BE49-F238E27FC236}">
-                <a16:creationId xmlns:a16="http://schemas.microsoft.com/office/drawing/2014/main" xmlns="" id="{9C09008C-348E-CAC8-F695-08D4D59DB3D0}"/>
+                <a16:creationId xmlns:a16="http://schemas.microsoft.com/office/drawing/2014/main" id="{9C09008C-348E-CAC8-F695-08D4D59DB3D0}"/>
               </a:ext>
               <a:ext uri="{C183D7F6-B498-43B3-948B-1728B52AA6E4}">
-                <adec:decorative xmlns:adec="http://schemas.microsoft.com/office/drawing/2017/decorative" xmlns="" val="1"/>
+                <adec:decorative xmlns:adec="http://schemas.microsoft.com/office/drawing/2017/decorative" val="1"/>
               </a:ext>
             </a:extLst>
           </p:cNvPr>
@@ -27143,10 +27136,10 @@
           <p:cNvPr id="4" name="Oval 3">
             <a:extLst>
               <a:ext uri="{FF2B5EF4-FFF2-40B4-BE49-F238E27FC236}">
-                <a16:creationId xmlns:a16="http://schemas.microsoft.com/office/drawing/2014/main" xmlns="" id="{8392DB71-11A1-8B7E-EAA4-FDA88B6D586C}"/>
+                <a16:creationId xmlns:a16="http://schemas.microsoft.com/office/drawing/2014/main" id="{8392DB71-11A1-8B7E-EAA4-FDA88B6D586C}"/>
               </a:ext>
               <a:ext uri="{C183D7F6-B498-43B3-948B-1728B52AA6E4}">
-                <adec:decorative xmlns:adec="http://schemas.microsoft.com/office/drawing/2017/decorative" xmlns="" val="1"/>
+                <adec:decorative xmlns:adec="http://schemas.microsoft.com/office/drawing/2017/decorative" val="1"/>
               </a:ext>
             </a:extLst>
           </p:cNvPr>
@@ -27201,7 +27194,7 @@
           <p:cNvPr id="5" name="Date Placeholder 3">
             <a:extLst>
               <a:ext uri="{FF2B5EF4-FFF2-40B4-BE49-F238E27FC236}">
-                <a16:creationId xmlns:a16="http://schemas.microsoft.com/office/drawing/2014/main" xmlns="" id="{705589EF-8DD8-AEE5-B805-F35A554E7F98}"/>
+                <a16:creationId xmlns:a16="http://schemas.microsoft.com/office/drawing/2014/main" id="{705589EF-8DD8-AEE5-B805-F35A554E7F98}"/>
               </a:ext>
             </a:extLst>
           </p:cNvPr>
@@ -27283,10 +27276,10 @@
           <p:cNvPr id="7" name="Rectangle 6">
             <a:extLst>
               <a:ext uri="{FF2B5EF4-FFF2-40B4-BE49-F238E27FC236}">
-                <a16:creationId xmlns:a16="http://schemas.microsoft.com/office/drawing/2014/main" xmlns="" id="{993814EA-F598-EBFD-83D1-6782D7CBB598}"/>
+                <a16:creationId xmlns:a16="http://schemas.microsoft.com/office/drawing/2014/main" id="{993814EA-F598-EBFD-83D1-6782D7CBB598}"/>
               </a:ext>
               <a:ext uri="{C183D7F6-B498-43B3-948B-1728B52AA6E4}">
-                <adec:decorative xmlns:adec="http://schemas.microsoft.com/office/drawing/2017/decorative" xmlns="" val="1"/>
+                <adec:decorative xmlns:adec="http://schemas.microsoft.com/office/drawing/2017/decorative" val="1"/>
               </a:ext>
             </a:extLst>
           </p:cNvPr>
@@ -27340,7 +27333,7 @@
           <p:cNvPr id="9" name="Title 1">
             <a:extLst>
               <a:ext uri="{FF2B5EF4-FFF2-40B4-BE49-F238E27FC236}">
-                <a16:creationId xmlns:a16="http://schemas.microsoft.com/office/drawing/2014/main" xmlns="" id="{1F4F8927-891C-4D7A-C2D3-6EB5EF6712FF}"/>
+                <a16:creationId xmlns:a16="http://schemas.microsoft.com/office/drawing/2014/main" id="{1F4F8927-891C-4D7A-C2D3-6EB5EF6712FF}"/>
               </a:ext>
             </a:extLst>
           </p:cNvPr>
@@ -27383,7 +27376,7 @@
           <p:cNvPr id="10" name="Subtitle 2">
             <a:extLst>
               <a:ext uri="{FF2B5EF4-FFF2-40B4-BE49-F238E27FC236}">
-                <a16:creationId xmlns:a16="http://schemas.microsoft.com/office/drawing/2014/main" xmlns="" id="{0489314B-CDC1-7F7E-C4DD-AAC0E5222B03}"/>
+                <a16:creationId xmlns:a16="http://schemas.microsoft.com/office/drawing/2014/main" id="{0489314B-CDC1-7F7E-C4DD-AAC0E5222B03}"/>
               </a:ext>
             </a:extLst>
           </p:cNvPr>
@@ -27459,7 +27452,7 @@
           <p:cNvPr id="15" name="Date Placeholder 4">
             <a:extLst>
               <a:ext uri="{FF2B5EF4-FFF2-40B4-BE49-F238E27FC236}">
-                <a16:creationId xmlns:a16="http://schemas.microsoft.com/office/drawing/2014/main" xmlns="" id="{4D81316D-7AD5-22E6-6806-2F3D201FB53E}"/>
+                <a16:creationId xmlns:a16="http://schemas.microsoft.com/office/drawing/2014/main" id="{4D81316D-7AD5-22E6-6806-2F3D201FB53E}"/>
               </a:ext>
             </a:extLst>
           </p:cNvPr>
@@ -27497,7 +27490,7 @@
           <p:cNvPr id="14" name="Footer Placeholder 5">
             <a:extLst>
               <a:ext uri="{FF2B5EF4-FFF2-40B4-BE49-F238E27FC236}">
-                <a16:creationId xmlns:a16="http://schemas.microsoft.com/office/drawing/2014/main" xmlns="" id="{545E312D-C246-214A-8F58-D9F6BAB62C03}"/>
+                <a16:creationId xmlns:a16="http://schemas.microsoft.com/office/drawing/2014/main" id="{545E312D-C246-214A-8F58-D9F6BAB62C03}"/>
               </a:ext>
             </a:extLst>
           </p:cNvPr>
@@ -27530,7 +27523,7 @@
           <p:cNvPr id="13" name="Slide Number Placeholder 6">
             <a:extLst>
               <a:ext uri="{FF2B5EF4-FFF2-40B4-BE49-F238E27FC236}">
-                <a16:creationId xmlns:a16="http://schemas.microsoft.com/office/drawing/2014/main" xmlns="" id="{5DB604A8-7D54-9DD8-8A5E-316C302EDBEE}"/>
+                <a16:creationId xmlns:a16="http://schemas.microsoft.com/office/drawing/2014/main" id="{5DB604A8-7D54-9DD8-8A5E-316C302EDBEE}"/>
               </a:ext>
             </a:extLst>
           </p:cNvPr>
@@ -27564,10 +27557,10 @@
           <p:cNvPr id="2" name="Oval 1">
             <a:extLst>
               <a:ext uri="{FF2B5EF4-FFF2-40B4-BE49-F238E27FC236}">
-                <a16:creationId xmlns:a16="http://schemas.microsoft.com/office/drawing/2014/main" xmlns="" id="{8C7A0F15-0EC8-3130-B9B5-66D39962587E}"/>
+                <a16:creationId xmlns:a16="http://schemas.microsoft.com/office/drawing/2014/main" id="{8C7A0F15-0EC8-3130-B9B5-66D39962587E}"/>
               </a:ext>
               <a:ext uri="{C183D7F6-B498-43B3-948B-1728B52AA6E4}">
-                <adec:decorative xmlns:adec="http://schemas.microsoft.com/office/drawing/2017/decorative" xmlns="" val="1"/>
+                <adec:decorative xmlns:adec="http://schemas.microsoft.com/office/drawing/2017/decorative" val="1"/>
               </a:ext>
             </a:extLst>
           </p:cNvPr>
@@ -27622,10 +27615,10 @@
           <p:cNvPr id="3" name="Rectangle 2">
             <a:extLst>
               <a:ext uri="{FF2B5EF4-FFF2-40B4-BE49-F238E27FC236}">
-                <a16:creationId xmlns:a16="http://schemas.microsoft.com/office/drawing/2014/main" xmlns="" id="{5D7BB827-F847-836C-072E-C2C3984CE54D}"/>
+                <a16:creationId xmlns:a16="http://schemas.microsoft.com/office/drawing/2014/main" id="{5D7BB827-F847-836C-072E-C2C3984CE54D}"/>
               </a:ext>
               <a:ext uri="{C183D7F6-B498-43B3-948B-1728B52AA6E4}">
-                <adec:decorative xmlns:adec="http://schemas.microsoft.com/office/drawing/2017/decorative" xmlns="" val="1"/>
+                <adec:decorative xmlns:adec="http://schemas.microsoft.com/office/drawing/2017/decorative" val="1"/>
               </a:ext>
             </a:extLst>
           </p:cNvPr>
@@ -27685,7 +27678,7 @@
   <p:clrMapOvr>
     <a:overrideClrMapping bg1="dk1" tx1="lt1" bg2="dk2" tx2="lt2" accent1="accent1" accent2="accent2" accent3="accent3" accent4="accent4" accent5="accent5" accent6="accent6" hlink="hlink" folHlink="folHlink"/>
   </p:clrMapOvr>
-  <p:extLst mod="1">
+  <p:extLst>
     <p:ext uri="{DCECCB84-F9BA-43D5-87BE-67443E8EF086}">
       <p15:sldGuideLst xmlns:p15="http://schemas.microsoft.com/office/powerpoint/2012/main">
         <p15:guide id="5" orient="horz" pos="2160">
@@ -27726,10 +27719,10 @@
           <p:cNvPr id="6" name="Rectangle 8">
             <a:extLst>
               <a:ext uri="{FF2B5EF4-FFF2-40B4-BE49-F238E27FC236}">
-                <a16:creationId xmlns:a16="http://schemas.microsoft.com/office/drawing/2014/main" xmlns="" id="{11CA164D-7C6B-06BE-16C2-75C3BBB09D50}"/>
+                <a16:creationId xmlns:a16="http://schemas.microsoft.com/office/drawing/2014/main" id="{11CA164D-7C6B-06BE-16C2-75C3BBB09D50}"/>
               </a:ext>
               <a:ext uri="{C183D7F6-B498-43B3-948B-1728B52AA6E4}">
-                <adec:decorative xmlns:adec="http://schemas.microsoft.com/office/drawing/2017/decorative" xmlns="" val="1"/>
+                <adec:decorative xmlns:adec="http://schemas.microsoft.com/office/drawing/2017/decorative" val="1"/>
               </a:ext>
             </a:extLst>
           </p:cNvPr>
@@ -27781,7 +27774,7 @@
           <p:cNvPr id="2" name="Title 1">
             <a:extLst>
               <a:ext uri="{FF2B5EF4-FFF2-40B4-BE49-F238E27FC236}">
-                <a16:creationId xmlns:a16="http://schemas.microsoft.com/office/drawing/2014/main" xmlns="" id="{A7221EB5-8556-FBD7-00D5-D69AC8E7E73A}"/>
+                <a16:creationId xmlns:a16="http://schemas.microsoft.com/office/drawing/2014/main" id="{A7221EB5-8556-FBD7-00D5-D69AC8E7E73A}"/>
               </a:ext>
             </a:extLst>
           </p:cNvPr>
@@ -27820,7 +27813,7 @@
           <p:cNvPr id="3" name="Content Placeholder 6">
             <a:extLst>
               <a:ext uri="{FF2B5EF4-FFF2-40B4-BE49-F238E27FC236}">
-                <a16:creationId xmlns:a16="http://schemas.microsoft.com/office/drawing/2014/main" xmlns="" id="{F564D697-3A15-958B-0687-86B35554E5C9}"/>
+                <a16:creationId xmlns:a16="http://schemas.microsoft.com/office/drawing/2014/main" id="{F564D697-3A15-958B-0687-86B35554E5C9}"/>
               </a:ext>
             </a:extLst>
           </p:cNvPr>
@@ -27920,7 +27913,7 @@
           <p:cNvPr id="11" name="Date Placeholder 2">
             <a:extLst>
               <a:ext uri="{FF2B5EF4-FFF2-40B4-BE49-F238E27FC236}">
-                <a16:creationId xmlns:a16="http://schemas.microsoft.com/office/drawing/2014/main" xmlns="" id="{7BE9796F-7CAB-A7AD-BB1B-EF86F280A998}"/>
+                <a16:creationId xmlns:a16="http://schemas.microsoft.com/office/drawing/2014/main" id="{7BE9796F-7CAB-A7AD-BB1B-EF86F280A998}"/>
               </a:ext>
             </a:extLst>
           </p:cNvPr>
@@ -27965,7 +27958,7 @@
           <p:cNvPr id="10" name="Footer Placeholder 3">
             <a:extLst>
               <a:ext uri="{FF2B5EF4-FFF2-40B4-BE49-F238E27FC236}">
-                <a16:creationId xmlns:a16="http://schemas.microsoft.com/office/drawing/2014/main" xmlns="" id="{FB9F2B7A-26D1-C74D-5C9C-6D7D978F5EB4}"/>
+                <a16:creationId xmlns:a16="http://schemas.microsoft.com/office/drawing/2014/main" id="{FB9F2B7A-26D1-C74D-5C9C-6D7D978F5EB4}"/>
               </a:ext>
             </a:extLst>
           </p:cNvPr>
@@ -28004,7 +27997,7 @@
           <p:cNvPr id="9" name="Slide Number Placeholder 4">
             <a:extLst>
               <a:ext uri="{FF2B5EF4-FFF2-40B4-BE49-F238E27FC236}">
-                <a16:creationId xmlns:a16="http://schemas.microsoft.com/office/drawing/2014/main" xmlns="" id="{E8025FD8-B45A-B3C3-084D-724FB4DFB4AD}"/>
+                <a16:creationId xmlns:a16="http://schemas.microsoft.com/office/drawing/2014/main" id="{E8025FD8-B45A-B3C3-084D-724FB4DFB4AD}"/>
               </a:ext>
             </a:extLst>
           </p:cNvPr>
@@ -28045,10 +28038,10 @@
           <p:cNvPr id="8" name="Oval 9">
             <a:extLst>
               <a:ext uri="{FF2B5EF4-FFF2-40B4-BE49-F238E27FC236}">
-                <a16:creationId xmlns:a16="http://schemas.microsoft.com/office/drawing/2014/main" xmlns="" id="{B71AB10C-8E59-AE2D-86E6-6D9A67FE36C9}"/>
+                <a16:creationId xmlns:a16="http://schemas.microsoft.com/office/drawing/2014/main" id="{B71AB10C-8E59-AE2D-86E6-6D9A67FE36C9}"/>
               </a:ext>
               <a:ext uri="{C183D7F6-B498-43B3-948B-1728B52AA6E4}">
-                <adec:decorative xmlns:adec="http://schemas.microsoft.com/office/drawing/2017/decorative" xmlns="" val="1"/>
+                <adec:decorative xmlns:adec="http://schemas.microsoft.com/office/drawing/2017/decorative" val="1"/>
               </a:ext>
             </a:extLst>
           </p:cNvPr>
@@ -28133,10 +28126,10 @@
           <p:cNvPr id="6" name="Rectangle 8">
             <a:extLst>
               <a:ext uri="{FF2B5EF4-FFF2-40B4-BE49-F238E27FC236}">
-                <a16:creationId xmlns:a16="http://schemas.microsoft.com/office/drawing/2014/main" xmlns="" id="{ABBD9B3D-FB5A-6D3F-EF35-F7B4FBF0ECC5}"/>
+                <a16:creationId xmlns:a16="http://schemas.microsoft.com/office/drawing/2014/main" id="{ABBD9B3D-FB5A-6D3F-EF35-F7B4FBF0ECC5}"/>
               </a:ext>
               <a:ext uri="{C183D7F6-B498-43B3-948B-1728B52AA6E4}">
-                <adec:decorative xmlns:adec="http://schemas.microsoft.com/office/drawing/2017/decorative" xmlns="" val="1"/>
+                <adec:decorative xmlns:adec="http://schemas.microsoft.com/office/drawing/2017/decorative" val="1"/>
               </a:ext>
             </a:extLst>
           </p:cNvPr>
@@ -28188,7 +28181,7 @@
           <p:cNvPr id="2" name="Title 1">
             <a:extLst>
               <a:ext uri="{FF2B5EF4-FFF2-40B4-BE49-F238E27FC236}">
-                <a16:creationId xmlns:a16="http://schemas.microsoft.com/office/drawing/2014/main" xmlns="" id="{A7221EB5-8556-FBD7-00D5-D69AC8E7E73A}"/>
+                <a16:creationId xmlns:a16="http://schemas.microsoft.com/office/drawing/2014/main" id="{A7221EB5-8556-FBD7-00D5-D69AC8E7E73A}"/>
               </a:ext>
             </a:extLst>
           </p:cNvPr>
@@ -28227,7 +28220,7 @@
           <p:cNvPr id="3" name="Content Placeholder 6">
             <a:extLst>
               <a:ext uri="{FF2B5EF4-FFF2-40B4-BE49-F238E27FC236}">
-                <a16:creationId xmlns:a16="http://schemas.microsoft.com/office/drawing/2014/main" xmlns="" id="{84CA7AA3-D510-AE6D-77CB-24E1A93D2183}"/>
+                <a16:creationId xmlns:a16="http://schemas.microsoft.com/office/drawing/2014/main" id="{84CA7AA3-D510-AE6D-77CB-24E1A93D2183}"/>
               </a:ext>
             </a:extLst>
           </p:cNvPr>
@@ -28327,7 +28320,7 @@
           <p:cNvPr id="11" name="Date Placeholder 3">
             <a:extLst>
               <a:ext uri="{FF2B5EF4-FFF2-40B4-BE49-F238E27FC236}">
-                <a16:creationId xmlns:a16="http://schemas.microsoft.com/office/drawing/2014/main" xmlns="" id="{A16EFAA2-E99D-F827-DFFE-D71EBB1C997B}"/>
+                <a16:creationId xmlns:a16="http://schemas.microsoft.com/office/drawing/2014/main" id="{A16EFAA2-E99D-F827-DFFE-D71EBB1C997B}"/>
               </a:ext>
             </a:extLst>
           </p:cNvPr>
@@ -28365,7 +28358,7 @@
           <p:cNvPr id="10" name="Footer Placeholder 4">
             <a:extLst>
               <a:ext uri="{FF2B5EF4-FFF2-40B4-BE49-F238E27FC236}">
-                <a16:creationId xmlns:a16="http://schemas.microsoft.com/office/drawing/2014/main" xmlns="" id="{4D80EBC9-29E7-4715-E05F-F2D325C93622}"/>
+                <a16:creationId xmlns:a16="http://schemas.microsoft.com/office/drawing/2014/main" id="{4D80EBC9-29E7-4715-E05F-F2D325C93622}"/>
               </a:ext>
             </a:extLst>
           </p:cNvPr>
@@ -28398,7 +28391,7 @@
           <p:cNvPr id="9" name="Slide Number Placeholder 5">
             <a:extLst>
               <a:ext uri="{FF2B5EF4-FFF2-40B4-BE49-F238E27FC236}">
-                <a16:creationId xmlns:a16="http://schemas.microsoft.com/office/drawing/2014/main" xmlns="" id="{45C54C63-BED0-0452-B6A1-95AD18F28E9D}"/>
+                <a16:creationId xmlns:a16="http://schemas.microsoft.com/office/drawing/2014/main" id="{45C54C63-BED0-0452-B6A1-95AD18F28E9D}"/>
               </a:ext>
             </a:extLst>
           </p:cNvPr>
@@ -28432,10 +28425,10 @@
           <p:cNvPr id="8" name="Oval 9">
             <a:extLst>
               <a:ext uri="{FF2B5EF4-FFF2-40B4-BE49-F238E27FC236}">
-                <a16:creationId xmlns:a16="http://schemas.microsoft.com/office/drawing/2014/main" xmlns="" id="{FE1ABDF3-0063-4A1D-10BB-DA224E36DC12}"/>
+                <a16:creationId xmlns:a16="http://schemas.microsoft.com/office/drawing/2014/main" id="{FE1ABDF3-0063-4A1D-10BB-DA224E36DC12}"/>
               </a:ext>
               <a:ext uri="{C183D7F6-B498-43B3-948B-1728B52AA6E4}">
-                <adec:decorative xmlns:adec="http://schemas.microsoft.com/office/drawing/2017/decorative" xmlns="" val="1"/>
+                <adec:decorative xmlns:adec="http://schemas.microsoft.com/office/drawing/2017/decorative" val="1"/>
               </a:ext>
             </a:extLst>
           </p:cNvPr>
@@ -28520,10 +28513,10 @@
           <p:cNvPr id="6" name="Rectangle 8">
             <a:extLst>
               <a:ext uri="{FF2B5EF4-FFF2-40B4-BE49-F238E27FC236}">
-                <a16:creationId xmlns:a16="http://schemas.microsoft.com/office/drawing/2014/main" xmlns="" id="{1812D861-AAF6-629C-C60E-0B5C35159274}"/>
+                <a16:creationId xmlns:a16="http://schemas.microsoft.com/office/drawing/2014/main" id="{1812D861-AAF6-629C-C60E-0B5C35159274}"/>
               </a:ext>
               <a:ext uri="{C183D7F6-B498-43B3-948B-1728B52AA6E4}">
-                <adec:decorative xmlns:adec="http://schemas.microsoft.com/office/drawing/2017/decorative" xmlns="" val="1"/>
+                <adec:decorative xmlns:adec="http://schemas.microsoft.com/office/drawing/2017/decorative" val="1"/>
               </a:ext>
             </a:extLst>
           </p:cNvPr>
@@ -28575,7 +28568,7 @@
           <p:cNvPr id="2" name="Title 1">
             <a:extLst>
               <a:ext uri="{FF2B5EF4-FFF2-40B4-BE49-F238E27FC236}">
-                <a16:creationId xmlns:a16="http://schemas.microsoft.com/office/drawing/2014/main" xmlns="" id="{A7221EB5-8556-FBD7-00D5-D69AC8E7E73A}"/>
+                <a16:creationId xmlns:a16="http://schemas.microsoft.com/office/drawing/2014/main" id="{A7221EB5-8556-FBD7-00D5-D69AC8E7E73A}"/>
               </a:ext>
             </a:extLst>
           </p:cNvPr>
@@ -28614,7 +28607,7 @@
           <p:cNvPr id="3" name="Content Placeholder 6">
             <a:extLst>
               <a:ext uri="{FF2B5EF4-FFF2-40B4-BE49-F238E27FC236}">
-                <a16:creationId xmlns:a16="http://schemas.microsoft.com/office/drawing/2014/main" xmlns="" id="{EC92FC1E-596F-194E-3F60-0A378404860D}"/>
+                <a16:creationId xmlns:a16="http://schemas.microsoft.com/office/drawing/2014/main" id="{EC92FC1E-596F-194E-3F60-0A378404860D}"/>
               </a:ext>
             </a:extLst>
           </p:cNvPr>
@@ -28714,7 +28707,7 @@
           <p:cNvPr id="11" name="Date Placeholder 3">
             <a:extLst>
               <a:ext uri="{FF2B5EF4-FFF2-40B4-BE49-F238E27FC236}">
-                <a16:creationId xmlns:a16="http://schemas.microsoft.com/office/drawing/2014/main" xmlns="" id="{312B60F2-F319-70A6-2EBE-ED2F93E6BBCF}"/>
+                <a16:creationId xmlns:a16="http://schemas.microsoft.com/office/drawing/2014/main" id="{312B60F2-F319-70A6-2EBE-ED2F93E6BBCF}"/>
               </a:ext>
             </a:extLst>
           </p:cNvPr>
@@ -28752,7 +28745,7 @@
           <p:cNvPr id="10" name="Footer Placeholder 4">
             <a:extLst>
               <a:ext uri="{FF2B5EF4-FFF2-40B4-BE49-F238E27FC236}">
-                <a16:creationId xmlns:a16="http://schemas.microsoft.com/office/drawing/2014/main" xmlns="" id="{578C9B71-D747-9AA5-01A4-6AEFAECC7CEB}"/>
+                <a16:creationId xmlns:a16="http://schemas.microsoft.com/office/drawing/2014/main" id="{578C9B71-D747-9AA5-01A4-6AEFAECC7CEB}"/>
               </a:ext>
             </a:extLst>
           </p:cNvPr>
@@ -28785,7 +28778,7 @@
           <p:cNvPr id="9" name="Slide Number Placeholder 5">
             <a:extLst>
               <a:ext uri="{FF2B5EF4-FFF2-40B4-BE49-F238E27FC236}">
-                <a16:creationId xmlns:a16="http://schemas.microsoft.com/office/drawing/2014/main" xmlns="" id="{8264EEDC-4B25-0FE5-4420-D6FB69DD9D27}"/>
+                <a16:creationId xmlns:a16="http://schemas.microsoft.com/office/drawing/2014/main" id="{8264EEDC-4B25-0FE5-4420-D6FB69DD9D27}"/>
               </a:ext>
             </a:extLst>
           </p:cNvPr>
@@ -28819,10 +28812,10 @@
           <p:cNvPr id="8" name="Oval 9">
             <a:extLst>
               <a:ext uri="{FF2B5EF4-FFF2-40B4-BE49-F238E27FC236}">
-                <a16:creationId xmlns:a16="http://schemas.microsoft.com/office/drawing/2014/main" xmlns="" id="{3B5B8FFC-1EB4-655C-F3FA-BF2976D1E3A9}"/>
+                <a16:creationId xmlns:a16="http://schemas.microsoft.com/office/drawing/2014/main" id="{3B5B8FFC-1EB4-655C-F3FA-BF2976D1E3A9}"/>
               </a:ext>
               <a:ext uri="{C183D7F6-B498-43B3-948B-1728B52AA6E4}">
-                <adec:decorative xmlns:adec="http://schemas.microsoft.com/office/drawing/2017/decorative" xmlns="" val="1"/>
+                <adec:decorative xmlns:adec="http://schemas.microsoft.com/office/drawing/2017/decorative" val="1"/>
               </a:ext>
             </a:extLst>
           </p:cNvPr>
@@ -28907,10 +28900,10 @@
           <p:cNvPr id="10" name="Oval 9">
             <a:extLst>
               <a:ext uri="{FF2B5EF4-FFF2-40B4-BE49-F238E27FC236}">
-                <a16:creationId xmlns:a16="http://schemas.microsoft.com/office/drawing/2014/main" xmlns="" id="{BD6CD142-9810-6E9E-811F-FBF95DAB136A}"/>
+                <a16:creationId xmlns:a16="http://schemas.microsoft.com/office/drawing/2014/main" id="{BD6CD142-9810-6E9E-811F-FBF95DAB136A}"/>
               </a:ext>
               <a:ext uri="{C183D7F6-B498-43B3-948B-1728B52AA6E4}">
-                <adec:decorative xmlns:adec="http://schemas.microsoft.com/office/drawing/2017/decorative" xmlns="" val="1"/>
+                <adec:decorative xmlns:adec="http://schemas.microsoft.com/office/drawing/2017/decorative" val="1"/>
               </a:ext>
             </a:extLst>
           </p:cNvPr>
@@ -28965,10 +28958,10 @@
           <p:cNvPr id="12" name="Rectangle 11">
             <a:extLst>
               <a:ext uri="{FF2B5EF4-FFF2-40B4-BE49-F238E27FC236}">
-                <a16:creationId xmlns:a16="http://schemas.microsoft.com/office/drawing/2014/main" xmlns="" id="{20410E30-A3EF-7BFE-43CC-85D8B7FDC4C2}"/>
+                <a16:creationId xmlns:a16="http://schemas.microsoft.com/office/drawing/2014/main" id="{20410E30-A3EF-7BFE-43CC-85D8B7FDC4C2}"/>
               </a:ext>
               <a:ext uri="{C183D7F6-B498-43B3-948B-1728B52AA6E4}">
-                <adec:decorative xmlns:adec="http://schemas.microsoft.com/office/drawing/2017/decorative" xmlns="" val="1"/>
+                <adec:decorative xmlns:adec="http://schemas.microsoft.com/office/drawing/2017/decorative" val="1"/>
               </a:ext>
             </a:extLst>
           </p:cNvPr>
@@ -29020,7 +29013,7 @@
           <p:cNvPr id="2" name="Title 1">
             <a:extLst>
               <a:ext uri="{FF2B5EF4-FFF2-40B4-BE49-F238E27FC236}">
-                <a16:creationId xmlns:a16="http://schemas.microsoft.com/office/drawing/2014/main" xmlns="" id="{FAF3BB49-A328-F121-7F27-DEB7C3CC2B0F}"/>
+                <a16:creationId xmlns:a16="http://schemas.microsoft.com/office/drawing/2014/main" id="{FAF3BB49-A328-F121-7F27-DEB7C3CC2B0F}"/>
               </a:ext>
             </a:extLst>
           </p:cNvPr>
@@ -29059,7 +29052,7 @@
           <p:cNvPr id="9" name="Text Placeholder 8">
             <a:extLst>
               <a:ext uri="{FF2B5EF4-FFF2-40B4-BE49-F238E27FC236}">
-                <a16:creationId xmlns:a16="http://schemas.microsoft.com/office/drawing/2014/main" xmlns="" id="{84DC103C-4E45-07FA-2734-5BAE2624DC48}"/>
+                <a16:creationId xmlns:a16="http://schemas.microsoft.com/office/drawing/2014/main" id="{84DC103C-4E45-07FA-2734-5BAE2624DC48}"/>
               </a:ext>
             </a:extLst>
           </p:cNvPr>
@@ -29144,7 +29137,7 @@
           <p:cNvPr id="11" name="Text Placeholder 10">
             <a:extLst>
               <a:ext uri="{FF2B5EF4-FFF2-40B4-BE49-F238E27FC236}">
-                <a16:creationId xmlns:a16="http://schemas.microsoft.com/office/drawing/2014/main" xmlns="" id="{288F1ED9-CE64-0191-F909-FDC002A7456F}"/>
+                <a16:creationId xmlns:a16="http://schemas.microsoft.com/office/drawing/2014/main" id="{288F1ED9-CE64-0191-F909-FDC002A7456F}"/>
               </a:ext>
             </a:extLst>
           </p:cNvPr>
@@ -29229,7 +29222,7 @@
           <p:cNvPr id="5" name="Date Placeholder 3">
             <a:extLst>
               <a:ext uri="{FF2B5EF4-FFF2-40B4-BE49-F238E27FC236}">
-                <a16:creationId xmlns:a16="http://schemas.microsoft.com/office/drawing/2014/main" xmlns="" id="{060A18B9-CFE5-6D5D-5C30-04F0B3377620}"/>
+                <a16:creationId xmlns:a16="http://schemas.microsoft.com/office/drawing/2014/main" id="{060A18B9-CFE5-6D5D-5C30-04F0B3377620}"/>
               </a:ext>
             </a:extLst>
           </p:cNvPr>
@@ -29276,7 +29269,7 @@
           <p:cNvPr id="13" name="Footer Placeholder 4">
             <a:extLst>
               <a:ext uri="{FF2B5EF4-FFF2-40B4-BE49-F238E27FC236}">
-                <a16:creationId xmlns:a16="http://schemas.microsoft.com/office/drawing/2014/main" xmlns="" id="{23869561-2D2D-9996-FFE8-388DC6E9963D}"/>
+                <a16:creationId xmlns:a16="http://schemas.microsoft.com/office/drawing/2014/main" id="{23869561-2D2D-9996-FFE8-388DC6E9963D}"/>
               </a:ext>
             </a:extLst>
           </p:cNvPr>
@@ -29309,7 +29302,7 @@
           <p:cNvPr id="8" name="Slide Number Placeholder 5">
             <a:extLst>
               <a:ext uri="{FF2B5EF4-FFF2-40B4-BE49-F238E27FC236}">
-                <a16:creationId xmlns:a16="http://schemas.microsoft.com/office/drawing/2014/main" xmlns="" id="{18998549-C638-4A98-30C9-24AEA6415173}"/>
+                <a16:creationId xmlns:a16="http://schemas.microsoft.com/office/drawing/2014/main" id="{18998549-C638-4A98-30C9-24AEA6415173}"/>
               </a:ext>
             </a:extLst>
           </p:cNvPr>
@@ -29343,10 +29336,10 @@
           <p:cNvPr id="4" name="Rectangle 3">
             <a:extLst>
               <a:ext uri="{FF2B5EF4-FFF2-40B4-BE49-F238E27FC236}">
-                <a16:creationId xmlns:a16="http://schemas.microsoft.com/office/drawing/2014/main" xmlns="" id="{F7999891-11D4-E429-CDE9-3DF80CE2015A}"/>
+                <a16:creationId xmlns:a16="http://schemas.microsoft.com/office/drawing/2014/main" id="{F7999891-11D4-E429-CDE9-3DF80CE2015A}"/>
               </a:ext>
               <a:ext uri="{C183D7F6-B498-43B3-948B-1728B52AA6E4}">
-                <adec:decorative xmlns:adec="http://schemas.microsoft.com/office/drawing/2017/decorative" xmlns="" val="1"/>
+                <adec:decorative xmlns:adec="http://schemas.microsoft.com/office/drawing/2017/decorative" val="1"/>
               </a:ext>
             </a:extLst>
           </p:cNvPr>
@@ -29398,10 +29391,10 @@
           <p:cNvPr id="3" name="Oval 2">
             <a:extLst>
               <a:ext uri="{FF2B5EF4-FFF2-40B4-BE49-F238E27FC236}">
-                <a16:creationId xmlns:a16="http://schemas.microsoft.com/office/drawing/2014/main" xmlns="" id="{DB733A1D-510F-48B2-3D98-68215649F5AF}"/>
+                <a16:creationId xmlns:a16="http://schemas.microsoft.com/office/drawing/2014/main" id="{DB733A1D-510F-48B2-3D98-68215649F5AF}"/>
               </a:ext>
               <a:ext uri="{C183D7F6-B498-43B3-948B-1728B52AA6E4}">
-                <adec:decorative xmlns:adec="http://schemas.microsoft.com/office/drawing/2017/decorative" xmlns="" val="1"/>
+                <adec:decorative xmlns:adec="http://schemas.microsoft.com/office/drawing/2017/decorative" val="1"/>
               </a:ext>
             </a:extLst>
           </p:cNvPr>
@@ -29486,10 +29479,10 @@
           <p:cNvPr id="12" name="Oval 11">
             <a:extLst>
               <a:ext uri="{FF2B5EF4-FFF2-40B4-BE49-F238E27FC236}">
-                <a16:creationId xmlns:a16="http://schemas.microsoft.com/office/drawing/2014/main" xmlns="" id="{C6BD940F-D20B-0BF8-988B-5F547E82603B}"/>
+                <a16:creationId xmlns:a16="http://schemas.microsoft.com/office/drawing/2014/main" id="{C6BD940F-D20B-0BF8-988B-5F547E82603B}"/>
               </a:ext>
               <a:ext uri="{C183D7F6-B498-43B3-948B-1728B52AA6E4}">
-                <adec:decorative xmlns:adec="http://schemas.microsoft.com/office/drawing/2017/decorative" xmlns="" val="1"/>
+                <adec:decorative xmlns:adec="http://schemas.microsoft.com/office/drawing/2017/decorative" val="1"/>
               </a:ext>
             </a:extLst>
           </p:cNvPr>
@@ -29544,10 +29537,10 @@
           <p:cNvPr id="14" name="Rectangle 13">
             <a:extLst>
               <a:ext uri="{FF2B5EF4-FFF2-40B4-BE49-F238E27FC236}">
-                <a16:creationId xmlns:a16="http://schemas.microsoft.com/office/drawing/2014/main" xmlns="" id="{D74561AA-EE8E-A34D-D1B7-BCB6A39A792C}"/>
+                <a16:creationId xmlns:a16="http://schemas.microsoft.com/office/drawing/2014/main" id="{D74561AA-EE8E-A34D-D1B7-BCB6A39A792C}"/>
               </a:ext>
               <a:ext uri="{C183D7F6-B498-43B3-948B-1728B52AA6E4}">
-                <adec:decorative xmlns:adec="http://schemas.microsoft.com/office/drawing/2017/decorative" xmlns="" val="1"/>
+                <adec:decorative xmlns:adec="http://schemas.microsoft.com/office/drawing/2017/decorative" val="1"/>
               </a:ext>
             </a:extLst>
           </p:cNvPr>
@@ -29599,7 +29592,7 @@
           <p:cNvPr id="2" name="Title 1">
             <a:extLst>
               <a:ext uri="{FF2B5EF4-FFF2-40B4-BE49-F238E27FC236}">
-                <a16:creationId xmlns:a16="http://schemas.microsoft.com/office/drawing/2014/main" xmlns="" id="{41FEE969-634D-6E32-D227-18E9282C6F9E}"/>
+                <a16:creationId xmlns:a16="http://schemas.microsoft.com/office/drawing/2014/main" id="{41FEE969-634D-6E32-D227-18E9282C6F9E}"/>
               </a:ext>
             </a:extLst>
           </p:cNvPr>
@@ -29638,7 +29631,7 @@
           <p:cNvPr id="3" name="Text Placeholder 2">
             <a:extLst>
               <a:ext uri="{FF2B5EF4-FFF2-40B4-BE49-F238E27FC236}">
-                <a16:creationId xmlns:a16="http://schemas.microsoft.com/office/drawing/2014/main" xmlns="" id="{61CD26D4-290A-F0ED-7D62-41EDA6FEC2B9}"/>
+                <a16:creationId xmlns:a16="http://schemas.microsoft.com/office/drawing/2014/main" id="{61CD26D4-290A-F0ED-7D62-41EDA6FEC2B9}"/>
               </a:ext>
             </a:extLst>
           </p:cNvPr>
@@ -29714,7 +29707,7 @@
           <p:cNvPr id="11" name="Text Placeholder 10">
             <a:extLst>
               <a:ext uri="{FF2B5EF4-FFF2-40B4-BE49-F238E27FC236}">
-                <a16:creationId xmlns:a16="http://schemas.microsoft.com/office/drawing/2014/main" xmlns="" id="{F86E5640-DE07-46FE-2EFB-FCD8C5238DC9}"/>
+                <a16:creationId xmlns:a16="http://schemas.microsoft.com/office/drawing/2014/main" id="{F86E5640-DE07-46FE-2EFB-FCD8C5238DC9}"/>
               </a:ext>
             </a:extLst>
           </p:cNvPr>
@@ -29799,7 +29792,7 @@
           <p:cNvPr id="5" name="Text Placeholder 4">
             <a:extLst>
               <a:ext uri="{FF2B5EF4-FFF2-40B4-BE49-F238E27FC236}">
-                <a16:creationId xmlns:a16="http://schemas.microsoft.com/office/drawing/2014/main" xmlns="" id="{06536620-C4F3-EEC3-DBF1-05196B1CBB55}"/>
+                <a16:creationId xmlns:a16="http://schemas.microsoft.com/office/drawing/2014/main" id="{06536620-C4F3-EEC3-DBF1-05196B1CBB55}"/>
               </a:ext>
             </a:extLst>
           </p:cNvPr>
@@ -29875,7 +29868,7 @@
           <p:cNvPr id="13" name="Text Placeholder 12">
             <a:extLst>
               <a:ext uri="{FF2B5EF4-FFF2-40B4-BE49-F238E27FC236}">
-                <a16:creationId xmlns:a16="http://schemas.microsoft.com/office/drawing/2014/main" xmlns="" id="{20D5795C-6228-AA6F-1CF7-AD7010686BC6}"/>
+                <a16:creationId xmlns:a16="http://schemas.microsoft.com/office/drawing/2014/main" id="{20D5795C-6228-AA6F-1CF7-AD7010686BC6}"/>
               </a:ext>
             </a:extLst>
           </p:cNvPr>
@@ -29960,7 +29953,7 @@
           <p:cNvPr id="15" name="Footer Placeholder 3">
             <a:extLst>
               <a:ext uri="{FF2B5EF4-FFF2-40B4-BE49-F238E27FC236}">
-                <a16:creationId xmlns:a16="http://schemas.microsoft.com/office/drawing/2014/main" xmlns="" id="{B593D132-537B-9DD5-6B41-6F24C843C53D}"/>
+                <a16:creationId xmlns:a16="http://schemas.microsoft.com/office/drawing/2014/main" id="{B593D132-537B-9DD5-6B41-6F24C843C53D}"/>
               </a:ext>
             </a:extLst>
           </p:cNvPr>
@@ -29999,7 +29992,7 @@
           <p:cNvPr id="10" name="Slide Number Placeholder 4">
             <a:extLst>
               <a:ext uri="{FF2B5EF4-FFF2-40B4-BE49-F238E27FC236}">
-                <a16:creationId xmlns:a16="http://schemas.microsoft.com/office/drawing/2014/main" xmlns="" id="{BE6E8398-5863-5CDD-8A1A-FAF35E8D3A5D}"/>
+                <a16:creationId xmlns:a16="http://schemas.microsoft.com/office/drawing/2014/main" id="{BE6E8398-5863-5CDD-8A1A-FAF35E8D3A5D}"/>
               </a:ext>
             </a:extLst>
           </p:cNvPr>
@@ -30040,10 +30033,10 @@
           <p:cNvPr id="6" name="Rectangle 5">
             <a:extLst>
               <a:ext uri="{FF2B5EF4-FFF2-40B4-BE49-F238E27FC236}">
-                <a16:creationId xmlns:a16="http://schemas.microsoft.com/office/drawing/2014/main" xmlns="" id="{69187B6F-DAFE-6F4E-C600-61C125681F39}"/>
+                <a16:creationId xmlns:a16="http://schemas.microsoft.com/office/drawing/2014/main" id="{69187B6F-DAFE-6F4E-C600-61C125681F39}"/>
               </a:ext>
               <a:ext uri="{C183D7F6-B498-43B3-948B-1728B52AA6E4}">
-                <adec:decorative xmlns:adec="http://schemas.microsoft.com/office/drawing/2017/decorative" xmlns="" val="1"/>
+                <adec:decorative xmlns:adec="http://schemas.microsoft.com/office/drawing/2017/decorative" val="1"/>
               </a:ext>
             </a:extLst>
           </p:cNvPr>
@@ -30095,10 +30088,10 @@
           <p:cNvPr id="4" name="Oval 3">
             <a:extLst>
               <a:ext uri="{FF2B5EF4-FFF2-40B4-BE49-F238E27FC236}">
-                <a16:creationId xmlns:a16="http://schemas.microsoft.com/office/drawing/2014/main" xmlns="" id="{DE069CF5-8226-D57D-93F5-CB79F89435E5}"/>
+                <a16:creationId xmlns:a16="http://schemas.microsoft.com/office/drawing/2014/main" id="{DE069CF5-8226-D57D-93F5-CB79F89435E5}"/>
               </a:ext>
               <a:ext uri="{C183D7F6-B498-43B3-948B-1728B52AA6E4}">
-                <adec:decorative xmlns:adec="http://schemas.microsoft.com/office/drawing/2017/decorative" xmlns="" val="1"/>
+                <adec:decorative xmlns:adec="http://schemas.microsoft.com/office/drawing/2017/decorative" val="1"/>
               </a:ext>
             </a:extLst>
           </p:cNvPr>
@@ -30153,7 +30146,7 @@
           <p:cNvPr id="7" name="Date Placeholder 3">
             <a:extLst>
               <a:ext uri="{FF2B5EF4-FFF2-40B4-BE49-F238E27FC236}">
-                <a16:creationId xmlns:a16="http://schemas.microsoft.com/office/drawing/2014/main" xmlns="" id="{2275FBC0-CDAF-8728-57DD-F90BC45BAA1B}"/>
+                <a16:creationId xmlns:a16="http://schemas.microsoft.com/office/drawing/2014/main" id="{2275FBC0-CDAF-8728-57DD-F90BC45BAA1B}"/>
               </a:ext>
             </a:extLst>
           </p:cNvPr>
@@ -30230,10 +30223,10 @@
           <p:cNvPr id="20" name="Rectangle 8">
             <a:extLst>
               <a:ext uri="{FF2B5EF4-FFF2-40B4-BE49-F238E27FC236}">
-                <a16:creationId xmlns:a16="http://schemas.microsoft.com/office/drawing/2014/main" xmlns="" id="{DDD22BDB-6215-B88F-E45B-801DAF53832E}"/>
+                <a16:creationId xmlns:a16="http://schemas.microsoft.com/office/drawing/2014/main" id="{DDD22BDB-6215-B88F-E45B-801DAF53832E}"/>
               </a:ext>
               <a:ext uri="{C183D7F6-B498-43B3-948B-1728B52AA6E4}">
-                <adec:decorative xmlns:adec="http://schemas.microsoft.com/office/drawing/2017/decorative" xmlns="" val="1"/>
+                <adec:decorative xmlns:adec="http://schemas.microsoft.com/office/drawing/2017/decorative" val="1"/>
               </a:ext>
             </a:extLst>
           </p:cNvPr>
@@ -30285,7 +30278,7 @@
           <p:cNvPr id="2" name="Title 1">
             <a:extLst>
               <a:ext uri="{FF2B5EF4-FFF2-40B4-BE49-F238E27FC236}">
-                <a16:creationId xmlns:a16="http://schemas.microsoft.com/office/drawing/2014/main" xmlns="" id="{666A9F42-7FF7-F803-C075-BC4968D35E34}"/>
+                <a16:creationId xmlns:a16="http://schemas.microsoft.com/office/drawing/2014/main" id="{666A9F42-7FF7-F803-C075-BC4968D35E34}"/>
               </a:ext>
             </a:extLst>
           </p:cNvPr>
@@ -30324,7 +30317,7 @@
           <p:cNvPr id="12" name="Date Placeholder 2">
             <a:extLst>
               <a:ext uri="{FF2B5EF4-FFF2-40B4-BE49-F238E27FC236}">
-                <a16:creationId xmlns:a16="http://schemas.microsoft.com/office/drawing/2014/main" xmlns="" id="{60D48F82-45FC-A36B-0146-5E8D370B7C7E}"/>
+                <a16:creationId xmlns:a16="http://schemas.microsoft.com/office/drawing/2014/main" id="{60D48F82-45FC-A36B-0146-5E8D370B7C7E}"/>
               </a:ext>
             </a:extLst>
           </p:cNvPr>
@@ -30369,7 +30362,7 @@
           <p:cNvPr id="11" name="Footer Placeholder 3">
             <a:extLst>
               <a:ext uri="{FF2B5EF4-FFF2-40B4-BE49-F238E27FC236}">
-                <a16:creationId xmlns:a16="http://schemas.microsoft.com/office/drawing/2014/main" xmlns="" id="{0ACEA3CE-FEF8-2294-2081-7C50B08B5E8A}"/>
+                <a16:creationId xmlns:a16="http://schemas.microsoft.com/office/drawing/2014/main" id="{0ACEA3CE-FEF8-2294-2081-7C50B08B5E8A}"/>
               </a:ext>
             </a:extLst>
           </p:cNvPr>
@@ -30408,7 +30401,7 @@
           <p:cNvPr id="10" name="Slide Number Placeholder 4">
             <a:extLst>
               <a:ext uri="{FF2B5EF4-FFF2-40B4-BE49-F238E27FC236}">
-                <a16:creationId xmlns:a16="http://schemas.microsoft.com/office/drawing/2014/main" xmlns="" id="{C5CEDF45-2CB7-35F2-5138-54DBA2ADD8F4}"/>
+                <a16:creationId xmlns:a16="http://schemas.microsoft.com/office/drawing/2014/main" id="{C5CEDF45-2CB7-35F2-5138-54DBA2ADD8F4}"/>
               </a:ext>
             </a:extLst>
           </p:cNvPr>
@@ -30449,10 +30442,10 @@
           <p:cNvPr id="21" name="Oval 9">
             <a:extLst>
               <a:ext uri="{FF2B5EF4-FFF2-40B4-BE49-F238E27FC236}">
-                <a16:creationId xmlns:a16="http://schemas.microsoft.com/office/drawing/2014/main" xmlns="" id="{3B8FB568-40CA-4614-DF0C-2C6D33DBF8E5}"/>
+                <a16:creationId xmlns:a16="http://schemas.microsoft.com/office/drawing/2014/main" id="{3B8FB568-40CA-4614-DF0C-2C6D33DBF8E5}"/>
               </a:ext>
               <a:ext uri="{C183D7F6-B498-43B3-948B-1728B52AA6E4}">
-                <adec:decorative xmlns:adec="http://schemas.microsoft.com/office/drawing/2017/decorative" xmlns="" val="1"/>
+                <adec:decorative xmlns:adec="http://schemas.microsoft.com/office/drawing/2017/decorative" val="1"/>
               </a:ext>
             </a:extLst>
           </p:cNvPr>
@@ -30507,10 +30500,10 @@
           <p:cNvPr id="4" name="Oval 5">
             <a:extLst>
               <a:ext uri="{FF2B5EF4-FFF2-40B4-BE49-F238E27FC236}">
-                <a16:creationId xmlns:a16="http://schemas.microsoft.com/office/drawing/2014/main" xmlns="" id="{19509B16-033B-8F64-FFC4-DDE5E8D48D51}"/>
+                <a16:creationId xmlns:a16="http://schemas.microsoft.com/office/drawing/2014/main" id="{19509B16-033B-8F64-FFC4-DDE5E8D48D51}"/>
               </a:ext>
               <a:ext uri="{C183D7F6-B498-43B3-948B-1728B52AA6E4}">
-                <adec:decorative xmlns:adec="http://schemas.microsoft.com/office/drawing/2017/decorative" xmlns="" val="1"/>
+                <adec:decorative xmlns:adec="http://schemas.microsoft.com/office/drawing/2017/decorative" val="1"/>
               </a:ext>
             </a:extLst>
           </p:cNvPr>
@@ -30565,10 +30558,10 @@
           <p:cNvPr id="5" name="Rectangle 7">
             <a:extLst>
               <a:ext uri="{FF2B5EF4-FFF2-40B4-BE49-F238E27FC236}">
-                <a16:creationId xmlns:a16="http://schemas.microsoft.com/office/drawing/2014/main" xmlns="" id="{4A002548-DE85-310F-C8D5-5305547E86EB}"/>
+                <a16:creationId xmlns:a16="http://schemas.microsoft.com/office/drawing/2014/main" id="{4A002548-DE85-310F-C8D5-5305547E86EB}"/>
               </a:ext>
               <a:ext uri="{C183D7F6-B498-43B3-948B-1728B52AA6E4}">
-                <adec:decorative xmlns:adec="http://schemas.microsoft.com/office/drawing/2017/decorative" xmlns="" val="1"/>
+                <adec:decorative xmlns:adec="http://schemas.microsoft.com/office/drawing/2017/decorative" val="1"/>
               </a:ext>
             </a:extLst>
           </p:cNvPr>
@@ -30650,10 +30643,10 @@
           <p:cNvPr id="8" name="Oval 6">
             <a:extLst>
               <a:ext uri="{FF2B5EF4-FFF2-40B4-BE49-F238E27FC236}">
-                <a16:creationId xmlns:a16="http://schemas.microsoft.com/office/drawing/2014/main" xmlns="" id="{3CA77268-47A6-DBA8-B49A-089CF0ABA55F}"/>
+                <a16:creationId xmlns:a16="http://schemas.microsoft.com/office/drawing/2014/main" id="{3CA77268-47A6-DBA8-B49A-089CF0ABA55F}"/>
               </a:ext>
               <a:ext uri="{C183D7F6-B498-43B3-948B-1728B52AA6E4}">
-                <adec:decorative xmlns:adec="http://schemas.microsoft.com/office/drawing/2017/decorative" xmlns="" val="1"/>
+                <adec:decorative xmlns:adec="http://schemas.microsoft.com/office/drawing/2017/decorative" val="1"/>
               </a:ext>
             </a:extLst>
           </p:cNvPr>
@@ -30708,10 +30701,10 @@
           <p:cNvPr id="9" name="Rectangle 7">
             <a:extLst>
               <a:ext uri="{FF2B5EF4-FFF2-40B4-BE49-F238E27FC236}">
-                <a16:creationId xmlns:a16="http://schemas.microsoft.com/office/drawing/2014/main" xmlns="" id="{457AE0FC-167D-DCD4-7E90-08F6C5CF5343}"/>
+                <a16:creationId xmlns:a16="http://schemas.microsoft.com/office/drawing/2014/main" id="{457AE0FC-167D-DCD4-7E90-08F6C5CF5343}"/>
               </a:ext>
               <a:ext uri="{C183D7F6-B498-43B3-948B-1728B52AA6E4}">
-                <adec:decorative xmlns:adec="http://schemas.microsoft.com/office/drawing/2017/decorative" xmlns="" val="1"/>
+                <adec:decorative xmlns:adec="http://schemas.microsoft.com/office/drawing/2017/decorative" val="1"/>
               </a:ext>
             </a:extLst>
           </p:cNvPr>
@@ -30763,10 +30756,10 @@
           <p:cNvPr id="2" name="Rectangle 11">
             <a:extLst>
               <a:ext uri="{FF2B5EF4-FFF2-40B4-BE49-F238E27FC236}">
-                <a16:creationId xmlns:a16="http://schemas.microsoft.com/office/drawing/2014/main" xmlns="" id="{6CB3C578-3B25-DE12-0521-367F4E721220}"/>
+                <a16:creationId xmlns:a16="http://schemas.microsoft.com/office/drawing/2014/main" id="{6CB3C578-3B25-DE12-0521-367F4E721220}"/>
               </a:ext>
               <a:ext uri="{C183D7F6-B498-43B3-948B-1728B52AA6E4}">
-                <adec:decorative xmlns:adec="http://schemas.microsoft.com/office/drawing/2017/decorative" xmlns="" val="1"/>
+                <adec:decorative xmlns:adec="http://schemas.microsoft.com/office/drawing/2017/decorative" val="1"/>
               </a:ext>
             </a:extLst>
           </p:cNvPr>
@@ -30818,10 +30811,10 @@
           <p:cNvPr id="4" name="Oval 5">
             <a:extLst>
               <a:ext uri="{FF2B5EF4-FFF2-40B4-BE49-F238E27FC236}">
-                <a16:creationId xmlns:a16="http://schemas.microsoft.com/office/drawing/2014/main" xmlns="" id="{E81BD741-F30D-3EC0-3E21-FE8EDC56FE9E}"/>
+                <a16:creationId xmlns:a16="http://schemas.microsoft.com/office/drawing/2014/main" id="{E81BD741-F30D-3EC0-3E21-FE8EDC56FE9E}"/>
               </a:ext>
               <a:ext uri="{C183D7F6-B498-43B3-948B-1728B52AA6E4}">
-                <adec:decorative xmlns:adec="http://schemas.microsoft.com/office/drawing/2017/decorative" xmlns="" val="1"/>
+                <adec:decorative xmlns:adec="http://schemas.microsoft.com/office/drawing/2017/decorative" val="1"/>
               </a:ext>
             </a:extLst>
           </p:cNvPr>
@@ -30876,10 +30869,10 @@
           <p:cNvPr id="5" name="Rectangle 7">
             <a:extLst>
               <a:ext uri="{FF2B5EF4-FFF2-40B4-BE49-F238E27FC236}">
-                <a16:creationId xmlns:a16="http://schemas.microsoft.com/office/drawing/2014/main" xmlns="" id="{B78CB1F1-43DC-84A2-DB38-42CED8A6D0DE}"/>
+                <a16:creationId xmlns:a16="http://schemas.microsoft.com/office/drawing/2014/main" id="{B78CB1F1-43DC-84A2-DB38-42CED8A6D0DE}"/>
               </a:ext>
               <a:ext uri="{C183D7F6-B498-43B3-948B-1728B52AA6E4}">
-                <adec:decorative xmlns:adec="http://schemas.microsoft.com/office/drawing/2017/decorative" xmlns="" val="1"/>
+                <adec:decorative xmlns:adec="http://schemas.microsoft.com/office/drawing/2017/decorative" val="1"/>
               </a:ext>
             </a:extLst>
           </p:cNvPr>
@@ -30931,7 +30924,7 @@
           <p:cNvPr id="3" name="Title 1">
             <a:extLst>
               <a:ext uri="{FF2B5EF4-FFF2-40B4-BE49-F238E27FC236}">
-                <a16:creationId xmlns:a16="http://schemas.microsoft.com/office/drawing/2014/main" xmlns="" id="{09CCEDB7-7782-5D8A-FC68-FF822CFE4673}"/>
+                <a16:creationId xmlns:a16="http://schemas.microsoft.com/office/drawing/2014/main" id="{09CCEDB7-7782-5D8A-FC68-FF822CFE4673}"/>
               </a:ext>
             </a:extLst>
           </p:cNvPr>
@@ -30970,7 +30963,7 @@
           <p:cNvPr id="14" name="Picture Placeholder 13">
             <a:extLst>
               <a:ext uri="{FF2B5EF4-FFF2-40B4-BE49-F238E27FC236}">
-                <a16:creationId xmlns:a16="http://schemas.microsoft.com/office/drawing/2014/main" xmlns="" id="{E3235B6E-0BC4-E35C-A63D-8431B00F0646}"/>
+                <a16:creationId xmlns:a16="http://schemas.microsoft.com/office/drawing/2014/main" id="{E3235B6E-0BC4-E35C-A63D-8431B00F0646}"/>
               </a:ext>
             </a:extLst>
           </p:cNvPr>
@@ -31048,10 +31041,10 @@
           <p:cNvPr id="19" name="Straight Connector 3">
             <a:extLst>
               <a:ext uri="{FF2B5EF4-FFF2-40B4-BE49-F238E27FC236}">
-                <a16:creationId xmlns:a16="http://schemas.microsoft.com/office/drawing/2014/main" xmlns="" id="{917DECF4-2610-D056-1F1B-0A01B2308F3C}"/>
+                <a16:creationId xmlns:a16="http://schemas.microsoft.com/office/drawing/2014/main" id="{917DECF4-2610-D056-1F1B-0A01B2308F3C}"/>
               </a:ext>
               <a:ext uri="{C183D7F6-B498-43B3-948B-1728B52AA6E4}">
-                <adec:decorative xmlns:adec="http://schemas.microsoft.com/office/drawing/2017/decorative" xmlns="" val="1"/>
+                <adec:decorative xmlns:adec="http://schemas.microsoft.com/office/drawing/2017/decorative" val="1"/>
               </a:ext>
             </a:extLst>
           </p:cNvPr>
@@ -31094,10 +31087,10 @@
           <p:cNvPr id="20" name="Straight Connector 4">
             <a:extLst>
               <a:ext uri="{FF2B5EF4-FFF2-40B4-BE49-F238E27FC236}">
-                <a16:creationId xmlns:a16="http://schemas.microsoft.com/office/drawing/2014/main" xmlns="" id="{2C28AB49-3DB1-E52D-1AB4-B1709BC0AB85}"/>
+                <a16:creationId xmlns:a16="http://schemas.microsoft.com/office/drawing/2014/main" id="{2C28AB49-3DB1-E52D-1AB4-B1709BC0AB85}"/>
               </a:ext>
               <a:ext uri="{C183D7F6-B498-43B3-948B-1728B52AA6E4}">
-                <adec:decorative xmlns:adec="http://schemas.microsoft.com/office/drawing/2017/decorative" xmlns="" val="1"/>
+                <adec:decorative xmlns:adec="http://schemas.microsoft.com/office/drawing/2017/decorative" val="1"/>
               </a:ext>
             </a:extLst>
           </p:cNvPr>
@@ -31140,7 +31133,7 @@
           <p:cNvPr id="21" name="Text Placeholder 2">
             <a:extLst>
               <a:ext uri="{FF2B5EF4-FFF2-40B4-BE49-F238E27FC236}">
-                <a16:creationId xmlns:a16="http://schemas.microsoft.com/office/drawing/2014/main" xmlns="" id="{40FAA266-7A2C-303C-37A9-D9096061EB68}"/>
+                <a16:creationId xmlns:a16="http://schemas.microsoft.com/office/drawing/2014/main" id="{40FAA266-7A2C-303C-37A9-D9096061EB68}"/>
               </a:ext>
             </a:extLst>
           </p:cNvPr>
@@ -31218,7 +31211,7 @@
           <p:cNvPr id="22" name="Text Placeholder 10">
             <a:extLst>
               <a:ext uri="{FF2B5EF4-FFF2-40B4-BE49-F238E27FC236}">
-                <a16:creationId xmlns:a16="http://schemas.microsoft.com/office/drawing/2014/main" xmlns="" id="{30CEB8D7-8819-9032-A32B-1E36953A03F9}"/>
+                <a16:creationId xmlns:a16="http://schemas.microsoft.com/office/drawing/2014/main" id="{30CEB8D7-8819-9032-A32B-1E36953A03F9}"/>
               </a:ext>
             </a:extLst>
           </p:cNvPr>
@@ -31285,10 +31278,10 @@
           <p:cNvPr id="23" name="Straight Connector 3">
             <a:extLst>
               <a:ext uri="{FF2B5EF4-FFF2-40B4-BE49-F238E27FC236}">
-                <a16:creationId xmlns:a16="http://schemas.microsoft.com/office/drawing/2014/main" xmlns="" id="{A273CF89-AB4A-0304-626F-BFDCFC1E20C6}"/>
+                <a16:creationId xmlns:a16="http://schemas.microsoft.com/office/drawing/2014/main" id="{A273CF89-AB4A-0304-626F-BFDCFC1E20C6}"/>
               </a:ext>
               <a:ext uri="{C183D7F6-B498-43B3-948B-1728B52AA6E4}">
-                <adec:decorative xmlns:adec="http://schemas.microsoft.com/office/drawing/2017/decorative" xmlns="" val="1"/>
+                <adec:decorative xmlns:adec="http://schemas.microsoft.com/office/drawing/2017/decorative" val="1"/>
               </a:ext>
             </a:extLst>
           </p:cNvPr>
@@ -31331,10 +31324,10 @@
           <p:cNvPr id="24" name="Straight Connector 4">
             <a:extLst>
               <a:ext uri="{FF2B5EF4-FFF2-40B4-BE49-F238E27FC236}">
-                <a16:creationId xmlns:a16="http://schemas.microsoft.com/office/drawing/2014/main" xmlns="" id="{5A619983-7048-CFFA-2B3F-E567DA8E3A19}"/>
+                <a16:creationId xmlns:a16="http://schemas.microsoft.com/office/drawing/2014/main" id="{5A619983-7048-CFFA-2B3F-E567DA8E3A19}"/>
               </a:ext>
               <a:ext uri="{C183D7F6-B498-43B3-948B-1728B52AA6E4}">
-                <adec:decorative xmlns:adec="http://schemas.microsoft.com/office/drawing/2017/decorative" xmlns="" val="1"/>
+                <adec:decorative xmlns:adec="http://schemas.microsoft.com/office/drawing/2017/decorative" val="1"/>
               </a:ext>
             </a:extLst>
           </p:cNvPr>
@@ -31377,7 +31370,7 @@
           <p:cNvPr id="25" name="Text Placeholder 2">
             <a:extLst>
               <a:ext uri="{FF2B5EF4-FFF2-40B4-BE49-F238E27FC236}">
-                <a16:creationId xmlns:a16="http://schemas.microsoft.com/office/drawing/2014/main" xmlns="" id="{60DD2985-D841-921A-2CA5-FA93C316ACBF}"/>
+                <a16:creationId xmlns:a16="http://schemas.microsoft.com/office/drawing/2014/main" id="{60DD2985-D841-921A-2CA5-FA93C316ACBF}"/>
               </a:ext>
             </a:extLst>
           </p:cNvPr>
@@ -31455,7 +31448,7 @@
           <p:cNvPr id="26" name="Text Placeholder 10">
             <a:extLst>
               <a:ext uri="{FF2B5EF4-FFF2-40B4-BE49-F238E27FC236}">
-                <a16:creationId xmlns:a16="http://schemas.microsoft.com/office/drawing/2014/main" xmlns="" id="{A1B32814-1E10-4360-C81E-F89CCF857006}"/>
+                <a16:creationId xmlns:a16="http://schemas.microsoft.com/office/drawing/2014/main" id="{A1B32814-1E10-4360-C81E-F89CCF857006}"/>
               </a:ext>
             </a:extLst>
           </p:cNvPr>
@@ -31522,10 +31515,10 @@
           <p:cNvPr id="44" name="Straight Connector 3">
             <a:extLst>
               <a:ext uri="{FF2B5EF4-FFF2-40B4-BE49-F238E27FC236}">
-                <a16:creationId xmlns:a16="http://schemas.microsoft.com/office/drawing/2014/main" xmlns="" id="{E3DDDE90-D898-8159-4120-69CD5B67197A}"/>
+                <a16:creationId xmlns:a16="http://schemas.microsoft.com/office/drawing/2014/main" id="{E3DDDE90-D898-8159-4120-69CD5B67197A}"/>
               </a:ext>
               <a:ext uri="{C183D7F6-B498-43B3-948B-1728B52AA6E4}">
-                <adec:decorative xmlns:adec="http://schemas.microsoft.com/office/drawing/2017/decorative" xmlns="" val="1"/>
+                <adec:decorative xmlns:adec="http://schemas.microsoft.com/office/drawing/2017/decorative" val="1"/>
               </a:ext>
             </a:extLst>
           </p:cNvPr>
@@ -31568,10 +31561,10 @@
           <p:cNvPr id="45" name="Straight Connector 4">
             <a:extLst>
               <a:ext uri="{FF2B5EF4-FFF2-40B4-BE49-F238E27FC236}">
-                <a16:creationId xmlns:a16="http://schemas.microsoft.com/office/drawing/2014/main" xmlns="" id="{911865EF-2FFC-ABE3-A83C-6F770125D1C6}"/>
+                <a16:creationId xmlns:a16="http://schemas.microsoft.com/office/drawing/2014/main" id="{911865EF-2FFC-ABE3-A83C-6F770125D1C6}"/>
               </a:ext>
               <a:ext uri="{C183D7F6-B498-43B3-948B-1728B52AA6E4}">
-                <adec:decorative xmlns:adec="http://schemas.microsoft.com/office/drawing/2017/decorative" xmlns="" val="1"/>
+                <adec:decorative xmlns:adec="http://schemas.microsoft.com/office/drawing/2017/decorative" val="1"/>
               </a:ext>
             </a:extLst>
           </p:cNvPr>
@@ -31614,7 +31607,7 @@
           <p:cNvPr id="46" name="Text Placeholder 2">
             <a:extLst>
               <a:ext uri="{FF2B5EF4-FFF2-40B4-BE49-F238E27FC236}">
-                <a16:creationId xmlns:a16="http://schemas.microsoft.com/office/drawing/2014/main" xmlns="" id="{6F566BA2-1186-85A4-6ED7-A0446CC42128}"/>
+                <a16:creationId xmlns:a16="http://schemas.microsoft.com/office/drawing/2014/main" id="{6F566BA2-1186-85A4-6ED7-A0446CC42128}"/>
               </a:ext>
             </a:extLst>
           </p:cNvPr>
@@ -31692,7 +31685,7 @@
           <p:cNvPr id="47" name="Text Placeholder 10">
             <a:extLst>
               <a:ext uri="{FF2B5EF4-FFF2-40B4-BE49-F238E27FC236}">
-                <a16:creationId xmlns:a16="http://schemas.microsoft.com/office/drawing/2014/main" xmlns="" id="{802D8DCD-6AEF-BCCC-41E1-218BC4F8CBCC}"/>
+                <a16:creationId xmlns:a16="http://schemas.microsoft.com/office/drawing/2014/main" id="{802D8DCD-6AEF-BCCC-41E1-218BC4F8CBCC}"/>
               </a:ext>
             </a:extLst>
           </p:cNvPr>
@@ -31759,10 +31752,10 @@
           <p:cNvPr id="48" name="Straight Connector 3">
             <a:extLst>
               <a:ext uri="{FF2B5EF4-FFF2-40B4-BE49-F238E27FC236}">
-                <a16:creationId xmlns:a16="http://schemas.microsoft.com/office/drawing/2014/main" xmlns="" id="{6EF6E5FB-696E-E4DA-376C-C6E58622653B}"/>
+                <a16:creationId xmlns:a16="http://schemas.microsoft.com/office/drawing/2014/main" id="{6EF6E5FB-696E-E4DA-376C-C6E58622653B}"/>
               </a:ext>
               <a:ext uri="{C183D7F6-B498-43B3-948B-1728B52AA6E4}">
-                <adec:decorative xmlns:adec="http://schemas.microsoft.com/office/drawing/2017/decorative" xmlns="" val="1"/>
+                <adec:decorative xmlns:adec="http://schemas.microsoft.com/office/drawing/2017/decorative" val="1"/>
               </a:ext>
             </a:extLst>
           </p:cNvPr>
@@ -31805,10 +31798,10 @@
           <p:cNvPr id="49" name="Straight Connector 4">
             <a:extLst>
               <a:ext uri="{FF2B5EF4-FFF2-40B4-BE49-F238E27FC236}">
-                <a16:creationId xmlns:a16="http://schemas.microsoft.com/office/drawing/2014/main" xmlns="" id="{45179F2C-623F-1831-DD39-ED9E7ED59319}"/>
+                <a16:creationId xmlns:a16="http://schemas.microsoft.com/office/drawing/2014/main" id="{45179F2C-623F-1831-DD39-ED9E7ED59319}"/>
               </a:ext>
               <a:ext uri="{C183D7F6-B498-43B3-948B-1728B52AA6E4}">
-                <adec:decorative xmlns:adec="http://schemas.microsoft.com/office/drawing/2017/decorative" xmlns="" val="1"/>
+                <adec:decorative xmlns:adec="http://schemas.microsoft.com/office/drawing/2017/decorative" val="1"/>
               </a:ext>
             </a:extLst>
           </p:cNvPr>
@@ -31851,7 +31844,7 @@
           <p:cNvPr id="50" name="Text Placeholder 2">
             <a:extLst>
               <a:ext uri="{FF2B5EF4-FFF2-40B4-BE49-F238E27FC236}">
-                <a16:creationId xmlns:a16="http://schemas.microsoft.com/office/drawing/2014/main" xmlns="" id="{A0830792-F096-74D1-6CB2-FE2D1864B418}"/>
+                <a16:creationId xmlns:a16="http://schemas.microsoft.com/office/drawing/2014/main" id="{A0830792-F096-74D1-6CB2-FE2D1864B418}"/>
               </a:ext>
             </a:extLst>
           </p:cNvPr>
@@ -31929,7 +31922,7 @@
           <p:cNvPr id="51" name="Text Placeholder 10">
             <a:extLst>
               <a:ext uri="{FF2B5EF4-FFF2-40B4-BE49-F238E27FC236}">
-                <a16:creationId xmlns:a16="http://schemas.microsoft.com/office/drawing/2014/main" xmlns="" id="{29642387-6B33-1DBB-00B8-EDF68B532CA8}"/>
+                <a16:creationId xmlns:a16="http://schemas.microsoft.com/office/drawing/2014/main" id="{29642387-6B33-1DBB-00B8-EDF68B532CA8}"/>
               </a:ext>
             </a:extLst>
           </p:cNvPr>
@@ -31996,7 +31989,7 @@
           <p:cNvPr id="12" name="Date Placeholder 2">
             <a:extLst>
               <a:ext uri="{FF2B5EF4-FFF2-40B4-BE49-F238E27FC236}">
-                <a16:creationId xmlns:a16="http://schemas.microsoft.com/office/drawing/2014/main" xmlns="" id="{60D48F82-45FC-A36B-0146-5E8D370B7C7E}"/>
+                <a16:creationId xmlns:a16="http://schemas.microsoft.com/office/drawing/2014/main" id="{60D48F82-45FC-A36B-0146-5E8D370B7C7E}"/>
               </a:ext>
             </a:extLst>
           </p:cNvPr>
@@ -32041,7 +32034,7 @@
           <p:cNvPr id="11" name="Footer Placeholder 3">
             <a:extLst>
               <a:ext uri="{FF2B5EF4-FFF2-40B4-BE49-F238E27FC236}">
-                <a16:creationId xmlns:a16="http://schemas.microsoft.com/office/drawing/2014/main" xmlns="" id="{0ACEA3CE-FEF8-2294-2081-7C50B08B5E8A}"/>
+                <a16:creationId xmlns:a16="http://schemas.microsoft.com/office/drawing/2014/main" id="{0ACEA3CE-FEF8-2294-2081-7C50B08B5E8A}"/>
               </a:ext>
             </a:extLst>
           </p:cNvPr>
@@ -32080,7 +32073,7 @@
           <p:cNvPr id="10" name="Slide Number Placeholder 4">
             <a:extLst>
               <a:ext uri="{FF2B5EF4-FFF2-40B4-BE49-F238E27FC236}">
-                <a16:creationId xmlns:a16="http://schemas.microsoft.com/office/drawing/2014/main" xmlns="" id="{C5CEDF45-2CB7-35F2-5138-54DBA2ADD8F4}"/>
+                <a16:creationId xmlns:a16="http://schemas.microsoft.com/office/drawing/2014/main" id="{C5CEDF45-2CB7-35F2-5138-54DBA2ADD8F4}"/>
               </a:ext>
             </a:extLst>
           </p:cNvPr>
@@ -32161,7 +32154,7 @@
           <p:cNvPr id="2" name="Title 1">
             <a:extLst>
               <a:ext uri="{FF2B5EF4-FFF2-40B4-BE49-F238E27FC236}">
-                <a16:creationId xmlns:a16="http://schemas.microsoft.com/office/drawing/2014/main" xmlns="" id="{BC7433D9-FD02-59E2-0F81-A0B7201D2DA0}"/>
+                <a16:creationId xmlns:a16="http://schemas.microsoft.com/office/drawing/2014/main" id="{BC7433D9-FD02-59E2-0F81-A0B7201D2DA0}"/>
               </a:ext>
             </a:extLst>
           </p:cNvPr>
@@ -32200,7 +32193,7 @@
           <p:cNvPr id="8" name="Content Placeholder 7">
             <a:extLst>
               <a:ext uri="{FF2B5EF4-FFF2-40B4-BE49-F238E27FC236}">
-                <a16:creationId xmlns:a16="http://schemas.microsoft.com/office/drawing/2014/main" xmlns="" id="{C7E1FCC9-2D1D-9C6B-8C9A-E3D0A77DBEF0}"/>
+                <a16:creationId xmlns:a16="http://schemas.microsoft.com/office/drawing/2014/main" id="{C7E1FCC9-2D1D-9C6B-8C9A-E3D0A77DBEF0}"/>
               </a:ext>
             </a:extLst>
           </p:cNvPr>
@@ -32285,7 +32278,7 @@
           <p:cNvPr id="4" name="Date Placeholder 3">
             <a:extLst>
               <a:ext uri="{FF2B5EF4-FFF2-40B4-BE49-F238E27FC236}">
-                <a16:creationId xmlns:a16="http://schemas.microsoft.com/office/drawing/2014/main" xmlns="" id="{0B9485D1-E172-8F0A-A425-3097B3ABCFB4}"/>
+                <a16:creationId xmlns:a16="http://schemas.microsoft.com/office/drawing/2014/main" id="{0B9485D1-E172-8F0A-A425-3097B3ABCFB4}"/>
               </a:ext>
             </a:extLst>
           </p:cNvPr>
@@ -32323,7 +32316,7 @@
           <p:cNvPr id="5" name="Footer Placeholder 4">
             <a:extLst>
               <a:ext uri="{FF2B5EF4-FFF2-40B4-BE49-F238E27FC236}">
-                <a16:creationId xmlns:a16="http://schemas.microsoft.com/office/drawing/2014/main" xmlns="" id="{B17E6B5E-6174-FD5C-41E8-FFC44C650D7E}"/>
+                <a16:creationId xmlns:a16="http://schemas.microsoft.com/office/drawing/2014/main" id="{B17E6B5E-6174-FD5C-41E8-FFC44C650D7E}"/>
               </a:ext>
             </a:extLst>
           </p:cNvPr>
@@ -32356,7 +32349,7 @@
           <p:cNvPr id="6" name="Slide Number Placeholder 5">
             <a:extLst>
               <a:ext uri="{FF2B5EF4-FFF2-40B4-BE49-F238E27FC236}">
-                <a16:creationId xmlns:a16="http://schemas.microsoft.com/office/drawing/2014/main" xmlns="" id="{4BF72154-F85B-E301-DA57-E314D7315916}"/>
+                <a16:creationId xmlns:a16="http://schemas.microsoft.com/office/drawing/2014/main" id="{4BF72154-F85B-E301-DA57-E314D7315916}"/>
               </a:ext>
             </a:extLst>
           </p:cNvPr>
@@ -32390,10 +32383,10 @@
           <p:cNvPr id="7" name="Oval 6">
             <a:extLst>
               <a:ext uri="{FF2B5EF4-FFF2-40B4-BE49-F238E27FC236}">
-                <a16:creationId xmlns:a16="http://schemas.microsoft.com/office/drawing/2014/main" xmlns="" id="{976288D7-F050-E1E7-DC78-67369A1148C2}"/>
+                <a16:creationId xmlns:a16="http://schemas.microsoft.com/office/drawing/2014/main" id="{976288D7-F050-E1E7-DC78-67369A1148C2}"/>
               </a:ext>
               <a:ext uri="{C183D7F6-B498-43B3-948B-1728B52AA6E4}">
-                <adec:decorative xmlns:adec="http://schemas.microsoft.com/office/drawing/2017/decorative" xmlns="" val="1"/>
+                <adec:decorative xmlns:adec="http://schemas.microsoft.com/office/drawing/2017/decorative" val="1"/>
               </a:ext>
             </a:extLst>
           </p:cNvPr>
@@ -32448,10 +32441,10 @@
           <p:cNvPr id="9" name="Rectangle 8">
             <a:extLst>
               <a:ext uri="{FF2B5EF4-FFF2-40B4-BE49-F238E27FC236}">
-                <a16:creationId xmlns:a16="http://schemas.microsoft.com/office/drawing/2014/main" xmlns="" id="{E5394A36-B784-7244-4CF7-3B5208E8D701}"/>
+                <a16:creationId xmlns:a16="http://schemas.microsoft.com/office/drawing/2014/main" id="{E5394A36-B784-7244-4CF7-3B5208E8D701}"/>
               </a:ext>
               <a:ext uri="{C183D7F6-B498-43B3-948B-1728B52AA6E4}">
-                <adec:decorative xmlns:adec="http://schemas.microsoft.com/office/drawing/2017/decorative" xmlns="" val="1"/>
+                <adec:decorative xmlns:adec="http://schemas.microsoft.com/office/drawing/2017/decorative" val="1"/>
               </a:ext>
             </a:extLst>
           </p:cNvPr>
@@ -32591,7 +32584,7 @@
           <a:lstStyle/>
           <a:p>
             <a:r>
-              <a:rPr lang="en-US" smtClean="0"/>
+              <a:rPr lang="en-US"/>
               <a:t>Click to edit Master title style</a:t>
             </a:r>
             <a:endParaRPr lang="en-US" dirty="0"/>
@@ -32614,7 +32607,7 @@
           <a:lstStyle/>
           <a:p>
             <a:r>
-              <a:rPr lang="en-US" altLang="zh-CN" smtClean="0"/>
+              <a:rPr lang="en-US" altLang="zh-CN"/>
               <a:t>03/10/2025</a:t>
             </a:r>
             <a:fld id="{8A60B404-9532-4DA8-8A40-EC339A5BE635}" type="datetime1">
@@ -32642,10 +32635,9 @@
           <a:lstStyle/>
           <a:p>
             <a:r>
-              <a:rPr lang="en-US" smtClean="0"/>
+              <a:rPr lang="en-US"/>
               <a:t>Sample Footer Text</a:t>
             </a:r>
-            <a:endParaRPr lang="en-US"/>
           </a:p>
         </p:txBody>
       </p:sp>
@@ -32678,10 +32670,10 @@
           <p:cNvPr id="9" name="Rectangle 8">
             <a:extLst>
               <a:ext uri="{FF2B5EF4-FFF2-40B4-BE49-F238E27FC236}">
-                <a16:creationId xmlns:a16="http://schemas.microsoft.com/office/drawing/2014/main" xmlns="" id="{DDD22BDB-6215-B88F-E45B-801DAF53832E}"/>
+                <a16:creationId xmlns:a16="http://schemas.microsoft.com/office/drawing/2014/main" id="{DDD22BDB-6215-B88F-E45B-801DAF53832E}"/>
               </a:ext>
               <a:ext uri="{C183D7F6-B498-43B3-948B-1728B52AA6E4}">
-                <adec:decorative xmlns:adec="http://schemas.microsoft.com/office/drawing/2017/decorative" xmlns="" val="1"/>
+                <adec:decorative xmlns:adec="http://schemas.microsoft.com/office/drawing/2017/decorative" val="1"/>
               </a:ext>
             </a:extLst>
           </p:cNvPr>
@@ -32733,10 +32725,10 @@
           <p:cNvPr id="10" name="Oval 9">
             <a:extLst>
               <a:ext uri="{FF2B5EF4-FFF2-40B4-BE49-F238E27FC236}">
-                <a16:creationId xmlns:a16="http://schemas.microsoft.com/office/drawing/2014/main" xmlns="" id="{3B8FB568-40CA-4614-DF0C-2C6D33DBF8E5}"/>
+                <a16:creationId xmlns:a16="http://schemas.microsoft.com/office/drawing/2014/main" id="{3B8FB568-40CA-4614-DF0C-2C6D33DBF8E5}"/>
               </a:ext>
               <a:ext uri="{C183D7F6-B498-43B3-948B-1728B52AA6E4}">
-                <adec:decorative xmlns:adec="http://schemas.microsoft.com/office/drawing/2017/decorative" xmlns="" val="1"/>
+                <adec:decorative xmlns:adec="http://schemas.microsoft.com/office/drawing/2017/decorative" val="1"/>
               </a:ext>
             </a:extLst>
           </p:cNvPr>
@@ -32791,10 +32783,10 @@
           <p:cNvPr id="11" name="Oval 5">
             <a:extLst>
               <a:ext uri="{FF2B5EF4-FFF2-40B4-BE49-F238E27FC236}">
-                <a16:creationId xmlns:a16="http://schemas.microsoft.com/office/drawing/2014/main" xmlns="" id="{19509B16-033B-8F64-FFC4-DDE5E8D48D51}"/>
+                <a16:creationId xmlns:a16="http://schemas.microsoft.com/office/drawing/2014/main" id="{19509B16-033B-8F64-FFC4-DDE5E8D48D51}"/>
               </a:ext>
               <a:ext uri="{C183D7F6-B498-43B3-948B-1728B52AA6E4}">
-                <adec:decorative xmlns:adec="http://schemas.microsoft.com/office/drawing/2017/decorative" xmlns="" val="1"/>
+                <adec:decorative xmlns:adec="http://schemas.microsoft.com/office/drawing/2017/decorative" val="1"/>
               </a:ext>
             </a:extLst>
           </p:cNvPr>
@@ -32849,10 +32841,10 @@
           <p:cNvPr id="12" name="Rectangle 7">
             <a:extLst>
               <a:ext uri="{FF2B5EF4-FFF2-40B4-BE49-F238E27FC236}">
-                <a16:creationId xmlns:a16="http://schemas.microsoft.com/office/drawing/2014/main" xmlns="" id="{4A002548-DE85-310F-C8D5-5305547E86EB}"/>
+                <a16:creationId xmlns:a16="http://schemas.microsoft.com/office/drawing/2014/main" id="{4A002548-DE85-310F-C8D5-5305547E86EB}"/>
               </a:ext>
               <a:ext uri="{C183D7F6-B498-43B3-948B-1728B52AA6E4}">
-                <adec:decorative xmlns:adec="http://schemas.microsoft.com/office/drawing/2017/decorative" xmlns="" val="1"/>
+                <adec:decorative xmlns:adec="http://schemas.microsoft.com/office/drawing/2017/decorative" val="1"/>
               </a:ext>
             </a:extLst>
           </p:cNvPr>
@@ -32944,10 +32936,10 @@
           <p:cNvPr id="9" name="Rectangle 8">
             <a:extLst>
               <a:ext uri="{FF2B5EF4-FFF2-40B4-BE49-F238E27FC236}">
-                <a16:creationId xmlns:a16="http://schemas.microsoft.com/office/drawing/2014/main" xmlns="" id="{C2278D60-FC64-3BFB-1E09-A1791F9154DB}"/>
+                <a16:creationId xmlns:a16="http://schemas.microsoft.com/office/drawing/2014/main" id="{C2278D60-FC64-3BFB-1E09-A1791F9154DB}"/>
               </a:ext>
               <a:ext uri="{C183D7F6-B498-43B3-948B-1728B52AA6E4}">
-                <adec:decorative xmlns:adec="http://schemas.microsoft.com/office/drawing/2017/decorative" xmlns="" val="1"/>
+                <adec:decorative xmlns:adec="http://schemas.microsoft.com/office/drawing/2017/decorative" val="1"/>
               </a:ext>
             </a:extLst>
           </p:cNvPr>
@@ -33002,7 +32994,7 @@
           <p:cNvPr id="2" name="Title 1">
             <a:extLst>
               <a:ext uri="{FF2B5EF4-FFF2-40B4-BE49-F238E27FC236}">
-                <a16:creationId xmlns:a16="http://schemas.microsoft.com/office/drawing/2014/main" xmlns="" id="{BC7433D9-FD02-59E2-0F81-A0B7201D2DA0}"/>
+                <a16:creationId xmlns:a16="http://schemas.microsoft.com/office/drawing/2014/main" id="{BC7433D9-FD02-59E2-0F81-A0B7201D2DA0}"/>
               </a:ext>
             </a:extLst>
           </p:cNvPr>
@@ -33041,7 +33033,7 @@
           <p:cNvPr id="7" name="Content Placeholder 6">
             <a:extLst>
               <a:ext uri="{FF2B5EF4-FFF2-40B4-BE49-F238E27FC236}">
-                <a16:creationId xmlns:a16="http://schemas.microsoft.com/office/drawing/2014/main" xmlns="" id="{053FFEDA-E57B-DF13-2394-A1514E15F85A}"/>
+                <a16:creationId xmlns:a16="http://schemas.microsoft.com/office/drawing/2014/main" id="{053FFEDA-E57B-DF13-2394-A1514E15F85A}"/>
               </a:ext>
             </a:extLst>
           </p:cNvPr>
@@ -33126,7 +33118,7 @@
           <p:cNvPr id="12" name="Date Placeholder 3">
             <a:extLst>
               <a:ext uri="{FF2B5EF4-FFF2-40B4-BE49-F238E27FC236}">
-                <a16:creationId xmlns:a16="http://schemas.microsoft.com/office/drawing/2014/main" xmlns="" id="{F0CDBB60-E0E0-833E-F84B-9BEC60B79C6F}"/>
+                <a16:creationId xmlns:a16="http://schemas.microsoft.com/office/drawing/2014/main" id="{F0CDBB60-E0E0-833E-F84B-9BEC60B79C6F}"/>
               </a:ext>
             </a:extLst>
           </p:cNvPr>
@@ -33164,7 +33156,7 @@
           <p:cNvPr id="11" name="Footer Placeholder 4">
             <a:extLst>
               <a:ext uri="{FF2B5EF4-FFF2-40B4-BE49-F238E27FC236}">
-                <a16:creationId xmlns:a16="http://schemas.microsoft.com/office/drawing/2014/main" xmlns="" id="{63CCC54A-AE1A-0789-DF90-5E087B8531A9}"/>
+                <a16:creationId xmlns:a16="http://schemas.microsoft.com/office/drawing/2014/main" id="{63CCC54A-AE1A-0789-DF90-5E087B8531A9}"/>
               </a:ext>
             </a:extLst>
           </p:cNvPr>
@@ -33197,7 +33189,7 @@
           <p:cNvPr id="3" name="Slide Number Placeholder 5">
             <a:extLst>
               <a:ext uri="{FF2B5EF4-FFF2-40B4-BE49-F238E27FC236}">
-                <a16:creationId xmlns:a16="http://schemas.microsoft.com/office/drawing/2014/main" xmlns="" id="{2507772A-AF63-4BA6-5E0F-6C909D0E0405}"/>
+                <a16:creationId xmlns:a16="http://schemas.microsoft.com/office/drawing/2014/main" id="{2507772A-AF63-4BA6-5E0F-6C909D0E0405}"/>
               </a:ext>
             </a:extLst>
           </p:cNvPr>
@@ -33231,10 +33223,10 @@
           <p:cNvPr id="10" name="Oval 9">
             <a:extLst>
               <a:ext uri="{FF2B5EF4-FFF2-40B4-BE49-F238E27FC236}">
-                <a16:creationId xmlns:a16="http://schemas.microsoft.com/office/drawing/2014/main" xmlns="" id="{18BF7F53-1667-65E2-E3E8-2BDFBB430047}"/>
+                <a16:creationId xmlns:a16="http://schemas.microsoft.com/office/drawing/2014/main" id="{18BF7F53-1667-65E2-E3E8-2BDFBB430047}"/>
               </a:ext>
               <a:ext uri="{C183D7F6-B498-43B3-948B-1728B52AA6E4}">
-                <adec:decorative xmlns:adec="http://schemas.microsoft.com/office/drawing/2017/decorative" xmlns="" val="1"/>
+                <adec:decorative xmlns:adec="http://schemas.microsoft.com/office/drawing/2017/decorative" val="1"/>
               </a:ext>
             </a:extLst>
           </p:cNvPr>
@@ -33330,7 +33322,7 @@
           <a:lstStyle/>
           <a:p>
             <a:r>
-              <a:rPr lang="en-US" altLang="zh-CN" smtClean="0"/>
+              <a:rPr lang="en-US" altLang="zh-CN"/>
               <a:t>03/10/2025</a:t>
             </a:r>
             <a:fld id="{87CFF128-BAC7-4E0D-8F77-28A571D93B6F}" type="datetime1">
@@ -33357,10 +33349,9 @@
           <a:lstStyle/>
           <a:p>
             <a:r>
-              <a:rPr lang="en-US" smtClean="0"/>
+              <a:rPr lang="en-US"/>
               <a:t>Sample Footer Text</a:t>
             </a:r>
-            <a:endParaRPr lang="en-US"/>
           </a:p>
         </p:txBody>
       </p:sp>
@@ -33488,7 +33479,7 @@
           </a:lstStyle>
           <a:p>
             <a:r>
-              <a:rPr lang="en-US" smtClean="0"/>
+              <a:rPr lang="en-US"/>
               <a:t>Click to edit Master title style</a:t>
             </a:r>
             <a:endParaRPr lang="en-US" dirty="0"/>
@@ -33583,35 +33574,35 @@
           <a:p>
             <a:pPr lvl="0"/>
             <a:r>
-              <a:rPr lang="en-US" smtClean="0"/>
+              <a:rPr lang="en-US"/>
               <a:t>Edit Master text styles</a:t>
             </a:r>
           </a:p>
           <a:p>
             <a:pPr lvl="1"/>
             <a:r>
-              <a:rPr lang="en-US" smtClean="0"/>
+              <a:rPr lang="en-US"/>
               <a:t>Second level</a:t>
             </a:r>
           </a:p>
           <a:p>
             <a:pPr lvl="2"/>
             <a:r>
-              <a:rPr lang="en-US" smtClean="0"/>
+              <a:rPr lang="en-US"/>
               <a:t>Third level</a:t>
             </a:r>
           </a:p>
           <a:p>
             <a:pPr lvl="3"/>
             <a:r>
-              <a:rPr lang="en-US" smtClean="0"/>
+              <a:rPr lang="en-US"/>
               <a:t>Fourth level</a:t>
             </a:r>
           </a:p>
           <a:p>
             <a:pPr lvl="4"/>
             <a:r>
-              <a:rPr lang="en-US" smtClean="0"/>
+              <a:rPr lang="en-US"/>
               <a:t>Fifth level</a:t>
             </a:r>
             <a:endParaRPr lang="en-US" dirty="0"/>
@@ -33683,7 +33674,7 @@
           <a:p>
             <a:pPr lvl="0"/>
             <a:r>
-              <a:rPr lang="en-US" smtClean="0"/>
+              <a:rPr lang="en-US"/>
               <a:t>Edit Master text styles</a:t>
             </a:r>
           </a:p>
@@ -33716,7 +33707,7 @@
           </a:lstStyle>
           <a:p>
             <a:r>
-              <a:rPr lang="en-US" altLang="zh-CN" smtClean="0"/>
+              <a:rPr lang="en-US" altLang="zh-CN"/>
               <a:t>03/10/2025</a:t>
             </a:r>
             <a:fld id="{4D63035D-22A0-4334-A9AE-2457016C8B47}" type="datetime1">
@@ -33755,10 +33746,9 @@
           </a:lstStyle>
           <a:p>
             <a:r>
-              <a:rPr lang="en-US" smtClean="0"/>
+              <a:rPr lang="en-US"/>
               <a:t>Sample Footer Text</a:t>
             </a:r>
-            <a:endParaRPr lang="en-US"/>
           </a:p>
         </p:txBody>
       </p:sp>
@@ -33801,10 +33791,10 @@
           <p:cNvPr id="10" name="Oval 9">
             <a:extLst>
               <a:ext uri="{FF2B5EF4-FFF2-40B4-BE49-F238E27FC236}">
-                <a16:creationId xmlns:a16="http://schemas.microsoft.com/office/drawing/2014/main" xmlns="" id="{D607E11C-4CFD-0917-7CE5-5FD047FF471A}"/>
+                <a16:creationId xmlns:a16="http://schemas.microsoft.com/office/drawing/2014/main" id="{D607E11C-4CFD-0917-7CE5-5FD047FF471A}"/>
               </a:ext>
               <a:ext uri="{C183D7F6-B498-43B3-948B-1728B52AA6E4}">
-                <adec:decorative xmlns:adec="http://schemas.microsoft.com/office/drawing/2017/decorative" xmlns="" val="1"/>
+                <adec:decorative xmlns:adec="http://schemas.microsoft.com/office/drawing/2017/decorative" val="1"/>
               </a:ext>
             </a:extLst>
           </p:cNvPr>
@@ -33859,10 +33849,10 @@
           <p:cNvPr id="11" name="Rectangle 10">
             <a:extLst>
               <a:ext uri="{FF2B5EF4-FFF2-40B4-BE49-F238E27FC236}">
-                <a16:creationId xmlns:a16="http://schemas.microsoft.com/office/drawing/2014/main" xmlns="" id="{09039689-5195-17C0-4FE6-F7675B1A3931}"/>
+                <a16:creationId xmlns:a16="http://schemas.microsoft.com/office/drawing/2014/main" id="{09039689-5195-17C0-4FE6-F7675B1A3931}"/>
               </a:ext>
               <a:ext uri="{C183D7F6-B498-43B3-948B-1728B52AA6E4}">
-                <adec:decorative xmlns:adec="http://schemas.microsoft.com/office/drawing/2017/decorative" xmlns="" val="1"/>
+                <adec:decorative xmlns:adec="http://schemas.microsoft.com/office/drawing/2017/decorative" val="1"/>
               </a:ext>
             </a:extLst>
           </p:cNvPr>
@@ -33914,10 +33904,10 @@
           <p:cNvPr id="12" name="Rectangle 11">
             <a:extLst>
               <a:ext uri="{FF2B5EF4-FFF2-40B4-BE49-F238E27FC236}">
-                <a16:creationId xmlns:a16="http://schemas.microsoft.com/office/drawing/2014/main" xmlns="" id="{7DDAAFA8-C82C-ACA2-4E69-EB7E3BD0DC0A}"/>
+                <a16:creationId xmlns:a16="http://schemas.microsoft.com/office/drawing/2014/main" id="{7DDAAFA8-C82C-ACA2-4E69-EB7E3BD0DC0A}"/>
               </a:ext>
               <a:ext uri="{C183D7F6-B498-43B3-948B-1728B52AA6E4}">
-                <adec:decorative xmlns:adec="http://schemas.microsoft.com/office/drawing/2017/decorative" xmlns="" val="1"/>
+                <adec:decorative xmlns:adec="http://schemas.microsoft.com/office/drawing/2017/decorative" val="1"/>
               </a:ext>
             </a:extLst>
           </p:cNvPr>
@@ -33969,10 +33959,10 @@
           <p:cNvPr id="13" name="Oval 12">
             <a:extLst>
               <a:ext uri="{FF2B5EF4-FFF2-40B4-BE49-F238E27FC236}">
-                <a16:creationId xmlns:a16="http://schemas.microsoft.com/office/drawing/2014/main" xmlns="" id="{92A204AA-E1F0-B3EE-A344-C3874ECEA490}"/>
+                <a16:creationId xmlns:a16="http://schemas.microsoft.com/office/drawing/2014/main" id="{92A204AA-E1F0-B3EE-A344-C3874ECEA490}"/>
               </a:ext>
               <a:ext uri="{C183D7F6-B498-43B3-948B-1728B52AA6E4}">
-                <adec:decorative xmlns:adec="http://schemas.microsoft.com/office/drawing/2017/decorative" xmlns="" val="1"/>
+                <adec:decorative xmlns:adec="http://schemas.microsoft.com/office/drawing/2017/decorative" val="1"/>
               </a:ext>
             </a:extLst>
           </p:cNvPr>
@@ -34083,7 +34073,7 @@
           </a:lstStyle>
           <a:p>
             <a:r>
-              <a:rPr lang="en-US" smtClean="0"/>
+              <a:rPr lang="en-US"/>
               <a:t>Click to edit Master title style</a:t>
             </a:r>
             <a:endParaRPr lang="en-US" dirty="0"/>
@@ -34150,7 +34140,7 @@
           </a:lstStyle>
           <a:p>
             <a:r>
-              <a:rPr lang="en-US" smtClean="0"/>
+              <a:rPr lang="en-US"/>
               <a:t>Click icon to add picture</a:t>
             </a:r>
             <a:endParaRPr lang="en-US" dirty="0"/>
@@ -34218,7 +34208,7 @@
           <a:p>
             <a:pPr lvl="0"/>
             <a:r>
-              <a:rPr lang="en-US" smtClean="0"/>
+              <a:rPr lang="en-US"/>
               <a:t>Edit Master text styles</a:t>
             </a:r>
           </a:p>
@@ -34240,7 +34230,7 @@
           <a:lstStyle/>
           <a:p>
             <a:r>
-              <a:rPr lang="en-US" altLang="zh-CN" smtClean="0"/>
+              <a:rPr lang="en-US" altLang="zh-CN"/>
               <a:t>03/10/2025</a:t>
             </a:r>
             <a:fld id="{4D63035D-22A0-4334-A9AE-2457016C8B47}" type="datetime1">
@@ -34268,10 +34258,9 @@
           <a:lstStyle/>
           <a:p>
             <a:r>
-              <a:rPr lang="en-US" smtClean="0"/>
+              <a:rPr lang="en-US"/>
               <a:t>Sample Footer Text</a:t>
             </a:r>
-            <a:endParaRPr lang="en-US"/>
           </a:p>
         </p:txBody>
       </p:sp>
@@ -34303,10 +34292,10 @@
           <p:cNvPr id="8" name="Oval 7">
             <a:extLst>
               <a:ext uri="{FF2B5EF4-FFF2-40B4-BE49-F238E27FC236}">
-                <a16:creationId xmlns:a16="http://schemas.microsoft.com/office/drawing/2014/main" xmlns="" id="{D0068B2F-8642-20C6-2DC8-D05334DB3E6E}"/>
+                <a16:creationId xmlns:a16="http://schemas.microsoft.com/office/drawing/2014/main" id="{D0068B2F-8642-20C6-2DC8-D05334DB3E6E}"/>
               </a:ext>
               <a:ext uri="{C183D7F6-B498-43B3-948B-1728B52AA6E4}">
-                <adec:decorative xmlns:adec="http://schemas.microsoft.com/office/drawing/2017/decorative" xmlns="" val="1"/>
+                <adec:decorative xmlns:adec="http://schemas.microsoft.com/office/drawing/2017/decorative" val="1"/>
               </a:ext>
             </a:extLst>
           </p:cNvPr>
@@ -34361,10 +34350,10 @@
           <p:cNvPr id="9" name="Rectangle 8">
             <a:extLst>
               <a:ext uri="{FF2B5EF4-FFF2-40B4-BE49-F238E27FC236}">
-                <a16:creationId xmlns:a16="http://schemas.microsoft.com/office/drawing/2014/main" xmlns="" id="{FD08106B-58A5-8614-7D42-8ACA85436A06}"/>
+                <a16:creationId xmlns:a16="http://schemas.microsoft.com/office/drawing/2014/main" id="{FD08106B-58A5-8614-7D42-8ACA85436A06}"/>
               </a:ext>
               <a:ext uri="{C183D7F6-B498-43B3-948B-1728B52AA6E4}">
-                <adec:decorative xmlns:adec="http://schemas.microsoft.com/office/drawing/2017/decorative" xmlns="" val="1"/>
+                <adec:decorative xmlns:adec="http://schemas.microsoft.com/office/drawing/2017/decorative" val="1"/>
               </a:ext>
             </a:extLst>
           </p:cNvPr>
@@ -34416,10 +34405,10 @@
           <p:cNvPr id="10" name="Rectangle 9">
             <a:extLst>
               <a:ext uri="{FF2B5EF4-FFF2-40B4-BE49-F238E27FC236}">
-                <a16:creationId xmlns:a16="http://schemas.microsoft.com/office/drawing/2014/main" xmlns="" id="{D74D5EF1-8756-9CD5-58BC-20BC31467CCD}"/>
+                <a16:creationId xmlns:a16="http://schemas.microsoft.com/office/drawing/2014/main" id="{D74D5EF1-8756-9CD5-58BC-20BC31467CCD}"/>
               </a:ext>
               <a:ext uri="{C183D7F6-B498-43B3-948B-1728B52AA6E4}">
-                <adec:decorative xmlns:adec="http://schemas.microsoft.com/office/drawing/2017/decorative" xmlns="" val="1"/>
+                <adec:decorative xmlns:adec="http://schemas.microsoft.com/office/drawing/2017/decorative" val="1"/>
               </a:ext>
             </a:extLst>
           </p:cNvPr>
@@ -34471,10 +34460,10 @@
           <p:cNvPr id="11" name="Oval 10">
             <a:extLst>
               <a:ext uri="{FF2B5EF4-FFF2-40B4-BE49-F238E27FC236}">
-                <a16:creationId xmlns:a16="http://schemas.microsoft.com/office/drawing/2014/main" xmlns="" id="{F09B8D7D-2466-9642-26D7-DFF380C458A0}"/>
+                <a16:creationId xmlns:a16="http://schemas.microsoft.com/office/drawing/2014/main" id="{F09B8D7D-2466-9642-26D7-DFF380C458A0}"/>
               </a:ext>
               <a:ext uri="{C183D7F6-B498-43B3-948B-1728B52AA6E4}">
-                <adec:decorative xmlns:adec="http://schemas.microsoft.com/office/drawing/2017/decorative" xmlns="" val="1"/>
+                <adec:decorative xmlns:adec="http://schemas.microsoft.com/office/drawing/2017/decorative" val="1"/>
               </a:ext>
             </a:extLst>
           </p:cNvPr>
@@ -34585,7 +34574,7 @@
           <a:lstStyle/>
           <a:p>
             <a:r>
-              <a:rPr lang="en-US" smtClean="0"/>
+              <a:rPr lang="en-US"/>
               <a:t>Click to edit Master title style</a:t>
             </a:r>
             <a:endParaRPr lang="en-US" dirty="0"/>
@@ -34619,35 +34608,35 @@
           <a:p>
             <a:pPr lvl="0"/>
             <a:r>
-              <a:rPr lang="en-US" smtClean="0"/>
+              <a:rPr lang="en-US"/>
               <a:t>Edit Master text styles</a:t>
             </a:r>
           </a:p>
           <a:p>
             <a:pPr lvl="1"/>
             <a:r>
-              <a:rPr lang="en-US" smtClean="0"/>
+              <a:rPr lang="en-US"/>
               <a:t>Second level</a:t>
             </a:r>
           </a:p>
           <a:p>
             <a:pPr lvl="2"/>
             <a:r>
-              <a:rPr lang="en-US" smtClean="0"/>
+              <a:rPr lang="en-US"/>
               <a:t>Third level</a:t>
             </a:r>
           </a:p>
           <a:p>
             <a:pPr lvl="3"/>
             <a:r>
-              <a:rPr lang="en-US" smtClean="0"/>
+              <a:rPr lang="en-US"/>
               <a:t>Fourth level</a:t>
             </a:r>
           </a:p>
           <a:p>
             <a:pPr lvl="4"/>
             <a:r>
-              <a:rPr lang="en-US" smtClean="0"/>
+              <a:rPr lang="en-US"/>
               <a:t>Fifth level</a:t>
             </a:r>
             <a:endParaRPr lang="en-US" dirty="0"/>
@@ -34726,10 +34715,9 @@
           </a:lstStyle>
           <a:p>
             <a:r>
-              <a:rPr lang="en-US" smtClean="0"/>
+              <a:rPr lang="en-US"/>
               <a:t>Sample Footer Text</a:t>
             </a:r>
-            <a:endParaRPr lang="en-US"/>
           </a:p>
         </p:txBody>
       </p:sp>
@@ -35354,7 +35342,7 @@
           <p:cNvPr id="70" name="Title 4">
             <a:extLst>
               <a:ext uri="{FF2B5EF4-FFF2-40B4-BE49-F238E27FC236}">
-                <a16:creationId xmlns:a16="http://schemas.microsoft.com/office/drawing/2014/main" xmlns="" id="{D24A2741-D9AA-DD7A-9493-007C8662A13D}"/>
+                <a16:creationId xmlns:a16="http://schemas.microsoft.com/office/drawing/2014/main" id="{D24A2741-D9AA-DD7A-9493-007C8662A13D}"/>
               </a:ext>
             </a:extLst>
           </p:cNvPr>
@@ -35379,62 +35367,22 @@
                   <a:schemeClr val="tx1"/>
                 </a:solidFill>
               </a:rPr>
-              <a:t>Task </a:t>
-            </a:r>
-            <a:r>
-              <a:rPr lang="en-US" altLang="zh-CN" sz="3200" dirty="0" smtClean="0">
-                <a:solidFill>
-                  <a:schemeClr val="tx1"/>
-                </a:solidFill>
-              </a:rPr>
-              <a:t>1I</a:t>
-            </a:r>
-            <a:r>
-              <a:rPr lang="en-US" altLang="zh-CN" sz="3200" dirty="0" smtClean="0">
-                <a:solidFill>
-                  <a:schemeClr val="tx1"/>
-                </a:solidFill>
-              </a:rPr>
-              <a:t/>
+              <a:t>Task 1I</a:t>
             </a:r>
             <a:br>
-              <a:rPr lang="en-US" altLang="zh-CN" sz="3200" dirty="0" smtClean="0">
+              <a:rPr lang="en-US" altLang="zh-CN" sz="3200" dirty="0">
                 <a:solidFill>
                   <a:schemeClr val="tx1"/>
                 </a:solidFill>
               </a:rPr>
             </a:br>
             <a:r>
-              <a:rPr lang="en-GB" sz="3200" b="1" dirty="0" smtClean="0">
-                <a:solidFill>
-                  <a:schemeClr val="tx1"/>
-                </a:solidFill>
-              </a:rPr>
-              <a:t>UNIVERSITY </a:t>
-            </a:r>
-            <a:r>
               <a:rPr lang="en-GB" sz="3200" b="1" dirty="0">
                 <a:solidFill>
                   <a:schemeClr val="tx1"/>
                 </a:solidFill>
               </a:rPr>
-              <a:t>OF </a:t>
-            </a:r>
-            <a:r>
-              <a:rPr lang="en-GB" sz="3200" b="1" dirty="0" smtClean="0">
-                <a:solidFill>
-                  <a:schemeClr val="tx1"/>
-                </a:solidFill>
-              </a:rPr>
-              <a:t>BUEA</a:t>
-            </a:r>
-            <a:r>
-              <a:rPr lang="en-GB" dirty="0">
-                <a:solidFill>
-                  <a:schemeClr val="tx1"/>
-                </a:solidFill>
-              </a:rPr>
-              <a:t/>
+              <a:t>UNIVERSITY OF BUEA</a:t>
             </a:r>
             <a:br>
               <a:rPr lang="en-GB" dirty="0">
@@ -35450,14 +35398,6 @@
                 </a:solidFill>
               </a:rPr>
               <a:t>Faculty Of Engineering and Technology</a:t>
-            </a:r>
-            <a:r>
-              <a:rPr lang="en-GB" b="1" dirty="0">
-                <a:solidFill>
-                  <a:schemeClr val="tx1"/>
-                </a:solidFill>
-              </a:rPr>
-              <a:t/>
             </a:r>
             <a:br>
               <a:rPr lang="en-GB" b="1" dirty="0">
@@ -35479,7 +35419,7 @@
           <p:cNvPr id="71" name="Text Placeholder 5">
             <a:extLst>
               <a:ext uri="{FF2B5EF4-FFF2-40B4-BE49-F238E27FC236}">
-                <a16:creationId xmlns:a16="http://schemas.microsoft.com/office/drawing/2014/main" xmlns="" id="{ACC83394-C51A-46B8-5282-9F054A03F9CF}"/>
+                <a16:creationId xmlns:a16="http://schemas.microsoft.com/office/drawing/2014/main" id="{ACC83394-C51A-46B8-5282-9F054A03F9CF}"/>
               </a:ext>
             </a:extLst>
           </p:cNvPr>
@@ -35500,30 +35440,22 @@
             <a:pPr algn="ctr"/>
             <a:r>
               <a:rPr lang="en-US" altLang="zh-CN" sz="3200" b="1" dirty="0"/>
-              <a:t>Internet Programming And Mobile </a:t>
-            </a:r>
-            <a:r>
-              <a:rPr lang="en-US" altLang="zh-CN" sz="3200" b="1" dirty="0" smtClean="0"/>
-              <a:t>Programming – CEF 440 </a:t>
+              <a:t>Internet Programming And Mobile Programming – CEF 440 </a:t>
             </a:r>
           </a:p>
           <a:p>
             <a:pPr algn="ctr"/>
             <a:r>
-              <a:rPr lang="en-US" sz="3200" dirty="0" smtClean="0"/>
+              <a:rPr lang="en-US" sz="3200" dirty="0"/>
               <a:t>By</a:t>
             </a:r>
             <a:r>
-              <a:rPr lang="en-US" sz="3200" b="1" dirty="0" smtClean="0"/>
+              <a:rPr lang="en-US" sz="3200" b="1" dirty="0"/>
               <a:t> </a:t>
             </a:r>
             <a:r>
-              <a:rPr lang="en-GB" dirty="0" err="1" smtClean="0"/>
-              <a:t>Dr</a:t>
-            </a:r>
-            <a:r>
               <a:rPr lang="en-GB" dirty="0" err="1"/>
-              <a:t>.</a:t>
+              <a:t>Dr.</a:t>
             </a:r>
             <a:r>
               <a:rPr lang="en-GB" dirty="0"/>
@@ -35548,7 +35480,7 @@
           <p:cNvPr id="26" name="Content Placeholder 11">
             <a:extLst>
               <a:ext uri="{FF2B5EF4-FFF2-40B4-BE49-F238E27FC236}">
-                <a16:creationId xmlns:a16="http://schemas.microsoft.com/office/drawing/2014/main" xmlns="" id="{78848326-E9CB-FC78-81AD-3AFB2C215C56}"/>
+                <a16:creationId xmlns:a16="http://schemas.microsoft.com/office/drawing/2014/main" id="{78848326-E9CB-FC78-81AD-3AFB2C215C56}"/>
               </a:ext>
             </a:extLst>
           </p:cNvPr>
@@ -35585,12 +35517,12 @@
           </a:lstStyle>
           <a:p>
             <a:pPr lvl="0" algn="ctr"/>
-            <a:endParaRPr lang="en-US" altLang="zh-CN" sz="2400" dirty="0" smtClean="0"/>
+            <a:endParaRPr lang="en-US" altLang="zh-CN" sz="2400" dirty="0"/>
           </a:p>
           <a:p>
             <a:pPr lvl="0" algn="ctr"/>
             <a:r>
-              <a:rPr lang="en-US" altLang="zh-CN" sz="2400" dirty="0" smtClean="0"/>
+              <a:rPr lang="en-US" altLang="zh-CN" sz="2400" dirty="0"/>
               <a:t>Group 16</a:t>
             </a:r>
             <a:endParaRPr lang="zh-CN" altLang="en-US" sz="2400" dirty="0"/>
@@ -35764,14 +35696,14 @@
           </a:lstStyle>
           <a:p>
             <a:r>
-              <a:rPr lang="en-US" sz="3600" b="1" dirty="0" err="1" smtClean="0">
+              <a:rPr lang="en-US" sz="3600" b="1" dirty="0" err="1">
                 <a:latin typeface="Times New Roman" panose="02020603050405020304" pitchFamily="18" charset="0"/>
                 <a:ea typeface="SimSun" panose="02010600030101010101" pitchFamily="2" charset="-122"/>
               </a:rPr>
               <a:t>DAta</a:t>
             </a:r>
             <a:r>
-              <a:rPr lang="en-US" sz="3600" b="1" dirty="0" smtClean="0">
+              <a:rPr lang="en-US" sz="3600" b="1" dirty="0">
                 <a:latin typeface="Times New Roman" panose="02020603050405020304" pitchFamily="18" charset="0"/>
                 <a:ea typeface="SimSun" panose="02010600030101010101" pitchFamily="2" charset="-122"/>
               </a:rPr>
@@ -35804,7 +35736,7 @@
           <a:lstStyle/>
           <a:p>
             <a:r>
-              <a:rPr lang="en-US" sz="2400" dirty="0" smtClean="0"/>
+              <a:rPr lang="en-US" sz="2400" dirty="0"/>
               <a:t>Why Cleaning is necessary?</a:t>
             </a:r>
           </a:p>
@@ -35840,7 +35772,7 @@
               <a:buChar char="-"/>
             </a:pPr>
             <a:r>
-              <a:rPr lang="en-US" dirty="0" smtClean="0"/>
+              <a:rPr lang="en-US" dirty="0"/>
               <a:t>Ensures data is accurate, complete, consistent and usable for analysis or decision-making.</a:t>
             </a:r>
           </a:p>
@@ -35853,7 +35785,7 @@
               <a:buChar char="-"/>
             </a:pPr>
             <a:r>
-              <a:rPr lang="en-US" dirty="0" smtClean="0"/>
+              <a:rPr lang="en-US" dirty="0"/>
               <a:t>Address common data quality issues such as duplicates, missing values, inconsistencies, syntax errors, irrelevant data and structural error,</a:t>
             </a:r>
           </a:p>
@@ -35889,7 +35821,7 @@
           <a:lstStyle/>
           <a:p>
             <a:r>
-              <a:rPr lang="en-US" sz="3600" dirty="0" smtClean="0">
+              <a:rPr lang="en-US" sz="3600" dirty="0">
                 <a:solidFill>
                   <a:schemeClr val="bg1"/>
                 </a:solidFill>
@@ -35898,13 +35830,6 @@
               </a:rPr>
               <a:t>05</a:t>
             </a:r>
-            <a:endParaRPr lang="en-US" sz="3600" dirty="0">
-              <a:solidFill>
-                <a:schemeClr val="bg1"/>
-              </a:solidFill>
-              <a:latin typeface="Times New Roman" panose="02020603050405020304" pitchFamily="18" charset="0"/>
-              <a:cs typeface="Times New Roman" panose="02020603050405020304" pitchFamily="18" charset="0"/>
-            </a:endParaRPr>
           </a:p>
         </p:txBody>
       </p:sp>
@@ -36057,14 +35982,14 @@
           </a:lstStyle>
           <a:p>
             <a:r>
-              <a:rPr lang="en-US" sz="3600" b="1" dirty="0" err="1" smtClean="0">
+              <a:rPr lang="en-US" sz="3600" b="1" dirty="0" err="1">
                 <a:latin typeface="Times New Roman" panose="02020603050405020304" pitchFamily="18" charset="0"/>
                 <a:ea typeface="SimSun" panose="02010600030101010101" pitchFamily="2" charset="-122"/>
               </a:rPr>
               <a:t>DAta</a:t>
             </a:r>
             <a:r>
-              <a:rPr lang="en-US" sz="3600" b="1" dirty="0" smtClean="0">
+              <a:rPr lang="en-US" sz="3600" b="1" dirty="0">
                 <a:latin typeface="Times New Roman" panose="02020603050405020304" pitchFamily="18" charset="0"/>
                 <a:ea typeface="SimSun" panose="02010600030101010101" pitchFamily="2" charset="-122"/>
               </a:rPr>
@@ -36098,10 +36023,9 @@
           <a:p>
             <a:pPr algn="ctr"/>
             <a:r>
-              <a:rPr lang="en-US" sz="2800" dirty="0" smtClean="0"/>
+              <a:rPr lang="en-US" sz="2800" dirty="0"/>
               <a:t>Process of Cleaning our data</a:t>
             </a:r>
-            <a:endParaRPr lang="en-US" sz="2800" dirty="0"/>
           </a:p>
         </p:txBody>
       </p:sp>
@@ -36135,7 +36059,7 @@
               <a:buChar char="-"/>
             </a:pPr>
             <a:r>
-              <a:rPr lang="en-US" dirty="0" smtClean="0"/>
+              <a:rPr lang="en-US" dirty="0"/>
               <a:t>Structural Standardization</a:t>
             </a:r>
           </a:p>
@@ -36148,7 +36072,7 @@
               <a:buChar char="-"/>
             </a:pPr>
             <a:r>
-              <a:rPr lang="en-US" dirty="0" smtClean="0"/>
+              <a:rPr lang="en-US" dirty="0"/>
               <a:t>Renaming</a:t>
             </a:r>
           </a:p>
@@ -36161,7 +36085,7 @@
               <a:buChar char="-"/>
             </a:pPr>
             <a:r>
-              <a:rPr lang="en-US" dirty="0" smtClean="0"/>
+              <a:rPr lang="en-US" dirty="0"/>
               <a:t>Whitespace Removal</a:t>
             </a:r>
           </a:p>
@@ -36174,7 +36098,7 @@
               <a:buChar char="-"/>
             </a:pPr>
             <a:r>
-              <a:rPr lang="en-US" dirty="0" smtClean="0"/>
+              <a:rPr lang="en-US" dirty="0"/>
               <a:t>Geographic and Text Harmonization</a:t>
             </a:r>
           </a:p>
@@ -36187,7 +36111,7 @@
               <a:buChar char="-"/>
             </a:pPr>
             <a:r>
-              <a:rPr lang="en-US" dirty="0" smtClean="0"/>
+              <a:rPr lang="en-US" dirty="0"/>
               <a:t>City Name consolidation</a:t>
             </a:r>
           </a:p>
@@ -36200,7 +36124,7 @@
               <a:buChar char="-"/>
             </a:pPr>
             <a:r>
-              <a:rPr lang="en-US" dirty="0" smtClean="0"/>
+              <a:rPr lang="en-US" dirty="0"/>
               <a:t>Case correction</a:t>
             </a:r>
           </a:p>
@@ -36213,7 +36137,7 @@
               <a:buChar char="-"/>
             </a:pPr>
             <a:r>
-              <a:rPr lang="en-US" dirty="0" smtClean="0"/>
+              <a:rPr lang="en-US" dirty="0"/>
               <a:t>Accent Normalization</a:t>
             </a:r>
           </a:p>
@@ -36226,7 +36150,7 @@
               <a:buChar char="-"/>
             </a:pPr>
             <a:r>
-              <a:rPr lang="en-US" dirty="0" smtClean="0"/>
+              <a:rPr lang="en-US" dirty="0"/>
               <a:t>Neighborhood mapping</a:t>
             </a:r>
           </a:p>
@@ -36239,14 +36163,14 @@
               <a:buChar char="-"/>
             </a:pPr>
             <a:r>
-              <a:rPr lang="en-US" dirty="0" smtClean="0"/>
+              <a:rPr lang="en-US" dirty="0"/>
               <a:t>Data Integrity and </a:t>
             </a:r>
             <a:r>
-              <a:rPr lang="en-US" dirty="0" err="1" smtClean="0"/>
+              <a:rPr lang="en-US" dirty="0" err="1"/>
               <a:t>Deduplication</a:t>
             </a:r>
-            <a:endParaRPr lang="en-US" dirty="0" smtClean="0"/>
+            <a:endParaRPr lang="en-US" dirty="0"/>
           </a:p>
           <a:p>
             <a:pPr marL="285750" indent="-285750">
@@ -36257,14 +36181,14 @@
               <a:buChar char="-"/>
             </a:pPr>
             <a:r>
-              <a:rPr lang="en-US" dirty="0" smtClean="0"/>
+              <a:rPr lang="en-US" dirty="0"/>
               <a:t>Missing Value Management, </a:t>
             </a:r>
             <a:r>
-              <a:rPr lang="en-US" dirty="0" err="1" smtClean="0"/>
+              <a:rPr lang="en-US" dirty="0" err="1"/>
               <a:t>etc</a:t>
             </a:r>
-            <a:endParaRPr lang="en-US" dirty="0" smtClean="0"/>
+            <a:endParaRPr lang="en-US" dirty="0"/>
           </a:p>
         </p:txBody>
       </p:sp>
@@ -36345,7 +36269,7 @@
           <a:lstStyle/>
           <a:p>
             <a:r>
-              <a:rPr lang="en-US" sz="3600" dirty="0" smtClean="0">
+              <a:rPr lang="en-US" sz="3600" dirty="0">
                 <a:solidFill>
                   <a:schemeClr val="bg1"/>
                 </a:solidFill>
@@ -36354,13 +36278,6 @@
               </a:rPr>
               <a:t>USER RELUCTANCE ASSESSMENT</a:t>
             </a:r>
-            <a:endParaRPr lang="en-US" sz="3600" dirty="0">
-              <a:solidFill>
-                <a:schemeClr val="bg1"/>
-              </a:solidFill>
-              <a:latin typeface="Times New Roman" panose="02020603050405020304" pitchFamily="18" charset="0"/>
-              <a:cs typeface="Times New Roman" panose="02020603050405020304" pitchFamily="18" charset="0"/>
-            </a:endParaRPr>
           </a:p>
         </p:txBody>
       </p:sp>
@@ -36387,7 +36304,7 @@
           <a:lstStyle/>
           <a:p>
             <a:r>
-              <a:rPr lang="en-US" sz="3600" dirty="0" smtClean="0">
+              <a:rPr lang="en-US" sz="3600" dirty="0">
                 <a:solidFill>
                   <a:schemeClr val="bg1"/>
                 </a:solidFill>
@@ -36396,13 +36313,6 @@
               </a:rPr>
               <a:t>06</a:t>
             </a:r>
-            <a:endParaRPr lang="en-US" sz="3600" dirty="0">
-              <a:solidFill>
-                <a:schemeClr val="bg1"/>
-              </a:solidFill>
-              <a:latin typeface="Times New Roman" panose="02020603050405020304" pitchFamily="18" charset="0"/>
-              <a:cs typeface="Times New Roman" panose="02020603050405020304" pitchFamily="18" charset="0"/>
-            </a:endParaRPr>
           </a:p>
         </p:txBody>
       </p:sp>
@@ -36429,10 +36339,9 @@
           <a:lstStyle/>
           <a:p>
             <a:r>
-              <a:rPr lang="en-US" dirty="0" smtClean="0"/>
+              <a:rPr lang="en-US" dirty="0"/>
               <a:t>A major challenge faced during this phase was low user participation and engagement in data collection activities.</a:t>
             </a:r>
-            <a:endParaRPr lang="en-US" dirty="0"/>
           </a:p>
         </p:txBody>
       </p:sp>
@@ -36463,7 +36372,7 @@
               <a:buChar char="-"/>
             </a:pPr>
             <a:r>
-              <a:rPr lang="en-US" dirty="0" smtClean="0"/>
+              <a:rPr lang="en-US" dirty="0"/>
               <a:t>Many users were  unwilling to fill out the surveys.</a:t>
             </a:r>
           </a:p>
@@ -36473,7 +36382,7 @@
               <a:buChar char="-"/>
             </a:pPr>
             <a:r>
-              <a:rPr lang="en-US" dirty="0" smtClean="0"/>
+              <a:rPr lang="en-US" dirty="0"/>
               <a:t>Some participants ignored or abandoned surveys midway.</a:t>
             </a:r>
           </a:p>
@@ -36483,7 +36392,7 @@
               <a:buChar char="-"/>
             </a:pPr>
             <a:r>
-              <a:rPr lang="en-US" dirty="0" smtClean="0"/>
+              <a:rPr lang="en-US" dirty="0"/>
               <a:t>A few gave jokes or careless answers suggesting disengagement.</a:t>
             </a:r>
           </a:p>
@@ -36493,7 +36402,7 @@
               <a:buChar char="-"/>
             </a:pPr>
             <a:r>
-              <a:rPr lang="en-US" dirty="0" smtClean="0"/>
+              <a:rPr lang="en-US" dirty="0"/>
               <a:t>Privacy concerns made some users reluctant to provide their city or location.</a:t>
             </a:r>
           </a:p>
@@ -36503,7 +36412,7 @@
               <a:buChar char="-"/>
             </a:pPr>
             <a:r>
-              <a:rPr lang="en-US" dirty="0" smtClean="0"/>
+              <a:rPr lang="en-US" dirty="0"/>
               <a:t>Follow up of participants was required since some forgot to fill the form when shared.</a:t>
             </a:r>
           </a:p>
@@ -36513,7 +36422,7 @@
               <a:buChar char="-"/>
             </a:pPr>
             <a:r>
-              <a:rPr lang="en-US" dirty="0" smtClean="0"/>
+              <a:rPr lang="en-US" dirty="0"/>
               <a:t>Difficulty accessing IT professionals due to lack of permission or formal authorization.</a:t>
             </a:r>
           </a:p>
@@ -36523,10 +36432,9 @@
               <a:buChar char="-"/>
             </a:pPr>
             <a:r>
-              <a:rPr lang="en-US" dirty="0" smtClean="0"/>
+              <a:rPr lang="en-US" dirty="0"/>
               <a:t>Limited opportunities to conduct in-person interviews in professional environments.</a:t>
             </a:r>
-            <a:endParaRPr lang="en-US" dirty="0"/>
           </a:p>
         </p:txBody>
       </p:sp>
@@ -36565,7 +36473,7 @@
           <p:cNvPr id="3" name="Title 2">
             <a:extLst>
               <a:ext uri="{FF2B5EF4-FFF2-40B4-BE49-F238E27FC236}">
-                <a16:creationId xmlns:a16="http://schemas.microsoft.com/office/drawing/2014/main" xmlns="" id="{6FC43111-1417-3930-812C-8E1378EE781E}"/>
+                <a16:creationId xmlns:a16="http://schemas.microsoft.com/office/drawing/2014/main" id="{6FC43111-1417-3930-812C-8E1378EE781E}"/>
               </a:ext>
             </a:extLst>
           </p:cNvPr>
@@ -36602,7 +36510,7 @@
           <p:cNvPr id="2" name="Text Placeholder 3">
             <a:extLst>
               <a:ext uri="{FF2B5EF4-FFF2-40B4-BE49-F238E27FC236}">
-                <a16:creationId xmlns:a16="http://schemas.microsoft.com/office/drawing/2014/main" xmlns="" id="{594A1305-15D6-3DB3-46BD-53303F83A0F2}"/>
+                <a16:creationId xmlns:a16="http://schemas.microsoft.com/office/drawing/2014/main" id="{594A1305-15D6-3DB3-46BD-53303F83A0F2}"/>
               </a:ext>
             </a:extLst>
           </p:cNvPr>
@@ -36633,7 +36541,7 @@
               <a:buChar char="-"/>
             </a:pPr>
             <a:r>
-              <a:rPr lang="en-US" altLang="zh-CN" dirty="0" smtClean="0">
+              <a:rPr lang="en-US" altLang="zh-CN" dirty="0">
                 <a:solidFill>
                   <a:schemeClr val="tx1"/>
                 </a:solidFill>
@@ -36650,7 +36558,7 @@
               <a:buChar char="-"/>
             </a:pPr>
             <a:r>
-              <a:rPr lang="en-US" altLang="zh-CN" dirty="0" smtClean="0">
+              <a:rPr lang="en-US" altLang="zh-CN" dirty="0">
                 <a:solidFill>
                   <a:schemeClr val="tx1"/>
                 </a:solidFill>
@@ -36667,7 +36575,7 @@
               <a:buChar char="-"/>
             </a:pPr>
             <a:r>
-              <a:rPr lang="en-US" altLang="zh-CN" dirty="0" smtClean="0">
+              <a:rPr lang="en-US" altLang="zh-CN" dirty="0">
                 <a:solidFill>
                   <a:schemeClr val="tx1"/>
                 </a:solidFill>
@@ -36682,7 +36590,7 @@
               </a:lnSpc>
             </a:pPr>
             <a:r>
-              <a:rPr lang="en-US" altLang="zh-CN" dirty="0" smtClean="0">
+              <a:rPr lang="en-US" altLang="zh-CN" dirty="0">
                 <a:solidFill>
                   <a:schemeClr val="tx1"/>
                 </a:solidFill>
@@ -36701,10 +36609,10 @@
           <p:cNvPr id="4" name="Text Placeholder 1">
             <a:extLst>
               <a:ext uri="{FF2B5EF4-FFF2-40B4-BE49-F238E27FC236}">
-                <a16:creationId xmlns:a16="http://schemas.microsoft.com/office/drawing/2014/main" xmlns="" id="{4FCBEBFD-6AE7-6140-3885-019582E7D00B}"/>
+                <a16:creationId xmlns:a16="http://schemas.microsoft.com/office/drawing/2014/main" id="{4FCBEBFD-6AE7-6140-3885-019582E7D00B}"/>
               </a:ext>
               <a:ext uri="{C183D7F6-B498-43B3-948B-1728B52AA6E4}">
-                <adec:decorative xmlns:adec="http://schemas.microsoft.com/office/drawing/2017/decorative" xmlns="" val="0"/>
+                <adec:decorative xmlns:adec="http://schemas.microsoft.com/office/drawing/2017/decorative" val="0"/>
               </a:ext>
             </a:extLst>
           </p:cNvPr>
@@ -36892,7 +36800,7 @@
           </a:lstStyle>
           <a:p>
             <a:r>
-              <a:rPr lang="en-US" altLang="zh-CN" sz="3200" b="1" dirty="0" smtClean="0">
+              <a:rPr lang="en-US" altLang="zh-CN" sz="3200" b="1" dirty="0">
                 <a:latin typeface="Times New Roman" panose="02020603050405020304" pitchFamily="18" charset="0"/>
                 <a:cs typeface="Times New Roman" panose="02020603050405020304" pitchFamily="18" charset="0"/>
               </a:rPr>
@@ -36940,7 +36848,7 @@
           <p:cNvPr id="3" name="Title 2">
             <a:extLst>
               <a:ext uri="{FF2B5EF4-FFF2-40B4-BE49-F238E27FC236}">
-                <a16:creationId xmlns:a16="http://schemas.microsoft.com/office/drawing/2014/main" xmlns="" id="{FE4A01E4-C1AA-5FF3-87D3-D36F76AE9EB1}"/>
+                <a16:creationId xmlns:a16="http://schemas.microsoft.com/office/drawing/2014/main" id="{FE4A01E4-C1AA-5FF3-87D3-D36F76AE9EB1}"/>
               </a:ext>
             </a:extLst>
           </p:cNvPr>
@@ -36977,7 +36885,7 @@
           <p:cNvPr id="5" name="Picture Placeholder 4" descr="Woman standing in work conference room">
             <a:extLst>
               <a:ext uri="{FF2B5EF4-FFF2-40B4-BE49-F238E27FC236}">
-                <a16:creationId xmlns:a16="http://schemas.microsoft.com/office/drawing/2014/main" xmlns="" id="{AAB18CD4-A387-CAD5-F0A9-F9DE4E62D2FB}"/>
+                <a16:creationId xmlns:a16="http://schemas.microsoft.com/office/drawing/2014/main" id="{AAB18CD4-A387-CAD5-F0A9-F9DE4E62D2FB}"/>
               </a:ext>
             </a:extLst>
           </p:cNvPr>
@@ -37041,7 +36949,7 @@
           <p:cNvPr id="2" name="Title 1">
             <a:extLst>
               <a:ext uri="{FF2B5EF4-FFF2-40B4-BE49-F238E27FC236}">
-                <a16:creationId xmlns:a16="http://schemas.microsoft.com/office/drawing/2014/main" xmlns="" id="{E7607F69-41ED-30F5-166A-551B5D0C7F81}"/>
+                <a16:creationId xmlns:a16="http://schemas.microsoft.com/office/drawing/2014/main" id="{E7607F69-41ED-30F5-166A-551B5D0C7F81}"/>
               </a:ext>
             </a:extLst>
           </p:cNvPr>
@@ -37070,7 +36978,7 @@
           <p:cNvPr id="3" name="Text Placeholder 2">
             <a:extLst>
               <a:ext uri="{FF2B5EF4-FFF2-40B4-BE49-F238E27FC236}">
-                <a16:creationId xmlns:a16="http://schemas.microsoft.com/office/drawing/2014/main" xmlns="" id="{64E5B9A5-654F-D10C-C72F-92F9B261CB60}"/>
+                <a16:creationId xmlns:a16="http://schemas.microsoft.com/office/drawing/2014/main" id="{64E5B9A5-654F-D10C-C72F-92F9B261CB60}"/>
               </a:ext>
             </a:extLst>
           </p:cNvPr>
@@ -37103,7 +37011,7 @@
           <p:cNvPr id="4" name="Text Placeholder 3">
             <a:extLst>
               <a:ext uri="{FF2B5EF4-FFF2-40B4-BE49-F238E27FC236}">
-                <a16:creationId xmlns:a16="http://schemas.microsoft.com/office/drawing/2014/main" xmlns="" id="{F24B31C9-771F-A407-D89F-280DF73B2FEF}"/>
+                <a16:creationId xmlns:a16="http://schemas.microsoft.com/office/drawing/2014/main" id="{F24B31C9-771F-A407-D89F-280DF73B2FEF}"/>
               </a:ext>
             </a:extLst>
           </p:cNvPr>
@@ -37139,7 +37047,7 @@
           <p:cNvPr id="5" name="Content Placeholder 4">
             <a:extLst>
               <a:ext uri="{FF2B5EF4-FFF2-40B4-BE49-F238E27FC236}">
-                <a16:creationId xmlns:a16="http://schemas.microsoft.com/office/drawing/2014/main" xmlns="" id="{2F71CB5A-5B72-C38E-7D7E-F648B3709E39}"/>
+                <a16:creationId xmlns:a16="http://schemas.microsoft.com/office/drawing/2014/main" id="{2F71CB5A-5B72-C38E-7D7E-F648B3709E39}"/>
               </a:ext>
             </a:extLst>
           </p:cNvPr>
@@ -37161,7 +37069,7 @@
           <a:lstStyle/>
           <a:p>
             <a:r>
-              <a:rPr lang="en-US" sz="2000" noProof="1" smtClean="0"/>
+              <a:rPr lang="en-US" sz="2000" noProof="1"/>
               <a:t>Brief intro into phase2 of the SDLC</a:t>
             </a:r>
             <a:endParaRPr lang="en-US" sz="2000" dirty="0"/>
@@ -37173,7 +37081,7 @@
           <p:cNvPr id="6" name="Text Placeholder 5">
             <a:extLst>
               <a:ext uri="{FF2B5EF4-FFF2-40B4-BE49-F238E27FC236}">
-                <a16:creationId xmlns:a16="http://schemas.microsoft.com/office/drawing/2014/main" xmlns="" id="{930E7F64-B964-8C53-CF09-F8CC256DCB1B}"/>
+                <a16:creationId xmlns:a16="http://schemas.microsoft.com/office/drawing/2014/main" id="{930E7F64-B964-8C53-CF09-F8CC256DCB1B}"/>
               </a:ext>
             </a:extLst>
           </p:cNvPr>
@@ -37195,10 +37103,9 @@
           <a:lstStyle/>
           <a:p>
             <a:r>
-              <a:rPr lang="en-GB" sz="2000" b="1" dirty="0" smtClean="0"/>
+              <a:rPr lang="en-GB" sz="2000" b="1" dirty="0"/>
               <a:t>03</a:t>
             </a:r>
-            <a:endParaRPr lang="en-GB" sz="2000" b="1" dirty="0"/>
           </a:p>
         </p:txBody>
       </p:sp>
@@ -37207,7 +37114,7 @@
           <p:cNvPr id="7" name="Text Placeholder 6">
             <a:extLst>
               <a:ext uri="{FF2B5EF4-FFF2-40B4-BE49-F238E27FC236}">
-                <a16:creationId xmlns:a16="http://schemas.microsoft.com/office/drawing/2014/main" xmlns="" id="{EFDD5AA2-64EC-A8B5-13D9-726874BEC8E2}"/>
+                <a16:creationId xmlns:a16="http://schemas.microsoft.com/office/drawing/2014/main" id="{EFDD5AA2-64EC-A8B5-13D9-726874BEC8E2}"/>
               </a:ext>
             </a:extLst>
           </p:cNvPr>
@@ -37229,16 +37136,12 @@
           <a:lstStyle/>
           <a:p>
             <a:r>
-              <a:rPr lang="en-US" altLang="zh-CN" sz="2000" b="1" noProof="1" smtClean="0">
+              <a:rPr lang="en-US" altLang="zh-CN" sz="2000" b="1" noProof="1">
                 <a:latin typeface="Times New Roman" panose="02020603050405020304" pitchFamily="18" charset="0"/>
                 <a:cs typeface="Times New Roman" panose="02020603050405020304" pitchFamily="18" charset="0"/>
               </a:rPr>
               <a:t>REQUIREMENT GATHERINE TECHNIQUE</a:t>
             </a:r>
-            <a:endParaRPr lang="en-US" altLang="zh-CN" sz="2000" b="1" noProof="1">
-              <a:latin typeface="Times New Roman" panose="02020603050405020304" pitchFamily="18" charset="0"/>
-              <a:cs typeface="Times New Roman" panose="02020603050405020304" pitchFamily="18" charset="0"/>
-            </a:endParaRPr>
           </a:p>
         </p:txBody>
       </p:sp>
@@ -37247,7 +37150,7 @@
           <p:cNvPr id="8" name="Content Placeholder 7">
             <a:extLst>
               <a:ext uri="{FF2B5EF4-FFF2-40B4-BE49-F238E27FC236}">
-                <a16:creationId xmlns:a16="http://schemas.microsoft.com/office/drawing/2014/main" xmlns="" id="{1FF48E63-DF4C-5288-C8FE-B465284EA825}"/>
+                <a16:creationId xmlns:a16="http://schemas.microsoft.com/office/drawing/2014/main" id="{1FF48E63-DF4C-5288-C8FE-B465284EA825}"/>
               </a:ext>
             </a:extLst>
           </p:cNvPr>
@@ -37280,7 +37183,7 @@
           <p:cNvPr id="9" name="Text Placeholder 8">
             <a:extLst>
               <a:ext uri="{FF2B5EF4-FFF2-40B4-BE49-F238E27FC236}">
-                <a16:creationId xmlns:a16="http://schemas.microsoft.com/office/drawing/2014/main" xmlns="" id="{85627838-9041-CCF7-2CBA-87E0F9E1AD22}"/>
+                <a16:creationId xmlns:a16="http://schemas.microsoft.com/office/drawing/2014/main" id="{85627838-9041-CCF7-2CBA-87E0F9E1AD22}"/>
               </a:ext>
             </a:extLst>
           </p:cNvPr>
@@ -37302,10 +37205,9 @@
           <a:lstStyle/>
           <a:p>
             <a:r>
-              <a:rPr lang="en-GB" sz="2000" b="1" dirty="0" smtClean="0"/>
+              <a:rPr lang="en-GB" sz="2000" b="1" dirty="0"/>
               <a:t>04</a:t>
             </a:r>
-            <a:endParaRPr lang="en-GB" sz="2000" b="1" dirty="0"/>
           </a:p>
         </p:txBody>
       </p:sp>
@@ -37314,7 +37216,7 @@
           <p:cNvPr id="10" name="Text Placeholder 9">
             <a:extLst>
               <a:ext uri="{FF2B5EF4-FFF2-40B4-BE49-F238E27FC236}">
-                <a16:creationId xmlns:a16="http://schemas.microsoft.com/office/drawing/2014/main" xmlns="" id="{44926C95-B877-91A7-C35C-D42E894A714C}"/>
+                <a16:creationId xmlns:a16="http://schemas.microsoft.com/office/drawing/2014/main" id="{44926C95-B877-91A7-C35C-D42E894A714C}"/>
               </a:ext>
             </a:extLst>
           </p:cNvPr>
@@ -37336,7 +37238,7 @@
           <a:lstStyle/>
           <a:p>
             <a:r>
-              <a:rPr lang="en-US" sz="2000" b="1" dirty="0" smtClean="0">
+              <a:rPr lang="en-US" sz="2000" b="1" dirty="0">
                 <a:effectLst/>
                 <a:latin typeface="Times New Roman" panose="02020603050405020304" pitchFamily="18" charset="0"/>
                 <a:ea typeface="SimSun" panose="02010600030101010101" pitchFamily="2" charset="-122"/>
@@ -37352,7 +37254,7 @@
           <p:cNvPr id="11" name="Content Placeholder 10">
             <a:extLst>
               <a:ext uri="{FF2B5EF4-FFF2-40B4-BE49-F238E27FC236}">
-                <a16:creationId xmlns:a16="http://schemas.microsoft.com/office/drawing/2014/main" xmlns="" id="{1892148A-47C2-00A7-9F32-9193CDAA3EDE}"/>
+                <a16:creationId xmlns:a16="http://schemas.microsoft.com/office/drawing/2014/main" id="{1892148A-47C2-00A7-9F32-9193CDAA3EDE}"/>
               </a:ext>
             </a:extLst>
           </p:cNvPr>
@@ -37385,7 +37287,7 @@
           <p:cNvPr id="12" name="Text Placeholder 11">
             <a:extLst>
               <a:ext uri="{FF2B5EF4-FFF2-40B4-BE49-F238E27FC236}">
-                <a16:creationId xmlns:a16="http://schemas.microsoft.com/office/drawing/2014/main" xmlns="" id="{8CCE4395-2732-DD6C-B289-143F90EC99FA}"/>
+                <a16:creationId xmlns:a16="http://schemas.microsoft.com/office/drawing/2014/main" id="{8CCE4395-2732-DD6C-B289-143F90EC99FA}"/>
               </a:ext>
             </a:extLst>
           </p:cNvPr>
@@ -37407,10 +37309,9 @@
           <a:lstStyle/>
           <a:p>
             <a:r>
-              <a:rPr lang="en-GB" sz="2000" b="1" dirty="0" smtClean="0"/>
+              <a:rPr lang="en-GB" sz="2000" b="1" dirty="0"/>
               <a:t>05</a:t>
             </a:r>
-            <a:endParaRPr lang="en-GB" sz="2000" b="1" dirty="0"/>
           </a:p>
         </p:txBody>
       </p:sp>
@@ -37419,7 +37320,7 @@
           <p:cNvPr id="13" name="Text Placeholder 12">
             <a:extLst>
               <a:ext uri="{FF2B5EF4-FFF2-40B4-BE49-F238E27FC236}">
-                <a16:creationId xmlns:a16="http://schemas.microsoft.com/office/drawing/2014/main" xmlns="" id="{8F99EFA3-031E-E36A-8AD1-8C56185D1B2F}"/>
+                <a16:creationId xmlns:a16="http://schemas.microsoft.com/office/drawing/2014/main" id="{8F99EFA3-031E-E36A-8AD1-8C56185D1B2F}"/>
               </a:ext>
             </a:extLst>
           </p:cNvPr>
@@ -37441,7 +37342,7 @@
           <a:lstStyle/>
           <a:p>
             <a:r>
-              <a:rPr lang="en-US" sz="2000" b="1" noProof="1" smtClean="0">
+              <a:rPr lang="en-US" sz="2000" b="1" noProof="1">
                 <a:latin typeface="Times New Roman" panose="02020603050405020304" pitchFamily="18" charset="0"/>
                 <a:ea typeface="DengXian" panose="02010600030101010101" pitchFamily="2" charset="-122"/>
                 <a:cs typeface="Times New Roman" panose="02020603050405020304" pitchFamily="18" charset="0"/>
@@ -37460,7 +37361,7 @@
           <p:cNvPr id="14" name="Content Placeholder 13">
             <a:extLst>
               <a:ext uri="{FF2B5EF4-FFF2-40B4-BE49-F238E27FC236}">
-                <a16:creationId xmlns:a16="http://schemas.microsoft.com/office/drawing/2014/main" xmlns="" id="{C2D00FDD-9F14-449E-3CD7-6B5341C37C94}"/>
+                <a16:creationId xmlns:a16="http://schemas.microsoft.com/office/drawing/2014/main" id="{C2D00FDD-9F14-449E-3CD7-6B5341C37C94}"/>
               </a:ext>
             </a:extLst>
           </p:cNvPr>
@@ -37482,10 +37383,9 @@
           <a:lstStyle/>
           <a:p>
             <a:r>
-              <a:rPr lang="en-US" sz="1800" noProof="1" smtClean="0"/>
+              <a:rPr lang="en-US" sz="1800" noProof="1"/>
               <a:t>Review on how the data gathered was cleansed.</a:t>
             </a:r>
-            <a:endParaRPr lang="en-US" sz="1800" noProof="1"/>
           </a:p>
         </p:txBody>
       </p:sp>
@@ -37494,7 +37394,7 @@
           <p:cNvPr id="15" name="Text Placeholder 14">
             <a:extLst>
               <a:ext uri="{FF2B5EF4-FFF2-40B4-BE49-F238E27FC236}">
-                <a16:creationId xmlns:a16="http://schemas.microsoft.com/office/drawing/2014/main" xmlns="" id="{2361CB3E-BCE0-431A-1F87-462AFBA8DD27}"/>
+                <a16:creationId xmlns:a16="http://schemas.microsoft.com/office/drawing/2014/main" id="{2361CB3E-BCE0-431A-1F87-462AFBA8DD27}"/>
               </a:ext>
             </a:extLst>
           </p:cNvPr>
@@ -37516,10 +37416,9 @@
           <a:lstStyle/>
           <a:p>
             <a:r>
-              <a:rPr lang="en-GB" sz="2000" b="1" dirty="0" smtClean="0"/>
+              <a:rPr lang="en-GB" sz="2000" b="1" dirty="0"/>
               <a:t>06</a:t>
             </a:r>
-            <a:endParaRPr lang="en-GB" sz="2000" b="1" dirty="0"/>
           </a:p>
         </p:txBody>
       </p:sp>
@@ -37528,7 +37427,7 @@
           <p:cNvPr id="16" name="Text Placeholder 15">
             <a:extLst>
               <a:ext uri="{FF2B5EF4-FFF2-40B4-BE49-F238E27FC236}">
-                <a16:creationId xmlns:a16="http://schemas.microsoft.com/office/drawing/2014/main" xmlns="" id="{448AD761-BA58-FB71-0C6C-B8A01131D7CD}"/>
+                <a16:creationId xmlns:a16="http://schemas.microsoft.com/office/drawing/2014/main" id="{448AD761-BA58-FB71-0C6C-B8A01131D7CD}"/>
               </a:ext>
             </a:extLst>
           </p:cNvPr>
@@ -37550,7 +37449,7 @@
           <a:lstStyle/>
           <a:p>
             <a:r>
-              <a:rPr lang="en-US" sz="2000" b="1" dirty="0" smtClean="0">
+              <a:rPr lang="en-US" sz="2000" b="1" dirty="0">
                 <a:effectLst/>
                 <a:latin typeface="Times New Roman" panose="02020603050405020304" pitchFamily="18" charset="0"/>
                 <a:ea typeface="DengXian" panose="02010600030101010101" pitchFamily="2" charset="-122"/>
@@ -37578,7 +37477,7 @@
           <p:cNvPr id="17" name="Content Placeholder 16">
             <a:extLst>
               <a:ext uri="{FF2B5EF4-FFF2-40B4-BE49-F238E27FC236}">
-                <a16:creationId xmlns:a16="http://schemas.microsoft.com/office/drawing/2014/main" xmlns="" id="{E414148B-AEBF-596F-19C3-445753A897A7}"/>
+                <a16:creationId xmlns:a16="http://schemas.microsoft.com/office/drawing/2014/main" id="{E414148B-AEBF-596F-19C3-445753A897A7}"/>
               </a:ext>
             </a:extLst>
           </p:cNvPr>
@@ -37601,15 +37500,7 @@
           <a:p>
             <a:r>
               <a:rPr lang="en-US" altLang="zh-CN" sz="1800" noProof="1"/>
-              <a:t>Introduction </a:t>
-            </a:r>
-            <a:r>
-              <a:rPr lang="en-US" altLang="zh-CN" sz="1800" noProof="1" smtClean="0"/>
-              <a:t>to budgeting tools and </a:t>
-            </a:r>
-            <a:r>
-              <a:rPr lang="en-US" altLang="zh-CN" sz="1800" noProof="1"/>
-              <a:t>apps.</a:t>
+              <a:t>Introduction to budgeting tools and apps.</a:t>
             </a:r>
           </a:p>
         </p:txBody>
@@ -37619,7 +37510,7 @@
           <p:cNvPr id="23" name="Text Placeholder 11">
             <a:extLst>
               <a:ext uri="{FF2B5EF4-FFF2-40B4-BE49-F238E27FC236}">
-                <a16:creationId xmlns:a16="http://schemas.microsoft.com/office/drawing/2014/main" xmlns="" id="{C1015FAC-4DE3-0D99-C770-CE1602812224}"/>
+                <a16:creationId xmlns:a16="http://schemas.microsoft.com/office/drawing/2014/main" id="{C1015FAC-4DE3-0D99-C770-CE1602812224}"/>
               </a:ext>
             </a:extLst>
           </p:cNvPr>
@@ -37815,7 +37706,7 @@
           <p:cNvPr id="24" name="Text Placeholder 3">
             <a:extLst>
               <a:ext uri="{FF2B5EF4-FFF2-40B4-BE49-F238E27FC236}">
-                <a16:creationId xmlns:a16="http://schemas.microsoft.com/office/drawing/2014/main" xmlns="" id="{D69D7A99-3501-94D7-433A-FCE2A83452D2}"/>
+                <a16:creationId xmlns:a16="http://schemas.microsoft.com/office/drawing/2014/main" id="{D69D7A99-3501-94D7-433A-FCE2A83452D2}"/>
               </a:ext>
             </a:extLst>
           </p:cNvPr>
@@ -38014,7 +37905,7 @@
           <p:cNvPr id="26" name="Text Placeholder 11">
             <a:extLst>
               <a:ext uri="{FF2B5EF4-FFF2-40B4-BE49-F238E27FC236}">
-                <a16:creationId xmlns:a16="http://schemas.microsoft.com/office/drawing/2014/main" xmlns="" id="{22B25CFF-42ED-B376-1CE6-0A29B9241FA4}"/>
+                <a16:creationId xmlns:a16="http://schemas.microsoft.com/office/drawing/2014/main" id="{22B25CFF-42ED-B376-1CE6-0A29B9241FA4}"/>
               </a:ext>
             </a:extLst>
           </p:cNvPr>
@@ -38202,7 +38093,7 @@
           </a:lstStyle>
           <a:p>
             <a:r>
-              <a:rPr lang="en-GB" sz="2000" b="1" dirty="0" smtClean="0">
+              <a:rPr lang="en-GB" sz="2000" b="1" dirty="0">
                 <a:solidFill>
                   <a:schemeClr val="tx1">
                     <a:lumMod val="75000"/>
@@ -38212,14 +38103,6 @@
               </a:rPr>
               <a:t>02</a:t>
             </a:r>
-            <a:endParaRPr lang="en-GB" sz="2000" b="1" dirty="0">
-              <a:solidFill>
-                <a:schemeClr val="tx1">
-                  <a:lumMod val="75000"/>
-                  <a:lumOff val="25000"/>
-                </a:schemeClr>
-              </a:solidFill>
-            </a:endParaRPr>
           </a:p>
         </p:txBody>
       </p:sp>
@@ -38228,7 +38111,7 @@
           <p:cNvPr id="28" name="Text Placeholder 3">
             <a:extLst>
               <a:ext uri="{FF2B5EF4-FFF2-40B4-BE49-F238E27FC236}">
-                <a16:creationId xmlns:a16="http://schemas.microsoft.com/office/drawing/2014/main" xmlns="" id="{1250C9C2-B4D7-FBD9-5209-D8BCDBB0F473}"/>
+                <a16:creationId xmlns:a16="http://schemas.microsoft.com/office/drawing/2014/main" id="{1250C9C2-B4D7-FBD9-5209-D8BCDBB0F473}"/>
               </a:ext>
             </a:extLst>
           </p:cNvPr>
@@ -38436,7 +38319,7 @@
           <p:cNvPr id="29" name="Content Placeholder 16">
             <a:extLst>
               <a:ext uri="{FF2B5EF4-FFF2-40B4-BE49-F238E27FC236}">
-                <a16:creationId xmlns:a16="http://schemas.microsoft.com/office/drawing/2014/main" xmlns="" id="{47DF1D87-D7C8-533D-E65C-A5A3A3D4BEE1}"/>
+                <a16:creationId xmlns:a16="http://schemas.microsoft.com/office/drawing/2014/main" id="{47DF1D87-D7C8-533D-E65C-A5A3A3D4BEE1}"/>
               </a:ext>
             </a:extLst>
           </p:cNvPr>
@@ -38647,7 +38530,7 @@
           <p:cNvPr id="32" name="TextBox 31">
             <a:extLst>
               <a:ext uri="{FF2B5EF4-FFF2-40B4-BE49-F238E27FC236}">
-                <a16:creationId xmlns:a16="http://schemas.microsoft.com/office/drawing/2014/main" xmlns="" id="{4342ABDE-C41E-AD4F-1312-49E150847BD6}"/>
+                <a16:creationId xmlns:a16="http://schemas.microsoft.com/office/drawing/2014/main" id="{4342ABDE-C41E-AD4F-1312-49E150847BD6}"/>
               </a:ext>
             </a:extLst>
           </p:cNvPr>
@@ -38715,7 +38598,7 @@
           <a:lstStyle/>
           <a:p>
             <a:r>
-              <a:rPr lang="en-US" sz="2000" dirty="0" smtClean="0">
+              <a:rPr lang="en-US" sz="2000" dirty="0">
                 <a:solidFill>
                   <a:schemeClr val="tx1">
                     <a:lumMod val="75000"/>
@@ -38725,14 +38608,6 @@
               </a:rPr>
               <a:t>07</a:t>
             </a:r>
-            <a:endParaRPr lang="en-US" sz="2000" dirty="0">
-              <a:solidFill>
-                <a:schemeClr val="tx1">
-                  <a:lumMod val="75000"/>
-                  <a:lumOff val="25000"/>
-                </a:schemeClr>
-              </a:solidFill>
-            </a:endParaRPr>
           </a:p>
         </p:txBody>
       </p:sp>
@@ -38759,7 +38634,7 @@
           <a:lstStyle/>
           <a:p>
             <a:r>
-              <a:rPr lang="en-US" sz="2000" dirty="0" smtClean="0">
+              <a:rPr lang="en-US" sz="2000" dirty="0">
                 <a:solidFill>
                   <a:schemeClr val="tx1">
                     <a:lumMod val="75000"/>
@@ -38769,14 +38644,6 @@
               </a:rPr>
               <a:t>STAKEHOLDER IDENTIFICATION</a:t>
             </a:r>
-            <a:endParaRPr lang="en-US" sz="2000" dirty="0">
-              <a:solidFill>
-                <a:schemeClr val="tx1">
-                  <a:lumMod val="75000"/>
-                  <a:lumOff val="25000"/>
-                </a:schemeClr>
-              </a:solidFill>
-            </a:endParaRPr>
           </a:p>
         </p:txBody>
       </p:sp>
@@ -38803,7 +38670,7 @@
           <a:lstStyle/>
           <a:p>
             <a:r>
-              <a:rPr lang="en-US" sz="2000" dirty="0" smtClean="0">
+              <a:rPr lang="en-US" sz="2000" dirty="0">
                 <a:solidFill>
                   <a:schemeClr val="tx1">
                     <a:lumMod val="75000"/>
@@ -38813,14 +38680,6 @@
               </a:rPr>
               <a:t>Various stakeholders involved in the system </a:t>
             </a:r>
-            <a:endParaRPr lang="en-US" sz="2000" dirty="0">
-              <a:solidFill>
-                <a:schemeClr val="tx1">
-                  <a:lumMod val="75000"/>
-                  <a:lumOff val="25000"/>
-                </a:schemeClr>
-              </a:solidFill>
-            </a:endParaRPr>
           </a:p>
         </p:txBody>
       </p:sp>
@@ -38859,7 +38718,7 @@
           <p:cNvPr id="3" name="Title 2">
             <a:extLst>
               <a:ext uri="{FF2B5EF4-FFF2-40B4-BE49-F238E27FC236}">
-                <a16:creationId xmlns:a16="http://schemas.microsoft.com/office/drawing/2014/main" xmlns="" id="{38F3E1E9-91F3-D594-7B6B-7298782A34E5}"/>
+                <a16:creationId xmlns:a16="http://schemas.microsoft.com/office/drawing/2014/main" id="{38F3E1E9-91F3-D594-7B6B-7298782A34E5}"/>
               </a:ext>
             </a:extLst>
           </p:cNvPr>
@@ -38893,10 +38752,10 @@
           <p:cNvPr id="2" name="Text Placeholder 1">
             <a:extLst>
               <a:ext uri="{FF2B5EF4-FFF2-40B4-BE49-F238E27FC236}">
-                <a16:creationId xmlns:a16="http://schemas.microsoft.com/office/drawing/2014/main" xmlns="" id="{5DF5C731-0B26-AFBA-1D25-E6AE3BB1DD35}"/>
+                <a16:creationId xmlns:a16="http://schemas.microsoft.com/office/drawing/2014/main" id="{5DF5C731-0B26-AFBA-1D25-E6AE3BB1DD35}"/>
               </a:ext>
               <a:ext uri="{C183D7F6-B498-43B3-948B-1728B52AA6E4}">
-                <adec:decorative xmlns:adec="http://schemas.microsoft.com/office/drawing/2017/decorative" xmlns="" val="0"/>
+                <adec:decorative xmlns:adec="http://schemas.microsoft.com/office/drawing/2017/decorative" val="0"/>
               </a:ext>
             </a:extLst>
           </p:cNvPr>
@@ -38925,7 +38784,7 @@
           <p:cNvPr id="4" name="Text Placeholder 3">
             <a:extLst>
               <a:ext uri="{FF2B5EF4-FFF2-40B4-BE49-F238E27FC236}">
-                <a16:creationId xmlns:a16="http://schemas.microsoft.com/office/drawing/2014/main" xmlns="" id="{DB86EB85-4192-7B99-43A7-13B6BF9CEE0A}"/>
+                <a16:creationId xmlns:a16="http://schemas.microsoft.com/office/drawing/2014/main" id="{DB86EB85-4192-7B99-43A7-13B6BF9CEE0A}"/>
               </a:ext>
             </a:extLst>
           </p:cNvPr>
@@ -39117,28 +38976,7 @@
                 <a:latin typeface="Calibri" panose="020F0502020204030204" pitchFamily="34" charset="0"/>
                 <a:ea typeface="SimSun" panose="02010600030101010101" pitchFamily="2" charset="-122"/>
               </a:rPr>
-              <a:t>This </a:t>
-            </a:r>
-            <a:r>
-              <a:rPr lang="en-US" sz="2800" dirty="0" smtClean="0">
-                <a:latin typeface="Calibri" panose="020F0502020204030204" pitchFamily="34" charset="0"/>
-                <a:ea typeface="SimSun" panose="02010600030101010101" pitchFamily="2" charset="-122"/>
-              </a:rPr>
-              <a:t>presentation </a:t>
-            </a:r>
-            <a:r>
-              <a:rPr lang="en-US" sz="2800" dirty="0">
-                <a:latin typeface="Calibri" panose="020F0502020204030204" pitchFamily="34" charset="0"/>
-                <a:ea typeface="SimSun" panose="02010600030101010101" pitchFamily="2" charset="-122"/>
-              </a:rPr>
-              <a:t>explores </a:t>
-            </a:r>
-            <a:r>
-              <a:rPr lang="en-US" sz="2800" dirty="0" smtClean="0">
-                <a:latin typeface="Calibri" panose="020F0502020204030204" pitchFamily="34" charset="0"/>
-                <a:ea typeface="SimSun" panose="02010600030101010101" pitchFamily="2" charset="-122"/>
-              </a:rPr>
-              <a:t>the requirement gathering phase of the SDLC.</a:t>
+              <a:t>This presentation explores the requirement gathering phase of the SDLC.</a:t>
             </a:r>
             <a:endParaRPr lang="en-US" altLang="zh-CN" dirty="0"/>
           </a:p>
@@ -39225,7 +39063,7 @@
           <p:cNvPr id="2" name="Title 1">
             <a:extLst>
               <a:ext uri="{FF2B5EF4-FFF2-40B4-BE49-F238E27FC236}">
-                <a16:creationId xmlns:a16="http://schemas.microsoft.com/office/drawing/2014/main" xmlns="" id="{25B7B16F-932C-9603-7D17-0B6C13E55EEF}"/>
+                <a16:creationId xmlns:a16="http://schemas.microsoft.com/office/drawing/2014/main" id="{25B7B16F-932C-9603-7D17-0B6C13E55EEF}"/>
               </a:ext>
             </a:extLst>
           </p:cNvPr>
@@ -39252,16 +39090,12 @@
               </a:lnSpc>
             </a:pPr>
             <a:r>
-              <a:rPr lang="en-US" altLang="zh-CN" sz="3600" b="1" noProof="1" smtClean="0">
+              <a:rPr lang="en-US" altLang="zh-CN" sz="3600" b="1" noProof="1">
                 <a:latin typeface="Times New Roman" panose="02020603050405020304" pitchFamily="18" charset="0"/>
                 <a:cs typeface="Times New Roman" panose="02020603050405020304" pitchFamily="18" charset="0"/>
               </a:rPr>
               <a:t>STAKEHOLDERS IDENTIFICATION 1/2</a:t>
             </a:r>
-            <a:endParaRPr lang="en-US" altLang="zh-CN" sz="3600" b="1" noProof="1">
-              <a:latin typeface="Times New Roman" panose="02020603050405020304" pitchFamily="18" charset="0"/>
-              <a:cs typeface="Times New Roman" panose="02020603050405020304" pitchFamily="18" charset="0"/>
-            </a:endParaRPr>
           </a:p>
         </p:txBody>
       </p:sp>
@@ -39270,7 +39104,7 @@
           <p:cNvPr id="4" name="Text Placeholder 3">
             <a:extLst>
               <a:ext uri="{FF2B5EF4-FFF2-40B4-BE49-F238E27FC236}">
-                <a16:creationId xmlns:a16="http://schemas.microsoft.com/office/drawing/2014/main" xmlns="" id="{913CD7D7-CF46-569F-FBAE-20559860A16D}"/>
+                <a16:creationId xmlns:a16="http://schemas.microsoft.com/office/drawing/2014/main" id="{913CD7D7-CF46-569F-FBAE-20559860A16D}"/>
               </a:ext>
             </a:extLst>
           </p:cNvPr>
@@ -39297,10 +39131,9 @@
               </a:lnSpc>
             </a:pPr>
             <a:r>
-              <a:rPr lang="en-US" altLang="zh-CN" sz="2400" dirty="0" smtClean="0"/>
+              <a:rPr lang="en-US" altLang="zh-CN" sz="2400" dirty="0"/>
               <a:t>PRIMARY STAKEHOLDERS</a:t>
             </a:r>
-            <a:endParaRPr lang="en-US" altLang="zh-CN" sz="2400" dirty="0"/>
           </a:p>
         </p:txBody>
       </p:sp>
@@ -39309,10 +39142,10 @@
           <p:cNvPr id="15" name="Text Placeholder 1">
             <a:extLst>
               <a:ext uri="{FF2B5EF4-FFF2-40B4-BE49-F238E27FC236}">
-                <a16:creationId xmlns:a16="http://schemas.microsoft.com/office/drawing/2014/main" xmlns="" id="{820E67EE-BC68-3E73-19C3-C677814DFFC2}"/>
+                <a16:creationId xmlns:a16="http://schemas.microsoft.com/office/drawing/2014/main" id="{820E67EE-BC68-3E73-19C3-C677814DFFC2}"/>
               </a:ext>
               <a:ext uri="{C183D7F6-B498-43B3-948B-1728B52AA6E4}">
-                <adec:decorative xmlns:adec="http://schemas.microsoft.com/office/drawing/2017/decorative" xmlns="" val="0"/>
+                <adec:decorative xmlns:adec="http://schemas.microsoft.com/office/drawing/2017/decorative" val="0"/>
               </a:ext>
             </a:extLst>
           </p:cNvPr>
@@ -39554,7 +39387,7 @@
               <a:buChar char="-"/>
             </a:pPr>
             <a:r>
-              <a:rPr lang="en-US" sz="2000" b="1" dirty="0" smtClean="0"/>
+              <a:rPr lang="en-US" sz="2000" b="1" dirty="0"/>
               <a:t>Mobile Network Operators</a:t>
             </a:r>
           </a:p>
@@ -39598,7 +39431,7 @@
               </a:lnSpc>
             </a:pPr>
             <a:r>
-              <a:rPr lang="en-US" dirty="0" smtClean="0"/>
+              <a:rPr lang="en-US" dirty="0"/>
               <a:t>The main beneficiaries of this system since they will use it to optimize their network.</a:t>
             </a:r>
           </a:p>
@@ -39634,7 +39467,7 @@
               <a:buChar char="-"/>
             </a:pPr>
             <a:r>
-              <a:rPr lang="en-US" b="1" dirty="0" smtClean="0"/>
+              <a:rPr lang="en-US" b="1" dirty="0"/>
               <a:t>Mobile Subscriber</a:t>
             </a:r>
           </a:p>
@@ -39668,10 +39501,9 @@
               </a:lnSpc>
             </a:pPr>
             <a:r>
-              <a:rPr lang="en-US" dirty="0" smtClean="0"/>
+              <a:rPr lang="en-US" dirty="0"/>
               <a:t>Their role is to provide raw data. They benefit from potentially better network performance.</a:t>
             </a:r>
-            <a:endParaRPr lang="en-US" dirty="0"/>
           </a:p>
         </p:txBody>
       </p:sp>
@@ -39703,14 +39535,13 @@
               </a:lnSpc>
             </a:pPr>
             <a:r>
-              <a:rPr lang="en-US" dirty="0" smtClean="0"/>
+              <a:rPr lang="en-US" dirty="0"/>
               <a:t>- </a:t>
             </a:r>
             <a:r>
-              <a:rPr lang="en-US" b="1" dirty="0" smtClean="0"/>
+              <a:rPr lang="en-US" b="1" dirty="0"/>
               <a:t>Development Team</a:t>
             </a:r>
-            <a:endParaRPr lang="en-US" b="1" dirty="0"/>
           </a:p>
         </p:txBody>
       </p:sp>
@@ -39742,10 +39573,9 @@
               </a:lnSpc>
             </a:pPr>
             <a:r>
-              <a:rPr lang="en-US" dirty="0" smtClean="0"/>
+              <a:rPr lang="en-US" dirty="0"/>
               <a:t>These are the individuals responsible for designing, building and testing the system.</a:t>
             </a:r>
-            <a:endParaRPr lang="en-US" dirty="0"/>
           </a:p>
         </p:txBody>
       </p:sp>
@@ -39874,7 +39704,7 @@
           <a:lstStyle/>
           <a:p>
             <a:r>
-              <a:rPr lang="en-US" sz="3600" b="1" dirty="0" smtClean="0">
+              <a:rPr lang="en-US" sz="3600" b="1" dirty="0">
                 <a:solidFill>
                   <a:schemeClr val="bg1"/>
                 </a:solidFill>
@@ -39883,13 +39713,6 @@
               </a:rPr>
               <a:t>STAKEHOLDERS IDENTIFICATION 2/2</a:t>
             </a:r>
-            <a:endParaRPr lang="en-US" sz="3600" b="1" dirty="0">
-              <a:solidFill>
-                <a:schemeClr val="bg1"/>
-              </a:solidFill>
-              <a:latin typeface="Times New Roman" panose="02020603050405020304" pitchFamily="18" charset="0"/>
-              <a:cs typeface="Times New Roman" panose="02020603050405020304" pitchFamily="18" charset="0"/>
-            </a:endParaRPr>
           </a:p>
         </p:txBody>
       </p:sp>
@@ -39898,7 +39721,7 @@
           <p:cNvPr id="9" name="Text Placeholder 3">
             <a:extLst>
               <a:ext uri="{FF2B5EF4-FFF2-40B4-BE49-F238E27FC236}">
-                <a16:creationId xmlns:a16="http://schemas.microsoft.com/office/drawing/2014/main" xmlns="" id="{913CD7D7-CF46-569F-FBAE-20559860A16D}"/>
+                <a16:creationId xmlns:a16="http://schemas.microsoft.com/office/drawing/2014/main" id="{913CD7D7-CF46-569F-FBAE-20559860A16D}"/>
               </a:ext>
             </a:extLst>
           </p:cNvPr>
@@ -40127,10 +39950,9 @@
               </a:lnSpc>
             </a:pPr>
             <a:r>
-              <a:rPr lang="en-US" altLang="zh-CN" sz="2400" dirty="0" smtClean="0"/>
+              <a:rPr lang="en-US" altLang="zh-CN" sz="2400" dirty="0"/>
               <a:t>SECONDARY STAKEHOLDERS</a:t>
             </a:r>
-            <a:endParaRPr lang="en-US" altLang="zh-CN" sz="2400" dirty="0"/>
           </a:p>
         </p:txBody>
       </p:sp>
@@ -40164,15 +39986,15 @@
               <a:buChar char="-"/>
             </a:pPr>
             <a:r>
-              <a:rPr lang="en-US" b="1" dirty="0" smtClean="0"/>
+              <a:rPr lang="en-US" b="1" dirty="0"/>
               <a:t>Telecommunication Regulatory Authorities </a:t>
             </a:r>
             <a:r>
-              <a:rPr lang="en-US" b="1" dirty="0" err="1" smtClean="0"/>
+              <a:rPr lang="en-US" b="1" dirty="0" err="1"/>
               <a:t>eg</a:t>
             </a:r>
             <a:r>
-              <a:rPr lang="en-US" b="1" dirty="0" smtClean="0"/>
+              <a:rPr lang="en-US" b="1" dirty="0"/>
               <a:t>: TRB in Cameroon</a:t>
             </a:r>
           </a:p>
@@ -40218,7 +40040,7 @@
               <a:buChar char="-"/>
             </a:pPr>
             <a:r>
-              <a:rPr lang="en-US" sz="2000" b="1" dirty="0" smtClean="0"/>
+              <a:rPr lang="en-US" sz="2000" b="1" dirty="0"/>
               <a:t>Network Engineers and Optimization teams</a:t>
             </a:r>
           </a:p>
@@ -40264,7 +40086,7 @@
               <a:buChar char="-"/>
             </a:pPr>
             <a:r>
-              <a:rPr lang="en-US" sz="2000" b="1" dirty="0" smtClean="0"/>
+              <a:rPr lang="en-US" sz="2000" b="1" dirty="0"/>
               <a:t>Data Privacy and Compliance officers</a:t>
             </a:r>
           </a:p>
@@ -40308,14 +40130,14 @@
               </a:lnSpc>
             </a:pPr>
             <a:r>
-              <a:rPr lang="en-US" dirty="0" smtClean="0"/>
+              <a:rPr lang="en-US" dirty="0"/>
               <a:t>They have interest in using such data to ensure MNOs are meeting their SLA and </a:t>
             </a:r>
             <a:r>
-              <a:rPr lang="en-US" dirty="0" err="1" smtClean="0"/>
+              <a:rPr lang="en-US" dirty="0" err="1"/>
               <a:t>QoS</a:t>
             </a:r>
-            <a:endParaRPr lang="en-US" dirty="0" smtClean="0"/>
+            <a:endParaRPr lang="en-US" dirty="0"/>
           </a:p>
         </p:txBody>
       </p:sp>
@@ -40347,10 +40169,9 @@
               </a:lnSpc>
             </a:pPr>
             <a:r>
-              <a:rPr lang="en-US" dirty="0" smtClean="0"/>
+              <a:rPr lang="en-US" dirty="0"/>
               <a:t>They will analyze the data to pinpoint specific geographical areas with poor performance</a:t>
             </a:r>
-            <a:endParaRPr lang="en-US" dirty="0"/>
           </a:p>
         </p:txBody>
       </p:sp>
@@ -40375,7 +40196,7 @@
         <p:cNvPr id="1" name="">
           <a:extLst>
             <a:ext uri="{FF2B5EF4-FFF2-40B4-BE49-F238E27FC236}">
-              <a16:creationId xmlns:a16="http://schemas.microsoft.com/office/drawing/2014/main" xmlns="" id="{05251FBC-C8AD-43A3-BEBA-C7E012582587}"/>
+              <a16:creationId xmlns:a16="http://schemas.microsoft.com/office/drawing/2014/main" id="{05251FBC-C8AD-43A3-BEBA-C7E012582587}"/>
             </a:ext>
           </a:extLst>
         </p:cNvPr>
@@ -40395,7 +40216,7 @@
           <p:cNvPr id="2" name="Title 1">
             <a:extLst>
               <a:ext uri="{FF2B5EF4-FFF2-40B4-BE49-F238E27FC236}">
-                <a16:creationId xmlns:a16="http://schemas.microsoft.com/office/drawing/2014/main" xmlns="" id="{56A5F9B5-7577-9C00-9013-E02439FC1171}"/>
+                <a16:creationId xmlns:a16="http://schemas.microsoft.com/office/drawing/2014/main" id="{56A5F9B5-7577-9C00-9013-E02439FC1171}"/>
               </a:ext>
             </a:extLst>
           </p:cNvPr>
@@ -40417,7 +40238,7 @@
           <a:lstStyle/>
           <a:p>
             <a:r>
-              <a:rPr lang="en-US" sz="3600" b="1" dirty="0" smtClean="0">
+              <a:rPr lang="en-US" sz="3600" b="1" dirty="0">
                 <a:effectLst/>
                 <a:latin typeface="Times New Roman" panose="02020603050405020304" pitchFamily="18" charset="0"/>
                 <a:ea typeface="SimSun" panose="02010600030101010101" pitchFamily="2" charset="-122"/>
@@ -40433,7 +40254,7 @@
           <p:cNvPr id="9" name="Text Placeholder 2">
             <a:extLst>
               <a:ext uri="{FF2B5EF4-FFF2-40B4-BE49-F238E27FC236}">
-                <a16:creationId xmlns:a16="http://schemas.microsoft.com/office/drawing/2014/main" xmlns="" id="{2C8604BD-C535-800C-D453-F19E9CAD5B7B}"/>
+                <a16:creationId xmlns:a16="http://schemas.microsoft.com/office/drawing/2014/main" id="{2C8604BD-C535-800C-D453-F19E9CAD5B7B}"/>
               </a:ext>
             </a:extLst>
           </p:cNvPr>
@@ -40631,10 +40452,10 @@
           <p:cNvPr id="19" name="Text Placeholder 1">
             <a:extLst>
               <a:ext uri="{FF2B5EF4-FFF2-40B4-BE49-F238E27FC236}">
-                <a16:creationId xmlns:a16="http://schemas.microsoft.com/office/drawing/2014/main" xmlns="" id="{71CF9445-66C3-B1F9-131B-59BA46245A6E}"/>
+                <a16:creationId xmlns:a16="http://schemas.microsoft.com/office/drawing/2014/main" id="{71CF9445-66C3-B1F9-131B-59BA46245A6E}"/>
               </a:ext>
               <a:ext uri="{C183D7F6-B498-43B3-948B-1728B52AA6E4}">
-                <adec:decorative xmlns:adec="http://schemas.microsoft.com/office/drawing/2017/decorative" xmlns="" val="0"/>
+                <adec:decorative xmlns:adec="http://schemas.microsoft.com/office/drawing/2017/decorative" val="0"/>
               </a:ext>
             </a:extLst>
           </p:cNvPr>
@@ -40864,10 +40685,9 @@
           <a:lstStyle/>
           <a:p>
             <a:r>
-              <a:rPr lang="en-US" b="1" dirty="0" smtClean="0"/>
+              <a:rPr lang="en-US" b="1" dirty="0"/>
               <a:t>SURVEY</a:t>
             </a:r>
-            <a:endParaRPr lang="en-US" b="1" dirty="0"/>
           </a:p>
         </p:txBody>
       </p:sp>
@@ -40898,7 +40718,7 @@
               <a:buChar char="-"/>
             </a:pPr>
             <a:r>
-              <a:rPr lang="en-US" dirty="0" smtClean="0"/>
+              <a:rPr lang="en-US" dirty="0"/>
               <a:t>Administered to mobile subscribers across Cameroon.</a:t>
             </a:r>
           </a:p>
@@ -40907,7 +40727,7 @@
               <a:buFontTx/>
               <a:buChar char="-"/>
             </a:pPr>
-            <a:endParaRPr lang="en-US" dirty="0" smtClean="0"/>
+            <a:endParaRPr lang="en-US" dirty="0"/>
           </a:p>
           <a:p>
             <a:pPr marL="285750" indent="-285750">
@@ -40915,24 +40735,20 @@
               <a:buChar char="-"/>
             </a:pPr>
             <a:r>
-              <a:rPr lang="en-US" dirty="0" smtClean="0"/>
-              <a:t>Distributed as </a:t>
-            </a:r>
-            <a:r>
-              <a:rPr lang="en-US" dirty="0" err="1" smtClean="0"/>
-              <a:t>google</a:t>
-            </a:r>
-            <a:r>
-              <a:rPr lang="en-US" dirty="0" smtClean="0"/>
-              <a:t> forms on </a:t>
-            </a:r>
-            <a:r>
-              <a:rPr lang="en-US" dirty="0" err="1" smtClean="0"/>
+              <a:rPr lang="en-US" dirty="0"/>
+              <a:t>Distributed as google forms on </a:t>
+            </a:r>
+            <a:r>
+              <a:rPr lang="en-US" dirty="0" err="1"/>
               <a:t>whatsapp</a:t>
             </a:r>
             <a:r>
-              <a:rPr lang="en-US" dirty="0" smtClean="0"/>
-              <a:t> and social media.</a:t>
+              <a:rPr lang="en-US" dirty="0"/>
+              <a:t> and </a:t>
+            </a:r>
+            <a:r>
+              <a:rPr lang="en-US"/>
+              <a:t>social media.</a:t>
             </a:r>
             <a:endParaRPr lang="en-US" dirty="0"/>
           </a:p>
@@ -41015,10 +40831,9 @@
           <a:lstStyle/>
           <a:p>
             <a:r>
-              <a:rPr lang="en-US" b="1" dirty="0" smtClean="0"/>
+              <a:rPr lang="en-US" b="1" dirty="0"/>
               <a:t>BRAINSTORMING</a:t>
             </a:r>
-            <a:endParaRPr lang="en-US" b="1" dirty="0"/>
           </a:p>
         </p:txBody>
       </p:sp>
@@ -41049,7 +40864,7 @@
               <a:buChar char="-"/>
             </a:pPr>
             <a:r>
-              <a:rPr lang="en-US" dirty="0" smtClean="0"/>
+              <a:rPr lang="en-US" dirty="0"/>
               <a:t>Team session held to generate and evaluate app ideas.</a:t>
             </a:r>
           </a:p>
@@ -41091,7 +40906,7 @@
           <p:cNvPr id="6" name="Title 1">
             <a:extLst>
               <a:ext uri="{FF2B5EF4-FFF2-40B4-BE49-F238E27FC236}">
-                <a16:creationId xmlns:a16="http://schemas.microsoft.com/office/drawing/2014/main" xmlns="" id="{56A5F9B5-7577-9C00-9013-E02439FC1171}"/>
+                <a16:creationId xmlns:a16="http://schemas.microsoft.com/office/drawing/2014/main" id="{56A5F9B5-7577-9C00-9013-E02439FC1171}"/>
               </a:ext>
             </a:extLst>
           </p:cNvPr>
@@ -41187,7 +41002,7 @@
           </a:lstStyle>
           <a:p>
             <a:r>
-              <a:rPr lang="en-US" sz="3600" b="1" dirty="0" smtClean="0">
+              <a:rPr lang="en-US" sz="3600" b="1" dirty="0">
                 <a:latin typeface="Times New Roman" panose="02020603050405020304" pitchFamily="18" charset="0"/>
                 <a:ea typeface="SimSun" panose="02010600030101010101" pitchFamily="2" charset="-122"/>
               </a:rPr>
@@ -41250,10 +41065,9 @@
           <a:lstStyle/>
           <a:p>
             <a:r>
-              <a:rPr lang="en-US" b="1" dirty="0" smtClean="0"/>
+              <a:rPr lang="en-US" b="1" dirty="0"/>
               <a:t>REVERSE ENGINEERING</a:t>
             </a:r>
-            <a:endParaRPr lang="en-US" b="1" dirty="0"/>
           </a:p>
         </p:txBody>
       </p:sp>
@@ -41280,42 +41094,41 @@
           <a:lstStyle/>
           <a:p>
             <a:r>
-              <a:rPr lang="en-US" dirty="0" smtClean="0"/>
+              <a:rPr lang="en-US" dirty="0"/>
               <a:t>Learning from existing apps like </a:t>
             </a:r>
             <a:r>
-              <a:rPr lang="en-US" dirty="0" err="1" smtClean="0"/>
+              <a:rPr lang="en-US" dirty="0" err="1"/>
               <a:t>SpeedTest</a:t>
             </a:r>
             <a:r>
-              <a:rPr lang="en-US" dirty="0" smtClean="0"/>
+              <a:rPr lang="en-US" dirty="0"/>
               <a:t> by </a:t>
             </a:r>
             <a:r>
-              <a:rPr lang="en-US" dirty="0" err="1" smtClean="0"/>
+              <a:rPr lang="en-US" dirty="0" err="1"/>
               <a:t>Ookla</a:t>
             </a:r>
             <a:r>
-              <a:rPr lang="en-US" dirty="0" smtClean="0"/>
+              <a:rPr lang="en-US" dirty="0"/>
               <a:t>, </a:t>
             </a:r>
             <a:r>
-              <a:rPr lang="en-US" dirty="0" err="1" smtClean="0"/>
+              <a:rPr lang="en-US" dirty="0" err="1"/>
               <a:t>OpenSignal</a:t>
             </a:r>
             <a:r>
-              <a:rPr lang="en-US" dirty="0" smtClean="0"/>
+              <a:rPr lang="en-US" dirty="0"/>
               <a:t> and </a:t>
             </a:r>
             <a:r>
-              <a:rPr lang="en-US" dirty="0" err="1" smtClean="0"/>
+              <a:rPr lang="en-US" dirty="0" err="1"/>
               <a:t>nPerf</a:t>
             </a:r>
             <a:r>
-              <a:rPr lang="en-US" dirty="0" smtClean="0"/>
+              <a:rPr lang="en-US" dirty="0"/>
               <a:t>.</a:t>
             </a:r>
-            <a:endParaRPr lang="en-US" dirty="0"/>
           </a:p>
         </p:txBody>
       </p:sp>
@@ -41422,7 +41235,7 @@
           <p:cNvPr id="9" name="Title 1">
             <a:extLst>
               <a:ext uri="{FF2B5EF4-FFF2-40B4-BE49-F238E27FC236}">
-                <a16:creationId xmlns:a16="http://schemas.microsoft.com/office/drawing/2014/main" xmlns="" id="{56A5F9B5-7577-9C00-9013-E02439FC1171}"/>
+                <a16:creationId xmlns:a16="http://schemas.microsoft.com/office/drawing/2014/main" id="{56A5F9B5-7577-9C00-9013-E02439FC1171}"/>
               </a:ext>
             </a:extLst>
           </p:cNvPr>
@@ -41516,7 +41329,7 @@
           </a:lstStyle>
           <a:p>
             <a:r>
-              <a:rPr lang="en-US" sz="3600" b="1" dirty="0" smtClean="0">
+              <a:rPr lang="en-US" sz="3600" b="1" dirty="0">
                 <a:latin typeface="Times New Roman" panose="02020603050405020304" pitchFamily="18" charset="0"/>
                 <a:ea typeface="SimSun" panose="02010600030101010101" pitchFamily="2" charset="-122"/>
               </a:rPr>
@@ -41579,14 +41392,14 @@
           <a:lstStyle/>
           <a:p>
             <a:r>
-              <a:rPr lang="en-US" sz="3600" b="1" dirty="0" err="1" smtClean="0">
+              <a:rPr lang="en-US" sz="3600" b="1" dirty="0" err="1">
                 <a:latin typeface="Times New Roman" panose="02020603050405020304" pitchFamily="18" charset="0"/>
                 <a:ea typeface="SimSun" panose="02010600030101010101" pitchFamily="2" charset="-122"/>
               </a:rPr>
               <a:t>DAta</a:t>
             </a:r>
             <a:r>
-              <a:rPr lang="en-US" sz="3600" b="1" dirty="0" smtClean="0">
+              <a:rPr lang="en-US" sz="3600" b="1" dirty="0">
                 <a:latin typeface="Times New Roman" panose="02020603050405020304" pitchFamily="18" charset="0"/>
                 <a:ea typeface="SimSun" panose="02010600030101010101" pitchFamily="2" charset="-122"/>
               </a:rPr>
@@ -41626,15 +41439,15 @@
               <a:buChar char="-"/>
             </a:pPr>
             <a:r>
-              <a:rPr lang="en-US" dirty="0" smtClean="0"/>
+              <a:rPr lang="en-US" dirty="0"/>
               <a:t>Survey distributed via </a:t>
             </a:r>
             <a:r>
-              <a:rPr lang="en-US" dirty="0" err="1" smtClean="0"/>
+              <a:rPr lang="en-US" dirty="0" err="1"/>
               <a:t>WhatsApp</a:t>
             </a:r>
             <a:r>
-              <a:rPr lang="en-US" dirty="0" smtClean="0"/>
+              <a:rPr lang="en-US" dirty="0"/>
               <a:t> and Social media.</a:t>
             </a:r>
           </a:p>
@@ -41647,7 +41460,7 @@
               <a:buChar char="-"/>
             </a:pPr>
             <a:r>
-              <a:rPr lang="en-US" dirty="0" smtClean="0"/>
+              <a:rPr lang="en-US" dirty="0"/>
               <a:t> Targets: Mobile subscribers across multiple regions of Cameroon.</a:t>
             </a:r>
           </a:p>
@@ -41660,7 +41473,7 @@
               <a:buChar char="-"/>
             </a:pPr>
             <a:r>
-              <a:rPr lang="en-US" dirty="0" smtClean="0"/>
+              <a:rPr lang="en-US" dirty="0"/>
               <a:t>190 responses collected.</a:t>
             </a:r>
           </a:p>
@@ -41673,10 +41486,9 @@
               <a:buChar char="-"/>
             </a:pPr>
             <a:r>
-              <a:rPr lang="en-US" dirty="0" smtClean="0"/>
+              <a:rPr lang="en-US" dirty="0"/>
               <a:t>Open-ended questions allowed users to express additional thoughts.</a:t>
             </a:r>
-            <a:endParaRPr lang="en-US" dirty="0"/>
           </a:p>
         </p:txBody>
       </p:sp>
@@ -41703,18 +41515,13 @@
           <a:lstStyle/>
           <a:p>
             <a:r>
-              <a:rPr lang="en-US" sz="3600" dirty="0" smtClean="0">
+              <a:rPr lang="en-US" sz="3600" dirty="0">
                 <a:solidFill>
                   <a:schemeClr val="bg1"/>
                 </a:solidFill>
               </a:rPr>
               <a:t>04</a:t>
             </a:r>
-            <a:endParaRPr lang="en-US" sz="3600" dirty="0">
-              <a:solidFill>
-                <a:schemeClr val="bg1"/>
-              </a:solidFill>
-            </a:endParaRPr>
           </a:p>
         </p:txBody>
       </p:sp>
@@ -42661,6 +42468,19 @@
 </file>
 
 <file path=customXml/item1.xml><?xml version="1.0" encoding="utf-8"?>
+<p:properties xmlns:p="http://schemas.microsoft.com/office/2006/metadata/properties" xmlns:xsi="http://www.w3.org/2001/XMLSchema-instance" xmlns:pc="http://schemas.microsoft.com/office/infopath/2007/PartnerControls">
+  <documentManagement>
+    <_ip_UnifiedCompliancePolicyUIAction xmlns="http://schemas.microsoft.com/sharepoint/v3" xsi:nil="true"/>
+    <TaxCatchAll xmlns="38de0ec0-4312-429b-9ba4-a6f7899b86f2" xsi:nil="true"/>
+    <_ip_UnifiedCompliancePolicyProperties xmlns="http://schemas.microsoft.com/sharepoint/v3" xsi:nil="true"/>
+    <lcf76f155ced4ddcb4097134ff3c332f xmlns="21705155-b4ce-4c69-95dc-4fd6cb8c5571">
+      <Terms xmlns="http://schemas.microsoft.com/office/infopath/2007/PartnerControls"/>
+    </lcf76f155ced4ddcb4097134ff3c332f>
+  </documentManagement>
+</p:properties>
+</file>
+
+<file path=customXml/item2.xml><?xml version="1.0" encoding="utf-8"?>
 <ct:contentTypeSchema xmlns:ct="http://schemas.microsoft.com/office/2006/metadata/contentType" xmlns:ma="http://schemas.microsoft.com/office/2006/metadata/properties/metaAttributes" ct:_="" ma:_="" ma:contentTypeName="Document" ma:contentTypeID="0x0101001867FBBEFD40724CA20725D6B3094130" ma:contentTypeVersion="14" ma:contentTypeDescription="Create a new document." ma:contentTypeScope="" ma:versionID="b563ecc397a77cd5d82b22a852f9d63c">
   <xsd:schema xmlns:xsd="http://www.w3.org/2001/XMLSchema" xmlns:xs="http://www.w3.org/2001/XMLSchema" xmlns:p="http://schemas.microsoft.com/office/2006/metadata/properties" xmlns:ns1="http://schemas.microsoft.com/sharepoint/v3" xmlns:ns2="21705155-b4ce-4c69-95dc-4fd6cb8c5571" xmlns:ns3="38de0ec0-4312-429b-9ba4-a6f7899b86f2" targetNamespace="http://schemas.microsoft.com/office/2006/metadata/properties" ma:root="true" ma:fieldsID="514fef1a96c1431b584933149cb0dc9f" ns1:_="" ns2:_="" ns3:_="">
     <xsd:import namespace="http://schemas.microsoft.com/sharepoint/v3"/>
@@ -42878,19 +42698,6 @@
 </ct:contentTypeSchema>
 </file>
 
-<file path=customXml/item2.xml><?xml version="1.0" encoding="utf-8"?>
-<p:properties xmlns:p="http://schemas.microsoft.com/office/2006/metadata/properties" xmlns:xsi="http://www.w3.org/2001/XMLSchema-instance" xmlns:pc="http://schemas.microsoft.com/office/infopath/2007/PartnerControls">
-  <documentManagement>
-    <_ip_UnifiedCompliancePolicyUIAction xmlns="http://schemas.microsoft.com/sharepoint/v3" xsi:nil="true"/>
-    <TaxCatchAll xmlns="38de0ec0-4312-429b-9ba4-a6f7899b86f2" xsi:nil="true"/>
-    <_ip_UnifiedCompliancePolicyProperties xmlns="http://schemas.microsoft.com/sharepoint/v3" xsi:nil="true"/>
-    <lcf76f155ced4ddcb4097134ff3c332f xmlns="21705155-b4ce-4c69-95dc-4fd6cb8c5571">
-      <Terms xmlns="http://schemas.microsoft.com/office/infopath/2007/PartnerControls"/>
-    </lcf76f155ced4ddcb4097134ff3c332f>
-  </documentManagement>
-</p:properties>
-</file>
-
 <file path=customXml/item3.xml><?xml version="1.0" encoding="utf-8"?>
 <?mso-contentType ?>
 <FormTemplates xmlns="http://schemas.microsoft.com/sharepoint/v3/contenttype/forms">
@@ -42901,6 +42708,24 @@
 </file>
 
 <file path=customXml/itemProps1.xml><?xml version="1.0" encoding="utf-8"?>
+<ds:datastoreItem xmlns:ds="http://schemas.openxmlformats.org/officeDocument/2006/customXml" ds:itemID="{F2AE56A7-C0B1-422F-B93F-A1B9772F5342}">
+  <ds:schemaRefs>
+    <ds:schemaRef ds:uri="http://schemas.microsoft.com/office/2006/metadata/properties"/>
+    <ds:schemaRef ds:uri="21705155-b4ce-4c69-95dc-4fd6cb8c5571"/>
+    <ds:schemaRef ds:uri="38de0ec0-4312-429b-9ba4-a6f7899b86f2"/>
+    <ds:schemaRef ds:uri="http://schemas.microsoft.com/sharepoint/v3"/>
+    <ds:schemaRef ds:uri="http://purl.org/dc/terms/"/>
+    <ds:schemaRef ds:uri="http://schemas.openxmlformats.org/package/2006/metadata/core-properties"/>
+    <ds:schemaRef ds:uri="http://schemas.microsoft.com/office/2006/documentManagement/types"/>
+    <ds:schemaRef ds:uri="http://schemas.microsoft.com/office/infopath/2007/PartnerControls"/>
+    <ds:schemaRef ds:uri="http://purl.org/dc/elements/1.1/"/>
+    <ds:schemaRef ds:uri="http://www.w3.org/XML/1998/namespace"/>
+    <ds:schemaRef ds:uri="http://purl.org/dc/dcmitype/"/>
+  </ds:schemaRefs>
+</ds:datastoreItem>
+</file>
+
+<file path=customXml/itemProps2.xml><?xml version="1.0" encoding="utf-8"?>
 <ds:datastoreItem xmlns:ds="http://schemas.openxmlformats.org/officeDocument/2006/customXml" ds:itemID="{F5C30565-8F81-4B63-A6DA-15D20795E8BB}">
   <ds:schemaRefs>
     <ds:schemaRef ds:uri="http://schemas.microsoft.com/office/2006/metadata/contentType"/>
@@ -42920,24 +42745,6 @@
 </ds:datastoreItem>
 </file>
 
-<file path=customXml/itemProps2.xml><?xml version="1.0" encoding="utf-8"?>
-<ds:datastoreItem xmlns:ds="http://schemas.openxmlformats.org/officeDocument/2006/customXml" ds:itemID="{F2AE56A7-C0B1-422F-B93F-A1B9772F5342}">
-  <ds:schemaRefs>
-    <ds:schemaRef ds:uri="http://schemas.microsoft.com/office/2006/metadata/properties"/>
-    <ds:schemaRef ds:uri="21705155-b4ce-4c69-95dc-4fd6cb8c5571"/>
-    <ds:schemaRef ds:uri="38de0ec0-4312-429b-9ba4-a6f7899b86f2"/>
-    <ds:schemaRef ds:uri="http://schemas.microsoft.com/sharepoint/v3"/>
-    <ds:schemaRef ds:uri="http://purl.org/dc/terms/"/>
-    <ds:schemaRef ds:uri="http://schemas.openxmlformats.org/package/2006/metadata/core-properties"/>
-    <ds:schemaRef ds:uri="http://schemas.microsoft.com/office/2006/documentManagement/types"/>
-    <ds:schemaRef ds:uri="http://schemas.microsoft.com/office/infopath/2007/PartnerControls"/>
-    <ds:schemaRef ds:uri="http://purl.org/dc/elements/1.1/"/>
-    <ds:schemaRef ds:uri="http://www.w3.org/XML/1998/namespace"/>
-    <ds:schemaRef ds:uri="http://purl.org/dc/dcmitype/"/>
-  </ds:schemaRefs>
-</ds:datastoreItem>
-</file>
-
 <file path=customXml/itemProps3.xml><?xml version="1.0" encoding="utf-8"?>
 <ds:datastoreItem xmlns:ds="http://schemas.openxmlformats.org/officeDocument/2006/customXml" ds:itemID="{3439F29D-32A6-409A-A026-DEBF052F78D5}">
   <ds:schemaRefs>
